--- a/media/week_8/diagrams_dicts_tuples.pptx
+++ b/media/week_8/diagrams_dicts_tuples.pptx
@@ -7,6 +7,7 @@
   <p:sldIdLst>
     <p:sldId id="256" r:id="rId2"/>
     <p:sldId id="257" r:id="rId3"/>
+    <p:sldId id="258" r:id="rId4"/>
   </p:sldIdLst>
   <p:sldSz cx="12192000" cy="6858000"/>
   <p:notesSz cx="6858000" cy="9144000"/>
@@ -113,7 +114,7 @@
   <pc:docChgLst>
     <pc:chgData name="Hemma Philamore" userId="db50e2f3-17b2-4cc0-b719-fb6254d3e9df" providerId="ADAL" clId="{976AD799-FE43-55CA-A221-11B5AB66B93B}"/>
     <pc:docChg chg="undo custSel addSld modSld">
-      <pc:chgData name="Hemma Philamore" userId="db50e2f3-17b2-4cc0-b719-fb6254d3e9df" providerId="ADAL" clId="{976AD799-FE43-55CA-A221-11B5AB66B93B}" dt="2026-10-26T12:00:48.260" v="129" actId="164"/>
+      <pc:chgData name="Hemma Philamore" userId="db50e2f3-17b2-4cc0-b719-fb6254d3e9df" providerId="ADAL" clId="{976AD799-FE43-55CA-A221-11B5AB66B93B}" dt="2026-10-26T14:29:15.369" v="348" actId="164"/>
       <pc:docMkLst>
         <pc:docMk/>
       </pc:docMkLst>
@@ -569,6 +570,725 @@
             <pc:docMk/>
             <pc:sldMk cId="918735867" sldId="257"/>
             <ac:cxnSpMk id="41" creationId="{FDD3ABB9-215C-7F46-7BB3-3E7BB9129CB2}"/>
+          </ac:cxnSpMkLst>
+        </pc:cxnChg>
+      </pc:sldChg>
+      <pc:sldChg chg="addSp delSp modSp add mod">
+        <pc:chgData name="Hemma Philamore" userId="db50e2f3-17b2-4cc0-b719-fb6254d3e9df" providerId="ADAL" clId="{976AD799-FE43-55CA-A221-11B5AB66B93B}" dt="2026-10-26T14:29:15.369" v="348" actId="164"/>
+        <pc:sldMkLst>
+          <pc:docMk/>
+          <pc:sldMk cId="818822214" sldId="258"/>
+        </pc:sldMkLst>
+        <pc:spChg chg="topLvl">
+          <ac:chgData name="Hemma Philamore" userId="db50e2f3-17b2-4cc0-b719-fb6254d3e9df" providerId="ADAL" clId="{976AD799-FE43-55CA-A221-11B5AB66B93B}" dt="2026-10-26T14:01:57.370" v="142" actId="165"/>
+          <ac:spMkLst>
+            <pc:docMk/>
+            <pc:sldMk cId="818822214" sldId="258"/>
+            <ac:spMk id="2" creationId="{1166DCA7-BE25-075C-C4EB-C3A91B2B4558}"/>
+          </ac:spMkLst>
+        </pc:spChg>
+        <pc:spChg chg="del">
+          <ac:chgData name="Hemma Philamore" userId="db50e2f3-17b2-4cc0-b719-fb6254d3e9df" providerId="ADAL" clId="{976AD799-FE43-55CA-A221-11B5AB66B93B}" dt="2026-10-26T14:01:37.096" v="131" actId="478"/>
+          <ac:spMkLst>
+            <pc:docMk/>
+            <pc:sldMk cId="818822214" sldId="258"/>
+            <ac:spMk id="3" creationId="{0B6CC2A2-25F1-702A-6F65-CC7DEA5A1F73}"/>
+          </ac:spMkLst>
+        </pc:spChg>
+        <pc:spChg chg="add mod">
+          <ac:chgData name="Hemma Philamore" userId="db50e2f3-17b2-4cc0-b719-fb6254d3e9df" providerId="ADAL" clId="{976AD799-FE43-55CA-A221-11B5AB66B93B}" dt="2026-10-26T14:01:46.070" v="139" actId="1076"/>
+          <ac:spMkLst>
+            <pc:docMk/>
+            <pc:sldMk cId="818822214" sldId="258"/>
+            <ac:spMk id="5" creationId="{A8068F53-98F4-86A2-1022-96C32A264124}"/>
+          </ac:spMkLst>
+        </pc:spChg>
+        <pc:spChg chg="add mod">
+          <ac:chgData name="Hemma Philamore" userId="db50e2f3-17b2-4cc0-b719-fb6254d3e9df" providerId="ADAL" clId="{976AD799-FE43-55CA-A221-11B5AB66B93B}" dt="2026-10-26T14:02:20.886" v="156" actId="1076"/>
+          <ac:spMkLst>
+            <pc:docMk/>
+            <pc:sldMk cId="818822214" sldId="258"/>
+            <ac:spMk id="6" creationId="{8E0F47BF-4885-964F-0D60-B4639C8A9BE6}"/>
+          </ac:spMkLst>
+        </pc:spChg>
+        <pc:spChg chg="add mod">
+          <ac:chgData name="Hemma Philamore" userId="db50e2f3-17b2-4cc0-b719-fb6254d3e9df" providerId="ADAL" clId="{976AD799-FE43-55CA-A221-11B5AB66B93B}" dt="2026-10-26T14:02:40.590" v="177" actId="1076"/>
+          <ac:spMkLst>
+            <pc:docMk/>
+            <pc:sldMk cId="818822214" sldId="258"/>
+            <ac:spMk id="7" creationId="{91D8E25D-1B4C-F9BC-6D09-A03B452EEF3D}"/>
+          </ac:spMkLst>
+        </pc:spChg>
+        <pc:spChg chg="add mod">
+          <ac:chgData name="Hemma Philamore" userId="db50e2f3-17b2-4cc0-b719-fb6254d3e9df" providerId="ADAL" clId="{976AD799-FE43-55CA-A221-11B5AB66B93B}" dt="2026-10-26T14:03:07.925" v="193" actId="1076"/>
+          <ac:spMkLst>
+            <pc:docMk/>
+            <pc:sldMk cId="818822214" sldId="258"/>
+            <ac:spMk id="8" creationId="{E0633738-F0B1-A4FD-DA17-78FA70ED5802}"/>
+          </ac:spMkLst>
+        </pc:spChg>
+        <pc:spChg chg="add mod">
+          <ac:chgData name="Hemma Philamore" userId="db50e2f3-17b2-4cc0-b719-fb6254d3e9df" providerId="ADAL" clId="{976AD799-FE43-55CA-A221-11B5AB66B93B}" dt="2026-10-26T14:03:38.125" v="203" actId="1076"/>
+          <ac:spMkLst>
+            <pc:docMk/>
+            <pc:sldMk cId="818822214" sldId="258"/>
+            <ac:spMk id="9" creationId="{63FA04A2-A263-3D7E-6B3B-5A206D134AA4}"/>
+          </ac:spMkLst>
+        </pc:spChg>
+        <pc:spChg chg="add mod">
+          <ac:chgData name="Hemma Philamore" userId="db50e2f3-17b2-4cc0-b719-fb6254d3e9df" providerId="ADAL" clId="{976AD799-FE43-55CA-A221-11B5AB66B93B}" dt="2026-10-26T14:06:24.895" v="239" actId="1076"/>
+          <ac:spMkLst>
+            <pc:docMk/>
+            <pc:sldMk cId="818822214" sldId="258"/>
+            <ac:spMk id="10" creationId="{711322C6-5D34-34D5-158F-F28376BB0BAC}"/>
+          </ac:spMkLst>
+        </pc:spChg>
+        <pc:spChg chg="topLvl">
+          <ac:chgData name="Hemma Philamore" userId="db50e2f3-17b2-4cc0-b719-fb6254d3e9df" providerId="ADAL" clId="{976AD799-FE43-55CA-A221-11B5AB66B93B}" dt="2026-10-26T14:02:00.479" v="143" actId="478"/>
+          <ac:spMkLst>
+            <pc:docMk/>
+            <pc:sldMk cId="818822214" sldId="258"/>
+            <ac:spMk id="12" creationId="{4D0FB3C7-9C73-BC39-5690-7EFF4A2894AF}"/>
+          </ac:spMkLst>
+        </pc:spChg>
+        <pc:spChg chg="del topLvl">
+          <ac:chgData name="Hemma Philamore" userId="db50e2f3-17b2-4cc0-b719-fb6254d3e9df" providerId="ADAL" clId="{976AD799-FE43-55CA-A221-11B5AB66B93B}" dt="2026-10-26T14:02:00.479" v="143" actId="478"/>
+          <ac:spMkLst>
+            <pc:docMk/>
+            <pc:sldMk cId="818822214" sldId="258"/>
+            <ac:spMk id="13" creationId="{37B39678-CCA2-2160-EE6B-F3FFA9DE56F5}"/>
+          </ac:spMkLst>
+        </pc:spChg>
+        <pc:spChg chg="topLvl">
+          <ac:chgData name="Hemma Philamore" userId="db50e2f3-17b2-4cc0-b719-fb6254d3e9df" providerId="ADAL" clId="{976AD799-FE43-55CA-A221-11B5AB66B93B}" dt="2026-10-26T14:01:57.370" v="142" actId="165"/>
+          <ac:spMkLst>
+            <pc:docMk/>
+            <pc:sldMk cId="818822214" sldId="258"/>
+            <ac:spMk id="15" creationId="{075391DC-F7E3-F41D-1365-DF93FA2D0B76}"/>
+          </ac:spMkLst>
+        </pc:spChg>
+        <pc:spChg chg="del">
+          <ac:chgData name="Hemma Philamore" userId="db50e2f3-17b2-4cc0-b719-fb6254d3e9df" providerId="ADAL" clId="{976AD799-FE43-55CA-A221-11B5AB66B93B}" dt="2026-10-26T14:01:52.136" v="141" actId="478"/>
+          <ac:spMkLst>
+            <pc:docMk/>
+            <pc:sldMk cId="818822214" sldId="258"/>
+            <ac:spMk id="16" creationId="{D27389F5-42BB-3C70-DE01-14C4C4FE654F}"/>
+          </ac:spMkLst>
+        </pc:spChg>
+        <pc:spChg chg="topLvl">
+          <ac:chgData name="Hemma Philamore" userId="db50e2f3-17b2-4cc0-b719-fb6254d3e9df" providerId="ADAL" clId="{976AD799-FE43-55CA-A221-11B5AB66B93B}" dt="2026-10-26T14:02:02.304" v="144" actId="478"/>
+          <ac:spMkLst>
+            <pc:docMk/>
+            <pc:sldMk cId="818822214" sldId="258"/>
+            <ac:spMk id="18" creationId="{FB009A0A-1C4C-CCAF-7B85-986E3BB01521}"/>
+          </ac:spMkLst>
+        </pc:spChg>
+        <pc:spChg chg="del topLvl">
+          <ac:chgData name="Hemma Philamore" userId="db50e2f3-17b2-4cc0-b719-fb6254d3e9df" providerId="ADAL" clId="{976AD799-FE43-55CA-A221-11B5AB66B93B}" dt="2026-10-26T14:02:02.304" v="144" actId="478"/>
+          <ac:spMkLst>
+            <pc:docMk/>
+            <pc:sldMk cId="818822214" sldId="258"/>
+            <ac:spMk id="19" creationId="{7405E25B-B77D-65B9-058C-63428652E40E}"/>
+          </ac:spMkLst>
+        </pc:spChg>
+        <pc:spChg chg="topLvl">
+          <ac:chgData name="Hemma Philamore" userId="db50e2f3-17b2-4cc0-b719-fb6254d3e9df" providerId="ADAL" clId="{976AD799-FE43-55CA-A221-11B5AB66B93B}" dt="2026-10-26T14:01:57.370" v="142" actId="165"/>
+          <ac:spMkLst>
+            <pc:docMk/>
+            <pc:sldMk cId="818822214" sldId="258"/>
+            <ac:spMk id="21" creationId="{62B9B986-9CBD-1052-25FD-39E6133B2A70}"/>
+          </ac:spMkLst>
+        </pc:spChg>
+        <pc:spChg chg="del">
+          <ac:chgData name="Hemma Philamore" userId="db50e2f3-17b2-4cc0-b719-fb6254d3e9df" providerId="ADAL" clId="{976AD799-FE43-55CA-A221-11B5AB66B93B}" dt="2026-10-26T14:01:49.624" v="140" actId="478"/>
+          <ac:spMkLst>
+            <pc:docMk/>
+            <pc:sldMk cId="818822214" sldId="258"/>
+            <ac:spMk id="22" creationId="{C2F1FDE3-3920-1024-B120-E47CA3F25E3D}"/>
+          </ac:spMkLst>
+        </pc:spChg>
+        <pc:spChg chg="add mod">
+          <ac:chgData name="Hemma Philamore" userId="db50e2f3-17b2-4cc0-b719-fb6254d3e9df" providerId="ADAL" clId="{976AD799-FE43-55CA-A221-11B5AB66B93B}" dt="2026-10-26T14:07:37.863" v="263" actId="14100"/>
+          <ac:spMkLst>
+            <pc:docMk/>
+            <pc:sldMk cId="818822214" sldId="258"/>
+            <ac:spMk id="23" creationId="{446A178C-C437-313B-ED62-CE951E3F45F1}"/>
+          </ac:spMkLst>
+        </pc:spChg>
+        <pc:spChg chg="add del mod">
+          <ac:chgData name="Hemma Philamore" userId="db50e2f3-17b2-4cc0-b719-fb6254d3e9df" providerId="ADAL" clId="{976AD799-FE43-55CA-A221-11B5AB66B93B}" dt="2026-10-26T14:09:09.289" v="279" actId="478"/>
+          <ac:spMkLst>
+            <pc:docMk/>
+            <pc:sldMk cId="818822214" sldId="258"/>
+            <ac:spMk id="24" creationId="{6D790245-D61A-359E-E774-41FB675737AA}"/>
+          </ac:spMkLst>
+        </pc:spChg>
+        <pc:spChg chg="add del mod">
+          <ac:chgData name="Hemma Philamore" userId="db50e2f3-17b2-4cc0-b719-fb6254d3e9df" providerId="ADAL" clId="{976AD799-FE43-55CA-A221-11B5AB66B93B}" dt="2026-10-26T14:09:11.689" v="281" actId="478"/>
+          <ac:spMkLst>
+            <pc:docMk/>
+            <pc:sldMk cId="818822214" sldId="258"/>
+            <ac:spMk id="25" creationId="{B23047DA-1FB2-6F32-5E7D-EEC547097651}"/>
+          </ac:spMkLst>
+        </pc:spChg>
+        <pc:spChg chg="mod topLvl">
+          <ac:chgData name="Hemma Philamore" userId="db50e2f3-17b2-4cc0-b719-fb6254d3e9df" providerId="ADAL" clId="{976AD799-FE43-55CA-A221-11B5AB66B93B}" dt="2026-10-26T14:10:18.109" v="295" actId="20577"/>
+          <ac:spMkLst>
+            <pc:docMk/>
+            <pc:sldMk cId="818822214" sldId="258"/>
+            <ac:spMk id="42" creationId="{DF004EF6-E142-1614-EE3B-1100C1965C40}"/>
+          </ac:spMkLst>
+        </pc:spChg>
+        <pc:spChg chg="mod topLvl">
+          <ac:chgData name="Hemma Philamore" userId="db50e2f3-17b2-4cc0-b719-fb6254d3e9df" providerId="ADAL" clId="{976AD799-FE43-55CA-A221-11B5AB66B93B}" dt="2026-10-26T14:10:23.881" v="298" actId="20577"/>
+          <ac:spMkLst>
+            <pc:docMk/>
+            <pc:sldMk cId="818822214" sldId="258"/>
+            <ac:spMk id="43" creationId="{4A06994E-FB0B-7B1B-7212-5CABC63777CF}"/>
+          </ac:spMkLst>
+        </pc:spChg>
+        <pc:spChg chg="mod topLvl">
+          <ac:chgData name="Hemma Philamore" userId="db50e2f3-17b2-4cc0-b719-fb6254d3e9df" providerId="ADAL" clId="{976AD799-FE43-55CA-A221-11B5AB66B93B}" dt="2026-10-26T14:10:38.553" v="303" actId="20577"/>
+          <ac:spMkLst>
+            <pc:docMk/>
+            <pc:sldMk cId="818822214" sldId="258"/>
+            <ac:spMk id="44" creationId="{1426A36C-9368-D130-7B58-77E95C4566DD}"/>
+          </ac:spMkLst>
+        </pc:spChg>
+        <pc:spChg chg="del">
+          <ac:chgData name="Hemma Philamore" userId="db50e2f3-17b2-4cc0-b719-fb6254d3e9df" providerId="ADAL" clId="{976AD799-FE43-55CA-A221-11B5AB66B93B}" dt="2026-10-26T14:06:37.057" v="241" actId="478"/>
+          <ac:spMkLst>
+            <pc:docMk/>
+            <pc:sldMk cId="818822214" sldId="258"/>
+            <ac:spMk id="45" creationId="{9B01EE50-9BC2-915E-BFB6-C39B3AF6AD6C}"/>
+          </ac:spMkLst>
+        </pc:spChg>
+        <pc:spChg chg="mod topLvl">
+          <ac:chgData name="Hemma Philamore" userId="db50e2f3-17b2-4cc0-b719-fb6254d3e9df" providerId="ADAL" clId="{976AD799-FE43-55CA-A221-11B5AB66B93B}" dt="2026-10-26T14:10:30.327" v="302" actId="20577"/>
+          <ac:spMkLst>
+            <pc:docMk/>
+            <pc:sldMk cId="818822214" sldId="258"/>
+            <ac:spMk id="46" creationId="{FA7B7597-0100-DB49-F5FD-4C8F209EF168}"/>
+          </ac:spMkLst>
+        </pc:spChg>
+        <pc:spChg chg="mod topLvl">
+          <ac:chgData name="Hemma Philamore" userId="db50e2f3-17b2-4cc0-b719-fb6254d3e9df" providerId="ADAL" clId="{976AD799-FE43-55CA-A221-11B5AB66B93B}" dt="2026-10-26T14:10:20.520" v="297" actId="20577"/>
+          <ac:spMkLst>
+            <pc:docMk/>
+            <pc:sldMk cId="818822214" sldId="258"/>
+            <ac:spMk id="47" creationId="{985ED467-F9D2-E3D8-486F-C5B73DE24BEC}"/>
+          </ac:spMkLst>
+        </pc:spChg>
+        <pc:spChg chg="del mod topLvl">
+          <ac:chgData name="Hemma Philamore" userId="db50e2f3-17b2-4cc0-b719-fb6254d3e9df" providerId="ADAL" clId="{976AD799-FE43-55CA-A221-11B5AB66B93B}" dt="2026-10-26T14:08:51.817" v="276" actId="478"/>
+          <ac:spMkLst>
+            <pc:docMk/>
+            <pc:sldMk cId="818822214" sldId="258"/>
+            <ac:spMk id="48" creationId="{A50920EA-BEF7-BA04-465A-91FC90FDF5D5}"/>
+          </ac:spMkLst>
+        </pc:spChg>
+        <pc:spChg chg="mod topLvl">
+          <ac:chgData name="Hemma Philamore" userId="db50e2f3-17b2-4cc0-b719-fb6254d3e9df" providerId="ADAL" clId="{976AD799-FE43-55CA-A221-11B5AB66B93B}" dt="2026-10-26T14:10:27.207" v="300" actId="20577"/>
+          <ac:spMkLst>
+            <pc:docMk/>
+            <pc:sldMk cId="818822214" sldId="258"/>
+            <ac:spMk id="49" creationId="{2696082F-1587-CBC0-D621-0D22E15B2350}"/>
+          </ac:spMkLst>
+        </pc:spChg>
+        <pc:spChg chg="del">
+          <ac:chgData name="Hemma Philamore" userId="db50e2f3-17b2-4cc0-b719-fb6254d3e9df" providerId="ADAL" clId="{976AD799-FE43-55CA-A221-11B5AB66B93B}" dt="2026-10-26T14:11:47.891" v="324" actId="478"/>
+          <ac:spMkLst>
+            <pc:docMk/>
+            <pc:sldMk cId="818822214" sldId="258"/>
+            <ac:spMk id="86" creationId="{A64E81F8-9AFD-AEBD-C138-0E2EEEFEF570}"/>
+          </ac:spMkLst>
+        </pc:spChg>
+        <pc:spChg chg="add mod">
+          <ac:chgData name="Hemma Philamore" userId="db50e2f3-17b2-4cc0-b719-fb6254d3e9df" providerId="ADAL" clId="{976AD799-FE43-55CA-A221-11B5AB66B93B}" dt="2026-10-26T14:09:01.467" v="278" actId="1076"/>
+          <ac:spMkLst>
+            <pc:docMk/>
+            <pc:sldMk cId="818822214" sldId="258"/>
+            <ac:spMk id="87" creationId="{D1E39551-EB9F-48E5-8BD0-27DD519F263C}"/>
+          </ac:spMkLst>
+        </pc:spChg>
+        <pc:spChg chg="add del mod">
+          <ac:chgData name="Hemma Philamore" userId="db50e2f3-17b2-4cc0-b719-fb6254d3e9df" providerId="ADAL" clId="{976AD799-FE43-55CA-A221-11B5AB66B93B}" dt="2026-10-26T14:11:33.922" v="321" actId="478"/>
+          <ac:spMkLst>
+            <pc:docMk/>
+            <pc:sldMk cId="818822214" sldId="258"/>
+            <ac:spMk id="88" creationId="{1B379102-956F-C630-2A1D-3B8154491BFD}"/>
+          </ac:spMkLst>
+        </pc:spChg>
+        <pc:spChg chg="del">
+          <ac:chgData name="Hemma Philamore" userId="db50e2f3-17b2-4cc0-b719-fb6254d3e9df" providerId="ADAL" clId="{976AD799-FE43-55CA-A221-11B5AB66B93B}" dt="2026-10-26T14:11:33.922" v="321" actId="478"/>
+          <ac:spMkLst>
+            <pc:docMk/>
+            <pc:sldMk cId="818822214" sldId="258"/>
+            <ac:spMk id="98" creationId="{5C52D5CC-F625-4F5F-5FE0-054921630E7F}"/>
+          </ac:spMkLst>
+        </pc:spChg>
+        <pc:spChg chg="add mod">
+          <ac:chgData name="Hemma Philamore" userId="db50e2f3-17b2-4cc0-b719-fb6254d3e9df" providerId="ADAL" clId="{976AD799-FE43-55CA-A221-11B5AB66B93B}" dt="2026-10-26T14:09:01.467" v="278" actId="1076"/>
+          <ac:spMkLst>
+            <pc:docMk/>
+            <pc:sldMk cId="818822214" sldId="258"/>
+            <ac:spMk id="99" creationId="{93638AF1-46D6-09AA-F2C9-480FC5A6A7F6}"/>
+          </ac:spMkLst>
+        </pc:spChg>
+        <pc:spChg chg="add mod">
+          <ac:chgData name="Hemma Philamore" userId="db50e2f3-17b2-4cc0-b719-fb6254d3e9df" providerId="ADAL" clId="{976AD799-FE43-55CA-A221-11B5AB66B93B}" dt="2026-10-26T14:09:01.467" v="278" actId="1076"/>
+          <ac:spMkLst>
+            <pc:docMk/>
+            <pc:sldMk cId="818822214" sldId="258"/>
+            <ac:spMk id="100" creationId="{2EBD65D6-364C-48C0-08FF-186EC69538CF}"/>
+          </ac:spMkLst>
+        </pc:spChg>
+        <pc:spChg chg="add del mod">
+          <ac:chgData name="Hemma Philamore" userId="db50e2f3-17b2-4cc0-b719-fb6254d3e9df" providerId="ADAL" clId="{976AD799-FE43-55CA-A221-11B5AB66B93B}" dt="2026-10-26T14:11:33.922" v="321" actId="478"/>
+          <ac:spMkLst>
+            <pc:docMk/>
+            <pc:sldMk cId="818822214" sldId="258"/>
+            <ac:spMk id="101" creationId="{F904DC4D-9F7E-F78D-A308-4A18D42B6A3E}"/>
+          </ac:spMkLst>
+        </pc:spChg>
+        <pc:spChg chg="add del mod">
+          <ac:chgData name="Hemma Philamore" userId="db50e2f3-17b2-4cc0-b719-fb6254d3e9df" providerId="ADAL" clId="{976AD799-FE43-55CA-A221-11B5AB66B93B}" dt="2026-10-26T14:11:33.922" v="321" actId="478"/>
+          <ac:spMkLst>
+            <pc:docMk/>
+            <pc:sldMk cId="818822214" sldId="258"/>
+            <ac:spMk id="102" creationId="{B31EEC6E-D870-6915-276A-5DB3CD5AC11A}"/>
+          </ac:spMkLst>
+        </pc:spChg>
+        <pc:spChg chg="del">
+          <ac:chgData name="Hemma Philamore" userId="db50e2f3-17b2-4cc0-b719-fb6254d3e9df" providerId="ADAL" clId="{976AD799-FE43-55CA-A221-11B5AB66B93B}" dt="2026-10-26T14:11:33.922" v="321" actId="478"/>
+          <ac:spMkLst>
+            <pc:docMk/>
+            <pc:sldMk cId="818822214" sldId="258"/>
+            <ac:spMk id="103" creationId="{8B35FF13-F2F2-46A1-36ED-610A37714B79}"/>
+          </ac:spMkLst>
+        </pc:spChg>
+        <pc:spChg chg="del">
+          <ac:chgData name="Hemma Philamore" userId="db50e2f3-17b2-4cc0-b719-fb6254d3e9df" providerId="ADAL" clId="{976AD799-FE43-55CA-A221-11B5AB66B93B}" dt="2026-10-26T14:11:33.922" v="321" actId="478"/>
+          <ac:spMkLst>
+            <pc:docMk/>
+            <pc:sldMk cId="818822214" sldId="258"/>
+            <ac:spMk id="104" creationId="{475AE8FD-5901-9B93-9142-F719F6D63E9D}"/>
+          </ac:spMkLst>
+        </pc:spChg>
+        <pc:spChg chg="add del mod">
+          <ac:chgData name="Hemma Philamore" userId="db50e2f3-17b2-4cc0-b719-fb6254d3e9df" providerId="ADAL" clId="{976AD799-FE43-55CA-A221-11B5AB66B93B}" dt="2026-10-26T14:11:49.514" v="325" actId="478"/>
+          <ac:spMkLst>
+            <pc:docMk/>
+            <pc:sldMk cId="818822214" sldId="258"/>
+            <ac:spMk id="105" creationId="{10FFC99D-E1C2-D2DC-6FAB-C80FAB7789A3}"/>
+          </ac:spMkLst>
+        </pc:spChg>
+        <pc:spChg chg="add del mod">
+          <ac:chgData name="Hemma Philamore" userId="db50e2f3-17b2-4cc0-b719-fb6254d3e9df" providerId="ADAL" clId="{976AD799-FE43-55CA-A221-11B5AB66B93B}" dt="2026-10-26T14:11:33.922" v="321" actId="478"/>
+          <ac:spMkLst>
+            <pc:docMk/>
+            <pc:sldMk cId="818822214" sldId="258"/>
+            <ac:spMk id="106" creationId="{D8899B61-8B8D-95A3-4E9C-FFD41EF5A09F}"/>
+          </ac:spMkLst>
+        </pc:spChg>
+        <pc:spChg chg="del">
+          <ac:chgData name="Hemma Philamore" userId="db50e2f3-17b2-4cc0-b719-fb6254d3e9df" providerId="ADAL" clId="{976AD799-FE43-55CA-A221-11B5AB66B93B}" dt="2026-10-26T14:11:33.922" v="321" actId="478"/>
+          <ac:spMkLst>
+            <pc:docMk/>
+            <pc:sldMk cId="818822214" sldId="258"/>
+            <ac:spMk id="107" creationId="{82FA24D6-D964-25AF-2A1B-7E46FAC75E74}"/>
+          </ac:spMkLst>
+        </pc:spChg>
+        <pc:spChg chg="del">
+          <ac:chgData name="Hemma Philamore" userId="db50e2f3-17b2-4cc0-b719-fb6254d3e9df" providerId="ADAL" clId="{976AD799-FE43-55CA-A221-11B5AB66B93B}" dt="2026-10-26T14:11:33.922" v="321" actId="478"/>
+          <ac:spMkLst>
+            <pc:docMk/>
+            <pc:sldMk cId="818822214" sldId="258"/>
+            <ac:spMk id="108" creationId="{A251CB68-F817-4C3B-AECD-DE75AFC10DFB}"/>
+          </ac:spMkLst>
+        </pc:spChg>
+        <pc:spChg chg="del">
+          <ac:chgData name="Hemma Philamore" userId="db50e2f3-17b2-4cc0-b719-fb6254d3e9df" providerId="ADAL" clId="{976AD799-FE43-55CA-A221-11B5AB66B93B}" dt="2026-10-26T14:11:33.922" v="321" actId="478"/>
+          <ac:spMkLst>
+            <pc:docMk/>
+            <pc:sldMk cId="818822214" sldId="258"/>
+            <ac:spMk id="110" creationId="{1127DE7C-EF36-BB85-89C5-B7BC5B1DFC78}"/>
+          </ac:spMkLst>
+        </pc:spChg>
+        <pc:spChg chg="add mod topLvl">
+          <ac:chgData name="Hemma Philamore" userId="db50e2f3-17b2-4cc0-b719-fb6254d3e9df" providerId="ADAL" clId="{976AD799-FE43-55CA-A221-11B5AB66B93B}" dt="2026-10-26T14:12:05.777" v="328" actId="14100"/>
+          <ac:spMkLst>
+            <pc:docMk/>
+            <pc:sldMk cId="818822214" sldId="258"/>
+            <ac:spMk id="111" creationId="{C63B4B8F-493B-2448-8664-868D2B4C7003}"/>
+          </ac:spMkLst>
+        </pc:spChg>
+        <pc:spChg chg="add mod topLvl">
+          <ac:chgData name="Hemma Philamore" userId="db50e2f3-17b2-4cc0-b719-fb6254d3e9df" providerId="ADAL" clId="{976AD799-FE43-55CA-A221-11B5AB66B93B}" dt="2026-10-26T14:12:05.777" v="328" actId="14100"/>
+          <ac:spMkLst>
+            <pc:docMk/>
+            <pc:sldMk cId="818822214" sldId="258"/>
+            <ac:spMk id="112" creationId="{7EE30EA5-128D-9698-1BEA-DA7102282D15}"/>
+          </ac:spMkLst>
+        </pc:spChg>
+        <pc:spChg chg="add mod">
+          <ac:chgData name="Hemma Philamore" userId="db50e2f3-17b2-4cc0-b719-fb6254d3e9df" providerId="ADAL" clId="{976AD799-FE43-55CA-A221-11B5AB66B93B}" dt="2026-10-26T14:10:48.440" v="307" actId="20577"/>
+          <ac:spMkLst>
+            <pc:docMk/>
+            <pc:sldMk cId="818822214" sldId="258"/>
+            <ac:spMk id="118" creationId="{43132931-2181-0358-9025-FE93DECC5822}"/>
+          </ac:spMkLst>
+        </pc:spChg>
+        <pc:spChg chg="add mod">
+          <ac:chgData name="Hemma Philamore" userId="db50e2f3-17b2-4cc0-b719-fb6254d3e9df" providerId="ADAL" clId="{976AD799-FE43-55CA-A221-11B5AB66B93B}" dt="2026-10-26T14:10:55.557" v="311" actId="20577"/>
+          <ac:spMkLst>
+            <pc:docMk/>
+            <pc:sldMk cId="818822214" sldId="258"/>
+            <ac:spMk id="119" creationId="{318F769D-6D75-FEF3-8629-50C3B3EEB1A8}"/>
+          </ac:spMkLst>
+        </pc:spChg>
+        <pc:spChg chg="add mod">
+          <ac:chgData name="Hemma Philamore" userId="db50e2f3-17b2-4cc0-b719-fb6254d3e9df" providerId="ADAL" clId="{976AD799-FE43-55CA-A221-11B5AB66B93B}" dt="2026-10-26T14:11:02.473" v="315" actId="20577"/>
+          <ac:spMkLst>
+            <pc:docMk/>
+            <pc:sldMk cId="818822214" sldId="258"/>
+            <ac:spMk id="120" creationId="{73BA9F1C-4011-3116-9BC8-7808AB74D149}"/>
+          </ac:spMkLst>
+        </pc:spChg>
+        <pc:spChg chg="add mod">
+          <ac:chgData name="Hemma Philamore" userId="db50e2f3-17b2-4cc0-b719-fb6254d3e9df" providerId="ADAL" clId="{976AD799-FE43-55CA-A221-11B5AB66B93B}" dt="2026-10-26T14:11:09.559" v="318" actId="20577"/>
+          <ac:spMkLst>
+            <pc:docMk/>
+            <pc:sldMk cId="818822214" sldId="258"/>
+            <ac:spMk id="121" creationId="{DC4ACEFF-F814-4908-3FEC-A05988081730}"/>
+          </ac:spMkLst>
+        </pc:spChg>
+        <pc:spChg chg="add mod">
+          <ac:chgData name="Hemma Philamore" userId="db50e2f3-17b2-4cc0-b719-fb6254d3e9df" providerId="ADAL" clId="{976AD799-FE43-55CA-A221-11B5AB66B93B}" dt="2026-10-26T14:11:46.076" v="323" actId="1076"/>
+          <ac:spMkLst>
+            <pc:docMk/>
+            <pc:sldMk cId="818822214" sldId="258"/>
+            <ac:spMk id="124" creationId="{A13F0B98-D814-9718-9925-D2611AAF5D33}"/>
+          </ac:spMkLst>
+        </pc:spChg>
+        <pc:spChg chg="add mod">
+          <ac:chgData name="Hemma Philamore" userId="db50e2f3-17b2-4cc0-b719-fb6254d3e9df" providerId="ADAL" clId="{976AD799-FE43-55CA-A221-11B5AB66B93B}" dt="2026-10-26T14:11:46.076" v="323" actId="1076"/>
+          <ac:spMkLst>
+            <pc:docMk/>
+            <pc:sldMk cId="818822214" sldId="258"/>
+            <ac:spMk id="127" creationId="{FA0EAEB6-933C-0344-DB08-6E57355F2543}"/>
+          </ac:spMkLst>
+        </pc:spChg>
+        <pc:spChg chg="add mod">
+          <ac:chgData name="Hemma Philamore" userId="db50e2f3-17b2-4cc0-b719-fb6254d3e9df" providerId="ADAL" clId="{976AD799-FE43-55CA-A221-11B5AB66B93B}" dt="2026-10-26T14:12:14.799" v="330" actId="1076"/>
+          <ac:spMkLst>
+            <pc:docMk/>
+            <pc:sldMk cId="818822214" sldId="258"/>
+            <ac:spMk id="136" creationId="{40925F2C-3F02-51B7-F32A-7B2C595EA570}"/>
+          </ac:spMkLst>
+        </pc:spChg>
+        <pc:spChg chg="add mod">
+          <ac:chgData name="Hemma Philamore" userId="db50e2f3-17b2-4cc0-b719-fb6254d3e9df" providerId="ADAL" clId="{976AD799-FE43-55CA-A221-11B5AB66B93B}" dt="2026-10-26T14:11:46.076" v="323" actId="1076"/>
+          <ac:spMkLst>
+            <pc:docMk/>
+            <pc:sldMk cId="818822214" sldId="258"/>
+            <ac:spMk id="138" creationId="{6BDBCF13-8BD8-8619-F8B6-8F1959B8F78C}"/>
+          </ac:spMkLst>
+        </pc:spChg>
+        <pc:spChg chg="mod">
+          <ac:chgData name="Hemma Philamore" userId="db50e2f3-17b2-4cc0-b719-fb6254d3e9df" providerId="ADAL" clId="{976AD799-FE43-55CA-A221-11B5AB66B93B}" dt="2026-10-26T14:15:27.489" v="346" actId="207"/>
+          <ac:spMkLst>
+            <pc:docMk/>
+            <pc:sldMk cId="818822214" sldId="258"/>
+            <ac:spMk id="139" creationId="{B43BD31F-F83A-5776-2940-6634DB822B8F}"/>
+          </ac:spMkLst>
+        </pc:spChg>
+        <pc:spChg chg="add mod">
+          <ac:chgData name="Hemma Philamore" userId="db50e2f3-17b2-4cc0-b719-fb6254d3e9df" providerId="ADAL" clId="{976AD799-FE43-55CA-A221-11B5AB66B93B}" dt="2026-10-26T14:11:46.076" v="323" actId="1076"/>
+          <ac:spMkLst>
+            <pc:docMk/>
+            <pc:sldMk cId="818822214" sldId="258"/>
+            <ac:spMk id="142" creationId="{CEAF4C90-AE2C-7827-DCF3-2A271ECD185B}"/>
+          </ac:spMkLst>
+        </pc:spChg>
+        <pc:spChg chg="add mod">
+          <ac:chgData name="Hemma Philamore" userId="db50e2f3-17b2-4cc0-b719-fb6254d3e9df" providerId="ADAL" clId="{976AD799-FE43-55CA-A221-11B5AB66B93B}" dt="2026-10-26T14:11:46.076" v="323" actId="1076"/>
+          <ac:spMkLst>
+            <pc:docMk/>
+            <pc:sldMk cId="818822214" sldId="258"/>
+            <ac:spMk id="145" creationId="{682D751E-1538-A972-A34E-222CAC8E8C43}"/>
+          </ac:spMkLst>
+        </pc:spChg>
+        <pc:spChg chg="add mod">
+          <ac:chgData name="Hemma Philamore" userId="db50e2f3-17b2-4cc0-b719-fb6254d3e9df" providerId="ADAL" clId="{976AD799-FE43-55CA-A221-11B5AB66B93B}" dt="2026-10-26T14:11:46.076" v="323" actId="1076"/>
+          <ac:spMkLst>
+            <pc:docMk/>
+            <pc:sldMk cId="818822214" sldId="258"/>
+            <ac:spMk id="147" creationId="{7236C944-3E04-C958-3E18-0DA0EA763104}"/>
+          </ac:spMkLst>
+        </pc:spChg>
+        <pc:spChg chg="add mod">
+          <ac:chgData name="Hemma Philamore" userId="db50e2f3-17b2-4cc0-b719-fb6254d3e9df" providerId="ADAL" clId="{976AD799-FE43-55CA-A221-11B5AB66B93B}" dt="2026-10-26T14:11:46.076" v="323" actId="1076"/>
+          <ac:spMkLst>
+            <pc:docMk/>
+            <pc:sldMk cId="818822214" sldId="258"/>
+            <ac:spMk id="148" creationId="{FB687C8D-F8B7-55E4-00D4-FCF77A06E4F2}"/>
+          </ac:spMkLst>
+        </pc:spChg>
+        <pc:spChg chg="add mod">
+          <ac:chgData name="Hemma Philamore" userId="db50e2f3-17b2-4cc0-b719-fb6254d3e9df" providerId="ADAL" clId="{976AD799-FE43-55CA-A221-11B5AB66B93B}" dt="2026-10-26T14:11:46.076" v="323" actId="1076"/>
+          <ac:spMkLst>
+            <pc:docMk/>
+            <pc:sldMk cId="818822214" sldId="258"/>
+            <ac:spMk id="153" creationId="{34D013CB-DB02-4605-84C3-37CF024F87BF}"/>
+          </ac:spMkLst>
+        </pc:spChg>
+        <pc:spChg chg="add mod">
+          <ac:chgData name="Hemma Philamore" userId="db50e2f3-17b2-4cc0-b719-fb6254d3e9df" providerId="ADAL" clId="{976AD799-FE43-55CA-A221-11B5AB66B93B}" dt="2026-10-26T14:11:46.076" v="323" actId="1076"/>
+          <ac:spMkLst>
+            <pc:docMk/>
+            <pc:sldMk cId="818822214" sldId="258"/>
+            <ac:spMk id="154" creationId="{D94AEBCF-43E1-DC16-2798-C6F633CF38D6}"/>
+          </ac:spMkLst>
+        </pc:spChg>
+        <pc:spChg chg="add mod">
+          <ac:chgData name="Hemma Philamore" userId="db50e2f3-17b2-4cc0-b719-fb6254d3e9df" providerId="ADAL" clId="{976AD799-FE43-55CA-A221-11B5AB66B93B}" dt="2026-10-26T14:12:29.672" v="337" actId="207"/>
+          <ac:spMkLst>
+            <pc:docMk/>
+            <pc:sldMk cId="818822214" sldId="258"/>
+            <ac:spMk id="157" creationId="{0502A777-EFA5-D949-964E-161252600201}"/>
+          </ac:spMkLst>
+        </pc:spChg>
+        <pc:spChg chg="add mod">
+          <ac:chgData name="Hemma Philamore" userId="db50e2f3-17b2-4cc0-b719-fb6254d3e9df" providerId="ADAL" clId="{976AD799-FE43-55CA-A221-11B5AB66B93B}" dt="2026-10-26T14:12:39.720" v="341" actId="20577"/>
+          <ac:spMkLst>
+            <pc:docMk/>
+            <pc:sldMk cId="818822214" sldId="258"/>
+            <ac:spMk id="158" creationId="{7B05C46F-4A21-E57B-EF67-C89DE45F63EC}"/>
+          </ac:spMkLst>
+        </pc:spChg>
+        <pc:spChg chg="add mod">
+          <ac:chgData name="Hemma Philamore" userId="db50e2f3-17b2-4cc0-b719-fb6254d3e9df" providerId="ADAL" clId="{976AD799-FE43-55CA-A221-11B5AB66B93B}" dt="2026-10-26T14:12:48.298" v="344" actId="20577"/>
+          <ac:spMkLst>
+            <pc:docMk/>
+            <pc:sldMk cId="818822214" sldId="258"/>
+            <ac:spMk id="159" creationId="{427A000A-9BA2-4FF6-1BB1-EC4FAF0F5DCA}"/>
+          </ac:spMkLst>
+        </pc:spChg>
+        <pc:grpChg chg="del">
+          <ac:chgData name="Hemma Philamore" userId="db50e2f3-17b2-4cc0-b719-fb6254d3e9df" providerId="ADAL" clId="{976AD799-FE43-55CA-A221-11B5AB66B93B}" dt="2026-10-26T14:01:37.096" v="131" actId="478"/>
+          <ac:grpSpMkLst>
+            <pc:docMk/>
+            <pc:sldMk cId="818822214" sldId="258"/>
+            <ac:grpSpMk id="4" creationId="{22B12B85-67C8-67AE-6EC9-5721AFCA6E35}"/>
+          </ac:grpSpMkLst>
+        </pc:grpChg>
+        <pc:grpChg chg="del">
+          <ac:chgData name="Hemma Philamore" userId="db50e2f3-17b2-4cc0-b719-fb6254d3e9df" providerId="ADAL" clId="{976AD799-FE43-55CA-A221-11B5AB66B93B}" dt="2026-10-26T14:02:00.479" v="143" actId="478"/>
+          <ac:grpSpMkLst>
+            <pc:docMk/>
+            <pc:sldMk cId="818822214" sldId="258"/>
+            <ac:grpSpMk id="11" creationId="{540E5583-671A-AB53-F7C1-4C8D6385EB20}"/>
+          </ac:grpSpMkLst>
+        </pc:grpChg>
+        <pc:grpChg chg="del">
+          <ac:chgData name="Hemma Philamore" userId="db50e2f3-17b2-4cc0-b719-fb6254d3e9df" providerId="ADAL" clId="{976AD799-FE43-55CA-A221-11B5AB66B93B}" dt="2026-10-26T14:01:52.136" v="141" actId="478"/>
+          <ac:grpSpMkLst>
+            <pc:docMk/>
+            <pc:sldMk cId="818822214" sldId="258"/>
+            <ac:grpSpMk id="14" creationId="{FB3D31BC-71B8-BC20-228C-02224D7FCD47}"/>
+          </ac:grpSpMkLst>
+        </pc:grpChg>
+        <pc:grpChg chg="del">
+          <ac:chgData name="Hemma Philamore" userId="db50e2f3-17b2-4cc0-b719-fb6254d3e9df" providerId="ADAL" clId="{976AD799-FE43-55CA-A221-11B5AB66B93B}" dt="2026-10-26T14:02:02.304" v="144" actId="478"/>
+          <ac:grpSpMkLst>
+            <pc:docMk/>
+            <pc:sldMk cId="818822214" sldId="258"/>
+            <ac:grpSpMk id="17" creationId="{31C4B1DA-162D-55C0-8DC3-72BF4E4F6CB7}"/>
+          </ac:grpSpMkLst>
+        </pc:grpChg>
+        <pc:grpChg chg="del">
+          <ac:chgData name="Hemma Philamore" userId="db50e2f3-17b2-4cc0-b719-fb6254d3e9df" providerId="ADAL" clId="{976AD799-FE43-55CA-A221-11B5AB66B93B}" dt="2026-10-26T14:01:49.624" v="140" actId="478"/>
+          <ac:grpSpMkLst>
+            <pc:docMk/>
+            <pc:sldMk cId="818822214" sldId="258"/>
+            <ac:grpSpMk id="20" creationId="{F317DAEE-B729-0B48-0D93-60B2EDB14E03}"/>
+          </ac:grpSpMkLst>
+        </pc:grpChg>
+        <pc:grpChg chg="del">
+          <ac:chgData name="Hemma Philamore" userId="db50e2f3-17b2-4cc0-b719-fb6254d3e9df" providerId="ADAL" clId="{976AD799-FE43-55CA-A221-11B5AB66B93B}" dt="2026-10-26T14:06:39.283" v="242" actId="478"/>
+          <ac:grpSpMkLst>
+            <pc:docMk/>
+            <pc:sldMk cId="818822214" sldId="258"/>
+            <ac:grpSpMk id="83" creationId="{814F435E-6190-F88F-A253-966894EB682F}"/>
+          </ac:grpSpMkLst>
+        </pc:grpChg>
+        <pc:grpChg chg="add del mod">
+          <ac:chgData name="Hemma Philamore" userId="db50e2f3-17b2-4cc0-b719-fb6254d3e9df" providerId="ADAL" clId="{976AD799-FE43-55CA-A221-11B5AB66B93B}" dt="2026-10-26T14:12:03.493" v="327" actId="165"/>
+          <ac:grpSpMkLst>
+            <pc:docMk/>
+            <pc:sldMk cId="818822214" sldId="258"/>
+            <ac:grpSpMk id="122" creationId="{AEC02C9C-D68C-FCA7-2B3D-1E8961BE3C53}"/>
+          </ac:grpSpMkLst>
+        </pc:grpChg>
+        <pc:grpChg chg="add">
+          <ac:chgData name="Hemma Philamore" userId="db50e2f3-17b2-4cc0-b719-fb6254d3e9df" providerId="ADAL" clId="{976AD799-FE43-55CA-A221-11B5AB66B93B}" dt="2026-10-26T14:29:08.554" v="347" actId="164"/>
+          <ac:grpSpMkLst>
+            <pc:docMk/>
+            <pc:sldMk cId="818822214" sldId="258"/>
+            <ac:grpSpMk id="160" creationId="{4D364052-1EEB-5527-BCED-6D322E3256DD}"/>
+          </ac:grpSpMkLst>
+        </pc:grpChg>
+        <pc:grpChg chg="add">
+          <ac:chgData name="Hemma Philamore" userId="db50e2f3-17b2-4cc0-b719-fb6254d3e9df" providerId="ADAL" clId="{976AD799-FE43-55CA-A221-11B5AB66B93B}" dt="2026-10-26T14:29:15.369" v="348" actId="164"/>
+          <ac:grpSpMkLst>
+            <pc:docMk/>
+            <pc:sldMk cId="818822214" sldId="258"/>
+            <ac:grpSpMk id="161" creationId="{5D5FE7F6-109B-74A6-AA89-B1E5CBDBA62B}"/>
+          </ac:grpSpMkLst>
+        </pc:grpChg>
+        <pc:cxnChg chg="add mod">
+          <ac:chgData name="Hemma Philamore" userId="db50e2f3-17b2-4cc0-b719-fb6254d3e9df" providerId="ADAL" clId="{976AD799-FE43-55CA-A221-11B5AB66B93B}" dt="2026-10-26T14:08:37.504" v="270" actId="692"/>
+          <ac:cxnSpMkLst>
+            <pc:docMk/>
+            <pc:sldMk cId="818822214" sldId="258"/>
+            <ac:cxnSpMk id="28" creationId="{CA1D45DC-2FC8-6888-A955-02E09D868AC1}"/>
+          </ac:cxnSpMkLst>
+        </pc:cxnChg>
+        <pc:cxnChg chg="add del mod">
+          <ac:chgData name="Hemma Philamore" userId="db50e2f3-17b2-4cc0-b719-fb6254d3e9df" providerId="ADAL" clId="{976AD799-FE43-55CA-A221-11B5AB66B93B}" dt="2026-10-26T14:09:10.125" v="280" actId="478"/>
+          <ac:cxnSpMkLst>
+            <pc:docMk/>
+            <pc:sldMk cId="818822214" sldId="258"/>
+            <ac:cxnSpMk id="30" creationId="{09BF18E2-9024-11E2-149E-97E22F00B8A4}"/>
+          </ac:cxnSpMkLst>
+        </pc:cxnChg>
+        <pc:cxnChg chg="add del mod">
+          <ac:chgData name="Hemma Philamore" userId="db50e2f3-17b2-4cc0-b719-fb6254d3e9df" providerId="ADAL" clId="{976AD799-FE43-55CA-A221-11B5AB66B93B}" dt="2026-10-26T14:08:07.553" v="265" actId="478"/>
+          <ac:cxnSpMkLst>
+            <pc:docMk/>
+            <pc:sldMk cId="818822214" sldId="258"/>
+            <ac:cxnSpMk id="36" creationId="{90CE0A25-84B8-79BE-E353-4F6F7105A194}"/>
+          </ac:cxnSpMkLst>
+        </pc:cxnChg>
+        <pc:cxnChg chg="add del mod">
+          <ac:chgData name="Hemma Philamore" userId="db50e2f3-17b2-4cc0-b719-fb6254d3e9df" providerId="ADAL" clId="{976AD799-FE43-55CA-A221-11B5AB66B93B}" dt="2026-10-26T14:09:12.578" v="282" actId="478"/>
+          <ac:cxnSpMkLst>
+            <pc:docMk/>
+            <pc:sldMk cId="818822214" sldId="258"/>
+            <ac:cxnSpMk id="38" creationId="{3A2415BE-8554-E720-F22C-9B68A7D7150C}"/>
+          </ac:cxnSpMkLst>
+        </pc:cxnChg>
+        <pc:cxnChg chg="add del mod">
+          <ac:chgData name="Hemma Philamore" userId="db50e2f3-17b2-4cc0-b719-fb6254d3e9df" providerId="ADAL" clId="{976AD799-FE43-55CA-A221-11B5AB66B93B}" dt="2026-10-26T14:09:13.671" v="283" actId="478"/>
+          <ac:cxnSpMkLst>
+            <pc:docMk/>
+            <pc:sldMk cId="818822214" sldId="258"/>
+            <ac:cxnSpMk id="40" creationId="{3B4CE793-F989-BB95-0D5B-0F1096030130}"/>
+          </ac:cxnSpMkLst>
+        </pc:cxnChg>
+        <pc:cxnChg chg="mod">
+          <ac:chgData name="Hemma Philamore" userId="db50e2f3-17b2-4cc0-b719-fb6254d3e9df" providerId="ADAL" clId="{976AD799-FE43-55CA-A221-11B5AB66B93B}" dt="2026-10-26T14:06:39.283" v="242" actId="478"/>
+          <ac:cxnSpMkLst>
+            <pc:docMk/>
+            <pc:sldMk cId="818822214" sldId="258"/>
+            <ac:cxnSpMk id="57" creationId="{97D9D18C-9E7A-DFA9-FA4F-856527C788E4}"/>
+          </ac:cxnSpMkLst>
+        </pc:cxnChg>
+        <pc:cxnChg chg="mod">
+          <ac:chgData name="Hemma Philamore" userId="db50e2f3-17b2-4cc0-b719-fb6254d3e9df" providerId="ADAL" clId="{976AD799-FE43-55CA-A221-11B5AB66B93B}" dt="2026-10-26T14:06:39.283" v="242" actId="478"/>
+          <ac:cxnSpMkLst>
+            <pc:docMk/>
+            <pc:sldMk cId="818822214" sldId="258"/>
+            <ac:cxnSpMk id="58" creationId="{83B53E58-FA90-943D-D75F-C4C2A31E46DF}"/>
+          </ac:cxnSpMkLst>
+        </pc:cxnChg>
+        <pc:cxnChg chg="mod">
+          <ac:chgData name="Hemma Philamore" userId="db50e2f3-17b2-4cc0-b719-fb6254d3e9df" providerId="ADAL" clId="{976AD799-FE43-55CA-A221-11B5AB66B93B}" dt="2026-10-26T14:06:39.283" v="242" actId="478"/>
+          <ac:cxnSpMkLst>
+            <pc:docMk/>
+            <pc:sldMk cId="818822214" sldId="258"/>
+            <ac:cxnSpMk id="59" creationId="{8F8A3805-842B-0310-37D7-D619880257CE}"/>
+          </ac:cxnSpMkLst>
+        </pc:cxnChg>
+        <pc:cxnChg chg="mod">
+          <ac:chgData name="Hemma Philamore" userId="db50e2f3-17b2-4cc0-b719-fb6254d3e9df" providerId="ADAL" clId="{976AD799-FE43-55CA-A221-11B5AB66B93B}" dt="2026-10-26T14:06:39.283" v="242" actId="478"/>
+          <ac:cxnSpMkLst>
+            <pc:docMk/>
+            <pc:sldMk cId="818822214" sldId="258"/>
+            <ac:cxnSpMk id="60" creationId="{919E8544-4C7E-6947-C932-92AAFD3D8385}"/>
+          </ac:cxnSpMkLst>
+        </pc:cxnChg>
+        <pc:cxnChg chg="mod">
+          <ac:chgData name="Hemma Philamore" userId="db50e2f3-17b2-4cc0-b719-fb6254d3e9df" providerId="ADAL" clId="{976AD799-FE43-55CA-A221-11B5AB66B93B}" dt="2026-10-26T14:06:39.283" v="242" actId="478"/>
+          <ac:cxnSpMkLst>
+            <pc:docMk/>
+            <pc:sldMk cId="818822214" sldId="258"/>
+            <ac:cxnSpMk id="61" creationId="{4315371E-7668-80B7-6984-5D28C9F7BAAF}"/>
+          </ac:cxnSpMkLst>
+        </pc:cxnChg>
+        <pc:cxnChg chg="mod">
+          <ac:chgData name="Hemma Philamore" userId="db50e2f3-17b2-4cc0-b719-fb6254d3e9df" providerId="ADAL" clId="{976AD799-FE43-55CA-A221-11B5AB66B93B}" dt="2026-10-26T14:06:39.283" v="242" actId="478"/>
+          <ac:cxnSpMkLst>
+            <pc:docMk/>
+            <pc:sldMk cId="818822214" sldId="258"/>
+            <ac:cxnSpMk id="62" creationId="{8B948E47-C221-9FC6-41DF-4BD7D802D186}"/>
+          </ac:cxnSpMkLst>
+        </pc:cxnChg>
+        <pc:cxnChg chg="mod">
+          <ac:chgData name="Hemma Philamore" userId="db50e2f3-17b2-4cc0-b719-fb6254d3e9df" providerId="ADAL" clId="{976AD799-FE43-55CA-A221-11B5AB66B93B}" dt="2026-10-26T14:06:39.283" v="242" actId="478"/>
+          <ac:cxnSpMkLst>
+            <pc:docMk/>
+            <pc:sldMk cId="818822214" sldId="258"/>
+            <ac:cxnSpMk id="63" creationId="{88320384-CDE6-5221-6319-04A6E859481C}"/>
+          </ac:cxnSpMkLst>
+        </pc:cxnChg>
+        <pc:cxnChg chg="mod">
+          <ac:chgData name="Hemma Philamore" userId="db50e2f3-17b2-4cc0-b719-fb6254d3e9df" providerId="ADAL" clId="{976AD799-FE43-55CA-A221-11B5AB66B93B}" dt="2026-10-26T14:06:39.283" v="242" actId="478"/>
+          <ac:cxnSpMkLst>
+            <pc:docMk/>
+            <pc:sldMk cId="818822214" sldId="258"/>
+            <ac:cxnSpMk id="64" creationId="{CF0341AF-EC0B-683E-488D-A03B26CCA69D}"/>
+          </ac:cxnSpMkLst>
+        </pc:cxnChg>
+        <pc:cxnChg chg="add mod">
+          <ac:chgData name="Hemma Philamore" userId="db50e2f3-17b2-4cc0-b719-fb6254d3e9df" providerId="ADAL" clId="{976AD799-FE43-55CA-A221-11B5AB66B93B}" dt="2026-10-26T14:08:37.504" v="270" actId="692"/>
+          <ac:cxnSpMkLst>
+            <pc:docMk/>
+            <pc:sldMk cId="818822214" sldId="258"/>
+            <ac:cxnSpMk id="84" creationId="{8953C5E0-1352-304F-E5A4-6E2A0B075BD6}"/>
+          </ac:cxnSpMkLst>
+        </pc:cxnChg>
+        <pc:cxnChg chg="mod topLvl">
+          <ac:chgData name="Hemma Philamore" userId="db50e2f3-17b2-4cc0-b719-fb6254d3e9df" providerId="ADAL" clId="{976AD799-FE43-55CA-A221-11B5AB66B93B}" dt="2026-10-26T14:12:10.632" v="329" actId="14100"/>
+          <ac:cxnSpMkLst>
+            <pc:docMk/>
+            <pc:sldMk cId="818822214" sldId="258"/>
+            <ac:cxnSpMk id="114" creationId="{A773C88E-CD7F-B8F3-11DA-2E159491D435}"/>
+          </ac:cxnSpMkLst>
+        </pc:cxnChg>
+        <pc:cxnChg chg="mod topLvl">
+          <ac:chgData name="Hemma Philamore" userId="db50e2f3-17b2-4cc0-b719-fb6254d3e9df" providerId="ADAL" clId="{976AD799-FE43-55CA-A221-11B5AB66B93B}" dt="2026-10-26T14:12:05.777" v="328" actId="14100"/>
+          <ac:cxnSpMkLst>
+            <pc:docMk/>
+            <pc:sldMk cId="818822214" sldId="258"/>
+            <ac:cxnSpMk id="115" creationId="{229B8435-9CC1-145D-9CB1-AFEE2646401D}"/>
+          </ac:cxnSpMkLst>
+        </pc:cxnChg>
+        <pc:cxnChg chg="mod topLvl">
+          <ac:chgData name="Hemma Philamore" userId="db50e2f3-17b2-4cc0-b719-fb6254d3e9df" providerId="ADAL" clId="{976AD799-FE43-55CA-A221-11B5AB66B93B}" dt="2026-10-26T14:12:05.777" v="328" actId="14100"/>
+          <ac:cxnSpMkLst>
+            <pc:docMk/>
+            <pc:sldMk cId="818822214" sldId="258"/>
+            <ac:cxnSpMk id="116" creationId="{E198A755-DB47-96A1-1380-08FB2A234AA0}"/>
+          </ac:cxnSpMkLst>
+        </pc:cxnChg>
+        <pc:cxnChg chg="mod">
+          <ac:chgData name="Hemma Philamore" userId="db50e2f3-17b2-4cc0-b719-fb6254d3e9df" providerId="ADAL" clId="{976AD799-FE43-55CA-A221-11B5AB66B93B}" dt="2026-10-26T14:15:22.353" v="345" actId="208"/>
+          <ac:cxnSpMkLst>
+            <pc:docMk/>
+            <pc:sldMk cId="818822214" sldId="258"/>
+            <ac:cxnSpMk id="131" creationId="{698A2297-D560-157C-5E72-B14519BA8839}"/>
           </ac:cxnSpMkLst>
         </pc:cxnChg>
       </pc:sldChg>
@@ -5961,6 +6681,3061 @@
 </p:sld>
 </file>
 
+<file path=ppt/slides/slide3.xml><?xml version="1.0" encoding="utf-8"?>
+<p:sld xmlns:a="http://schemas.openxmlformats.org/drawingml/2006/main" xmlns:r="http://schemas.openxmlformats.org/officeDocument/2006/relationships" xmlns:p="http://schemas.openxmlformats.org/presentationml/2006/main">
+  <p:cSld>
+    <p:spTree>
+      <p:nvGrpSpPr>
+        <p:cNvPr id="1" name="">
+          <a:extLst>
+            <a:ext uri="{FF2B5EF4-FFF2-40B4-BE49-F238E27FC236}">
+              <a16:creationId xmlns:a16="http://schemas.microsoft.com/office/drawing/2014/main" id="{A54A6373-43CB-1300-2270-EA23ACB81961}"/>
+            </a:ext>
+          </a:extLst>
+        </p:cNvPr>
+        <p:cNvGrpSpPr/>
+        <p:nvPr/>
+      </p:nvGrpSpPr>
+      <p:grpSpPr>
+        <a:xfrm>
+          <a:off x="0" y="0"/>
+          <a:ext cx="0" cy="0"/>
+          <a:chOff x="0" y="0"/>
+          <a:chExt cx="0" cy="0"/>
+        </a:xfrm>
+      </p:grpSpPr>
+      <p:grpSp>
+        <p:nvGrpSpPr>
+          <p:cNvPr id="160" name="Group 159">
+            <a:extLst>
+              <a:ext uri="{FF2B5EF4-FFF2-40B4-BE49-F238E27FC236}">
+                <a16:creationId xmlns:a16="http://schemas.microsoft.com/office/drawing/2014/main" id="{4D364052-1EEB-5527-BCED-6D322E3256DD}"/>
+              </a:ext>
+            </a:extLst>
+          </p:cNvPr>
+          <p:cNvGrpSpPr/>
+          <p:nvPr/>
+        </p:nvGrpSpPr>
+        <p:grpSpPr>
+          <a:xfrm>
+            <a:off x="340654" y="1547037"/>
+            <a:ext cx="5566118" cy="5061909"/>
+            <a:chOff x="340654" y="1547037"/>
+            <a:chExt cx="5566118" cy="5061909"/>
+          </a:xfrm>
+        </p:grpSpPr>
+        <p:sp>
+          <p:nvSpPr>
+            <p:cNvPr id="2" name="Oval 1">
+              <a:extLst>
+                <a:ext uri="{FF2B5EF4-FFF2-40B4-BE49-F238E27FC236}">
+                  <a16:creationId xmlns:a16="http://schemas.microsoft.com/office/drawing/2014/main" id="{1166DCA7-BE25-075C-C4EB-C3A91B2B4558}"/>
+                </a:ext>
+              </a:extLst>
+            </p:cNvPr>
+            <p:cNvSpPr/>
+            <p:nvPr/>
+          </p:nvSpPr>
+          <p:spPr>
+            <a:xfrm>
+              <a:off x="2329249" y="1547037"/>
+              <a:ext cx="900000" cy="900000"/>
+            </a:xfrm>
+            <a:prstGeom prst="ellipse">
+              <a:avLst/>
+            </a:prstGeom>
+            <a:noFill/>
+            <a:ln w="38100"/>
+          </p:spPr>
+          <p:style>
+            <a:lnRef idx="2">
+              <a:schemeClr val="accent1">
+                <a:shade val="15000"/>
+              </a:schemeClr>
+            </a:lnRef>
+            <a:fillRef idx="1">
+              <a:schemeClr val="accent1"/>
+            </a:fillRef>
+            <a:effectRef idx="0">
+              <a:schemeClr val="accent1"/>
+            </a:effectRef>
+            <a:fontRef idx="minor">
+              <a:schemeClr val="lt1"/>
+            </a:fontRef>
+          </p:style>
+          <p:txBody>
+            <a:bodyPr rtlCol="0" anchor="ctr"/>
+            <a:lstStyle/>
+            <a:p>
+              <a:pPr algn="ctr"/>
+              <a:endParaRPr lang="en-US"/>
+            </a:p>
+          </p:txBody>
+        </p:sp>
+        <p:sp>
+          <p:nvSpPr>
+            <p:cNvPr id="12" name="Oval 11">
+              <a:extLst>
+                <a:ext uri="{FF2B5EF4-FFF2-40B4-BE49-F238E27FC236}">
+                  <a16:creationId xmlns:a16="http://schemas.microsoft.com/office/drawing/2014/main" id="{4D0FB3C7-9C73-BC39-5690-7EFF4A2894AF}"/>
+                </a:ext>
+              </a:extLst>
+            </p:cNvPr>
+            <p:cNvSpPr/>
+            <p:nvPr/>
+          </p:nvSpPr>
+          <p:spPr>
+            <a:xfrm>
+              <a:off x="4813979" y="2149152"/>
+              <a:ext cx="900000" cy="900000"/>
+            </a:xfrm>
+            <a:prstGeom prst="ellipse">
+              <a:avLst/>
+            </a:prstGeom>
+            <a:noFill/>
+            <a:ln w="38100"/>
+          </p:spPr>
+          <p:style>
+            <a:lnRef idx="2">
+              <a:schemeClr val="accent1">
+                <a:shade val="15000"/>
+              </a:schemeClr>
+            </a:lnRef>
+            <a:fillRef idx="1">
+              <a:schemeClr val="accent1"/>
+            </a:fillRef>
+            <a:effectRef idx="0">
+              <a:schemeClr val="accent1"/>
+            </a:effectRef>
+            <a:fontRef idx="minor">
+              <a:schemeClr val="lt1"/>
+            </a:fontRef>
+          </p:style>
+          <p:txBody>
+            <a:bodyPr rtlCol="0" anchor="ctr"/>
+            <a:lstStyle/>
+            <a:p>
+              <a:pPr algn="ctr"/>
+              <a:endParaRPr lang="en-US"/>
+            </a:p>
+          </p:txBody>
+        </p:sp>
+        <p:sp>
+          <p:nvSpPr>
+            <p:cNvPr id="15" name="Oval 14">
+              <a:extLst>
+                <a:ext uri="{FF2B5EF4-FFF2-40B4-BE49-F238E27FC236}">
+                  <a16:creationId xmlns:a16="http://schemas.microsoft.com/office/drawing/2014/main" id="{075391DC-F7E3-F41D-1365-DF93FA2D0B76}"/>
+                </a:ext>
+              </a:extLst>
+            </p:cNvPr>
+            <p:cNvSpPr/>
+            <p:nvPr/>
+          </p:nvSpPr>
+          <p:spPr>
+            <a:xfrm>
+              <a:off x="3008871" y="2856584"/>
+              <a:ext cx="900000" cy="900000"/>
+            </a:xfrm>
+            <a:prstGeom prst="ellipse">
+              <a:avLst/>
+            </a:prstGeom>
+            <a:noFill/>
+            <a:ln w="38100"/>
+          </p:spPr>
+          <p:style>
+            <a:lnRef idx="2">
+              <a:schemeClr val="accent1">
+                <a:shade val="15000"/>
+              </a:schemeClr>
+            </a:lnRef>
+            <a:fillRef idx="1">
+              <a:schemeClr val="accent1"/>
+            </a:fillRef>
+            <a:effectRef idx="0">
+              <a:schemeClr val="accent1"/>
+            </a:effectRef>
+            <a:fontRef idx="minor">
+              <a:schemeClr val="lt1"/>
+            </a:fontRef>
+          </p:style>
+          <p:txBody>
+            <a:bodyPr rtlCol="0" anchor="ctr"/>
+            <a:lstStyle/>
+            <a:p>
+              <a:pPr algn="ctr"/>
+              <a:endParaRPr lang="en-US"/>
+            </a:p>
+          </p:txBody>
+        </p:sp>
+        <p:sp>
+          <p:nvSpPr>
+            <p:cNvPr id="18" name="Oval 17">
+              <a:extLst>
+                <a:ext uri="{FF2B5EF4-FFF2-40B4-BE49-F238E27FC236}">
+                  <a16:creationId xmlns:a16="http://schemas.microsoft.com/office/drawing/2014/main" id="{FB009A0A-1C4C-CCAF-7B85-986E3BB01521}"/>
+                </a:ext>
+              </a:extLst>
+            </p:cNvPr>
+            <p:cNvSpPr/>
+            <p:nvPr/>
+          </p:nvSpPr>
+          <p:spPr>
+            <a:xfrm>
+              <a:off x="2420871" y="4410963"/>
+              <a:ext cx="900000" cy="900000"/>
+            </a:xfrm>
+            <a:prstGeom prst="ellipse">
+              <a:avLst/>
+            </a:prstGeom>
+            <a:noFill/>
+            <a:ln w="38100"/>
+          </p:spPr>
+          <p:style>
+            <a:lnRef idx="2">
+              <a:schemeClr val="accent1">
+                <a:shade val="15000"/>
+              </a:schemeClr>
+            </a:lnRef>
+            <a:fillRef idx="1">
+              <a:schemeClr val="accent1"/>
+            </a:fillRef>
+            <a:effectRef idx="0">
+              <a:schemeClr val="accent1"/>
+            </a:effectRef>
+            <a:fontRef idx="minor">
+              <a:schemeClr val="lt1"/>
+            </a:fontRef>
+          </p:style>
+          <p:txBody>
+            <a:bodyPr rtlCol="0" anchor="ctr"/>
+            <a:lstStyle/>
+            <a:p>
+              <a:pPr algn="ctr"/>
+              <a:endParaRPr lang="en-US"/>
+            </a:p>
+          </p:txBody>
+        </p:sp>
+        <p:sp>
+          <p:nvSpPr>
+            <p:cNvPr id="21" name="Oval 20">
+              <a:extLst>
+                <a:ext uri="{FF2B5EF4-FFF2-40B4-BE49-F238E27FC236}">
+                  <a16:creationId xmlns:a16="http://schemas.microsoft.com/office/drawing/2014/main" id="{62B9B986-9CBD-1052-25FD-39E6133B2A70}"/>
+                </a:ext>
+              </a:extLst>
+            </p:cNvPr>
+            <p:cNvSpPr/>
+            <p:nvPr/>
+          </p:nvSpPr>
+          <p:spPr>
+            <a:xfrm>
+              <a:off x="389238" y="3112980"/>
+              <a:ext cx="900000" cy="900000"/>
+            </a:xfrm>
+            <a:prstGeom prst="ellipse">
+              <a:avLst/>
+            </a:prstGeom>
+            <a:noFill/>
+            <a:ln w="38100"/>
+          </p:spPr>
+          <p:style>
+            <a:lnRef idx="2">
+              <a:schemeClr val="accent1">
+                <a:shade val="15000"/>
+              </a:schemeClr>
+            </a:lnRef>
+            <a:fillRef idx="1">
+              <a:schemeClr val="accent1"/>
+            </a:fillRef>
+            <a:effectRef idx="0">
+              <a:schemeClr val="accent1"/>
+            </a:effectRef>
+            <a:fontRef idx="minor">
+              <a:schemeClr val="lt1"/>
+            </a:fontRef>
+          </p:style>
+          <p:txBody>
+            <a:bodyPr rtlCol="0" anchor="ctr"/>
+            <a:lstStyle/>
+            <a:p>
+              <a:pPr algn="ctr"/>
+              <a:endParaRPr lang="en-US"/>
+            </a:p>
+          </p:txBody>
+        </p:sp>
+        <p:cxnSp>
+          <p:nvCxnSpPr>
+            <p:cNvPr id="26" name="Straight Connector 25">
+              <a:extLst>
+                <a:ext uri="{FF2B5EF4-FFF2-40B4-BE49-F238E27FC236}">
+                  <a16:creationId xmlns:a16="http://schemas.microsoft.com/office/drawing/2014/main" id="{9D4AD028-B45C-7240-B848-03DD6DFFDD15}"/>
+                </a:ext>
+              </a:extLst>
+            </p:cNvPr>
+            <p:cNvCxnSpPr>
+              <a:cxnSpLocks/>
+              <a:stCxn id="2" idx="4"/>
+              <a:endCxn id="15" idx="1"/>
+            </p:cNvCxnSpPr>
+            <p:nvPr/>
+          </p:nvCxnSpPr>
+          <p:spPr>
+            <a:xfrm>
+              <a:off x="2779249" y="2447037"/>
+              <a:ext cx="361424" cy="541349"/>
+            </a:xfrm>
+            <a:prstGeom prst="line">
+              <a:avLst/>
+            </a:prstGeom>
+            <a:ln w="31750">
+              <a:solidFill>
+                <a:schemeClr val="tx1"/>
+              </a:solidFill>
+            </a:ln>
+          </p:spPr>
+          <p:style>
+            <a:lnRef idx="2">
+              <a:schemeClr val="accent1"/>
+            </a:lnRef>
+            <a:fillRef idx="0">
+              <a:schemeClr val="accent1"/>
+            </a:fillRef>
+            <a:effectRef idx="1">
+              <a:schemeClr val="accent1"/>
+            </a:effectRef>
+            <a:fontRef idx="minor">
+              <a:schemeClr val="tx1"/>
+            </a:fontRef>
+          </p:style>
+        </p:cxnSp>
+        <p:cxnSp>
+          <p:nvCxnSpPr>
+            <p:cNvPr id="29" name="Straight Connector 28">
+              <a:extLst>
+                <a:ext uri="{FF2B5EF4-FFF2-40B4-BE49-F238E27FC236}">
+                  <a16:creationId xmlns:a16="http://schemas.microsoft.com/office/drawing/2014/main" id="{B17E67DB-911F-85A9-47F9-376C6FC16C8F}"/>
+                </a:ext>
+              </a:extLst>
+            </p:cNvPr>
+            <p:cNvCxnSpPr>
+              <a:stCxn id="2" idx="3"/>
+              <a:endCxn id="21" idx="7"/>
+            </p:cNvCxnSpPr>
+            <p:nvPr/>
+          </p:nvCxnSpPr>
+          <p:spPr>
+            <a:xfrm flipH="1">
+              <a:off x="1157436" y="2315235"/>
+              <a:ext cx="1303615" cy="929547"/>
+            </a:xfrm>
+            <a:prstGeom prst="line">
+              <a:avLst/>
+            </a:prstGeom>
+            <a:ln w="31750">
+              <a:solidFill>
+                <a:schemeClr val="tx1"/>
+              </a:solidFill>
+            </a:ln>
+          </p:spPr>
+          <p:style>
+            <a:lnRef idx="2">
+              <a:schemeClr val="accent1"/>
+            </a:lnRef>
+            <a:fillRef idx="0">
+              <a:schemeClr val="accent1"/>
+            </a:fillRef>
+            <a:effectRef idx="1">
+              <a:schemeClr val="accent1"/>
+            </a:effectRef>
+            <a:fontRef idx="minor">
+              <a:schemeClr val="tx1"/>
+            </a:fontRef>
+          </p:style>
+        </p:cxnSp>
+        <p:cxnSp>
+          <p:nvCxnSpPr>
+            <p:cNvPr id="31" name="Straight Connector 30">
+              <a:extLst>
+                <a:ext uri="{FF2B5EF4-FFF2-40B4-BE49-F238E27FC236}">
+                  <a16:creationId xmlns:a16="http://schemas.microsoft.com/office/drawing/2014/main" id="{8E023F93-997F-509B-29E8-B21353E65C5D}"/>
+                </a:ext>
+              </a:extLst>
+            </p:cNvPr>
+            <p:cNvCxnSpPr>
+              <a:stCxn id="21" idx="5"/>
+              <a:endCxn id="18" idx="2"/>
+            </p:cNvCxnSpPr>
+            <p:nvPr/>
+          </p:nvCxnSpPr>
+          <p:spPr>
+            <a:xfrm>
+              <a:off x="1157436" y="3881178"/>
+              <a:ext cx="1263435" cy="979785"/>
+            </a:xfrm>
+            <a:prstGeom prst="line">
+              <a:avLst/>
+            </a:prstGeom>
+            <a:ln w="31750">
+              <a:solidFill>
+                <a:schemeClr val="tx1"/>
+              </a:solidFill>
+            </a:ln>
+          </p:spPr>
+          <p:style>
+            <a:lnRef idx="2">
+              <a:schemeClr val="accent1"/>
+            </a:lnRef>
+            <a:fillRef idx="0">
+              <a:schemeClr val="accent1"/>
+            </a:fillRef>
+            <a:effectRef idx="1">
+              <a:schemeClr val="accent1"/>
+            </a:effectRef>
+            <a:fontRef idx="minor">
+              <a:schemeClr val="tx1"/>
+            </a:fontRef>
+          </p:style>
+        </p:cxnSp>
+        <p:cxnSp>
+          <p:nvCxnSpPr>
+            <p:cNvPr id="33" name="Straight Connector 32">
+              <a:extLst>
+                <a:ext uri="{FF2B5EF4-FFF2-40B4-BE49-F238E27FC236}">
+                  <a16:creationId xmlns:a16="http://schemas.microsoft.com/office/drawing/2014/main" id="{BD031B61-CDE5-F452-54EF-DA12162E65B1}"/>
+                </a:ext>
+              </a:extLst>
+            </p:cNvPr>
+            <p:cNvCxnSpPr>
+              <a:stCxn id="21" idx="6"/>
+              <a:endCxn id="15" idx="2"/>
+            </p:cNvCxnSpPr>
+            <p:nvPr/>
+          </p:nvCxnSpPr>
+          <p:spPr>
+            <a:xfrm flipV="1">
+              <a:off x="1289238" y="3306584"/>
+              <a:ext cx="1719633" cy="256396"/>
+            </a:xfrm>
+            <a:prstGeom prst="line">
+              <a:avLst/>
+            </a:prstGeom>
+            <a:ln w="31750">
+              <a:solidFill>
+                <a:schemeClr val="tx1"/>
+              </a:solidFill>
+            </a:ln>
+          </p:spPr>
+          <p:style>
+            <a:lnRef idx="2">
+              <a:schemeClr val="accent1"/>
+            </a:lnRef>
+            <a:fillRef idx="0">
+              <a:schemeClr val="accent1"/>
+            </a:fillRef>
+            <a:effectRef idx="1">
+              <a:schemeClr val="accent1"/>
+            </a:effectRef>
+            <a:fontRef idx="minor">
+              <a:schemeClr val="tx1"/>
+            </a:fontRef>
+          </p:style>
+        </p:cxnSp>
+        <p:cxnSp>
+          <p:nvCxnSpPr>
+            <p:cNvPr id="35" name="Straight Connector 34">
+              <a:extLst>
+                <a:ext uri="{FF2B5EF4-FFF2-40B4-BE49-F238E27FC236}">
+                  <a16:creationId xmlns:a16="http://schemas.microsoft.com/office/drawing/2014/main" id="{B627860C-C4B1-734D-6D60-BF1D0F266A27}"/>
+                </a:ext>
+              </a:extLst>
+            </p:cNvPr>
+            <p:cNvCxnSpPr>
+              <a:stCxn id="18" idx="7"/>
+              <a:endCxn id="15" idx="4"/>
+            </p:cNvCxnSpPr>
+            <p:nvPr/>
+          </p:nvCxnSpPr>
+          <p:spPr>
+            <a:xfrm flipV="1">
+              <a:off x="3189069" y="3756584"/>
+              <a:ext cx="269802" cy="786181"/>
+            </a:xfrm>
+            <a:prstGeom prst="line">
+              <a:avLst/>
+            </a:prstGeom>
+            <a:ln w="31750">
+              <a:solidFill>
+                <a:schemeClr val="tx1"/>
+              </a:solidFill>
+            </a:ln>
+          </p:spPr>
+          <p:style>
+            <a:lnRef idx="2">
+              <a:schemeClr val="accent1"/>
+            </a:lnRef>
+            <a:fillRef idx="0">
+              <a:schemeClr val="accent1"/>
+            </a:fillRef>
+            <a:effectRef idx="1">
+              <a:schemeClr val="accent1"/>
+            </a:effectRef>
+            <a:fontRef idx="minor">
+              <a:schemeClr val="tx1"/>
+            </a:fontRef>
+          </p:style>
+        </p:cxnSp>
+        <p:cxnSp>
+          <p:nvCxnSpPr>
+            <p:cNvPr id="37" name="Straight Connector 36">
+              <a:extLst>
+                <a:ext uri="{FF2B5EF4-FFF2-40B4-BE49-F238E27FC236}">
+                  <a16:creationId xmlns:a16="http://schemas.microsoft.com/office/drawing/2014/main" id="{269DBA2F-D07A-05F2-1FDD-BF5026FBF626}"/>
+                </a:ext>
+              </a:extLst>
+            </p:cNvPr>
+            <p:cNvCxnSpPr>
+              <a:stCxn id="2" idx="6"/>
+              <a:endCxn id="12" idx="2"/>
+            </p:cNvCxnSpPr>
+            <p:nvPr/>
+          </p:nvCxnSpPr>
+          <p:spPr>
+            <a:xfrm>
+              <a:off x="3229249" y="1997037"/>
+              <a:ext cx="1584730" cy="602115"/>
+            </a:xfrm>
+            <a:prstGeom prst="line">
+              <a:avLst/>
+            </a:prstGeom>
+            <a:ln w="31750">
+              <a:solidFill>
+                <a:schemeClr val="tx1"/>
+              </a:solidFill>
+            </a:ln>
+          </p:spPr>
+          <p:style>
+            <a:lnRef idx="2">
+              <a:schemeClr val="accent1"/>
+            </a:lnRef>
+            <a:fillRef idx="0">
+              <a:schemeClr val="accent1"/>
+            </a:fillRef>
+            <a:effectRef idx="1">
+              <a:schemeClr val="accent1"/>
+            </a:effectRef>
+            <a:fontRef idx="minor">
+              <a:schemeClr val="tx1"/>
+            </a:fontRef>
+          </p:style>
+        </p:cxnSp>
+        <p:cxnSp>
+          <p:nvCxnSpPr>
+            <p:cNvPr id="39" name="Straight Connector 38">
+              <a:extLst>
+                <a:ext uri="{FF2B5EF4-FFF2-40B4-BE49-F238E27FC236}">
+                  <a16:creationId xmlns:a16="http://schemas.microsoft.com/office/drawing/2014/main" id="{21786D18-D8D7-BB75-8A0B-4D00C6F21888}"/>
+                </a:ext>
+              </a:extLst>
+            </p:cNvPr>
+            <p:cNvCxnSpPr>
+              <a:stCxn id="15" idx="6"/>
+              <a:endCxn id="12" idx="3"/>
+            </p:cNvCxnSpPr>
+            <p:nvPr/>
+          </p:nvCxnSpPr>
+          <p:spPr>
+            <a:xfrm flipV="1">
+              <a:off x="3908871" y="2917350"/>
+              <a:ext cx="1036910" cy="389234"/>
+            </a:xfrm>
+            <a:prstGeom prst="line">
+              <a:avLst/>
+            </a:prstGeom>
+            <a:ln w="31750">
+              <a:solidFill>
+                <a:schemeClr val="tx1"/>
+              </a:solidFill>
+            </a:ln>
+          </p:spPr>
+          <p:style>
+            <a:lnRef idx="2">
+              <a:schemeClr val="accent1"/>
+            </a:lnRef>
+            <a:fillRef idx="0">
+              <a:schemeClr val="accent1"/>
+            </a:fillRef>
+            <a:effectRef idx="1">
+              <a:schemeClr val="accent1"/>
+            </a:effectRef>
+            <a:fontRef idx="minor">
+              <a:schemeClr val="tx1"/>
+            </a:fontRef>
+          </p:style>
+        </p:cxnSp>
+        <p:cxnSp>
+          <p:nvCxnSpPr>
+            <p:cNvPr id="41" name="Straight Connector 40">
+              <a:extLst>
+                <a:ext uri="{FF2B5EF4-FFF2-40B4-BE49-F238E27FC236}">
+                  <a16:creationId xmlns:a16="http://schemas.microsoft.com/office/drawing/2014/main" id="{DFF6FED4-331C-D24F-28E0-687D757C026E}"/>
+                </a:ext>
+              </a:extLst>
+            </p:cNvPr>
+            <p:cNvCxnSpPr>
+              <a:stCxn id="18" idx="6"/>
+              <a:endCxn id="12" idx="4"/>
+            </p:cNvCxnSpPr>
+            <p:nvPr/>
+          </p:nvCxnSpPr>
+          <p:spPr>
+            <a:xfrm flipV="1">
+              <a:off x="3320871" y="3049152"/>
+              <a:ext cx="1943108" cy="1811811"/>
+            </a:xfrm>
+            <a:prstGeom prst="line">
+              <a:avLst/>
+            </a:prstGeom>
+            <a:ln w="31750">
+              <a:solidFill>
+                <a:schemeClr val="tx1"/>
+              </a:solidFill>
+            </a:ln>
+          </p:spPr>
+          <p:style>
+            <a:lnRef idx="2">
+              <a:schemeClr val="accent1"/>
+            </a:lnRef>
+            <a:fillRef idx="0">
+              <a:schemeClr val="accent1"/>
+            </a:fillRef>
+            <a:effectRef idx="1">
+              <a:schemeClr val="accent1"/>
+            </a:effectRef>
+            <a:fontRef idx="minor">
+              <a:schemeClr val="tx1"/>
+            </a:fontRef>
+          </p:style>
+        </p:cxnSp>
+        <p:sp>
+          <p:nvSpPr>
+            <p:cNvPr id="42" name="TextBox 41">
+              <a:extLst>
+                <a:ext uri="{FF2B5EF4-FFF2-40B4-BE49-F238E27FC236}">
+                  <a16:creationId xmlns:a16="http://schemas.microsoft.com/office/drawing/2014/main" id="{DF004EF6-E142-1614-EE3B-1100C1965C40}"/>
+                </a:ext>
+              </a:extLst>
+            </p:cNvPr>
+            <p:cNvSpPr txBox="1"/>
+            <p:nvPr/>
+          </p:nvSpPr>
+          <p:spPr>
+            <a:xfrm>
+              <a:off x="1236698" y="2373652"/>
+              <a:ext cx="654908" cy="461665"/>
+            </a:xfrm>
+            <a:prstGeom prst="rect">
+              <a:avLst/>
+            </a:prstGeom>
+            <a:noFill/>
+          </p:spPr>
+          <p:txBody>
+            <a:bodyPr wrap="square" rtlCol="0">
+              <a:spAutoFit/>
+            </a:bodyPr>
+            <a:lstStyle/>
+            <a:p>
+              <a:pPr algn="ctr"/>
+              <a:r>
+                <a:rPr lang="en-US" sz="2400" dirty="0"/>
+                <a:t>12</a:t>
+              </a:r>
+            </a:p>
+          </p:txBody>
+        </p:sp>
+        <p:sp>
+          <p:nvSpPr>
+            <p:cNvPr id="43" name="TextBox 42">
+              <a:extLst>
+                <a:ext uri="{FF2B5EF4-FFF2-40B4-BE49-F238E27FC236}">
+                  <a16:creationId xmlns:a16="http://schemas.microsoft.com/office/drawing/2014/main" id="{4A06994E-FB0B-7B1B-7212-5CABC63777CF}"/>
+                </a:ext>
+              </a:extLst>
+            </p:cNvPr>
+            <p:cNvSpPr txBox="1"/>
+            <p:nvPr/>
+          </p:nvSpPr>
+          <p:spPr>
+            <a:xfrm>
+              <a:off x="2861615" y="2415145"/>
+              <a:ext cx="654908" cy="461665"/>
+            </a:xfrm>
+            <a:prstGeom prst="rect">
+              <a:avLst/>
+            </a:prstGeom>
+            <a:noFill/>
+          </p:spPr>
+          <p:txBody>
+            <a:bodyPr wrap="square" rtlCol="0">
+              <a:spAutoFit/>
+            </a:bodyPr>
+            <a:lstStyle/>
+            <a:p>
+              <a:pPr algn="ctr"/>
+              <a:r>
+                <a:rPr lang="en-US" sz="2400" dirty="0"/>
+                <a:t>8</a:t>
+              </a:r>
+            </a:p>
+          </p:txBody>
+        </p:sp>
+        <p:sp>
+          <p:nvSpPr>
+            <p:cNvPr id="44" name="TextBox 43">
+              <a:extLst>
+                <a:ext uri="{FF2B5EF4-FFF2-40B4-BE49-F238E27FC236}">
+                  <a16:creationId xmlns:a16="http://schemas.microsoft.com/office/drawing/2014/main" id="{1426A36C-9368-D130-7B58-77E95C4566DD}"/>
+                </a:ext>
+              </a:extLst>
+            </p:cNvPr>
+            <p:cNvSpPr txBox="1"/>
+            <p:nvPr/>
+          </p:nvSpPr>
+          <p:spPr>
+            <a:xfrm>
+              <a:off x="2751426" y="3852691"/>
+              <a:ext cx="654908" cy="461665"/>
+            </a:xfrm>
+            <a:prstGeom prst="rect">
+              <a:avLst/>
+            </a:prstGeom>
+            <a:noFill/>
+          </p:spPr>
+          <p:txBody>
+            <a:bodyPr wrap="square" rtlCol="0">
+              <a:spAutoFit/>
+            </a:bodyPr>
+            <a:lstStyle/>
+            <a:p>
+              <a:pPr algn="ctr"/>
+              <a:r>
+                <a:rPr lang="en-US" sz="2400" dirty="0"/>
+                <a:t>6</a:t>
+              </a:r>
+            </a:p>
+          </p:txBody>
+        </p:sp>
+        <p:sp>
+          <p:nvSpPr>
+            <p:cNvPr id="46" name="TextBox 45">
+              <a:extLst>
+                <a:ext uri="{FF2B5EF4-FFF2-40B4-BE49-F238E27FC236}">
+                  <a16:creationId xmlns:a16="http://schemas.microsoft.com/office/drawing/2014/main" id="{FA7B7597-0100-DB49-F5FD-4C8F209EF168}"/>
+                </a:ext>
+              </a:extLst>
+            </p:cNvPr>
+            <p:cNvSpPr txBox="1"/>
+            <p:nvPr/>
+          </p:nvSpPr>
+          <p:spPr>
+            <a:xfrm>
+              <a:off x="1803589" y="2978204"/>
+              <a:ext cx="654908" cy="461665"/>
+            </a:xfrm>
+            <a:prstGeom prst="rect">
+              <a:avLst/>
+            </a:prstGeom>
+            <a:noFill/>
+          </p:spPr>
+          <p:txBody>
+            <a:bodyPr wrap="square" rtlCol="0">
+              <a:spAutoFit/>
+            </a:bodyPr>
+            <a:lstStyle/>
+            <a:p>
+              <a:pPr algn="ctr"/>
+              <a:r>
+                <a:rPr lang="en-US" sz="2400" dirty="0"/>
+                <a:t>10</a:t>
+              </a:r>
+            </a:p>
+          </p:txBody>
+        </p:sp>
+        <p:sp>
+          <p:nvSpPr>
+            <p:cNvPr id="47" name="TextBox 46">
+              <a:extLst>
+                <a:ext uri="{FF2B5EF4-FFF2-40B4-BE49-F238E27FC236}">
+                  <a16:creationId xmlns:a16="http://schemas.microsoft.com/office/drawing/2014/main" id="{985ED467-F9D2-E3D8-486F-C5B73DE24BEC}"/>
+                </a:ext>
+              </a:extLst>
+            </p:cNvPr>
+            <p:cNvSpPr txBox="1"/>
+            <p:nvPr/>
+          </p:nvSpPr>
+          <p:spPr>
+            <a:xfrm>
+              <a:off x="3793507" y="1836429"/>
+              <a:ext cx="654908" cy="461665"/>
+            </a:xfrm>
+            <a:prstGeom prst="rect">
+              <a:avLst/>
+            </a:prstGeom>
+            <a:noFill/>
+          </p:spPr>
+          <p:txBody>
+            <a:bodyPr wrap="square" rtlCol="0">
+              <a:spAutoFit/>
+            </a:bodyPr>
+            <a:lstStyle/>
+            <a:p>
+              <a:pPr algn="ctr"/>
+              <a:r>
+                <a:rPr lang="en-US" sz="2400" dirty="0"/>
+                <a:t>20</a:t>
+              </a:r>
+            </a:p>
+          </p:txBody>
+        </p:sp>
+        <p:sp>
+          <p:nvSpPr>
+            <p:cNvPr id="49" name="TextBox 48">
+              <a:extLst>
+                <a:ext uri="{FF2B5EF4-FFF2-40B4-BE49-F238E27FC236}">
+                  <a16:creationId xmlns:a16="http://schemas.microsoft.com/office/drawing/2014/main" id="{2696082F-1587-CBC0-D621-0D22E15B2350}"/>
+                </a:ext>
+              </a:extLst>
+            </p:cNvPr>
+            <p:cNvSpPr txBox="1"/>
+            <p:nvPr/>
+          </p:nvSpPr>
+          <p:spPr>
+            <a:xfrm>
+              <a:off x="3976289" y="2712565"/>
+              <a:ext cx="654908" cy="461665"/>
+            </a:xfrm>
+            <a:prstGeom prst="rect">
+              <a:avLst/>
+            </a:prstGeom>
+            <a:noFill/>
+          </p:spPr>
+          <p:txBody>
+            <a:bodyPr wrap="square" rtlCol="0">
+              <a:spAutoFit/>
+            </a:bodyPr>
+            <a:lstStyle/>
+            <a:p>
+              <a:pPr algn="ctr"/>
+              <a:r>
+                <a:rPr lang="en-US" sz="2400" dirty="0"/>
+                <a:t>15</a:t>
+              </a:r>
+            </a:p>
+          </p:txBody>
+        </p:sp>
+        <p:sp>
+          <p:nvSpPr>
+            <p:cNvPr id="5" name="TextBox 4">
+              <a:extLst>
+                <a:ext uri="{FF2B5EF4-FFF2-40B4-BE49-F238E27FC236}">
+                  <a16:creationId xmlns:a16="http://schemas.microsoft.com/office/drawing/2014/main" id="{A8068F53-98F4-86A2-1022-96C32A264124}"/>
+                </a:ext>
+              </a:extLst>
+            </p:cNvPr>
+            <p:cNvSpPr txBox="1"/>
+            <p:nvPr/>
+          </p:nvSpPr>
+          <p:spPr>
+            <a:xfrm>
+              <a:off x="2405110" y="1806488"/>
+              <a:ext cx="778107" cy="369332"/>
+            </a:xfrm>
+            <a:prstGeom prst="rect">
+              <a:avLst/>
+            </a:prstGeom>
+            <a:noFill/>
+          </p:spPr>
+          <p:txBody>
+            <a:bodyPr wrap="square" rtlCol="0">
+              <a:spAutoFit/>
+            </a:bodyPr>
+            <a:lstStyle/>
+            <a:p>
+              <a:r>
+                <a:rPr lang="en-US" dirty="0"/>
+                <a:t>Alden</a:t>
+              </a:r>
+            </a:p>
+          </p:txBody>
+        </p:sp>
+        <p:sp>
+          <p:nvSpPr>
+            <p:cNvPr id="6" name="TextBox 5">
+              <a:extLst>
+                <a:ext uri="{FF2B5EF4-FFF2-40B4-BE49-F238E27FC236}">
+                  <a16:creationId xmlns:a16="http://schemas.microsoft.com/office/drawing/2014/main" id="{8E0F47BF-4885-964F-0D60-B4639C8A9BE6}"/>
+                </a:ext>
+              </a:extLst>
+            </p:cNvPr>
+            <p:cNvSpPr txBox="1"/>
+            <p:nvPr/>
+          </p:nvSpPr>
+          <p:spPr>
+            <a:xfrm>
+              <a:off x="4791118" y="2414486"/>
+              <a:ext cx="1115654" cy="369332"/>
+            </a:xfrm>
+            <a:prstGeom prst="rect">
+              <a:avLst/>
+            </a:prstGeom>
+            <a:noFill/>
+          </p:spPr>
+          <p:txBody>
+            <a:bodyPr wrap="square" rtlCol="0">
+              <a:spAutoFit/>
+            </a:bodyPr>
+            <a:lstStyle/>
+            <a:p>
+              <a:r>
+                <a:rPr lang="en-US" dirty="0" err="1"/>
+                <a:t>Brinford</a:t>
+              </a:r>
+              <a:endParaRPr lang="en-US" dirty="0"/>
+            </a:p>
+          </p:txBody>
+        </p:sp>
+        <p:sp>
+          <p:nvSpPr>
+            <p:cNvPr id="7" name="TextBox 6">
+              <a:extLst>
+                <a:ext uri="{FF2B5EF4-FFF2-40B4-BE49-F238E27FC236}">
+                  <a16:creationId xmlns:a16="http://schemas.microsoft.com/office/drawing/2014/main" id="{91D8E25D-1B4C-F9BC-6D09-A03B452EEF3D}"/>
+                </a:ext>
+              </a:extLst>
+            </p:cNvPr>
+            <p:cNvSpPr txBox="1"/>
+            <p:nvPr/>
+          </p:nvSpPr>
+          <p:spPr>
+            <a:xfrm>
+              <a:off x="2438398" y="4703218"/>
+              <a:ext cx="1115654" cy="369332"/>
+            </a:xfrm>
+            <a:prstGeom prst="rect">
+              <a:avLst/>
+            </a:prstGeom>
+            <a:noFill/>
+          </p:spPr>
+          <p:txBody>
+            <a:bodyPr wrap="square" rtlCol="0">
+              <a:spAutoFit/>
+            </a:bodyPr>
+            <a:lstStyle/>
+            <a:p>
+              <a:r>
+                <a:rPr lang="en-US" dirty="0"/>
+                <a:t>Caster</a:t>
+              </a:r>
+            </a:p>
+          </p:txBody>
+        </p:sp>
+        <p:sp>
+          <p:nvSpPr>
+            <p:cNvPr id="8" name="TextBox 7">
+              <a:extLst>
+                <a:ext uri="{FF2B5EF4-FFF2-40B4-BE49-F238E27FC236}">
+                  <a16:creationId xmlns:a16="http://schemas.microsoft.com/office/drawing/2014/main" id="{E0633738-F0B1-A4FD-DA17-78FA70ED5802}"/>
+                </a:ext>
+              </a:extLst>
+            </p:cNvPr>
+            <p:cNvSpPr txBox="1"/>
+            <p:nvPr/>
+          </p:nvSpPr>
+          <p:spPr>
+            <a:xfrm>
+              <a:off x="3016860" y="3152566"/>
+              <a:ext cx="1115654" cy="369332"/>
+            </a:xfrm>
+            <a:prstGeom prst="rect">
+              <a:avLst/>
+            </a:prstGeom>
+            <a:noFill/>
+          </p:spPr>
+          <p:txBody>
+            <a:bodyPr wrap="square" rtlCol="0">
+              <a:spAutoFit/>
+            </a:bodyPr>
+            <a:lstStyle/>
+            <a:p>
+              <a:r>
+                <a:rPr lang="en-US" dirty="0" err="1"/>
+                <a:t>Dunvor</a:t>
+              </a:r>
+              <a:endParaRPr lang="en-US" dirty="0"/>
+            </a:p>
+          </p:txBody>
+        </p:sp>
+        <p:sp>
+          <p:nvSpPr>
+            <p:cNvPr id="9" name="TextBox 8">
+              <a:extLst>
+                <a:ext uri="{FF2B5EF4-FFF2-40B4-BE49-F238E27FC236}">
+                  <a16:creationId xmlns:a16="http://schemas.microsoft.com/office/drawing/2014/main" id="{63FA04A2-A263-3D7E-6B3B-5A206D134AA4}"/>
+                </a:ext>
+              </a:extLst>
+            </p:cNvPr>
+            <p:cNvSpPr txBox="1"/>
+            <p:nvPr/>
+          </p:nvSpPr>
+          <p:spPr>
+            <a:xfrm>
+              <a:off x="340654" y="3365565"/>
+              <a:ext cx="1115654" cy="369332"/>
+            </a:xfrm>
+            <a:prstGeom prst="rect">
+              <a:avLst/>
+            </a:prstGeom>
+            <a:noFill/>
+          </p:spPr>
+          <p:txBody>
+            <a:bodyPr wrap="square" rtlCol="0">
+              <a:spAutoFit/>
+            </a:bodyPr>
+            <a:lstStyle/>
+            <a:p>
+              <a:r>
+                <a:rPr lang="en-US" dirty="0"/>
+                <a:t>Fenwick</a:t>
+              </a:r>
+            </a:p>
+          </p:txBody>
+        </p:sp>
+        <p:sp>
+          <p:nvSpPr>
+            <p:cNvPr id="10" name="Oval 9">
+              <a:extLst>
+                <a:ext uri="{FF2B5EF4-FFF2-40B4-BE49-F238E27FC236}">
+                  <a16:creationId xmlns:a16="http://schemas.microsoft.com/office/drawing/2014/main" id="{711322C6-5D34-34D5-158F-F28376BB0BAC}"/>
+                </a:ext>
+              </a:extLst>
+            </p:cNvPr>
+            <p:cNvSpPr/>
+            <p:nvPr/>
+          </p:nvSpPr>
+          <p:spPr>
+            <a:xfrm>
+              <a:off x="2294772" y="5708946"/>
+              <a:ext cx="900000" cy="900000"/>
+            </a:xfrm>
+            <a:prstGeom prst="ellipse">
+              <a:avLst/>
+            </a:prstGeom>
+            <a:noFill/>
+            <a:ln w="38100"/>
+          </p:spPr>
+          <p:style>
+            <a:lnRef idx="2">
+              <a:schemeClr val="accent1">
+                <a:shade val="15000"/>
+              </a:schemeClr>
+            </a:lnRef>
+            <a:fillRef idx="1">
+              <a:schemeClr val="accent1"/>
+            </a:fillRef>
+            <a:effectRef idx="0">
+              <a:schemeClr val="accent1"/>
+            </a:effectRef>
+            <a:fontRef idx="minor">
+              <a:schemeClr val="lt1"/>
+            </a:fontRef>
+          </p:style>
+          <p:txBody>
+            <a:bodyPr rtlCol="0" anchor="ctr"/>
+            <a:lstStyle/>
+            <a:p>
+              <a:pPr algn="ctr"/>
+              <a:endParaRPr lang="en-US"/>
+            </a:p>
+          </p:txBody>
+        </p:sp>
+        <p:sp>
+          <p:nvSpPr>
+            <p:cNvPr id="23" name="TextBox 22">
+              <a:extLst>
+                <a:ext uri="{FF2B5EF4-FFF2-40B4-BE49-F238E27FC236}">
+                  <a16:creationId xmlns:a16="http://schemas.microsoft.com/office/drawing/2014/main" id="{446A178C-C437-313B-ED62-CE951E3F45F1}"/>
+                </a:ext>
+              </a:extLst>
+            </p:cNvPr>
+            <p:cNvSpPr txBox="1"/>
+            <p:nvPr/>
+          </p:nvSpPr>
+          <p:spPr>
+            <a:xfrm>
+              <a:off x="2361665" y="5999514"/>
+              <a:ext cx="959206" cy="369332"/>
+            </a:xfrm>
+            <a:prstGeom prst="rect">
+              <a:avLst/>
+            </a:prstGeom>
+            <a:noFill/>
+          </p:spPr>
+          <p:txBody>
+            <a:bodyPr wrap="square" rtlCol="0">
+              <a:spAutoFit/>
+            </a:bodyPr>
+            <a:lstStyle/>
+            <a:p>
+              <a:r>
+                <a:rPr lang="en-US" dirty="0" err="1"/>
+                <a:t>Elwick</a:t>
+              </a:r>
+              <a:endParaRPr lang="en-US" dirty="0"/>
+            </a:p>
+          </p:txBody>
+        </p:sp>
+        <p:cxnSp>
+          <p:nvCxnSpPr>
+            <p:cNvPr id="28" name="Straight Connector 27">
+              <a:extLst>
+                <a:ext uri="{FF2B5EF4-FFF2-40B4-BE49-F238E27FC236}">
+                  <a16:creationId xmlns:a16="http://schemas.microsoft.com/office/drawing/2014/main" id="{CA1D45DC-2FC8-6888-A955-02E09D868AC1}"/>
+                </a:ext>
+              </a:extLst>
+            </p:cNvPr>
+            <p:cNvCxnSpPr>
+              <a:stCxn id="21" idx="4"/>
+              <a:endCxn id="10" idx="1"/>
+            </p:cNvCxnSpPr>
+            <p:nvPr/>
+          </p:nvCxnSpPr>
+          <p:spPr>
+            <a:xfrm>
+              <a:off x="839238" y="4012980"/>
+              <a:ext cx="1587336" cy="1827768"/>
+            </a:xfrm>
+            <a:prstGeom prst="line">
+              <a:avLst/>
+            </a:prstGeom>
+            <a:ln w="31750">
+              <a:solidFill>
+                <a:schemeClr val="tx1"/>
+              </a:solidFill>
+            </a:ln>
+          </p:spPr>
+          <p:style>
+            <a:lnRef idx="2">
+              <a:schemeClr val="accent1"/>
+            </a:lnRef>
+            <a:fillRef idx="0">
+              <a:schemeClr val="accent1"/>
+            </a:fillRef>
+            <a:effectRef idx="1">
+              <a:schemeClr val="accent1"/>
+            </a:effectRef>
+            <a:fontRef idx="minor">
+              <a:schemeClr val="tx1"/>
+            </a:fontRef>
+          </p:style>
+        </p:cxnSp>
+        <p:cxnSp>
+          <p:nvCxnSpPr>
+            <p:cNvPr id="84" name="Straight Connector 83">
+              <a:extLst>
+                <a:ext uri="{FF2B5EF4-FFF2-40B4-BE49-F238E27FC236}">
+                  <a16:creationId xmlns:a16="http://schemas.microsoft.com/office/drawing/2014/main" id="{8953C5E0-1352-304F-E5A4-6E2A0B075BD6}"/>
+                </a:ext>
+              </a:extLst>
+            </p:cNvPr>
+            <p:cNvCxnSpPr>
+              <a:stCxn id="10" idx="0"/>
+              <a:endCxn id="18" idx="4"/>
+            </p:cNvCxnSpPr>
+            <p:nvPr/>
+          </p:nvCxnSpPr>
+          <p:spPr>
+            <a:xfrm flipV="1">
+              <a:off x="2744772" y="5310963"/>
+              <a:ext cx="126099" cy="397983"/>
+            </a:xfrm>
+            <a:prstGeom prst="line">
+              <a:avLst/>
+            </a:prstGeom>
+            <a:ln w="31750">
+              <a:solidFill>
+                <a:schemeClr val="tx1"/>
+              </a:solidFill>
+            </a:ln>
+          </p:spPr>
+          <p:style>
+            <a:lnRef idx="2">
+              <a:schemeClr val="accent1"/>
+            </a:lnRef>
+            <a:fillRef idx="0">
+              <a:schemeClr val="accent1"/>
+            </a:fillRef>
+            <a:effectRef idx="1">
+              <a:schemeClr val="accent1"/>
+            </a:effectRef>
+            <a:fontRef idx="minor">
+              <a:schemeClr val="tx1"/>
+            </a:fontRef>
+          </p:style>
+        </p:cxnSp>
+        <p:sp>
+          <p:nvSpPr>
+            <p:cNvPr id="118" name="TextBox 117">
+              <a:extLst>
+                <a:ext uri="{FF2B5EF4-FFF2-40B4-BE49-F238E27FC236}">
+                  <a16:creationId xmlns:a16="http://schemas.microsoft.com/office/drawing/2014/main" id="{43132931-2181-0358-9025-FE93DECC5822}"/>
+                </a:ext>
+              </a:extLst>
+            </p:cNvPr>
+            <p:cNvSpPr txBox="1"/>
+            <p:nvPr/>
+          </p:nvSpPr>
+          <p:spPr>
+            <a:xfrm>
+              <a:off x="4002504" y="4069211"/>
+              <a:ext cx="654908" cy="461665"/>
+            </a:xfrm>
+            <a:prstGeom prst="rect">
+              <a:avLst/>
+            </a:prstGeom>
+            <a:noFill/>
+          </p:spPr>
+          <p:txBody>
+            <a:bodyPr wrap="square" rtlCol="0">
+              <a:spAutoFit/>
+            </a:bodyPr>
+            <a:lstStyle/>
+            <a:p>
+              <a:pPr algn="ctr"/>
+              <a:r>
+                <a:rPr lang="en-US" sz="2400" dirty="0"/>
+                <a:t>32</a:t>
+              </a:r>
+            </a:p>
+          </p:txBody>
+        </p:sp>
+        <p:sp>
+          <p:nvSpPr>
+            <p:cNvPr id="119" name="TextBox 118">
+              <a:extLst>
+                <a:ext uri="{FF2B5EF4-FFF2-40B4-BE49-F238E27FC236}">
+                  <a16:creationId xmlns:a16="http://schemas.microsoft.com/office/drawing/2014/main" id="{318F769D-6D75-FEF3-8629-50C3B3EEB1A8}"/>
+                </a:ext>
+              </a:extLst>
+            </p:cNvPr>
+            <p:cNvSpPr txBox="1"/>
+            <p:nvPr/>
+          </p:nvSpPr>
+          <p:spPr>
+            <a:xfrm>
+              <a:off x="1675864" y="4012980"/>
+              <a:ext cx="654908" cy="461665"/>
+            </a:xfrm>
+            <a:prstGeom prst="rect">
+              <a:avLst/>
+            </a:prstGeom>
+            <a:noFill/>
+          </p:spPr>
+          <p:txBody>
+            <a:bodyPr wrap="square" rtlCol="0">
+              <a:spAutoFit/>
+            </a:bodyPr>
+            <a:lstStyle/>
+            <a:p>
+              <a:pPr algn="ctr"/>
+              <a:r>
+                <a:rPr lang="en-US" sz="2400" dirty="0"/>
+                <a:t>24</a:t>
+              </a:r>
+            </a:p>
+          </p:txBody>
+        </p:sp>
+        <p:sp>
+          <p:nvSpPr>
+            <p:cNvPr id="120" name="TextBox 119">
+              <a:extLst>
+                <a:ext uri="{FF2B5EF4-FFF2-40B4-BE49-F238E27FC236}">
+                  <a16:creationId xmlns:a16="http://schemas.microsoft.com/office/drawing/2014/main" id="{73BA9F1C-4011-3116-9BC8-7808AB74D149}"/>
+                </a:ext>
+              </a:extLst>
+            </p:cNvPr>
+            <p:cNvSpPr txBox="1"/>
+            <p:nvPr/>
+          </p:nvSpPr>
+          <p:spPr>
+            <a:xfrm>
+              <a:off x="1054410" y="4810725"/>
+              <a:ext cx="654908" cy="461665"/>
+            </a:xfrm>
+            <a:prstGeom prst="rect">
+              <a:avLst/>
+            </a:prstGeom>
+            <a:noFill/>
+          </p:spPr>
+          <p:txBody>
+            <a:bodyPr wrap="square" rtlCol="0">
+              <a:spAutoFit/>
+            </a:bodyPr>
+            <a:lstStyle/>
+            <a:p>
+              <a:pPr algn="ctr"/>
+              <a:r>
+                <a:rPr lang="en-US" sz="2400" dirty="0"/>
+                <a:t>41</a:t>
+              </a:r>
+            </a:p>
+          </p:txBody>
+        </p:sp>
+        <p:sp>
+          <p:nvSpPr>
+            <p:cNvPr id="121" name="TextBox 120">
+              <a:extLst>
+                <a:ext uri="{FF2B5EF4-FFF2-40B4-BE49-F238E27FC236}">
+                  <a16:creationId xmlns:a16="http://schemas.microsoft.com/office/drawing/2014/main" id="{DC4ACEFF-F814-4908-3FEC-A05988081730}"/>
+                </a:ext>
+              </a:extLst>
+            </p:cNvPr>
+            <p:cNvSpPr txBox="1"/>
+            <p:nvPr/>
+          </p:nvSpPr>
+          <p:spPr>
+            <a:xfrm>
+              <a:off x="2719756" y="5332563"/>
+              <a:ext cx="654908" cy="461665"/>
+            </a:xfrm>
+            <a:prstGeom prst="rect">
+              <a:avLst/>
+            </a:prstGeom>
+            <a:noFill/>
+          </p:spPr>
+          <p:txBody>
+            <a:bodyPr wrap="square" rtlCol="0">
+              <a:spAutoFit/>
+            </a:bodyPr>
+            <a:lstStyle/>
+            <a:p>
+              <a:pPr algn="ctr"/>
+              <a:r>
+                <a:rPr lang="en-US" sz="2400" dirty="0"/>
+                <a:t>5</a:t>
+              </a:r>
+            </a:p>
+          </p:txBody>
+        </p:sp>
+      </p:grpSp>
+      <p:sp>
+        <p:nvSpPr>
+          <p:cNvPr id="146" name="TextBox 145">
+            <a:extLst>
+              <a:ext uri="{FF2B5EF4-FFF2-40B4-BE49-F238E27FC236}">
+                <a16:creationId xmlns:a16="http://schemas.microsoft.com/office/drawing/2014/main" id="{1DE3FE3B-4B7F-9012-3351-08A6C2E2D45D}"/>
+              </a:ext>
+            </a:extLst>
+          </p:cNvPr>
+          <p:cNvSpPr txBox="1"/>
+          <p:nvPr/>
+        </p:nvSpPr>
+        <p:spPr>
+          <a:xfrm>
+            <a:off x="6570805" y="3356801"/>
+            <a:ext cx="1115654" cy="369332"/>
+          </a:xfrm>
+          <a:prstGeom prst="rect">
+            <a:avLst/>
+          </a:prstGeom>
+          <a:noFill/>
+        </p:spPr>
+        <p:txBody>
+          <a:bodyPr wrap="square" rtlCol="0">
+            <a:spAutoFit/>
+          </a:bodyPr>
+          <a:lstStyle/>
+          <a:p>
+            <a:r>
+              <a:rPr lang="en-US" dirty="0"/>
+              <a:t>Fenwick</a:t>
+            </a:r>
+          </a:p>
+        </p:txBody>
+      </p:sp>
+      <p:grpSp>
+        <p:nvGrpSpPr>
+          <p:cNvPr id="161" name="Group 160">
+            <a:extLst>
+              <a:ext uri="{FF2B5EF4-FFF2-40B4-BE49-F238E27FC236}">
+                <a16:creationId xmlns:a16="http://schemas.microsoft.com/office/drawing/2014/main" id="{5D5FE7F6-109B-74A6-AA89-B1E5CBDBA62B}"/>
+              </a:ext>
+            </a:extLst>
+          </p:cNvPr>
+          <p:cNvGrpSpPr/>
+          <p:nvPr/>
+        </p:nvGrpSpPr>
+        <p:grpSpPr>
+          <a:xfrm>
+            <a:off x="6619389" y="241176"/>
+            <a:ext cx="5517534" cy="6359006"/>
+            <a:chOff x="6619389" y="241176"/>
+            <a:chExt cx="5517534" cy="6359006"/>
+          </a:xfrm>
+        </p:grpSpPr>
+        <p:sp>
+          <p:nvSpPr>
+            <p:cNvPr id="111" name="Oval 110">
+              <a:extLst>
+                <a:ext uri="{FF2B5EF4-FFF2-40B4-BE49-F238E27FC236}">
+                  <a16:creationId xmlns:a16="http://schemas.microsoft.com/office/drawing/2014/main" id="{C63B4B8F-493B-2448-8664-868D2B4C7003}"/>
+                </a:ext>
+              </a:extLst>
+            </p:cNvPr>
+            <p:cNvSpPr/>
+            <p:nvPr/>
+          </p:nvSpPr>
+          <p:spPr>
+            <a:xfrm>
+              <a:off x="8455414" y="241176"/>
+              <a:ext cx="900000" cy="900000"/>
+            </a:xfrm>
+            <a:prstGeom prst="ellipse">
+              <a:avLst/>
+            </a:prstGeom>
+            <a:noFill/>
+            <a:ln w="38100">
+              <a:solidFill>
+                <a:schemeClr val="accent1">
+                  <a:lumMod val="60000"/>
+                  <a:lumOff val="40000"/>
+                </a:schemeClr>
+              </a:solidFill>
+            </a:ln>
+          </p:spPr>
+          <p:style>
+            <a:lnRef idx="2">
+              <a:schemeClr val="accent1">
+                <a:shade val="15000"/>
+              </a:schemeClr>
+            </a:lnRef>
+            <a:fillRef idx="1">
+              <a:schemeClr val="accent1"/>
+            </a:fillRef>
+            <a:effectRef idx="0">
+              <a:schemeClr val="accent1"/>
+            </a:effectRef>
+            <a:fontRef idx="minor">
+              <a:schemeClr val="lt1"/>
+            </a:fontRef>
+          </p:style>
+          <p:txBody>
+            <a:bodyPr rtlCol="0" anchor="ctr"/>
+            <a:lstStyle/>
+            <a:p>
+              <a:pPr algn="ctr"/>
+              <a:endParaRPr lang="en-US"/>
+            </a:p>
+          </p:txBody>
+        </p:sp>
+        <p:sp>
+          <p:nvSpPr>
+            <p:cNvPr id="112" name="TextBox 111">
+              <a:extLst>
+                <a:ext uri="{FF2B5EF4-FFF2-40B4-BE49-F238E27FC236}">
+                  <a16:creationId xmlns:a16="http://schemas.microsoft.com/office/drawing/2014/main" id="{7EE30EA5-128D-9698-1BEA-DA7102282D15}"/>
+                </a:ext>
+              </a:extLst>
+            </p:cNvPr>
+            <p:cNvSpPr txBox="1"/>
+            <p:nvPr/>
+          </p:nvSpPr>
+          <p:spPr>
+            <a:xfrm>
+              <a:off x="8486816" y="506510"/>
+              <a:ext cx="1115654" cy="369332"/>
+            </a:xfrm>
+            <a:prstGeom prst="rect">
+              <a:avLst/>
+            </a:prstGeom>
+            <a:noFill/>
+          </p:spPr>
+          <p:txBody>
+            <a:bodyPr wrap="square" rtlCol="0">
+              <a:spAutoFit/>
+            </a:bodyPr>
+            <a:lstStyle/>
+            <a:p>
+              <a:r>
+                <a:rPr lang="en-US" dirty="0">
+                  <a:solidFill>
+                    <a:schemeClr val="accent1">
+                      <a:lumMod val="60000"/>
+                      <a:lumOff val="40000"/>
+                    </a:schemeClr>
+                  </a:solidFill>
+                </a:rPr>
+                <a:t>Glenby</a:t>
+              </a:r>
+            </a:p>
+          </p:txBody>
+        </p:sp>
+        <p:cxnSp>
+          <p:nvCxnSpPr>
+            <p:cNvPr id="114" name="Straight Connector 113">
+              <a:extLst>
+                <a:ext uri="{FF2B5EF4-FFF2-40B4-BE49-F238E27FC236}">
+                  <a16:creationId xmlns:a16="http://schemas.microsoft.com/office/drawing/2014/main" id="{A773C88E-CD7F-B8F3-11DA-2E159491D435}"/>
+                </a:ext>
+              </a:extLst>
+            </p:cNvPr>
+            <p:cNvCxnSpPr>
+              <a:cxnSpLocks/>
+              <a:stCxn id="111" idx="2"/>
+              <a:endCxn id="127" idx="0"/>
+            </p:cNvCxnSpPr>
+            <p:nvPr/>
+          </p:nvCxnSpPr>
+          <p:spPr>
+            <a:xfrm flipH="1">
+              <a:off x="7069389" y="691176"/>
+              <a:ext cx="1386025" cy="2413040"/>
+            </a:xfrm>
+            <a:prstGeom prst="line">
+              <a:avLst/>
+            </a:prstGeom>
+            <a:ln w="31750">
+              <a:solidFill>
+                <a:schemeClr val="accent1">
+                  <a:lumMod val="60000"/>
+                  <a:lumOff val="40000"/>
+                </a:schemeClr>
+              </a:solidFill>
+            </a:ln>
+          </p:spPr>
+          <p:style>
+            <a:lnRef idx="2">
+              <a:schemeClr val="accent1"/>
+            </a:lnRef>
+            <a:fillRef idx="0">
+              <a:schemeClr val="accent1"/>
+            </a:fillRef>
+            <a:effectRef idx="1">
+              <a:schemeClr val="accent1"/>
+            </a:effectRef>
+            <a:fontRef idx="minor">
+              <a:schemeClr val="tx1"/>
+            </a:fontRef>
+          </p:style>
+        </p:cxnSp>
+        <p:cxnSp>
+          <p:nvCxnSpPr>
+            <p:cNvPr id="115" name="Straight Connector 114">
+              <a:extLst>
+                <a:ext uri="{FF2B5EF4-FFF2-40B4-BE49-F238E27FC236}">
+                  <a16:creationId xmlns:a16="http://schemas.microsoft.com/office/drawing/2014/main" id="{229B8435-9CC1-145D-9CB1-AFEE2646401D}"/>
+                </a:ext>
+              </a:extLst>
+            </p:cNvPr>
+            <p:cNvCxnSpPr>
+              <a:cxnSpLocks/>
+              <a:stCxn id="111" idx="5"/>
+              <a:endCxn id="124" idx="1"/>
+            </p:cNvCxnSpPr>
+            <p:nvPr/>
+          </p:nvCxnSpPr>
+          <p:spPr>
+            <a:xfrm>
+              <a:off x="9223612" y="1009374"/>
+              <a:ext cx="1952320" cy="1262816"/>
+            </a:xfrm>
+            <a:prstGeom prst="line">
+              <a:avLst/>
+            </a:prstGeom>
+            <a:ln w="31750">
+              <a:solidFill>
+                <a:schemeClr val="accent1">
+                  <a:lumMod val="60000"/>
+                  <a:lumOff val="40000"/>
+                </a:schemeClr>
+              </a:solidFill>
+            </a:ln>
+          </p:spPr>
+          <p:style>
+            <a:lnRef idx="2">
+              <a:schemeClr val="accent1"/>
+            </a:lnRef>
+            <a:fillRef idx="0">
+              <a:schemeClr val="accent1"/>
+            </a:fillRef>
+            <a:effectRef idx="1">
+              <a:schemeClr val="accent1"/>
+            </a:effectRef>
+            <a:fontRef idx="minor">
+              <a:schemeClr val="tx1"/>
+            </a:fontRef>
+          </p:style>
+        </p:cxnSp>
+        <p:cxnSp>
+          <p:nvCxnSpPr>
+            <p:cNvPr id="116" name="Straight Connector 115">
+              <a:extLst>
+                <a:ext uri="{FF2B5EF4-FFF2-40B4-BE49-F238E27FC236}">
+                  <a16:creationId xmlns:a16="http://schemas.microsoft.com/office/drawing/2014/main" id="{E198A755-DB47-96A1-1380-08FB2A234AA0}"/>
+                </a:ext>
+              </a:extLst>
+            </p:cNvPr>
+            <p:cNvCxnSpPr>
+              <a:cxnSpLocks/>
+              <a:endCxn id="111" idx="4"/>
+            </p:cNvCxnSpPr>
+            <p:nvPr/>
+          </p:nvCxnSpPr>
+          <p:spPr>
+            <a:xfrm flipH="1" flipV="1">
+              <a:off x="8905414" y="1141176"/>
+              <a:ext cx="46032" cy="384099"/>
+            </a:xfrm>
+            <a:prstGeom prst="line">
+              <a:avLst/>
+            </a:prstGeom>
+            <a:ln w="31750">
+              <a:solidFill>
+                <a:schemeClr val="accent1">
+                  <a:lumMod val="60000"/>
+                  <a:lumOff val="40000"/>
+                </a:schemeClr>
+              </a:solidFill>
+            </a:ln>
+          </p:spPr>
+          <p:style>
+            <a:lnRef idx="2">
+              <a:schemeClr val="accent1"/>
+            </a:lnRef>
+            <a:fillRef idx="0">
+              <a:schemeClr val="accent1"/>
+            </a:fillRef>
+            <a:effectRef idx="1">
+              <a:schemeClr val="accent1"/>
+            </a:effectRef>
+            <a:fontRef idx="minor">
+              <a:schemeClr val="tx1"/>
+            </a:fontRef>
+          </p:style>
+        </p:cxnSp>
+        <p:sp>
+          <p:nvSpPr>
+            <p:cNvPr id="123" name="Oval 122">
+              <a:extLst>
+                <a:ext uri="{FF2B5EF4-FFF2-40B4-BE49-F238E27FC236}">
+                  <a16:creationId xmlns:a16="http://schemas.microsoft.com/office/drawing/2014/main" id="{4365B91A-6F0A-7165-93D9-A7BAA77C22B9}"/>
+                </a:ext>
+              </a:extLst>
+            </p:cNvPr>
+            <p:cNvSpPr/>
+            <p:nvPr/>
+          </p:nvSpPr>
+          <p:spPr>
+            <a:xfrm>
+              <a:off x="8559400" y="1538273"/>
+              <a:ext cx="900000" cy="900000"/>
+            </a:xfrm>
+            <a:prstGeom prst="ellipse">
+              <a:avLst/>
+            </a:prstGeom>
+            <a:noFill/>
+            <a:ln w="38100"/>
+          </p:spPr>
+          <p:style>
+            <a:lnRef idx="2">
+              <a:schemeClr val="accent1">
+                <a:shade val="15000"/>
+              </a:schemeClr>
+            </a:lnRef>
+            <a:fillRef idx="1">
+              <a:schemeClr val="accent1"/>
+            </a:fillRef>
+            <a:effectRef idx="0">
+              <a:schemeClr val="accent1"/>
+            </a:effectRef>
+            <a:fontRef idx="minor">
+              <a:schemeClr val="lt1"/>
+            </a:fontRef>
+          </p:style>
+          <p:txBody>
+            <a:bodyPr rtlCol="0" anchor="ctr"/>
+            <a:lstStyle/>
+            <a:p>
+              <a:pPr algn="ctr"/>
+              <a:endParaRPr lang="en-US"/>
+            </a:p>
+          </p:txBody>
+        </p:sp>
+        <p:sp>
+          <p:nvSpPr>
+            <p:cNvPr id="124" name="Oval 123">
+              <a:extLst>
+                <a:ext uri="{FF2B5EF4-FFF2-40B4-BE49-F238E27FC236}">
+                  <a16:creationId xmlns:a16="http://schemas.microsoft.com/office/drawing/2014/main" id="{A13F0B98-D814-9718-9925-D2611AAF5D33}"/>
+                </a:ext>
+              </a:extLst>
+            </p:cNvPr>
+            <p:cNvSpPr/>
+            <p:nvPr/>
+          </p:nvSpPr>
+          <p:spPr>
+            <a:xfrm>
+              <a:off x="11044130" y="2140388"/>
+              <a:ext cx="900000" cy="900000"/>
+            </a:xfrm>
+            <a:prstGeom prst="ellipse">
+              <a:avLst/>
+            </a:prstGeom>
+            <a:noFill/>
+            <a:ln w="38100"/>
+          </p:spPr>
+          <p:style>
+            <a:lnRef idx="2">
+              <a:schemeClr val="accent1">
+                <a:shade val="15000"/>
+              </a:schemeClr>
+            </a:lnRef>
+            <a:fillRef idx="1">
+              <a:schemeClr val="accent1"/>
+            </a:fillRef>
+            <a:effectRef idx="0">
+              <a:schemeClr val="accent1"/>
+            </a:effectRef>
+            <a:fontRef idx="minor">
+              <a:schemeClr val="lt1"/>
+            </a:fontRef>
+          </p:style>
+          <p:txBody>
+            <a:bodyPr rtlCol="0" anchor="ctr"/>
+            <a:lstStyle/>
+            <a:p>
+              <a:pPr algn="ctr"/>
+              <a:endParaRPr lang="en-US"/>
+            </a:p>
+          </p:txBody>
+        </p:sp>
+        <p:sp>
+          <p:nvSpPr>
+            <p:cNvPr id="125" name="Oval 124">
+              <a:extLst>
+                <a:ext uri="{FF2B5EF4-FFF2-40B4-BE49-F238E27FC236}">
+                  <a16:creationId xmlns:a16="http://schemas.microsoft.com/office/drawing/2014/main" id="{1DA5C821-403F-D821-2B0A-AE1E8AC72B3E}"/>
+                </a:ext>
+              </a:extLst>
+            </p:cNvPr>
+            <p:cNvSpPr/>
+            <p:nvPr/>
+          </p:nvSpPr>
+          <p:spPr>
+            <a:xfrm>
+              <a:off x="9239022" y="2847820"/>
+              <a:ext cx="900000" cy="900000"/>
+            </a:xfrm>
+            <a:prstGeom prst="ellipse">
+              <a:avLst/>
+            </a:prstGeom>
+            <a:noFill/>
+            <a:ln w="38100"/>
+          </p:spPr>
+          <p:style>
+            <a:lnRef idx="2">
+              <a:schemeClr val="accent1">
+                <a:shade val="15000"/>
+              </a:schemeClr>
+            </a:lnRef>
+            <a:fillRef idx="1">
+              <a:schemeClr val="accent1"/>
+            </a:fillRef>
+            <a:effectRef idx="0">
+              <a:schemeClr val="accent1"/>
+            </a:effectRef>
+            <a:fontRef idx="minor">
+              <a:schemeClr val="lt1"/>
+            </a:fontRef>
+          </p:style>
+          <p:txBody>
+            <a:bodyPr rtlCol="0" anchor="ctr"/>
+            <a:lstStyle/>
+            <a:p>
+              <a:pPr algn="ctr"/>
+              <a:endParaRPr lang="en-US"/>
+            </a:p>
+          </p:txBody>
+        </p:sp>
+        <p:sp>
+          <p:nvSpPr>
+            <p:cNvPr id="126" name="Oval 125">
+              <a:extLst>
+                <a:ext uri="{FF2B5EF4-FFF2-40B4-BE49-F238E27FC236}">
+                  <a16:creationId xmlns:a16="http://schemas.microsoft.com/office/drawing/2014/main" id="{D4843A57-934C-3A1F-0951-0A55E54A53F6}"/>
+                </a:ext>
+              </a:extLst>
+            </p:cNvPr>
+            <p:cNvSpPr/>
+            <p:nvPr/>
+          </p:nvSpPr>
+          <p:spPr>
+            <a:xfrm>
+              <a:off x="8651022" y="4402199"/>
+              <a:ext cx="900000" cy="900000"/>
+            </a:xfrm>
+            <a:prstGeom prst="ellipse">
+              <a:avLst/>
+            </a:prstGeom>
+            <a:noFill/>
+            <a:ln w="38100"/>
+          </p:spPr>
+          <p:style>
+            <a:lnRef idx="2">
+              <a:schemeClr val="accent1">
+                <a:shade val="15000"/>
+              </a:schemeClr>
+            </a:lnRef>
+            <a:fillRef idx="1">
+              <a:schemeClr val="accent1"/>
+            </a:fillRef>
+            <a:effectRef idx="0">
+              <a:schemeClr val="accent1"/>
+            </a:effectRef>
+            <a:fontRef idx="minor">
+              <a:schemeClr val="lt1"/>
+            </a:fontRef>
+          </p:style>
+          <p:txBody>
+            <a:bodyPr rtlCol="0" anchor="ctr"/>
+            <a:lstStyle/>
+            <a:p>
+              <a:pPr algn="ctr"/>
+              <a:endParaRPr lang="en-US"/>
+            </a:p>
+          </p:txBody>
+        </p:sp>
+        <p:sp>
+          <p:nvSpPr>
+            <p:cNvPr id="127" name="Oval 126">
+              <a:extLst>
+                <a:ext uri="{FF2B5EF4-FFF2-40B4-BE49-F238E27FC236}">
+                  <a16:creationId xmlns:a16="http://schemas.microsoft.com/office/drawing/2014/main" id="{FA0EAEB6-933C-0344-DB08-6E57355F2543}"/>
+                </a:ext>
+              </a:extLst>
+            </p:cNvPr>
+            <p:cNvSpPr/>
+            <p:nvPr/>
+          </p:nvSpPr>
+          <p:spPr>
+            <a:xfrm>
+              <a:off x="6619389" y="3104216"/>
+              <a:ext cx="900000" cy="900000"/>
+            </a:xfrm>
+            <a:prstGeom prst="ellipse">
+              <a:avLst/>
+            </a:prstGeom>
+            <a:noFill/>
+            <a:ln w="38100"/>
+          </p:spPr>
+          <p:style>
+            <a:lnRef idx="2">
+              <a:schemeClr val="accent1">
+                <a:shade val="15000"/>
+              </a:schemeClr>
+            </a:lnRef>
+            <a:fillRef idx="1">
+              <a:schemeClr val="accent1"/>
+            </a:fillRef>
+            <a:effectRef idx="0">
+              <a:schemeClr val="accent1"/>
+            </a:effectRef>
+            <a:fontRef idx="minor">
+              <a:schemeClr val="lt1"/>
+            </a:fontRef>
+          </p:style>
+          <p:txBody>
+            <a:bodyPr rtlCol="0" anchor="ctr"/>
+            <a:lstStyle/>
+            <a:p>
+              <a:pPr algn="ctr"/>
+              <a:endParaRPr lang="en-US"/>
+            </a:p>
+          </p:txBody>
+        </p:sp>
+        <p:cxnSp>
+          <p:nvCxnSpPr>
+            <p:cNvPr id="128" name="Straight Connector 127">
+              <a:extLst>
+                <a:ext uri="{FF2B5EF4-FFF2-40B4-BE49-F238E27FC236}">
+                  <a16:creationId xmlns:a16="http://schemas.microsoft.com/office/drawing/2014/main" id="{93FA48F9-71C2-9120-04B5-92B03A894FBB}"/>
+                </a:ext>
+              </a:extLst>
+            </p:cNvPr>
+            <p:cNvCxnSpPr>
+              <a:cxnSpLocks/>
+              <a:stCxn id="123" idx="4"/>
+              <a:endCxn id="125" idx="1"/>
+            </p:cNvCxnSpPr>
+            <p:nvPr/>
+          </p:nvCxnSpPr>
+          <p:spPr>
+            <a:xfrm>
+              <a:off x="9009400" y="2438273"/>
+              <a:ext cx="361424" cy="541349"/>
+            </a:xfrm>
+            <a:prstGeom prst="line">
+              <a:avLst/>
+            </a:prstGeom>
+            <a:ln w="31750">
+              <a:solidFill>
+                <a:schemeClr val="tx1"/>
+              </a:solidFill>
+            </a:ln>
+          </p:spPr>
+          <p:style>
+            <a:lnRef idx="2">
+              <a:schemeClr val="accent1"/>
+            </a:lnRef>
+            <a:fillRef idx="0">
+              <a:schemeClr val="accent1"/>
+            </a:fillRef>
+            <a:effectRef idx="1">
+              <a:schemeClr val="accent1"/>
+            </a:effectRef>
+            <a:fontRef idx="minor">
+              <a:schemeClr val="tx1"/>
+            </a:fontRef>
+          </p:style>
+        </p:cxnSp>
+        <p:cxnSp>
+          <p:nvCxnSpPr>
+            <p:cNvPr id="129" name="Straight Connector 128">
+              <a:extLst>
+                <a:ext uri="{FF2B5EF4-FFF2-40B4-BE49-F238E27FC236}">
+                  <a16:creationId xmlns:a16="http://schemas.microsoft.com/office/drawing/2014/main" id="{3DFCCE19-5A7E-8716-3E1C-4DB01E1B5384}"/>
+                </a:ext>
+              </a:extLst>
+            </p:cNvPr>
+            <p:cNvCxnSpPr>
+              <a:stCxn id="123" idx="3"/>
+              <a:endCxn id="127" idx="7"/>
+            </p:cNvCxnSpPr>
+            <p:nvPr/>
+          </p:nvCxnSpPr>
+          <p:spPr>
+            <a:xfrm flipH="1">
+              <a:off x="7387587" y="2306471"/>
+              <a:ext cx="1303615" cy="929547"/>
+            </a:xfrm>
+            <a:prstGeom prst="line">
+              <a:avLst/>
+            </a:prstGeom>
+            <a:ln w="31750">
+              <a:solidFill>
+                <a:schemeClr val="tx1"/>
+              </a:solidFill>
+            </a:ln>
+          </p:spPr>
+          <p:style>
+            <a:lnRef idx="2">
+              <a:schemeClr val="accent1"/>
+            </a:lnRef>
+            <a:fillRef idx="0">
+              <a:schemeClr val="accent1"/>
+            </a:fillRef>
+            <a:effectRef idx="1">
+              <a:schemeClr val="accent1"/>
+            </a:effectRef>
+            <a:fontRef idx="minor">
+              <a:schemeClr val="tx1"/>
+            </a:fontRef>
+          </p:style>
+        </p:cxnSp>
+        <p:cxnSp>
+          <p:nvCxnSpPr>
+            <p:cNvPr id="130" name="Straight Connector 129">
+              <a:extLst>
+                <a:ext uri="{FF2B5EF4-FFF2-40B4-BE49-F238E27FC236}">
+                  <a16:creationId xmlns:a16="http://schemas.microsoft.com/office/drawing/2014/main" id="{30817B24-7AAA-538F-1942-884C5054C71D}"/>
+                </a:ext>
+              </a:extLst>
+            </p:cNvPr>
+            <p:cNvCxnSpPr>
+              <a:stCxn id="127" idx="5"/>
+              <a:endCxn id="126" idx="2"/>
+            </p:cNvCxnSpPr>
+            <p:nvPr/>
+          </p:nvCxnSpPr>
+          <p:spPr>
+            <a:xfrm>
+              <a:off x="7387587" y="3872414"/>
+              <a:ext cx="1263435" cy="979785"/>
+            </a:xfrm>
+            <a:prstGeom prst="line">
+              <a:avLst/>
+            </a:prstGeom>
+            <a:ln w="31750">
+              <a:solidFill>
+                <a:schemeClr val="tx1"/>
+              </a:solidFill>
+            </a:ln>
+          </p:spPr>
+          <p:style>
+            <a:lnRef idx="2">
+              <a:schemeClr val="accent1"/>
+            </a:lnRef>
+            <a:fillRef idx="0">
+              <a:schemeClr val="accent1"/>
+            </a:fillRef>
+            <a:effectRef idx="1">
+              <a:schemeClr val="accent1"/>
+            </a:effectRef>
+            <a:fontRef idx="minor">
+              <a:schemeClr val="tx1"/>
+            </a:fontRef>
+          </p:style>
+        </p:cxnSp>
+        <p:cxnSp>
+          <p:nvCxnSpPr>
+            <p:cNvPr id="131" name="Straight Connector 130">
+              <a:extLst>
+                <a:ext uri="{FF2B5EF4-FFF2-40B4-BE49-F238E27FC236}">
+                  <a16:creationId xmlns:a16="http://schemas.microsoft.com/office/drawing/2014/main" id="{698A2297-D560-157C-5E72-B14519BA8839}"/>
+                </a:ext>
+              </a:extLst>
+            </p:cNvPr>
+            <p:cNvCxnSpPr>
+              <a:stCxn id="127" idx="6"/>
+              <a:endCxn id="125" idx="2"/>
+            </p:cNvCxnSpPr>
+            <p:nvPr/>
+          </p:nvCxnSpPr>
+          <p:spPr>
+            <a:xfrm flipV="1">
+              <a:off x="7519389" y="3297820"/>
+              <a:ext cx="1719633" cy="256396"/>
+            </a:xfrm>
+            <a:prstGeom prst="line">
+              <a:avLst/>
+            </a:prstGeom>
+            <a:ln w="31750">
+              <a:solidFill>
+                <a:srgbClr val="FF0000"/>
+              </a:solidFill>
+            </a:ln>
+          </p:spPr>
+          <p:style>
+            <a:lnRef idx="2">
+              <a:schemeClr val="accent1"/>
+            </a:lnRef>
+            <a:fillRef idx="0">
+              <a:schemeClr val="accent1"/>
+            </a:fillRef>
+            <a:effectRef idx="1">
+              <a:schemeClr val="accent1"/>
+            </a:effectRef>
+            <a:fontRef idx="minor">
+              <a:schemeClr val="tx1"/>
+            </a:fontRef>
+          </p:style>
+        </p:cxnSp>
+        <p:cxnSp>
+          <p:nvCxnSpPr>
+            <p:cNvPr id="132" name="Straight Connector 131">
+              <a:extLst>
+                <a:ext uri="{FF2B5EF4-FFF2-40B4-BE49-F238E27FC236}">
+                  <a16:creationId xmlns:a16="http://schemas.microsoft.com/office/drawing/2014/main" id="{7DC3E761-80DA-4C87-F209-D4482C580FCC}"/>
+                </a:ext>
+              </a:extLst>
+            </p:cNvPr>
+            <p:cNvCxnSpPr>
+              <a:stCxn id="126" idx="7"/>
+              <a:endCxn id="125" idx="4"/>
+            </p:cNvCxnSpPr>
+            <p:nvPr/>
+          </p:nvCxnSpPr>
+          <p:spPr>
+            <a:xfrm flipV="1">
+              <a:off x="9419220" y="3747820"/>
+              <a:ext cx="269802" cy="786181"/>
+            </a:xfrm>
+            <a:prstGeom prst="line">
+              <a:avLst/>
+            </a:prstGeom>
+            <a:ln w="31750">
+              <a:solidFill>
+                <a:schemeClr val="tx1"/>
+              </a:solidFill>
+            </a:ln>
+          </p:spPr>
+          <p:style>
+            <a:lnRef idx="2">
+              <a:schemeClr val="accent1"/>
+            </a:lnRef>
+            <a:fillRef idx="0">
+              <a:schemeClr val="accent1"/>
+            </a:fillRef>
+            <a:effectRef idx="1">
+              <a:schemeClr val="accent1"/>
+            </a:effectRef>
+            <a:fontRef idx="minor">
+              <a:schemeClr val="tx1"/>
+            </a:fontRef>
+          </p:style>
+        </p:cxnSp>
+        <p:cxnSp>
+          <p:nvCxnSpPr>
+            <p:cNvPr id="133" name="Straight Connector 132">
+              <a:extLst>
+                <a:ext uri="{FF2B5EF4-FFF2-40B4-BE49-F238E27FC236}">
+                  <a16:creationId xmlns:a16="http://schemas.microsoft.com/office/drawing/2014/main" id="{72913842-4EBC-B4EC-6E90-D6F7683223BF}"/>
+                </a:ext>
+              </a:extLst>
+            </p:cNvPr>
+            <p:cNvCxnSpPr>
+              <a:stCxn id="123" idx="6"/>
+              <a:endCxn id="124" idx="2"/>
+            </p:cNvCxnSpPr>
+            <p:nvPr/>
+          </p:nvCxnSpPr>
+          <p:spPr>
+            <a:xfrm>
+              <a:off x="9459400" y="1988273"/>
+              <a:ext cx="1584730" cy="602115"/>
+            </a:xfrm>
+            <a:prstGeom prst="line">
+              <a:avLst/>
+            </a:prstGeom>
+            <a:ln w="31750">
+              <a:solidFill>
+                <a:schemeClr val="tx1"/>
+              </a:solidFill>
+            </a:ln>
+          </p:spPr>
+          <p:style>
+            <a:lnRef idx="2">
+              <a:schemeClr val="accent1"/>
+            </a:lnRef>
+            <a:fillRef idx="0">
+              <a:schemeClr val="accent1"/>
+            </a:fillRef>
+            <a:effectRef idx="1">
+              <a:schemeClr val="accent1"/>
+            </a:effectRef>
+            <a:fontRef idx="minor">
+              <a:schemeClr val="tx1"/>
+            </a:fontRef>
+          </p:style>
+        </p:cxnSp>
+        <p:cxnSp>
+          <p:nvCxnSpPr>
+            <p:cNvPr id="134" name="Straight Connector 133">
+              <a:extLst>
+                <a:ext uri="{FF2B5EF4-FFF2-40B4-BE49-F238E27FC236}">
+                  <a16:creationId xmlns:a16="http://schemas.microsoft.com/office/drawing/2014/main" id="{13E0193B-2D0C-349E-DCD1-A7CF5DBF665F}"/>
+                </a:ext>
+              </a:extLst>
+            </p:cNvPr>
+            <p:cNvCxnSpPr>
+              <a:stCxn id="125" idx="6"/>
+              <a:endCxn id="124" idx="3"/>
+            </p:cNvCxnSpPr>
+            <p:nvPr/>
+          </p:nvCxnSpPr>
+          <p:spPr>
+            <a:xfrm flipV="1">
+              <a:off x="10139022" y="2908586"/>
+              <a:ext cx="1036910" cy="389234"/>
+            </a:xfrm>
+            <a:prstGeom prst="line">
+              <a:avLst/>
+            </a:prstGeom>
+            <a:ln w="31750">
+              <a:solidFill>
+                <a:schemeClr val="tx1"/>
+              </a:solidFill>
+            </a:ln>
+          </p:spPr>
+          <p:style>
+            <a:lnRef idx="2">
+              <a:schemeClr val="accent1"/>
+            </a:lnRef>
+            <a:fillRef idx="0">
+              <a:schemeClr val="accent1"/>
+            </a:fillRef>
+            <a:effectRef idx="1">
+              <a:schemeClr val="accent1"/>
+            </a:effectRef>
+            <a:fontRef idx="minor">
+              <a:schemeClr val="tx1"/>
+            </a:fontRef>
+          </p:style>
+        </p:cxnSp>
+        <p:cxnSp>
+          <p:nvCxnSpPr>
+            <p:cNvPr id="135" name="Straight Connector 134">
+              <a:extLst>
+                <a:ext uri="{FF2B5EF4-FFF2-40B4-BE49-F238E27FC236}">
+                  <a16:creationId xmlns:a16="http://schemas.microsoft.com/office/drawing/2014/main" id="{AAE12599-E5EB-E67A-8166-0EE4346D419C}"/>
+                </a:ext>
+              </a:extLst>
+            </p:cNvPr>
+            <p:cNvCxnSpPr>
+              <a:stCxn id="126" idx="6"/>
+              <a:endCxn id="124" idx="4"/>
+            </p:cNvCxnSpPr>
+            <p:nvPr/>
+          </p:nvCxnSpPr>
+          <p:spPr>
+            <a:xfrm flipV="1">
+              <a:off x="9551022" y="3040388"/>
+              <a:ext cx="1943108" cy="1811811"/>
+            </a:xfrm>
+            <a:prstGeom prst="line">
+              <a:avLst/>
+            </a:prstGeom>
+            <a:ln w="31750">
+              <a:solidFill>
+                <a:schemeClr val="tx1"/>
+              </a:solidFill>
+            </a:ln>
+          </p:spPr>
+          <p:style>
+            <a:lnRef idx="2">
+              <a:schemeClr val="accent1"/>
+            </a:lnRef>
+            <a:fillRef idx="0">
+              <a:schemeClr val="accent1"/>
+            </a:fillRef>
+            <a:effectRef idx="1">
+              <a:schemeClr val="accent1"/>
+            </a:effectRef>
+            <a:fontRef idx="minor">
+              <a:schemeClr val="tx1"/>
+            </a:fontRef>
+          </p:style>
+        </p:cxnSp>
+        <p:sp>
+          <p:nvSpPr>
+            <p:cNvPr id="136" name="TextBox 135">
+              <a:extLst>
+                <a:ext uri="{FF2B5EF4-FFF2-40B4-BE49-F238E27FC236}">
+                  <a16:creationId xmlns:a16="http://schemas.microsoft.com/office/drawing/2014/main" id="{40925F2C-3F02-51B7-F32A-7B2C595EA570}"/>
+                </a:ext>
+              </a:extLst>
+            </p:cNvPr>
+            <p:cNvSpPr txBox="1"/>
+            <p:nvPr/>
+          </p:nvSpPr>
+          <p:spPr>
+            <a:xfrm>
+              <a:off x="7520393" y="2441874"/>
+              <a:ext cx="654908" cy="461665"/>
+            </a:xfrm>
+            <a:prstGeom prst="rect">
+              <a:avLst/>
+            </a:prstGeom>
+            <a:noFill/>
+          </p:spPr>
+          <p:txBody>
+            <a:bodyPr wrap="square" rtlCol="0">
+              <a:spAutoFit/>
+            </a:bodyPr>
+            <a:lstStyle/>
+            <a:p>
+              <a:pPr algn="ctr"/>
+              <a:r>
+                <a:rPr lang="en-US" sz="2400" dirty="0"/>
+                <a:t>12</a:t>
+              </a:r>
+            </a:p>
+          </p:txBody>
+        </p:sp>
+        <p:sp>
+          <p:nvSpPr>
+            <p:cNvPr id="137" name="TextBox 136">
+              <a:extLst>
+                <a:ext uri="{FF2B5EF4-FFF2-40B4-BE49-F238E27FC236}">
+                  <a16:creationId xmlns:a16="http://schemas.microsoft.com/office/drawing/2014/main" id="{689C637E-4DD6-DEC8-7294-CE2B309EA958}"/>
+                </a:ext>
+              </a:extLst>
+            </p:cNvPr>
+            <p:cNvSpPr txBox="1"/>
+            <p:nvPr/>
+          </p:nvSpPr>
+          <p:spPr>
+            <a:xfrm>
+              <a:off x="9091766" y="2406381"/>
+              <a:ext cx="654908" cy="461665"/>
+            </a:xfrm>
+            <a:prstGeom prst="rect">
+              <a:avLst/>
+            </a:prstGeom>
+            <a:noFill/>
+          </p:spPr>
+          <p:txBody>
+            <a:bodyPr wrap="square" rtlCol="0">
+              <a:spAutoFit/>
+            </a:bodyPr>
+            <a:lstStyle/>
+            <a:p>
+              <a:pPr algn="ctr"/>
+              <a:r>
+                <a:rPr lang="en-US" sz="2400" dirty="0"/>
+                <a:t>8</a:t>
+              </a:r>
+            </a:p>
+          </p:txBody>
+        </p:sp>
+        <p:sp>
+          <p:nvSpPr>
+            <p:cNvPr id="138" name="TextBox 137">
+              <a:extLst>
+                <a:ext uri="{FF2B5EF4-FFF2-40B4-BE49-F238E27FC236}">
+                  <a16:creationId xmlns:a16="http://schemas.microsoft.com/office/drawing/2014/main" id="{6BDBCF13-8BD8-8619-F8B6-8F1959B8F78C}"/>
+                </a:ext>
+              </a:extLst>
+            </p:cNvPr>
+            <p:cNvSpPr txBox="1"/>
+            <p:nvPr/>
+          </p:nvSpPr>
+          <p:spPr>
+            <a:xfrm>
+              <a:off x="8981577" y="3843927"/>
+              <a:ext cx="654908" cy="461665"/>
+            </a:xfrm>
+            <a:prstGeom prst="rect">
+              <a:avLst/>
+            </a:prstGeom>
+            <a:noFill/>
+          </p:spPr>
+          <p:txBody>
+            <a:bodyPr wrap="square" rtlCol="0">
+              <a:spAutoFit/>
+            </a:bodyPr>
+            <a:lstStyle/>
+            <a:p>
+              <a:pPr algn="ctr"/>
+              <a:r>
+                <a:rPr lang="en-US" sz="2400" dirty="0"/>
+                <a:t>6</a:t>
+              </a:r>
+            </a:p>
+          </p:txBody>
+        </p:sp>
+        <p:sp>
+          <p:nvSpPr>
+            <p:cNvPr id="139" name="TextBox 138">
+              <a:extLst>
+                <a:ext uri="{FF2B5EF4-FFF2-40B4-BE49-F238E27FC236}">
+                  <a16:creationId xmlns:a16="http://schemas.microsoft.com/office/drawing/2014/main" id="{B43BD31F-F83A-5776-2940-6634DB822B8F}"/>
+                </a:ext>
+              </a:extLst>
+            </p:cNvPr>
+            <p:cNvSpPr txBox="1"/>
+            <p:nvPr/>
+          </p:nvSpPr>
+          <p:spPr>
+            <a:xfrm>
+              <a:off x="8033740" y="2969440"/>
+              <a:ext cx="654908" cy="461665"/>
+            </a:xfrm>
+            <a:prstGeom prst="rect">
+              <a:avLst/>
+            </a:prstGeom>
+            <a:noFill/>
+          </p:spPr>
+          <p:txBody>
+            <a:bodyPr wrap="square" rtlCol="0">
+              <a:spAutoFit/>
+            </a:bodyPr>
+            <a:lstStyle/>
+            <a:p>
+              <a:pPr algn="ctr"/>
+              <a:r>
+                <a:rPr lang="en-US" sz="2400" dirty="0">
+                  <a:solidFill>
+                    <a:srgbClr val="FF0000"/>
+                  </a:solidFill>
+                </a:rPr>
+                <a:t>10</a:t>
+              </a:r>
+            </a:p>
+          </p:txBody>
+        </p:sp>
+        <p:sp>
+          <p:nvSpPr>
+            <p:cNvPr id="140" name="TextBox 139">
+              <a:extLst>
+                <a:ext uri="{FF2B5EF4-FFF2-40B4-BE49-F238E27FC236}">
+                  <a16:creationId xmlns:a16="http://schemas.microsoft.com/office/drawing/2014/main" id="{BBFF215E-564A-F5E9-A9AC-1B9BED88CEAD}"/>
+                </a:ext>
+              </a:extLst>
+            </p:cNvPr>
+            <p:cNvSpPr txBox="1"/>
+            <p:nvPr/>
+          </p:nvSpPr>
+          <p:spPr>
+            <a:xfrm>
+              <a:off x="10023658" y="1827665"/>
+              <a:ext cx="654908" cy="461665"/>
+            </a:xfrm>
+            <a:prstGeom prst="rect">
+              <a:avLst/>
+            </a:prstGeom>
+            <a:noFill/>
+          </p:spPr>
+          <p:txBody>
+            <a:bodyPr wrap="square" rtlCol="0">
+              <a:spAutoFit/>
+            </a:bodyPr>
+            <a:lstStyle/>
+            <a:p>
+              <a:pPr algn="ctr"/>
+              <a:r>
+                <a:rPr lang="en-US" sz="2400" dirty="0"/>
+                <a:t>20</a:t>
+              </a:r>
+            </a:p>
+          </p:txBody>
+        </p:sp>
+        <p:sp>
+          <p:nvSpPr>
+            <p:cNvPr id="141" name="TextBox 140">
+              <a:extLst>
+                <a:ext uri="{FF2B5EF4-FFF2-40B4-BE49-F238E27FC236}">
+                  <a16:creationId xmlns:a16="http://schemas.microsoft.com/office/drawing/2014/main" id="{F144E1CC-D36A-DEA3-5C93-D21FC0674635}"/>
+                </a:ext>
+              </a:extLst>
+            </p:cNvPr>
+            <p:cNvSpPr txBox="1"/>
+            <p:nvPr/>
+          </p:nvSpPr>
+          <p:spPr>
+            <a:xfrm>
+              <a:off x="10206440" y="2703801"/>
+              <a:ext cx="654908" cy="461665"/>
+            </a:xfrm>
+            <a:prstGeom prst="rect">
+              <a:avLst/>
+            </a:prstGeom>
+            <a:noFill/>
+          </p:spPr>
+          <p:txBody>
+            <a:bodyPr wrap="square" rtlCol="0">
+              <a:spAutoFit/>
+            </a:bodyPr>
+            <a:lstStyle/>
+            <a:p>
+              <a:pPr algn="ctr"/>
+              <a:r>
+                <a:rPr lang="en-US" sz="2400" dirty="0"/>
+                <a:t>15</a:t>
+              </a:r>
+            </a:p>
+          </p:txBody>
+        </p:sp>
+        <p:sp>
+          <p:nvSpPr>
+            <p:cNvPr id="142" name="TextBox 141">
+              <a:extLst>
+                <a:ext uri="{FF2B5EF4-FFF2-40B4-BE49-F238E27FC236}">
+                  <a16:creationId xmlns:a16="http://schemas.microsoft.com/office/drawing/2014/main" id="{CEAF4C90-AE2C-7827-DCF3-2A271ECD185B}"/>
+                </a:ext>
+              </a:extLst>
+            </p:cNvPr>
+            <p:cNvSpPr txBox="1"/>
+            <p:nvPr/>
+          </p:nvSpPr>
+          <p:spPr>
+            <a:xfrm>
+              <a:off x="8635261" y="1797724"/>
+              <a:ext cx="778107" cy="369332"/>
+            </a:xfrm>
+            <a:prstGeom prst="rect">
+              <a:avLst/>
+            </a:prstGeom>
+            <a:noFill/>
+          </p:spPr>
+          <p:txBody>
+            <a:bodyPr wrap="square" rtlCol="0">
+              <a:spAutoFit/>
+            </a:bodyPr>
+            <a:lstStyle/>
+            <a:p>
+              <a:r>
+                <a:rPr lang="en-US" dirty="0"/>
+                <a:t>Alden</a:t>
+              </a:r>
+            </a:p>
+          </p:txBody>
+        </p:sp>
+        <p:sp>
+          <p:nvSpPr>
+            <p:cNvPr id="143" name="TextBox 142">
+              <a:extLst>
+                <a:ext uri="{FF2B5EF4-FFF2-40B4-BE49-F238E27FC236}">
+                  <a16:creationId xmlns:a16="http://schemas.microsoft.com/office/drawing/2014/main" id="{A13BB8CC-11D2-8E6B-E02E-86FA62612A81}"/>
+                </a:ext>
+              </a:extLst>
+            </p:cNvPr>
+            <p:cNvSpPr txBox="1"/>
+            <p:nvPr/>
+          </p:nvSpPr>
+          <p:spPr>
+            <a:xfrm>
+              <a:off x="11021269" y="2405722"/>
+              <a:ext cx="1115654" cy="369332"/>
+            </a:xfrm>
+            <a:prstGeom prst="rect">
+              <a:avLst/>
+            </a:prstGeom>
+            <a:noFill/>
+          </p:spPr>
+          <p:txBody>
+            <a:bodyPr wrap="square" rtlCol="0">
+              <a:spAutoFit/>
+            </a:bodyPr>
+            <a:lstStyle/>
+            <a:p>
+              <a:r>
+                <a:rPr lang="en-US" dirty="0" err="1"/>
+                <a:t>Brinford</a:t>
+              </a:r>
+              <a:endParaRPr lang="en-US" dirty="0"/>
+            </a:p>
+          </p:txBody>
+        </p:sp>
+        <p:sp>
+          <p:nvSpPr>
+            <p:cNvPr id="144" name="TextBox 143">
+              <a:extLst>
+                <a:ext uri="{FF2B5EF4-FFF2-40B4-BE49-F238E27FC236}">
+                  <a16:creationId xmlns:a16="http://schemas.microsoft.com/office/drawing/2014/main" id="{EBFAB6CE-45C4-BD24-108C-F395F700BD8A}"/>
+                </a:ext>
+              </a:extLst>
+            </p:cNvPr>
+            <p:cNvSpPr txBox="1"/>
+            <p:nvPr/>
+          </p:nvSpPr>
+          <p:spPr>
+            <a:xfrm>
+              <a:off x="8668549" y="4694454"/>
+              <a:ext cx="1115654" cy="369332"/>
+            </a:xfrm>
+            <a:prstGeom prst="rect">
+              <a:avLst/>
+            </a:prstGeom>
+            <a:noFill/>
+          </p:spPr>
+          <p:txBody>
+            <a:bodyPr wrap="square" rtlCol="0">
+              <a:spAutoFit/>
+            </a:bodyPr>
+            <a:lstStyle/>
+            <a:p>
+              <a:r>
+                <a:rPr lang="en-US" dirty="0"/>
+                <a:t>Caster</a:t>
+              </a:r>
+            </a:p>
+          </p:txBody>
+        </p:sp>
+        <p:sp>
+          <p:nvSpPr>
+            <p:cNvPr id="145" name="TextBox 144">
+              <a:extLst>
+                <a:ext uri="{FF2B5EF4-FFF2-40B4-BE49-F238E27FC236}">
+                  <a16:creationId xmlns:a16="http://schemas.microsoft.com/office/drawing/2014/main" id="{682D751E-1538-A972-A34E-222CAC8E8C43}"/>
+                </a:ext>
+              </a:extLst>
+            </p:cNvPr>
+            <p:cNvSpPr txBox="1"/>
+            <p:nvPr/>
+          </p:nvSpPr>
+          <p:spPr>
+            <a:xfrm>
+              <a:off x="9247011" y="3143802"/>
+              <a:ext cx="1115654" cy="369332"/>
+            </a:xfrm>
+            <a:prstGeom prst="rect">
+              <a:avLst/>
+            </a:prstGeom>
+            <a:noFill/>
+          </p:spPr>
+          <p:txBody>
+            <a:bodyPr wrap="square" rtlCol="0">
+              <a:spAutoFit/>
+            </a:bodyPr>
+            <a:lstStyle/>
+            <a:p>
+              <a:r>
+                <a:rPr lang="en-US" dirty="0" err="1"/>
+                <a:t>Dunvor</a:t>
+              </a:r>
+              <a:endParaRPr lang="en-US" dirty="0"/>
+            </a:p>
+          </p:txBody>
+        </p:sp>
+        <p:sp>
+          <p:nvSpPr>
+            <p:cNvPr id="147" name="Oval 146">
+              <a:extLst>
+                <a:ext uri="{FF2B5EF4-FFF2-40B4-BE49-F238E27FC236}">
+                  <a16:creationId xmlns:a16="http://schemas.microsoft.com/office/drawing/2014/main" id="{7236C944-3E04-C958-3E18-0DA0EA763104}"/>
+                </a:ext>
+              </a:extLst>
+            </p:cNvPr>
+            <p:cNvSpPr/>
+            <p:nvPr/>
+          </p:nvSpPr>
+          <p:spPr>
+            <a:xfrm>
+              <a:off x="8524923" y="5700182"/>
+              <a:ext cx="900000" cy="900000"/>
+            </a:xfrm>
+            <a:prstGeom prst="ellipse">
+              <a:avLst/>
+            </a:prstGeom>
+            <a:noFill/>
+            <a:ln w="38100"/>
+          </p:spPr>
+          <p:style>
+            <a:lnRef idx="2">
+              <a:schemeClr val="accent1">
+                <a:shade val="15000"/>
+              </a:schemeClr>
+            </a:lnRef>
+            <a:fillRef idx="1">
+              <a:schemeClr val="accent1"/>
+            </a:fillRef>
+            <a:effectRef idx="0">
+              <a:schemeClr val="accent1"/>
+            </a:effectRef>
+            <a:fontRef idx="minor">
+              <a:schemeClr val="lt1"/>
+            </a:fontRef>
+          </p:style>
+          <p:txBody>
+            <a:bodyPr rtlCol="0" anchor="ctr"/>
+            <a:lstStyle/>
+            <a:p>
+              <a:pPr algn="ctr"/>
+              <a:endParaRPr lang="en-US"/>
+            </a:p>
+          </p:txBody>
+        </p:sp>
+        <p:sp>
+          <p:nvSpPr>
+            <p:cNvPr id="148" name="TextBox 147">
+              <a:extLst>
+                <a:ext uri="{FF2B5EF4-FFF2-40B4-BE49-F238E27FC236}">
+                  <a16:creationId xmlns:a16="http://schemas.microsoft.com/office/drawing/2014/main" id="{FB687C8D-F8B7-55E4-00D4-FCF77A06E4F2}"/>
+                </a:ext>
+              </a:extLst>
+            </p:cNvPr>
+            <p:cNvSpPr txBox="1"/>
+            <p:nvPr/>
+          </p:nvSpPr>
+          <p:spPr>
+            <a:xfrm>
+              <a:off x="8591816" y="5990750"/>
+              <a:ext cx="959206" cy="369332"/>
+            </a:xfrm>
+            <a:prstGeom prst="rect">
+              <a:avLst/>
+            </a:prstGeom>
+            <a:noFill/>
+          </p:spPr>
+          <p:txBody>
+            <a:bodyPr wrap="square" rtlCol="0">
+              <a:spAutoFit/>
+            </a:bodyPr>
+            <a:lstStyle/>
+            <a:p>
+              <a:r>
+                <a:rPr lang="en-US" dirty="0" err="1"/>
+                <a:t>Elwick</a:t>
+              </a:r>
+              <a:endParaRPr lang="en-US" dirty="0"/>
+            </a:p>
+          </p:txBody>
+        </p:sp>
+        <p:cxnSp>
+          <p:nvCxnSpPr>
+            <p:cNvPr id="149" name="Straight Connector 148">
+              <a:extLst>
+                <a:ext uri="{FF2B5EF4-FFF2-40B4-BE49-F238E27FC236}">
+                  <a16:creationId xmlns:a16="http://schemas.microsoft.com/office/drawing/2014/main" id="{2C33D758-1C23-41A5-9456-B61787FCBB2F}"/>
+                </a:ext>
+              </a:extLst>
+            </p:cNvPr>
+            <p:cNvCxnSpPr>
+              <a:stCxn id="127" idx="4"/>
+              <a:endCxn id="147" idx="1"/>
+            </p:cNvCxnSpPr>
+            <p:nvPr/>
+          </p:nvCxnSpPr>
+          <p:spPr>
+            <a:xfrm>
+              <a:off x="7069389" y="4004216"/>
+              <a:ext cx="1587336" cy="1827768"/>
+            </a:xfrm>
+            <a:prstGeom prst="line">
+              <a:avLst/>
+            </a:prstGeom>
+            <a:ln w="31750">
+              <a:solidFill>
+                <a:schemeClr val="tx1"/>
+              </a:solidFill>
+            </a:ln>
+          </p:spPr>
+          <p:style>
+            <a:lnRef idx="2">
+              <a:schemeClr val="accent1"/>
+            </a:lnRef>
+            <a:fillRef idx="0">
+              <a:schemeClr val="accent1"/>
+            </a:fillRef>
+            <a:effectRef idx="1">
+              <a:schemeClr val="accent1"/>
+            </a:effectRef>
+            <a:fontRef idx="minor">
+              <a:schemeClr val="tx1"/>
+            </a:fontRef>
+          </p:style>
+        </p:cxnSp>
+        <p:cxnSp>
+          <p:nvCxnSpPr>
+            <p:cNvPr id="150" name="Straight Connector 149">
+              <a:extLst>
+                <a:ext uri="{FF2B5EF4-FFF2-40B4-BE49-F238E27FC236}">
+                  <a16:creationId xmlns:a16="http://schemas.microsoft.com/office/drawing/2014/main" id="{89E130D5-873A-605A-DF74-A99838AC16BA}"/>
+                </a:ext>
+              </a:extLst>
+            </p:cNvPr>
+            <p:cNvCxnSpPr>
+              <a:stCxn id="147" idx="0"/>
+              <a:endCxn id="126" idx="4"/>
+            </p:cNvCxnSpPr>
+            <p:nvPr/>
+          </p:nvCxnSpPr>
+          <p:spPr>
+            <a:xfrm flipV="1">
+              <a:off x="8974923" y="5302199"/>
+              <a:ext cx="126099" cy="397983"/>
+            </a:xfrm>
+            <a:prstGeom prst="line">
+              <a:avLst/>
+            </a:prstGeom>
+            <a:ln w="31750">
+              <a:solidFill>
+                <a:schemeClr val="tx1"/>
+              </a:solidFill>
+            </a:ln>
+          </p:spPr>
+          <p:style>
+            <a:lnRef idx="2">
+              <a:schemeClr val="accent1"/>
+            </a:lnRef>
+            <a:fillRef idx="0">
+              <a:schemeClr val="accent1"/>
+            </a:fillRef>
+            <a:effectRef idx="1">
+              <a:schemeClr val="accent1"/>
+            </a:effectRef>
+            <a:fontRef idx="minor">
+              <a:schemeClr val="tx1"/>
+            </a:fontRef>
+          </p:style>
+        </p:cxnSp>
+        <p:sp>
+          <p:nvSpPr>
+            <p:cNvPr id="151" name="TextBox 150">
+              <a:extLst>
+                <a:ext uri="{FF2B5EF4-FFF2-40B4-BE49-F238E27FC236}">
+                  <a16:creationId xmlns:a16="http://schemas.microsoft.com/office/drawing/2014/main" id="{9EA62054-7215-EA59-42B3-FDBBCB76E24F}"/>
+                </a:ext>
+              </a:extLst>
+            </p:cNvPr>
+            <p:cNvSpPr txBox="1"/>
+            <p:nvPr/>
+          </p:nvSpPr>
+          <p:spPr>
+            <a:xfrm>
+              <a:off x="10232655" y="4060447"/>
+              <a:ext cx="654908" cy="461665"/>
+            </a:xfrm>
+            <a:prstGeom prst="rect">
+              <a:avLst/>
+            </a:prstGeom>
+            <a:noFill/>
+          </p:spPr>
+          <p:txBody>
+            <a:bodyPr wrap="square" rtlCol="0">
+              <a:spAutoFit/>
+            </a:bodyPr>
+            <a:lstStyle/>
+            <a:p>
+              <a:pPr algn="ctr"/>
+              <a:r>
+                <a:rPr lang="en-US" sz="2400" dirty="0"/>
+                <a:t>32</a:t>
+              </a:r>
+            </a:p>
+          </p:txBody>
+        </p:sp>
+        <p:sp>
+          <p:nvSpPr>
+            <p:cNvPr id="152" name="TextBox 151">
+              <a:extLst>
+                <a:ext uri="{FF2B5EF4-FFF2-40B4-BE49-F238E27FC236}">
+                  <a16:creationId xmlns:a16="http://schemas.microsoft.com/office/drawing/2014/main" id="{E5624463-9495-5D64-59CE-1B5C9ABBD0E3}"/>
+                </a:ext>
+              </a:extLst>
+            </p:cNvPr>
+            <p:cNvSpPr txBox="1"/>
+            <p:nvPr/>
+          </p:nvSpPr>
+          <p:spPr>
+            <a:xfrm>
+              <a:off x="7906015" y="4004216"/>
+              <a:ext cx="654908" cy="461665"/>
+            </a:xfrm>
+            <a:prstGeom prst="rect">
+              <a:avLst/>
+            </a:prstGeom>
+            <a:noFill/>
+          </p:spPr>
+          <p:txBody>
+            <a:bodyPr wrap="square" rtlCol="0">
+              <a:spAutoFit/>
+            </a:bodyPr>
+            <a:lstStyle/>
+            <a:p>
+              <a:pPr algn="ctr"/>
+              <a:r>
+                <a:rPr lang="en-US" sz="2400" dirty="0"/>
+                <a:t>24</a:t>
+              </a:r>
+            </a:p>
+          </p:txBody>
+        </p:sp>
+        <p:sp>
+          <p:nvSpPr>
+            <p:cNvPr id="153" name="TextBox 152">
+              <a:extLst>
+                <a:ext uri="{FF2B5EF4-FFF2-40B4-BE49-F238E27FC236}">
+                  <a16:creationId xmlns:a16="http://schemas.microsoft.com/office/drawing/2014/main" id="{34D013CB-DB02-4605-84C3-37CF024F87BF}"/>
+                </a:ext>
+              </a:extLst>
+            </p:cNvPr>
+            <p:cNvSpPr txBox="1"/>
+            <p:nvPr/>
+          </p:nvSpPr>
+          <p:spPr>
+            <a:xfrm>
+              <a:off x="7284561" y="4801961"/>
+              <a:ext cx="654908" cy="461665"/>
+            </a:xfrm>
+            <a:prstGeom prst="rect">
+              <a:avLst/>
+            </a:prstGeom>
+            <a:noFill/>
+          </p:spPr>
+          <p:txBody>
+            <a:bodyPr wrap="square" rtlCol="0">
+              <a:spAutoFit/>
+            </a:bodyPr>
+            <a:lstStyle/>
+            <a:p>
+              <a:pPr algn="ctr"/>
+              <a:r>
+                <a:rPr lang="en-US" sz="2400" dirty="0"/>
+                <a:t>41</a:t>
+              </a:r>
+            </a:p>
+          </p:txBody>
+        </p:sp>
+        <p:sp>
+          <p:nvSpPr>
+            <p:cNvPr id="154" name="TextBox 153">
+              <a:extLst>
+                <a:ext uri="{FF2B5EF4-FFF2-40B4-BE49-F238E27FC236}">
+                  <a16:creationId xmlns:a16="http://schemas.microsoft.com/office/drawing/2014/main" id="{D94AEBCF-43E1-DC16-2798-C6F633CF38D6}"/>
+                </a:ext>
+              </a:extLst>
+            </p:cNvPr>
+            <p:cNvSpPr txBox="1"/>
+            <p:nvPr/>
+          </p:nvSpPr>
+          <p:spPr>
+            <a:xfrm>
+              <a:off x="8949907" y="5323799"/>
+              <a:ext cx="654908" cy="461665"/>
+            </a:xfrm>
+            <a:prstGeom prst="rect">
+              <a:avLst/>
+            </a:prstGeom>
+            <a:noFill/>
+          </p:spPr>
+          <p:txBody>
+            <a:bodyPr wrap="square" rtlCol="0">
+              <a:spAutoFit/>
+            </a:bodyPr>
+            <a:lstStyle/>
+            <a:p>
+              <a:pPr algn="ctr"/>
+              <a:r>
+                <a:rPr lang="en-US" sz="2400" dirty="0"/>
+                <a:t>5</a:t>
+              </a:r>
+            </a:p>
+          </p:txBody>
+        </p:sp>
+        <p:sp>
+          <p:nvSpPr>
+            <p:cNvPr id="157" name="TextBox 156">
+              <a:extLst>
+                <a:ext uri="{FF2B5EF4-FFF2-40B4-BE49-F238E27FC236}">
+                  <a16:creationId xmlns:a16="http://schemas.microsoft.com/office/drawing/2014/main" id="{0502A777-EFA5-D949-964E-161252600201}"/>
+                </a:ext>
+              </a:extLst>
+            </p:cNvPr>
+            <p:cNvSpPr txBox="1"/>
+            <p:nvPr/>
+          </p:nvSpPr>
+          <p:spPr>
+            <a:xfrm>
+              <a:off x="7209219" y="1507280"/>
+              <a:ext cx="654908" cy="461665"/>
+            </a:xfrm>
+            <a:prstGeom prst="rect">
+              <a:avLst/>
+            </a:prstGeom>
+            <a:noFill/>
+          </p:spPr>
+          <p:txBody>
+            <a:bodyPr wrap="square" rtlCol="0">
+              <a:spAutoFit/>
+            </a:bodyPr>
+            <a:lstStyle/>
+            <a:p>
+              <a:pPr algn="ctr"/>
+              <a:r>
+                <a:rPr lang="en-US" sz="2400" dirty="0">
+                  <a:solidFill>
+                    <a:schemeClr val="accent1">
+                      <a:lumMod val="60000"/>
+                      <a:lumOff val="40000"/>
+                    </a:schemeClr>
+                  </a:solidFill>
+                </a:rPr>
+                <a:t>35</a:t>
+              </a:r>
+            </a:p>
+          </p:txBody>
+        </p:sp>
+        <p:sp>
+          <p:nvSpPr>
+            <p:cNvPr id="158" name="TextBox 157">
+              <a:extLst>
+                <a:ext uri="{FF2B5EF4-FFF2-40B4-BE49-F238E27FC236}">
+                  <a16:creationId xmlns:a16="http://schemas.microsoft.com/office/drawing/2014/main" id="{7B05C46F-4A21-E57B-EF67-C89DE45F63EC}"/>
+                </a:ext>
+              </a:extLst>
+            </p:cNvPr>
+            <p:cNvSpPr txBox="1"/>
+            <p:nvPr/>
+          </p:nvSpPr>
+          <p:spPr>
+            <a:xfrm>
+              <a:off x="10051478" y="1250142"/>
+              <a:ext cx="654908" cy="461665"/>
+            </a:xfrm>
+            <a:prstGeom prst="rect">
+              <a:avLst/>
+            </a:prstGeom>
+            <a:noFill/>
+          </p:spPr>
+          <p:txBody>
+            <a:bodyPr wrap="square" rtlCol="0">
+              <a:spAutoFit/>
+            </a:bodyPr>
+            <a:lstStyle/>
+            <a:p>
+              <a:pPr algn="ctr"/>
+              <a:r>
+                <a:rPr lang="en-US" sz="2400" dirty="0">
+                  <a:solidFill>
+                    <a:schemeClr val="accent1">
+                      <a:lumMod val="60000"/>
+                      <a:lumOff val="40000"/>
+                    </a:schemeClr>
+                  </a:solidFill>
+                </a:rPr>
+                <a:t>27</a:t>
+              </a:r>
+            </a:p>
+          </p:txBody>
+        </p:sp>
+        <p:sp>
+          <p:nvSpPr>
+            <p:cNvPr id="159" name="TextBox 158">
+              <a:extLst>
+                <a:ext uri="{FF2B5EF4-FFF2-40B4-BE49-F238E27FC236}">
+                  <a16:creationId xmlns:a16="http://schemas.microsoft.com/office/drawing/2014/main" id="{427A000A-9BA2-4FF6-1BB1-EC4FAF0F5DCA}"/>
+                </a:ext>
+              </a:extLst>
+            </p:cNvPr>
+            <p:cNvSpPr txBox="1"/>
+            <p:nvPr/>
+          </p:nvSpPr>
+          <p:spPr>
+            <a:xfrm>
+              <a:off x="8824034" y="1068931"/>
+              <a:ext cx="654908" cy="461665"/>
+            </a:xfrm>
+            <a:prstGeom prst="rect">
+              <a:avLst/>
+            </a:prstGeom>
+            <a:noFill/>
+          </p:spPr>
+          <p:txBody>
+            <a:bodyPr wrap="square" rtlCol="0">
+              <a:spAutoFit/>
+            </a:bodyPr>
+            <a:lstStyle/>
+            <a:p>
+              <a:pPr algn="ctr"/>
+              <a:r>
+                <a:rPr lang="en-US" sz="2400" dirty="0">
+                  <a:solidFill>
+                    <a:schemeClr val="accent1">
+                      <a:lumMod val="60000"/>
+                      <a:lumOff val="40000"/>
+                    </a:schemeClr>
+                  </a:solidFill>
+                </a:rPr>
+                <a:t>5</a:t>
+              </a:r>
+            </a:p>
+          </p:txBody>
+        </p:sp>
+      </p:grpSp>
+    </p:spTree>
+    <p:extLst>
+      <p:ext uri="{BB962C8B-B14F-4D97-AF65-F5344CB8AC3E}">
+        <p14:creationId xmlns:p14="http://schemas.microsoft.com/office/powerpoint/2010/main" val="818822214"/>
+      </p:ext>
+    </p:extLst>
+  </p:cSld>
+  <p:clrMapOvr>
+    <a:masterClrMapping/>
+  </p:clrMapOvr>
+</p:sld>
+</file>
+
 <file path=ppt/theme/theme1.xml><?xml version="1.0" encoding="utf-8"?>
 <a:theme xmlns:a="http://schemas.openxmlformats.org/drawingml/2006/main" name="Office Theme">
   <a:themeElements>

--- a/media/week_8/diagrams_dicts_tuples.pptx
+++ b/media/week_8/diagrams_dicts_tuples.pptx
@@ -114,7 +114,7 @@
   <pc:docChgLst>
     <pc:chgData name="Hemma Philamore" userId="db50e2f3-17b2-4cc0-b719-fb6254d3e9df" providerId="ADAL" clId="{976AD799-FE43-55CA-A221-11B5AB66B93B}"/>
     <pc:docChg chg="undo custSel addSld modSld">
-      <pc:chgData name="Hemma Philamore" userId="db50e2f3-17b2-4cc0-b719-fb6254d3e9df" providerId="ADAL" clId="{976AD799-FE43-55CA-A221-11B5AB66B93B}" dt="2026-10-26T14:29:15.369" v="348" actId="164"/>
+      <pc:chgData name="Hemma Philamore" userId="db50e2f3-17b2-4cc0-b719-fb6254d3e9df" providerId="ADAL" clId="{976AD799-FE43-55CA-A221-11B5AB66B93B}" dt="2026-10-26T16:05:40.984" v="349" actId="164"/>
       <pc:docMkLst>
         <pc:docMk/>
       </pc:docMkLst>
@@ -574,7 +574,7 @@
         </pc:cxnChg>
       </pc:sldChg>
       <pc:sldChg chg="addSp delSp modSp add mod">
-        <pc:chgData name="Hemma Philamore" userId="db50e2f3-17b2-4cc0-b719-fb6254d3e9df" providerId="ADAL" clId="{976AD799-FE43-55CA-A221-11B5AB66B93B}" dt="2026-10-26T14:29:15.369" v="348" actId="164"/>
+        <pc:chgData name="Hemma Philamore" userId="db50e2f3-17b2-4cc0-b719-fb6254d3e9df" providerId="ADAL" clId="{976AD799-FE43-55CA-A221-11B5AB66B93B}" dt="2026-10-26T16:05:40.984" v="349" actId="164"/>
         <pc:sldMkLst>
           <pc:docMk/>
           <pc:sldMk cId="818822214" sldId="258"/>
@@ -1145,6 +1145,14 @@
             <pc:docMk/>
             <pc:sldMk cId="818822214" sldId="258"/>
             <ac:grpSpMk id="161" creationId="{5D5FE7F6-109B-74A6-AA89-B1E5CBDBA62B}"/>
+          </ac:grpSpMkLst>
+        </pc:grpChg>
+        <pc:grpChg chg="add">
+          <ac:chgData name="Hemma Philamore" userId="db50e2f3-17b2-4cc0-b719-fb6254d3e9df" providerId="ADAL" clId="{976AD799-FE43-55CA-A221-11B5AB66B93B}" dt="2026-10-26T16:05:40.984" v="349" actId="164"/>
+          <ac:grpSpMkLst>
+            <pc:docMk/>
+            <pc:sldMk cId="818822214" sldId="258"/>
+            <ac:grpSpMk id="162" creationId="{86826C67-48C5-A1A8-E6FB-030429BB8B9B}"/>
           </ac:grpSpMkLst>
         </pc:grpChg>
         <pc:cxnChg chg="add mod">
@@ -8027,47 +8035,12 @@
           </p:txBody>
         </p:sp>
       </p:grpSp>
-      <p:sp>
-        <p:nvSpPr>
-          <p:cNvPr id="146" name="TextBox 145">
+      <p:grpSp>
+        <p:nvGrpSpPr>
+          <p:cNvPr id="162" name="Group 161">
             <a:extLst>
               <a:ext uri="{FF2B5EF4-FFF2-40B4-BE49-F238E27FC236}">
-                <a16:creationId xmlns:a16="http://schemas.microsoft.com/office/drawing/2014/main" id="{1DE3FE3B-4B7F-9012-3351-08A6C2E2D45D}"/>
-              </a:ext>
-            </a:extLst>
-          </p:cNvPr>
-          <p:cNvSpPr txBox="1"/>
-          <p:nvPr/>
-        </p:nvSpPr>
-        <p:spPr>
-          <a:xfrm>
-            <a:off x="6570805" y="3356801"/>
-            <a:ext cx="1115654" cy="369332"/>
-          </a:xfrm>
-          <a:prstGeom prst="rect">
-            <a:avLst/>
-          </a:prstGeom>
-          <a:noFill/>
-        </p:spPr>
-        <p:txBody>
-          <a:bodyPr wrap="square" rtlCol="0">
-            <a:spAutoFit/>
-          </a:bodyPr>
-          <a:lstStyle/>
-          <a:p>
-            <a:r>
-              <a:rPr lang="en-US" dirty="0"/>
-              <a:t>Fenwick</a:t>
-            </a:r>
-          </a:p>
-        </p:txBody>
-      </p:sp>
-      <p:grpSp>
-        <p:nvGrpSpPr>
-          <p:cNvPr id="161" name="Group 160">
-            <a:extLst>
-              <a:ext uri="{FF2B5EF4-FFF2-40B4-BE49-F238E27FC236}">
-                <a16:creationId xmlns:a16="http://schemas.microsoft.com/office/drawing/2014/main" id="{5D5FE7F6-109B-74A6-AA89-B1E5CBDBA62B}"/>
+                <a16:creationId xmlns:a16="http://schemas.microsoft.com/office/drawing/2014/main" id="{86826C67-48C5-A1A8-E6FB-030429BB8B9B}"/>
               </a:ext>
             </a:extLst>
           </p:cNvPr>
@@ -8076,73 +8049,18 @@
         </p:nvGrpSpPr>
         <p:grpSpPr>
           <a:xfrm>
-            <a:off x="6619389" y="241176"/>
-            <a:ext cx="5517534" cy="6359006"/>
-            <a:chOff x="6619389" y="241176"/>
-            <a:chExt cx="5517534" cy="6359006"/>
+            <a:off x="6570805" y="241176"/>
+            <a:ext cx="5566118" cy="6359006"/>
+            <a:chOff x="6570805" y="241176"/>
+            <a:chExt cx="5566118" cy="6359006"/>
           </a:xfrm>
         </p:grpSpPr>
         <p:sp>
           <p:nvSpPr>
-            <p:cNvPr id="111" name="Oval 110">
+            <p:cNvPr id="146" name="TextBox 145">
               <a:extLst>
                 <a:ext uri="{FF2B5EF4-FFF2-40B4-BE49-F238E27FC236}">
-                  <a16:creationId xmlns:a16="http://schemas.microsoft.com/office/drawing/2014/main" id="{C63B4B8F-493B-2448-8664-868D2B4C7003}"/>
-                </a:ext>
-              </a:extLst>
-            </p:cNvPr>
-            <p:cNvSpPr/>
-            <p:nvPr/>
-          </p:nvSpPr>
-          <p:spPr>
-            <a:xfrm>
-              <a:off x="8455414" y="241176"/>
-              <a:ext cx="900000" cy="900000"/>
-            </a:xfrm>
-            <a:prstGeom prst="ellipse">
-              <a:avLst/>
-            </a:prstGeom>
-            <a:noFill/>
-            <a:ln w="38100">
-              <a:solidFill>
-                <a:schemeClr val="accent1">
-                  <a:lumMod val="60000"/>
-                  <a:lumOff val="40000"/>
-                </a:schemeClr>
-              </a:solidFill>
-            </a:ln>
-          </p:spPr>
-          <p:style>
-            <a:lnRef idx="2">
-              <a:schemeClr val="accent1">
-                <a:shade val="15000"/>
-              </a:schemeClr>
-            </a:lnRef>
-            <a:fillRef idx="1">
-              <a:schemeClr val="accent1"/>
-            </a:fillRef>
-            <a:effectRef idx="0">
-              <a:schemeClr val="accent1"/>
-            </a:effectRef>
-            <a:fontRef idx="minor">
-              <a:schemeClr val="lt1"/>
-            </a:fontRef>
-          </p:style>
-          <p:txBody>
-            <a:bodyPr rtlCol="0" anchor="ctr"/>
-            <a:lstStyle/>
-            <a:p>
-              <a:pPr algn="ctr"/>
-              <a:endParaRPr lang="en-US"/>
-            </a:p>
-          </p:txBody>
-        </p:sp>
-        <p:sp>
-          <p:nvSpPr>
-            <p:cNvPr id="112" name="TextBox 111">
-              <a:extLst>
-                <a:ext uri="{FF2B5EF4-FFF2-40B4-BE49-F238E27FC236}">
-                  <a16:creationId xmlns:a16="http://schemas.microsoft.com/office/drawing/2014/main" id="{7EE30EA5-128D-9698-1BEA-DA7102282D15}"/>
+                  <a16:creationId xmlns:a16="http://schemas.microsoft.com/office/drawing/2014/main" id="{1DE3FE3B-4B7F-9012-3351-08A6C2E2D45D}"/>
                 </a:ext>
               </a:extLst>
             </p:cNvPr>
@@ -8151,1076 +8069,7 @@
           </p:nvSpPr>
           <p:spPr>
             <a:xfrm>
-              <a:off x="8486816" y="506510"/>
-              <a:ext cx="1115654" cy="369332"/>
-            </a:xfrm>
-            <a:prstGeom prst="rect">
-              <a:avLst/>
-            </a:prstGeom>
-            <a:noFill/>
-          </p:spPr>
-          <p:txBody>
-            <a:bodyPr wrap="square" rtlCol="0">
-              <a:spAutoFit/>
-            </a:bodyPr>
-            <a:lstStyle/>
-            <a:p>
-              <a:r>
-                <a:rPr lang="en-US" dirty="0">
-                  <a:solidFill>
-                    <a:schemeClr val="accent1">
-                      <a:lumMod val="60000"/>
-                      <a:lumOff val="40000"/>
-                    </a:schemeClr>
-                  </a:solidFill>
-                </a:rPr>
-                <a:t>Glenby</a:t>
-              </a:r>
-            </a:p>
-          </p:txBody>
-        </p:sp>
-        <p:cxnSp>
-          <p:nvCxnSpPr>
-            <p:cNvPr id="114" name="Straight Connector 113">
-              <a:extLst>
-                <a:ext uri="{FF2B5EF4-FFF2-40B4-BE49-F238E27FC236}">
-                  <a16:creationId xmlns:a16="http://schemas.microsoft.com/office/drawing/2014/main" id="{A773C88E-CD7F-B8F3-11DA-2E159491D435}"/>
-                </a:ext>
-              </a:extLst>
-            </p:cNvPr>
-            <p:cNvCxnSpPr>
-              <a:cxnSpLocks/>
-              <a:stCxn id="111" idx="2"/>
-              <a:endCxn id="127" idx="0"/>
-            </p:cNvCxnSpPr>
-            <p:nvPr/>
-          </p:nvCxnSpPr>
-          <p:spPr>
-            <a:xfrm flipH="1">
-              <a:off x="7069389" y="691176"/>
-              <a:ext cx="1386025" cy="2413040"/>
-            </a:xfrm>
-            <a:prstGeom prst="line">
-              <a:avLst/>
-            </a:prstGeom>
-            <a:ln w="31750">
-              <a:solidFill>
-                <a:schemeClr val="accent1">
-                  <a:lumMod val="60000"/>
-                  <a:lumOff val="40000"/>
-                </a:schemeClr>
-              </a:solidFill>
-            </a:ln>
-          </p:spPr>
-          <p:style>
-            <a:lnRef idx="2">
-              <a:schemeClr val="accent1"/>
-            </a:lnRef>
-            <a:fillRef idx="0">
-              <a:schemeClr val="accent1"/>
-            </a:fillRef>
-            <a:effectRef idx="1">
-              <a:schemeClr val="accent1"/>
-            </a:effectRef>
-            <a:fontRef idx="minor">
-              <a:schemeClr val="tx1"/>
-            </a:fontRef>
-          </p:style>
-        </p:cxnSp>
-        <p:cxnSp>
-          <p:nvCxnSpPr>
-            <p:cNvPr id="115" name="Straight Connector 114">
-              <a:extLst>
-                <a:ext uri="{FF2B5EF4-FFF2-40B4-BE49-F238E27FC236}">
-                  <a16:creationId xmlns:a16="http://schemas.microsoft.com/office/drawing/2014/main" id="{229B8435-9CC1-145D-9CB1-AFEE2646401D}"/>
-                </a:ext>
-              </a:extLst>
-            </p:cNvPr>
-            <p:cNvCxnSpPr>
-              <a:cxnSpLocks/>
-              <a:stCxn id="111" idx="5"/>
-              <a:endCxn id="124" idx="1"/>
-            </p:cNvCxnSpPr>
-            <p:nvPr/>
-          </p:nvCxnSpPr>
-          <p:spPr>
-            <a:xfrm>
-              <a:off x="9223612" y="1009374"/>
-              <a:ext cx="1952320" cy="1262816"/>
-            </a:xfrm>
-            <a:prstGeom prst="line">
-              <a:avLst/>
-            </a:prstGeom>
-            <a:ln w="31750">
-              <a:solidFill>
-                <a:schemeClr val="accent1">
-                  <a:lumMod val="60000"/>
-                  <a:lumOff val="40000"/>
-                </a:schemeClr>
-              </a:solidFill>
-            </a:ln>
-          </p:spPr>
-          <p:style>
-            <a:lnRef idx="2">
-              <a:schemeClr val="accent1"/>
-            </a:lnRef>
-            <a:fillRef idx="0">
-              <a:schemeClr val="accent1"/>
-            </a:fillRef>
-            <a:effectRef idx="1">
-              <a:schemeClr val="accent1"/>
-            </a:effectRef>
-            <a:fontRef idx="minor">
-              <a:schemeClr val="tx1"/>
-            </a:fontRef>
-          </p:style>
-        </p:cxnSp>
-        <p:cxnSp>
-          <p:nvCxnSpPr>
-            <p:cNvPr id="116" name="Straight Connector 115">
-              <a:extLst>
-                <a:ext uri="{FF2B5EF4-FFF2-40B4-BE49-F238E27FC236}">
-                  <a16:creationId xmlns:a16="http://schemas.microsoft.com/office/drawing/2014/main" id="{E198A755-DB47-96A1-1380-08FB2A234AA0}"/>
-                </a:ext>
-              </a:extLst>
-            </p:cNvPr>
-            <p:cNvCxnSpPr>
-              <a:cxnSpLocks/>
-              <a:endCxn id="111" idx="4"/>
-            </p:cNvCxnSpPr>
-            <p:nvPr/>
-          </p:nvCxnSpPr>
-          <p:spPr>
-            <a:xfrm flipH="1" flipV="1">
-              <a:off x="8905414" y="1141176"/>
-              <a:ext cx="46032" cy="384099"/>
-            </a:xfrm>
-            <a:prstGeom prst="line">
-              <a:avLst/>
-            </a:prstGeom>
-            <a:ln w="31750">
-              <a:solidFill>
-                <a:schemeClr val="accent1">
-                  <a:lumMod val="60000"/>
-                  <a:lumOff val="40000"/>
-                </a:schemeClr>
-              </a:solidFill>
-            </a:ln>
-          </p:spPr>
-          <p:style>
-            <a:lnRef idx="2">
-              <a:schemeClr val="accent1"/>
-            </a:lnRef>
-            <a:fillRef idx="0">
-              <a:schemeClr val="accent1"/>
-            </a:fillRef>
-            <a:effectRef idx="1">
-              <a:schemeClr val="accent1"/>
-            </a:effectRef>
-            <a:fontRef idx="minor">
-              <a:schemeClr val="tx1"/>
-            </a:fontRef>
-          </p:style>
-        </p:cxnSp>
-        <p:sp>
-          <p:nvSpPr>
-            <p:cNvPr id="123" name="Oval 122">
-              <a:extLst>
-                <a:ext uri="{FF2B5EF4-FFF2-40B4-BE49-F238E27FC236}">
-                  <a16:creationId xmlns:a16="http://schemas.microsoft.com/office/drawing/2014/main" id="{4365B91A-6F0A-7165-93D9-A7BAA77C22B9}"/>
-                </a:ext>
-              </a:extLst>
-            </p:cNvPr>
-            <p:cNvSpPr/>
-            <p:nvPr/>
-          </p:nvSpPr>
-          <p:spPr>
-            <a:xfrm>
-              <a:off x="8559400" y="1538273"/>
-              <a:ext cx="900000" cy="900000"/>
-            </a:xfrm>
-            <a:prstGeom prst="ellipse">
-              <a:avLst/>
-            </a:prstGeom>
-            <a:noFill/>
-            <a:ln w="38100"/>
-          </p:spPr>
-          <p:style>
-            <a:lnRef idx="2">
-              <a:schemeClr val="accent1">
-                <a:shade val="15000"/>
-              </a:schemeClr>
-            </a:lnRef>
-            <a:fillRef idx="1">
-              <a:schemeClr val="accent1"/>
-            </a:fillRef>
-            <a:effectRef idx="0">
-              <a:schemeClr val="accent1"/>
-            </a:effectRef>
-            <a:fontRef idx="minor">
-              <a:schemeClr val="lt1"/>
-            </a:fontRef>
-          </p:style>
-          <p:txBody>
-            <a:bodyPr rtlCol="0" anchor="ctr"/>
-            <a:lstStyle/>
-            <a:p>
-              <a:pPr algn="ctr"/>
-              <a:endParaRPr lang="en-US"/>
-            </a:p>
-          </p:txBody>
-        </p:sp>
-        <p:sp>
-          <p:nvSpPr>
-            <p:cNvPr id="124" name="Oval 123">
-              <a:extLst>
-                <a:ext uri="{FF2B5EF4-FFF2-40B4-BE49-F238E27FC236}">
-                  <a16:creationId xmlns:a16="http://schemas.microsoft.com/office/drawing/2014/main" id="{A13F0B98-D814-9718-9925-D2611AAF5D33}"/>
-                </a:ext>
-              </a:extLst>
-            </p:cNvPr>
-            <p:cNvSpPr/>
-            <p:nvPr/>
-          </p:nvSpPr>
-          <p:spPr>
-            <a:xfrm>
-              <a:off x="11044130" y="2140388"/>
-              <a:ext cx="900000" cy="900000"/>
-            </a:xfrm>
-            <a:prstGeom prst="ellipse">
-              <a:avLst/>
-            </a:prstGeom>
-            <a:noFill/>
-            <a:ln w="38100"/>
-          </p:spPr>
-          <p:style>
-            <a:lnRef idx="2">
-              <a:schemeClr val="accent1">
-                <a:shade val="15000"/>
-              </a:schemeClr>
-            </a:lnRef>
-            <a:fillRef idx="1">
-              <a:schemeClr val="accent1"/>
-            </a:fillRef>
-            <a:effectRef idx="0">
-              <a:schemeClr val="accent1"/>
-            </a:effectRef>
-            <a:fontRef idx="minor">
-              <a:schemeClr val="lt1"/>
-            </a:fontRef>
-          </p:style>
-          <p:txBody>
-            <a:bodyPr rtlCol="0" anchor="ctr"/>
-            <a:lstStyle/>
-            <a:p>
-              <a:pPr algn="ctr"/>
-              <a:endParaRPr lang="en-US"/>
-            </a:p>
-          </p:txBody>
-        </p:sp>
-        <p:sp>
-          <p:nvSpPr>
-            <p:cNvPr id="125" name="Oval 124">
-              <a:extLst>
-                <a:ext uri="{FF2B5EF4-FFF2-40B4-BE49-F238E27FC236}">
-                  <a16:creationId xmlns:a16="http://schemas.microsoft.com/office/drawing/2014/main" id="{1DA5C821-403F-D821-2B0A-AE1E8AC72B3E}"/>
-                </a:ext>
-              </a:extLst>
-            </p:cNvPr>
-            <p:cNvSpPr/>
-            <p:nvPr/>
-          </p:nvSpPr>
-          <p:spPr>
-            <a:xfrm>
-              <a:off x="9239022" y="2847820"/>
-              <a:ext cx="900000" cy="900000"/>
-            </a:xfrm>
-            <a:prstGeom prst="ellipse">
-              <a:avLst/>
-            </a:prstGeom>
-            <a:noFill/>
-            <a:ln w="38100"/>
-          </p:spPr>
-          <p:style>
-            <a:lnRef idx="2">
-              <a:schemeClr val="accent1">
-                <a:shade val="15000"/>
-              </a:schemeClr>
-            </a:lnRef>
-            <a:fillRef idx="1">
-              <a:schemeClr val="accent1"/>
-            </a:fillRef>
-            <a:effectRef idx="0">
-              <a:schemeClr val="accent1"/>
-            </a:effectRef>
-            <a:fontRef idx="minor">
-              <a:schemeClr val="lt1"/>
-            </a:fontRef>
-          </p:style>
-          <p:txBody>
-            <a:bodyPr rtlCol="0" anchor="ctr"/>
-            <a:lstStyle/>
-            <a:p>
-              <a:pPr algn="ctr"/>
-              <a:endParaRPr lang="en-US"/>
-            </a:p>
-          </p:txBody>
-        </p:sp>
-        <p:sp>
-          <p:nvSpPr>
-            <p:cNvPr id="126" name="Oval 125">
-              <a:extLst>
-                <a:ext uri="{FF2B5EF4-FFF2-40B4-BE49-F238E27FC236}">
-                  <a16:creationId xmlns:a16="http://schemas.microsoft.com/office/drawing/2014/main" id="{D4843A57-934C-3A1F-0951-0A55E54A53F6}"/>
-                </a:ext>
-              </a:extLst>
-            </p:cNvPr>
-            <p:cNvSpPr/>
-            <p:nvPr/>
-          </p:nvSpPr>
-          <p:spPr>
-            <a:xfrm>
-              <a:off x="8651022" y="4402199"/>
-              <a:ext cx="900000" cy="900000"/>
-            </a:xfrm>
-            <a:prstGeom prst="ellipse">
-              <a:avLst/>
-            </a:prstGeom>
-            <a:noFill/>
-            <a:ln w="38100"/>
-          </p:spPr>
-          <p:style>
-            <a:lnRef idx="2">
-              <a:schemeClr val="accent1">
-                <a:shade val="15000"/>
-              </a:schemeClr>
-            </a:lnRef>
-            <a:fillRef idx="1">
-              <a:schemeClr val="accent1"/>
-            </a:fillRef>
-            <a:effectRef idx="0">
-              <a:schemeClr val="accent1"/>
-            </a:effectRef>
-            <a:fontRef idx="minor">
-              <a:schemeClr val="lt1"/>
-            </a:fontRef>
-          </p:style>
-          <p:txBody>
-            <a:bodyPr rtlCol="0" anchor="ctr"/>
-            <a:lstStyle/>
-            <a:p>
-              <a:pPr algn="ctr"/>
-              <a:endParaRPr lang="en-US"/>
-            </a:p>
-          </p:txBody>
-        </p:sp>
-        <p:sp>
-          <p:nvSpPr>
-            <p:cNvPr id="127" name="Oval 126">
-              <a:extLst>
-                <a:ext uri="{FF2B5EF4-FFF2-40B4-BE49-F238E27FC236}">
-                  <a16:creationId xmlns:a16="http://schemas.microsoft.com/office/drawing/2014/main" id="{FA0EAEB6-933C-0344-DB08-6E57355F2543}"/>
-                </a:ext>
-              </a:extLst>
-            </p:cNvPr>
-            <p:cNvSpPr/>
-            <p:nvPr/>
-          </p:nvSpPr>
-          <p:spPr>
-            <a:xfrm>
-              <a:off x="6619389" y="3104216"/>
-              <a:ext cx="900000" cy="900000"/>
-            </a:xfrm>
-            <a:prstGeom prst="ellipse">
-              <a:avLst/>
-            </a:prstGeom>
-            <a:noFill/>
-            <a:ln w="38100"/>
-          </p:spPr>
-          <p:style>
-            <a:lnRef idx="2">
-              <a:schemeClr val="accent1">
-                <a:shade val="15000"/>
-              </a:schemeClr>
-            </a:lnRef>
-            <a:fillRef idx="1">
-              <a:schemeClr val="accent1"/>
-            </a:fillRef>
-            <a:effectRef idx="0">
-              <a:schemeClr val="accent1"/>
-            </a:effectRef>
-            <a:fontRef idx="minor">
-              <a:schemeClr val="lt1"/>
-            </a:fontRef>
-          </p:style>
-          <p:txBody>
-            <a:bodyPr rtlCol="0" anchor="ctr"/>
-            <a:lstStyle/>
-            <a:p>
-              <a:pPr algn="ctr"/>
-              <a:endParaRPr lang="en-US"/>
-            </a:p>
-          </p:txBody>
-        </p:sp>
-        <p:cxnSp>
-          <p:nvCxnSpPr>
-            <p:cNvPr id="128" name="Straight Connector 127">
-              <a:extLst>
-                <a:ext uri="{FF2B5EF4-FFF2-40B4-BE49-F238E27FC236}">
-                  <a16:creationId xmlns:a16="http://schemas.microsoft.com/office/drawing/2014/main" id="{93FA48F9-71C2-9120-04B5-92B03A894FBB}"/>
-                </a:ext>
-              </a:extLst>
-            </p:cNvPr>
-            <p:cNvCxnSpPr>
-              <a:cxnSpLocks/>
-              <a:stCxn id="123" idx="4"/>
-              <a:endCxn id="125" idx="1"/>
-            </p:cNvCxnSpPr>
-            <p:nvPr/>
-          </p:nvCxnSpPr>
-          <p:spPr>
-            <a:xfrm>
-              <a:off x="9009400" y="2438273"/>
-              <a:ext cx="361424" cy="541349"/>
-            </a:xfrm>
-            <a:prstGeom prst="line">
-              <a:avLst/>
-            </a:prstGeom>
-            <a:ln w="31750">
-              <a:solidFill>
-                <a:schemeClr val="tx1"/>
-              </a:solidFill>
-            </a:ln>
-          </p:spPr>
-          <p:style>
-            <a:lnRef idx="2">
-              <a:schemeClr val="accent1"/>
-            </a:lnRef>
-            <a:fillRef idx="0">
-              <a:schemeClr val="accent1"/>
-            </a:fillRef>
-            <a:effectRef idx="1">
-              <a:schemeClr val="accent1"/>
-            </a:effectRef>
-            <a:fontRef idx="minor">
-              <a:schemeClr val="tx1"/>
-            </a:fontRef>
-          </p:style>
-        </p:cxnSp>
-        <p:cxnSp>
-          <p:nvCxnSpPr>
-            <p:cNvPr id="129" name="Straight Connector 128">
-              <a:extLst>
-                <a:ext uri="{FF2B5EF4-FFF2-40B4-BE49-F238E27FC236}">
-                  <a16:creationId xmlns:a16="http://schemas.microsoft.com/office/drawing/2014/main" id="{3DFCCE19-5A7E-8716-3E1C-4DB01E1B5384}"/>
-                </a:ext>
-              </a:extLst>
-            </p:cNvPr>
-            <p:cNvCxnSpPr>
-              <a:stCxn id="123" idx="3"/>
-              <a:endCxn id="127" idx="7"/>
-            </p:cNvCxnSpPr>
-            <p:nvPr/>
-          </p:nvCxnSpPr>
-          <p:spPr>
-            <a:xfrm flipH="1">
-              <a:off x="7387587" y="2306471"/>
-              <a:ext cx="1303615" cy="929547"/>
-            </a:xfrm>
-            <a:prstGeom prst="line">
-              <a:avLst/>
-            </a:prstGeom>
-            <a:ln w="31750">
-              <a:solidFill>
-                <a:schemeClr val="tx1"/>
-              </a:solidFill>
-            </a:ln>
-          </p:spPr>
-          <p:style>
-            <a:lnRef idx="2">
-              <a:schemeClr val="accent1"/>
-            </a:lnRef>
-            <a:fillRef idx="0">
-              <a:schemeClr val="accent1"/>
-            </a:fillRef>
-            <a:effectRef idx="1">
-              <a:schemeClr val="accent1"/>
-            </a:effectRef>
-            <a:fontRef idx="minor">
-              <a:schemeClr val="tx1"/>
-            </a:fontRef>
-          </p:style>
-        </p:cxnSp>
-        <p:cxnSp>
-          <p:nvCxnSpPr>
-            <p:cNvPr id="130" name="Straight Connector 129">
-              <a:extLst>
-                <a:ext uri="{FF2B5EF4-FFF2-40B4-BE49-F238E27FC236}">
-                  <a16:creationId xmlns:a16="http://schemas.microsoft.com/office/drawing/2014/main" id="{30817B24-7AAA-538F-1942-884C5054C71D}"/>
-                </a:ext>
-              </a:extLst>
-            </p:cNvPr>
-            <p:cNvCxnSpPr>
-              <a:stCxn id="127" idx="5"/>
-              <a:endCxn id="126" idx="2"/>
-            </p:cNvCxnSpPr>
-            <p:nvPr/>
-          </p:nvCxnSpPr>
-          <p:spPr>
-            <a:xfrm>
-              <a:off x="7387587" y="3872414"/>
-              <a:ext cx="1263435" cy="979785"/>
-            </a:xfrm>
-            <a:prstGeom prst="line">
-              <a:avLst/>
-            </a:prstGeom>
-            <a:ln w="31750">
-              <a:solidFill>
-                <a:schemeClr val="tx1"/>
-              </a:solidFill>
-            </a:ln>
-          </p:spPr>
-          <p:style>
-            <a:lnRef idx="2">
-              <a:schemeClr val="accent1"/>
-            </a:lnRef>
-            <a:fillRef idx="0">
-              <a:schemeClr val="accent1"/>
-            </a:fillRef>
-            <a:effectRef idx="1">
-              <a:schemeClr val="accent1"/>
-            </a:effectRef>
-            <a:fontRef idx="minor">
-              <a:schemeClr val="tx1"/>
-            </a:fontRef>
-          </p:style>
-        </p:cxnSp>
-        <p:cxnSp>
-          <p:nvCxnSpPr>
-            <p:cNvPr id="131" name="Straight Connector 130">
-              <a:extLst>
-                <a:ext uri="{FF2B5EF4-FFF2-40B4-BE49-F238E27FC236}">
-                  <a16:creationId xmlns:a16="http://schemas.microsoft.com/office/drawing/2014/main" id="{698A2297-D560-157C-5E72-B14519BA8839}"/>
-                </a:ext>
-              </a:extLst>
-            </p:cNvPr>
-            <p:cNvCxnSpPr>
-              <a:stCxn id="127" idx="6"/>
-              <a:endCxn id="125" idx="2"/>
-            </p:cNvCxnSpPr>
-            <p:nvPr/>
-          </p:nvCxnSpPr>
-          <p:spPr>
-            <a:xfrm flipV="1">
-              <a:off x="7519389" y="3297820"/>
-              <a:ext cx="1719633" cy="256396"/>
-            </a:xfrm>
-            <a:prstGeom prst="line">
-              <a:avLst/>
-            </a:prstGeom>
-            <a:ln w="31750">
-              <a:solidFill>
-                <a:srgbClr val="FF0000"/>
-              </a:solidFill>
-            </a:ln>
-          </p:spPr>
-          <p:style>
-            <a:lnRef idx="2">
-              <a:schemeClr val="accent1"/>
-            </a:lnRef>
-            <a:fillRef idx="0">
-              <a:schemeClr val="accent1"/>
-            </a:fillRef>
-            <a:effectRef idx="1">
-              <a:schemeClr val="accent1"/>
-            </a:effectRef>
-            <a:fontRef idx="minor">
-              <a:schemeClr val="tx1"/>
-            </a:fontRef>
-          </p:style>
-        </p:cxnSp>
-        <p:cxnSp>
-          <p:nvCxnSpPr>
-            <p:cNvPr id="132" name="Straight Connector 131">
-              <a:extLst>
-                <a:ext uri="{FF2B5EF4-FFF2-40B4-BE49-F238E27FC236}">
-                  <a16:creationId xmlns:a16="http://schemas.microsoft.com/office/drawing/2014/main" id="{7DC3E761-80DA-4C87-F209-D4482C580FCC}"/>
-                </a:ext>
-              </a:extLst>
-            </p:cNvPr>
-            <p:cNvCxnSpPr>
-              <a:stCxn id="126" idx="7"/>
-              <a:endCxn id="125" idx="4"/>
-            </p:cNvCxnSpPr>
-            <p:nvPr/>
-          </p:nvCxnSpPr>
-          <p:spPr>
-            <a:xfrm flipV="1">
-              <a:off x="9419220" y="3747820"/>
-              <a:ext cx="269802" cy="786181"/>
-            </a:xfrm>
-            <a:prstGeom prst="line">
-              <a:avLst/>
-            </a:prstGeom>
-            <a:ln w="31750">
-              <a:solidFill>
-                <a:schemeClr val="tx1"/>
-              </a:solidFill>
-            </a:ln>
-          </p:spPr>
-          <p:style>
-            <a:lnRef idx="2">
-              <a:schemeClr val="accent1"/>
-            </a:lnRef>
-            <a:fillRef idx="0">
-              <a:schemeClr val="accent1"/>
-            </a:fillRef>
-            <a:effectRef idx="1">
-              <a:schemeClr val="accent1"/>
-            </a:effectRef>
-            <a:fontRef idx="minor">
-              <a:schemeClr val="tx1"/>
-            </a:fontRef>
-          </p:style>
-        </p:cxnSp>
-        <p:cxnSp>
-          <p:nvCxnSpPr>
-            <p:cNvPr id="133" name="Straight Connector 132">
-              <a:extLst>
-                <a:ext uri="{FF2B5EF4-FFF2-40B4-BE49-F238E27FC236}">
-                  <a16:creationId xmlns:a16="http://schemas.microsoft.com/office/drawing/2014/main" id="{72913842-4EBC-B4EC-6E90-D6F7683223BF}"/>
-                </a:ext>
-              </a:extLst>
-            </p:cNvPr>
-            <p:cNvCxnSpPr>
-              <a:stCxn id="123" idx="6"/>
-              <a:endCxn id="124" idx="2"/>
-            </p:cNvCxnSpPr>
-            <p:nvPr/>
-          </p:nvCxnSpPr>
-          <p:spPr>
-            <a:xfrm>
-              <a:off x="9459400" y="1988273"/>
-              <a:ext cx="1584730" cy="602115"/>
-            </a:xfrm>
-            <a:prstGeom prst="line">
-              <a:avLst/>
-            </a:prstGeom>
-            <a:ln w="31750">
-              <a:solidFill>
-                <a:schemeClr val="tx1"/>
-              </a:solidFill>
-            </a:ln>
-          </p:spPr>
-          <p:style>
-            <a:lnRef idx="2">
-              <a:schemeClr val="accent1"/>
-            </a:lnRef>
-            <a:fillRef idx="0">
-              <a:schemeClr val="accent1"/>
-            </a:fillRef>
-            <a:effectRef idx="1">
-              <a:schemeClr val="accent1"/>
-            </a:effectRef>
-            <a:fontRef idx="minor">
-              <a:schemeClr val="tx1"/>
-            </a:fontRef>
-          </p:style>
-        </p:cxnSp>
-        <p:cxnSp>
-          <p:nvCxnSpPr>
-            <p:cNvPr id="134" name="Straight Connector 133">
-              <a:extLst>
-                <a:ext uri="{FF2B5EF4-FFF2-40B4-BE49-F238E27FC236}">
-                  <a16:creationId xmlns:a16="http://schemas.microsoft.com/office/drawing/2014/main" id="{13E0193B-2D0C-349E-DCD1-A7CF5DBF665F}"/>
-                </a:ext>
-              </a:extLst>
-            </p:cNvPr>
-            <p:cNvCxnSpPr>
-              <a:stCxn id="125" idx="6"/>
-              <a:endCxn id="124" idx="3"/>
-            </p:cNvCxnSpPr>
-            <p:nvPr/>
-          </p:nvCxnSpPr>
-          <p:spPr>
-            <a:xfrm flipV="1">
-              <a:off x="10139022" y="2908586"/>
-              <a:ext cx="1036910" cy="389234"/>
-            </a:xfrm>
-            <a:prstGeom prst="line">
-              <a:avLst/>
-            </a:prstGeom>
-            <a:ln w="31750">
-              <a:solidFill>
-                <a:schemeClr val="tx1"/>
-              </a:solidFill>
-            </a:ln>
-          </p:spPr>
-          <p:style>
-            <a:lnRef idx="2">
-              <a:schemeClr val="accent1"/>
-            </a:lnRef>
-            <a:fillRef idx="0">
-              <a:schemeClr val="accent1"/>
-            </a:fillRef>
-            <a:effectRef idx="1">
-              <a:schemeClr val="accent1"/>
-            </a:effectRef>
-            <a:fontRef idx="minor">
-              <a:schemeClr val="tx1"/>
-            </a:fontRef>
-          </p:style>
-        </p:cxnSp>
-        <p:cxnSp>
-          <p:nvCxnSpPr>
-            <p:cNvPr id="135" name="Straight Connector 134">
-              <a:extLst>
-                <a:ext uri="{FF2B5EF4-FFF2-40B4-BE49-F238E27FC236}">
-                  <a16:creationId xmlns:a16="http://schemas.microsoft.com/office/drawing/2014/main" id="{AAE12599-E5EB-E67A-8166-0EE4346D419C}"/>
-                </a:ext>
-              </a:extLst>
-            </p:cNvPr>
-            <p:cNvCxnSpPr>
-              <a:stCxn id="126" idx="6"/>
-              <a:endCxn id="124" idx="4"/>
-            </p:cNvCxnSpPr>
-            <p:nvPr/>
-          </p:nvCxnSpPr>
-          <p:spPr>
-            <a:xfrm flipV="1">
-              <a:off x="9551022" y="3040388"/>
-              <a:ext cx="1943108" cy="1811811"/>
-            </a:xfrm>
-            <a:prstGeom prst="line">
-              <a:avLst/>
-            </a:prstGeom>
-            <a:ln w="31750">
-              <a:solidFill>
-                <a:schemeClr val="tx1"/>
-              </a:solidFill>
-            </a:ln>
-          </p:spPr>
-          <p:style>
-            <a:lnRef idx="2">
-              <a:schemeClr val="accent1"/>
-            </a:lnRef>
-            <a:fillRef idx="0">
-              <a:schemeClr val="accent1"/>
-            </a:fillRef>
-            <a:effectRef idx="1">
-              <a:schemeClr val="accent1"/>
-            </a:effectRef>
-            <a:fontRef idx="minor">
-              <a:schemeClr val="tx1"/>
-            </a:fontRef>
-          </p:style>
-        </p:cxnSp>
-        <p:sp>
-          <p:nvSpPr>
-            <p:cNvPr id="136" name="TextBox 135">
-              <a:extLst>
-                <a:ext uri="{FF2B5EF4-FFF2-40B4-BE49-F238E27FC236}">
-                  <a16:creationId xmlns:a16="http://schemas.microsoft.com/office/drawing/2014/main" id="{40925F2C-3F02-51B7-F32A-7B2C595EA570}"/>
-                </a:ext>
-              </a:extLst>
-            </p:cNvPr>
-            <p:cNvSpPr txBox="1"/>
-            <p:nvPr/>
-          </p:nvSpPr>
-          <p:spPr>
-            <a:xfrm>
-              <a:off x="7520393" y="2441874"/>
-              <a:ext cx="654908" cy="461665"/>
-            </a:xfrm>
-            <a:prstGeom prst="rect">
-              <a:avLst/>
-            </a:prstGeom>
-            <a:noFill/>
-          </p:spPr>
-          <p:txBody>
-            <a:bodyPr wrap="square" rtlCol="0">
-              <a:spAutoFit/>
-            </a:bodyPr>
-            <a:lstStyle/>
-            <a:p>
-              <a:pPr algn="ctr"/>
-              <a:r>
-                <a:rPr lang="en-US" sz="2400" dirty="0"/>
-                <a:t>12</a:t>
-              </a:r>
-            </a:p>
-          </p:txBody>
-        </p:sp>
-        <p:sp>
-          <p:nvSpPr>
-            <p:cNvPr id="137" name="TextBox 136">
-              <a:extLst>
-                <a:ext uri="{FF2B5EF4-FFF2-40B4-BE49-F238E27FC236}">
-                  <a16:creationId xmlns:a16="http://schemas.microsoft.com/office/drawing/2014/main" id="{689C637E-4DD6-DEC8-7294-CE2B309EA958}"/>
-                </a:ext>
-              </a:extLst>
-            </p:cNvPr>
-            <p:cNvSpPr txBox="1"/>
-            <p:nvPr/>
-          </p:nvSpPr>
-          <p:spPr>
-            <a:xfrm>
-              <a:off x="9091766" y="2406381"/>
-              <a:ext cx="654908" cy="461665"/>
-            </a:xfrm>
-            <a:prstGeom prst="rect">
-              <a:avLst/>
-            </a:prstGeom>
-            <a:noFill/>
-          </p:spPr>
-          <p:txBody>
-            <a:bodyPr wrap="square" rtlCol="0">
-              <a:spAutoFit/>
-            </a:bodyPr>
-            <a:lstStyle/>
-            <a:p>
-              <a:pPr algn="ctr"/>
-              <a:r>
-                <a:rPr lang="en-US" sz="2400" dirty="0"/>
-                <a:t>8</a:t>
-              </a:r>
-            </a:p>
-          </p:txBody>
-        </p:sp>
-        <p:sp>
-          <p:nvSpPr>
-            <p:cNvPr id="138" name="TextBox 137">
-              <a:extLst>
-                <a:ext uri="{FF2B5EF4-FFF2-40B4-BE49-F238E27FC236}">
-                  <a16:creationId xmlns:a16="http://schemas.microsoft.com/office/drawing/2014/main" id="{6BDBCF13-8BD8-8619-F8B6-8F1959B8F78C}"/>
-                </a:ext>
-              </a:extLst>
-            </p:cNvPr>
-            <p:cNvSpPr txBox="1"/>
-            <p:nvPr/>
-          </p:nvSpPr>
-          <p:spPr>
-            <a:xfrm>
-              <a:off x="8981577" y="3843927"/>
-              <a:ext cx="654908" cy="461665"/>
-            </a:xfrm>
-            <a:prstGeom prst="rect">
-              <a:avLst/>
-            </a:prstGeom>
-            <a:noFill/>
-          </p:spPr>
-          <p:txBody>
-            <a:bodyPr wrap="square" rtlCol="0">
-              <a:spAutoFit/>
-            </a:bodyPr>
-            <a:lstStyle/>
-            <a:p>
-              <a:pPr algn="ctr"/>
-              <a:r>
-                <a:rPr lang="en-US" sz="2400" dirty="0"/>
-                <a:t>6</a:t>
-              </a:r>
-            </a:p>
-          </p:txBody>
-        </p:sp>
-        <p:sp>
-          <p:nvSpPr>
-            <p:cNvPr id="139" name="TextBox 138">
-              <a:extLst>
-                <a:ext uri="{FF2B5EF4-FFF2-40B4-BE49-F238E27FC236}">
-                  <a16:creationId xmlns:a16="http://schemas.microsoft.com/office/drawing/2014/main" id="{B43BD31F-F83A-5776-2940-6634DB822B8F}"/>
-                </a:ext>
-              </a:extLst>
-            </p:cNvPr>
-            <p:cNvSpPr txBox="1"/>
-            <p:nvPr/>
-          </p:nvSpPr>
-          <p:spPr>
-            <a:xfrm>
-              <a:off x="8033740" y="2969440"/>
-              <a:ext cx="654908" cy="461665"/>
-            </a:xfrm>
-            <a:prstGeom prst="rect">
-              <a:avLst/>
-            </a:prstGeom>
-            <a:noFill/>
-          </p:spPr>
-          <p:txBody>
-            <a:bodyPr wrap="square" rtlCol="0">
-              <a:spAutoFit/>
-            </a:bodyPr>
-            <a:lstStyle/>
-            <a:p>
-              <a:pPr algn="ctr"/>
-              <a:r>
-                <a:rPr lang="en-US" sz="2400" dirty="0">
-                  <a:solidFill>
-                    <a:srgbClr val="FF0000"/>
-                  </a:solidFill>
-                </a:rPr>
-                <a:t>10</a:t>
-              </a:r>
-            </a:p>
-          </p:txBody>
-        </p:sp>
-        <p:sp>
-          <p:nvSpPr>
-            <p:cNvPr id="140" name="TextBox 139">
-              <a:extLst>
-                <a:ext uri="{FF2B5EF4-FFF2-40B4-BE49-F238E27FC236}">
-                  <a16:creationId xmlns:a16="http://schemas.microsoft.com/office/drawing/2014/main" id="{BBFF215E-564A-F5E9-A9AC-1B9BED88CEAD}"/>
-                </a:ext>
-              </a:extLst>
-            </p:cNvPr>
-            <p:cNvSpPr txBox="1"/>
-            <p:nvPr/>
-          </p:nvSpPr>
-          <p:spPr>
-            <a:xfrm>
-              <a:off x="10023658" y="1827665"/>
-              <a:ext cx="654908" cy="461665"/>
-            </a:xfrm>
-            <a:prstGeom prst="rect">
-              <a:avLst/>
-            </a:prstGeom>
-            <a:noFill/>
-          </p:spPr>
-          <p:txBody>
-            <a:bodyPr wrap="square" rtlCol="0">
-              <a:spAutoFit/>
-            </a:bodyPr>
-            <a:lstStyle/>
-            <a:p>
-              <a:pPr algn="ctr"/>
-              <a:r>
-                <a:rPr lang="en-US" sz="2400" dirty="0"/>
-                <a:t>20</a:t>
-              </a:r>
-            </a:p>
-          </p:txBody>
-        </p:sp>
-        <p:sp>
-          <p:nvSpPr>
-            <p:cNvPr id="141" name="TextBox 140">
-              <a:extLst>
-                <a:ext uri="{FF2B5EF4-FFF2-40B4-BE49-F238E27FC236}">
-                  <a16:creationId xmlns:a16="http://schemas.microsoft.com/office/drawing/2014/main" id="{F144E1CC-D36A-DEA3-5C93-D21FC0674635}"/>
-                </a:ext>
-              </a:extLst>
-            </p:cNvPr>
-            <p:cNvSpPr txBox="1"/>
-            <p:nvPr/>
-          </p:nvSpPr>
-          <p:spPr>
-            <a:xfrm>
-              <a:off x="10206440" y="2703801"/>
-              <a:ext cx="654908" cy="461665"/>
-            </a:xfrm>
-            <a:prstGeom prst="rect">
-              <a:avLst/>
-            </a:prstGeom>
-            <a:noFill/>
-          </p:spPr>
-          <p:txBody>
-            <a:bodyPr wrap="square" rtlCol="0">
-              <a:spAutoFit/>
-            </a:bodyPr>
-            <a:lstStyle/>
-            <a:p>
-              <a:pPr algn="ctr"/>
-              <a:r>
-                <a:rPr lang="en-US" sz="2400" dirty="0"/>
-                <a:t>15</a:t>
-              </a:r>
-            </a:p>
-          </p:txBody>
-        </p:sp>
-        <p:sp>
-          <p:nvSpPr>
-            <p:cNvPr id="142" name="TextBox 141">
-              <a:extLst>
-                <a:ext uri="{FF2B5EF4-FFF2-40B4-BE49-F238E27FC236}">
-                  <a16:creationId xmlns:a16="http://schemas.microsoft.com/office/drawing/2014/main" id="{CEAF4C90-AE2C-7827-DCF3-2A271ECD185B}"/>
-                </a:ext>
-              </a:extLst>
-            </p:cNvPr>
-            <p:cNvSpPr txBox="1"/>
-            <p:nvPr/>
-          </p:nvSpPr>
-          <p:spPr>
-            <a:xfrm>
-              <a:off x="8635261" y="1797724"/>
-              <a:ext cx="778107" cy="369332"/>
-            </a:xfrm>
-            <a:prstGeom prst="rect">
-              <a:avLst/>
-            </a:prstGeom>
-            <a:noFill/>
-          </p:spPr>
-          <p:txBody>
-            <a:bodyPr wrap="square" rtlCol="0">
-              <a:spAutoFit/>
-            </a:bodyPr>
-            <a:lstStyle/>
-            <a:p>
-              <a:r>
-                <a:rPr lang="en-US" dirty="0"/>
-                <a:t>Alden</a:t>
-              </a:r>
-            </a:p>
-          </p:txBody>
-        </p:sp>
-        <p:sp>
-          <p:nvSpPr>
-            <p:cNvPr id="143" name="TextBox 142">
-              <a:extLst>
-                <a:ext uri="{FF2B5EF4-FFF2-40B4-BE49-F238E27FC236}">
-                  <a16:creationId xmlns:a16="http://schemas.microsoft.com/office/drawing/2014/main" id="{A13BB8CC-11D2-8E6B-E02E-86FA62612A81}"/>
-                </a:ext>
-              </a:extLst>
-            </p:cNvPr>
-            <p:cNvSpPr txBox="1"/>
-            <p:nvPr/>
-          </p:nvSpPr>
-          <p:spPr>
-            <a:xfrm>
-              <a:off x="11021269" y="2405722"/>
-              <a:ext cx="1115654" cy="369332"/>
-            </a:xfrm>
-            <a:prstGeom prst="rect">
-              <a:avLst/>
-            </a:prstGeom>
-            <a:noFill/>
-          </p:spPr>
-          <p:txBody>
-            <a:bodyPr wrap="square" rtlCol="0">
-              <a:spAutoFit/>
-            </a:bodyPr>
-            <a:lstStyle/>
-            <a:p>
-              <a:r>
-                <a:rPr lang="en-US" dirty="0" err="1"/>
-                <a:t>Brinford</a:t>
-              </a:r>
-              <a:endParaRPr lang="en-US" dirty="0"/>
-            </a:p>
-          </p:txBody>
-        </p:sp>
-        <p:sp>
-          <p:nvSpPr>
-            <p:cNvPr id="144" name="TextBox 143">
-              <a:extLst>
-                <a:ext uri="{FF2B5EF4-FFF2-40B4-BE49-F238E27FC236}">
-                  <a16:creationId xmlns:a16="http://schemas.microsoft.com/office/drawing/2014/main" id="{EBFAB6CE-45C4-BD24-108C-F395F700BD8A}"/>
-                </a:ext>
-              </a:extLst>
-            </p:cNvPr>
-            <p:cNvSpPr txBox="1"/>
-            <p:nvPr/>
-          </p:nvSpPr>
-          <p:spPr>
-            <a:xfrm>
-              <a:off x="8668549" y="4694454"/>
+              <a:off x="6570805" y="3356801"/>
               <a:ext cx="1115654" cy="369332"/>
             </a:xfrm>
             <a:prstGeom prst="rect">
@@ -9236,492 +8085,1672 @@
             <a:p>
               <a:r>
                 <a:rPr lang="en-US" dirty="0"/>
-                <a:t>Caster</a:t>
+                <a:t>Fenwick</a:t>
               </a:r>
             </a:p>
           </p:txBody>
         </p:sp>
-        <p:sp>
-          <p:nvSpPr>
-            <p:cNvPr id="145" name="TextBox 144">
+        <p:grpSp>
+          <p:nvGrpSpPr>
+            <p:cNvPr id="161" name="Group 160">
               <a:extLst>
                 <a:ext uri="{FF2B5EF4-FFF2-40B4-BE49-F238E27FC236}">
-                  <a16:creationId xmlns:a16="http://schemas.microsoft.com/office/drawing/2014/main" id="{682D751E-1538-A972-A34E-222CAC8E8C43}"/>
+                  <a16:creationId xmlns:a16="http://schemas.microsoft.com/office/drawing/2014/main" id="{5D5FE7F6-109B-74A6-AA89-B1E5CBDBA62B}"/>
                 </a:ext>
               </a:extLst>
             </p:cNvPr>
-            <p:cNvSpPr txBox="1"/>
+            <p:cNvGrpSpPr/>
             <p:nvPr/>
-          </p:nvSpPr>
-          <p:spPr>
+          </p:nvGrpSpPr>
+          <p:grpSpPr>
             <a:xfrm>
-              <a:off x="9247011" y="3143802"/>
-              <a:ext cx="1115654" cy="369332"/>
+              <a:off x="6619389" y="241176"/>
+              <a:ext cx="5517534" cy="6359006"/>
+              <a:chOff x="6619389" y="241176"/>
+              <a:chExt cx="5517534" cy="6359006"/>
             </a:xfrm>
-            <a:prstGeom prst="rect">
-              <a:avLst/>
-            </a:prstGeom>
-            <a:noFill/>
-          </p:spPr>
-          <p:txBody>
-            <a:bodyPr wrap="square" rtlCol="0">
-              <a:spAutoFit/>
-            </a:bodyPr>
-            <a:lstStyle/>
-            <a:p>
-              <a:r>
-                <a:rPr lang="en-US" dirty="0" err="1"/>
-                <a:t>Dunvor</a:t>
-              </a:r>
-              <a:endParaRPr lang="en-US" dirty="0"/>
-            </a:p>
-          </p:txBody>
-        </p:sp>
-        <p:sp>
-          <p:nvSpPr>
-            <p:cNvPr id="147" name="Oval 146">
-              <a:extLst>
-                <a:ext uri="{FF2B5EF4-FFF2-40B4-BE49-F238E27FC236}">
-                  <a16:creationId xmlns:a16="http://schemas.microsoft.com/office/drawing/2014/main" id="{7236C944-3E04-C958-3E18-0DA0EA763104}"/>
-                </a:ext>
-              </a:extLst>
-            </p:cNvPr>
-            <p:cNvSpPr/>
-            <p:nvPr/>
-          </p:nvSpPr>
-          <p:spPr>
-            <a:xfrm>
-              <a:off x="8524923" y="5700182"/>
-              <a:ext cx="900000" cy="900000"/>
-            </a:xfrm>
-            <a:prstGeom prst="ellipse">
-              <a:avLst/>
-            </a:prstGeom>
-            <a:noFill/>
-            <a:ln w="38100"/>
-          </p:spPr>
-          <p:style>
-            <a:lnRef idx="2">
-              <a:schemeClr val="accent1">
-                <a:shade val="15000"/>
-              </a:schemeClr>
-            </a:lnRef>
-            <a:fillRef idx="1">
-              <a:schemeClr val="accent1"/>
-            </a:fillRef>
-            <a:effectRef idx="0">
-              <a:schemeClr val="accent1"/>
-            </a:effectRef>
-            <a:fontRef idx="minor">
-              <a:schemeClr val="lt1"/>
-            </a:fontRef>
-          </p:style>
-          <p:txBody>
-            <a:bodyPr rtlCol="0" anchor="ctr"/>
-            <a:lstStyle/>
-            <a:p>
-              <a:pPr algn="ctr"/>
-              <a:endParaRPr lang="en-US"/>
-            </a:p>
-          </p:txBody>
-        </p:sp>
-        <p:sp>
-          <p:nvSpPr>
-            <p:cNvPr id="148" name="TextBox 147">
-              <a:extLst>
-                <a:ext uri="{FF2B5EF4-FFF2-40B4-BE49-F238E27FC236}">
-                  <a16:creationId xmlns:a16="http://schemas.microsoft.com/office/drawing/2014/main" id="{FB687C8D-F8B7-55E4-00D4-FCF77A06E4F2}"/>
-                </a:ext>
-              </a:extLst>
-            </p:cNvPr>
-            <p:cNvSpPr txBox="1"/>
-            <p:nvPr/>
-          </p:nvSpPr>
-          <p:spPr>
-            <a:xfrm>
-              <a:off x="8591816" y="5990750"/>
-              <a:ext cx="959206" cy="369332"/>
-            </a:xfrm>
-            <a:prstGeom prst="rect">
-              <a:avLst/>
-            </a:prstGeom>
-            <a:noFill/>
-          </p:spPr>
-          <p:txBody>
-            <a:bodyPr wrap="square" rtlCol="0">
-              <a:spAutoFit/>
-            </a:bodyPr>
-            <a:lstStyle/>
-            <a:p>
-              <a:r>
-                <a:rPr lang="en-US" dirty="0" err="1"/>
-                <a:t>Elwick</a:t>
-              </a:r>
-              <a:endParaRPr lang="en-US" dirty="0"/>
-            </a:p>
-          </p:txBody>
-        </p:sp>
-        <p:cxnSp>
-          <p:nvCxnSpPr>
-            <p:cNvPr id="149" name="Straight Connector 148">
-              <a:extLst>
-                <a:ext uri="{FF2B5EF4-FFF2-40B4-BE49-F238E27FC236}">
-                  <a16:creationId xmlns:a16="http://schemas.microsoft.com/office/drawing/2014/main" id="{2C33D758-1C23-41A5-9456-B61787FCBB2F}"/>
-                </a:ext>
-              </a:extLst>
-            </p:cNvPr>
-            <p:cNvCxnSpPr>
-              <a:stCxn id="127" idx="4"/>
-              <a:endCxn id="147" idx="1"/>
-            </p:cNvCxnSpPr>
-            <p:nvPr/>
-          </p:nvCxnSpPr>
-          <p:spPr>
-            <a:xfrm>
-              <a:off x="7069389" y="4004216"/>
-              <a:ext cx="1587336" cy="1827768"/>
-            </a:xfrm>
-            <a:prstGeom prst="line">
-              <a:avLst/>
-            </a:prstGeom>
-            <a:ln w="31750">
-              <a:solidFill>
+          </p:grpSpPr>
+          <p:sp>
+            <p:nvSpPr>
+              <p:cNvPr id="111" name="Oval 110">
+                <a:extLst>
+                  <a:ext uri="{FF2B5EF4-FFF2-40B4-BE49-F238E27FC236}">
+                    <a16:creationId xmlns:a16="http://schemas.microsoft.com/office/drawing/2014/main" id="{C63B4B8F-493B-2448-8664-868D2B4C7003}"/>
+                  </a:ext>
+                </a:extLst>
+              </p:cNvPr>
+              <p:cNvSpPr/>
+              <p:nvPr/>
+            </p:nvSpPr>
+            <p:spPr>
+              <a:xfrm>
+                <a:off x="8455414" y="241176"/>
+                <a:ext cx="900000" cy="900000"/>
+              </a:xfrm>
+              <a:prstGeom prst="ellipse">
+                <a:avLst/>
+              </a:prstGeom>
+              <a:noFill/>
+              <a:ln w="38100">
+                <a:solidFill>
+                  <a:schemeClr val="accent1">
+                    <a:lumMod val="60000"/>
+                    <a:lumOff val="40000"/>
+                  </a:schemeClr>
+                </a:solidFill>
+              </a:ln>
+            </p:spPr>
+            <p:style>
+              <a:lnRef idx="2">
+                <a:schemeClr val="accent1">
+                  <a:shade val="15000"/>
+                </a:schemeClr>
+              </a:lnRef>
+              <a:fillRef idx="1">
+                <a:schemeClr val="accent1"/>
+              </a:fillRef>
+              <a:effectRef idx="0">
+                <a:schemeClr val="accent1"/>
+              </a:effectRef>
+              <a:fontRef idx="minor">
+                <a:schemeClr val="lt1"/>
+              </a:fontRef>
+            </p:style>
+            <p:txBody>
+              <a:bodyPr rtlCol="0" anchor="ctr"/>
+              <a:lstStyle/>
+              <a:p>
+                <a:pPr algn="ctr"/>
+                <a:endParaRPr lang="en-US"/>
+              </a:p>
+            </p:txBody>
+          </p:sp>
+          <p:sp>
+            <p:nvSpPr>
+              <p:cNvPr id="112" name="TextBox 111">
+                <a:extLst>
+                  <a:ext uri="{FF2B5EF4-FFF2-40B4-BE49-F238E27FC236}">
+                    <a16:creationId xmlns:a16="http://schemas.microsoft.com/office/drawing/2014/main" id="{7EE30EA5-128D-9698-1BEA-DA7102282D15}"/>
+                  </a:ext>
+                </a:extLst>
+              </p:cNvPr>
+              <p:cNvSpPr txBox="1"/>
+              <p:nvPr/>
+            </p:nvSpPr>
+            <p:spPr>
+              <a:xfrm>
+                <a:off x="8486816" y="506510"/>
+                <a:ext cx="1115654" cy="369332"/>
+              </a:xfrm>
+              <a:prstGeom prst="rect">
+                <a:avLst/>
+              </a:prstGeom>
+              <a:noFill/>
+            </p:spPr>
+            <p:txBody>
+              <a:bodyPr wrap="square" rtlCol="0">
+                <a:spAutoFit/>
+              </a:bodyPr>
+              <a:lstStyle/>
+              <a:p>
+                <a:r>
+                  <a:rPr lang="en-US" dirty="0">
+                    <a:solidFill>
+                      <a:schemeClr val="accent1">
+                        <a:lumMod val="60000"/>
+                        <a:lumOff val="40000"/>
+                      </a:schemeClr>
+                    </a:solidFill>
+                  </a:rPr>
+                  <a:t>Glenby</a:t>
+                </a:r>
+              </a:p>
+            </p:txBody>
+          </p:sp>
+          <p:cxnSp>
+            <p:nvCxnSpPr>
+              <p:cNvPr id="114" name="Straight Connector 113">
+                <a:extLst>
+                  <a:ext uri="{FF2B5EF4-FFF2-40B4-BE49-F238E27FC236}">
+                    <a16:creationId xmlns:a16="http://schemas.microsoft.com/office/drawing/2014/main" id="{A773C88E-CD7F-B8F3-11DA-2E159491D435}"/>
+                  </a:ext>
+                </a:extLst>
+              </p:cNvPr>
+              <p:cNvCxnSpPr>
+                <a:cxnSpLocks/>
+                <a:stCxn id="111" idx="2"/>
+                <a:endCxn id="127" idx="0"/>
+              </p:cNvCxnSpPr>
+              <p:nvPr/>
+            </p:nvCxnSpPr>
+            <p:spPr>
+              <a:xfrm flipH="1">
+                <a:off x="7069389" y="691176"/>
+                <a:ext cx="1386025" cy="2413040"/>
+              </a:xfrm>
+              <a:prstGeom prst="line">
+                <a:avLst/>
+              </a:prstGeom>
+              <a:ln w="31750">
+                <a:solidFill>
+                  <a:schemeClr val="accent1">
+                    <a:lumMod val="60000"/>
+                    <a:lumOff val="40000"/>
+                  </a:schemeClr>
+                </a:solidFill>
+              </a:ln>
+            </p:spPr>
+            <p:style>
+              <a:lnRef idx="2">
+                <a:schemeClr val="accent1"/>
+              </a:lnRef>
+              <a:fillRef idx="0">
+                <a:schemeClr val="accent1"/>
+              </a:fillRef>
+              <a:effectRef idx="1">
+                <a:schemeClr val="accent1"/>
+              </a:effectRef>
+              <a:fontRef idx="minor">
                 <a:schemeClr val="tx1"/>
-              </a:solidFill>
-            </a:ln>
-          </p:spPr>
-          <p:style>
-            <a:lnRef idx="2">
-              <a:schemeClr val="accent1"/>
-            </a:lnRef>
-            <a:fillRef idx="0">
-              <a:schemeClr val="accent1"/>
-            </a:fillRef>
-            <a:effectRef idx="1">
-              <a:schemeClr val="accent1"/>
-            </a:effectRef>
-            <a:fontRef idx="minor">
-              <a:schemeClr val="tx1"/>
-            </a:fontRef>
-          </p:style>
-        </p:cxnSp>
-        <p:cxnSp>
-          <p:nvCxnSpPr>
-            <p:cNvPr id="150" name="Straight Connector 149">
-              <a:extLst>
-                <a:ext uri="{FF2B5EF4-FFF2-40B4-BE49-F238E27FC236}">
-                  <a16:creationId xmlns:a16="http://schemas.microsoft.com/office/drawing/2014/main" id="{89E130D5-873A-605A-DF74-A99838AC16BA}"/>
-                </a:ext>
-              </a:extLst>
-            </p:cNvPr>
-            <p:cNvCxnSpPr>
-              <a:stCxn id="147" idx="0"/>
-              <a:endCxn id="126" idx="4"/>
-            </p:cNvCxnSpPr>
-            <p:nvPr/>
-          </p:nvCxnSpPr>
-          <p:spPr>
-            <a:xfrm flipV="1">
-              <a:off x="8974923" y="5302199"/>
-              <a:ext cx="126099" cy="397983"/>
-            </a:xfrm>
-            <a:prstGeom prst="line">
-              <a:avLst/>
-            </a:prstGeom>
-            <a:ln w="31750">
-              <a:solidFill>
+              </a:fontRef>
+            </p:style>
+          </p:cxnSp>
+          <p:cxnSp>
+            <p:nvCxnSpPr>
+              <p:cNvPr id="115" name="Straight Connector 114">
+                <a:extLst>
+                  <a:ext uri="{FF2B5EF4-FFF2-40B4-BE49-F238E27FC236}">
+                    <a16:creationId xmlns:a16="http://schemas.microsoft.com/office/drawing/2014/main" id="{229B8435-9CC1-145D-9CB1-AFEE2646401D}"/>
+                  </a:ext>
+                </a:extLst>
+              </p:cNvPr>
+              <p:cNvCxnSpPr>
+                <a:cxnSpLocks/>
+                <a:stCxn id="111" idx="5"/>
+                <a:endCxn id="124" idx="1"/>
+              </p:cNvCxnSpPr>
+              <p:nvPr/>
+            </p:nvCxnSpPr>
+            <p:spPr>
+              <a:xfrm>
+                <a:off x="9223612" y="1009374"/>
+                <a:ext cx="1952320" cy="1262816"/>
+              </a:xfrm>
+              <a:prstGeom prst="line">
+                <a:avLst/>
+              </a:prstGeom>
+              <a:ln w="31750">
+                <a:solidFill>
+                  <a:schemeClr val="accent1">
+                    <a:lumMod val="60000"/>
+                    <a:lumOff val="40000"/>
+                  </a:schemeClr>
+                </a:solidFill>
+              </a:ln>
+            </p:spPr>
+            <p:style>
+              <a:lnRef idx="2">
+                <a:schemeClr val="accent1"/>
+              </a:lnRef>
+              <a:fillRef idx="0">
+                <a:schemeClr val="accent1"/>
+              </a:fillRef>
+              <a:effectRef idx="1">
+                <a:schemeClr val="accent1"/>
+              </a:effectRef>
+              <a:fontRef idx="minor">
                 <a:schemeClr val="tx1"/>
-              </a:solidFill>
-            </a:ln>
-          </p:spPr>
-          <p:style>
-            <a:lnRef idx="2">
-              <a:schemeClr val="accent1"/>
-            </a:lnRef>
-            <a:fillRef idx="0">
-              <a:schemeClr val="accent1"/>
-            </a:fillRef>
-            <a:effectRef idx="1">
-              <a:schemeClr val="accent1"/>
-            </a:effectRef>
-            <a:fontRef idx="minor">
-              <a:schemeClr val="tx1"/>
-            </a:fontRef>
-          </p:style>
-        </p:cxnSp>
-        <p:sp>
-          <p:nvSpPr>
-            <p:cNvPr id="151" name="TextBox 150">
-              <a:extLst>
-                <a:ext uri="{FF2B5EF4-FFF2-40B4-BE49-F238E27FC236}">
-                  <a16:creationId xmlns:a16="http://schemas.microsoft.com/office/drawing/2014/main" id="{9EA62054-7215-EA59-42B3-FDBBCB76E24F}"/>
-                </a:ext>
-              </a:extLst>
-            </p:cNvPr>
-            <p:cNvSpPr txBox="1"/>
-            <p:nvPr/>
-          </p:nvSpPr>
-          <p:spPr>
-            <a:xfrm>
-              <a:off x="10232655" y="4060447"/>
-              <a:ext cx="654908" cy="461665"/>
-            </a:xfrm>
-            <a:prstGeom prst="rect">
-              <a:avLst/>
-            </a:prstGeom>
-            <a:noFill/>
-          </p:spPr>
-          <p:txBody>
-            <a:bodyPr wrap="square" rtlCol="0">
-              <a:spAutoFit/>
-            </a:bodyPr>
-            <a:lstStyle/>
-            <a:p>
-              <a:pPr algn="ctr"/>
-              <a:r>
-                <a:rPr lang="en-US" sz="2400" dirty="0"/>
-                <a:t>32</a:t>
-              </a:r>
-            </a:p>
-          </p:txBody>
-        </p:sp>
-        <p:sp>
-          <p:nvSpPr>
-            <p:cNvPr id="152" name="TextBox 151">
-              <a:extLst>
-                <a:ext uri="{FF2B5EF4-FFF2-40B4-BE49-F238E27FC236}">
-                  <a16:creationId xmlns:a16="http://schemas.microsoft.com/office/drawing/2014/main" id="{E5624463-9495-5D64-59CE-1B5C9ABBD0E3}"/>
-                </a:ext>
-              </a:extLst>
-            </p:cNvPr>
-            <p:cNvSpPr txBox="1"/>
-            <p:nvPr/>
-          </p:nvSpPr>
-          <p:spPr>
-            <a:xfrm>
-              <a:off x="7906015" y="4004216"/>
-              <a:ext cx="654908" cy="461665"/>
-            </a:xfrm>
-            <a:prstGeom prst="rect">
-              <a:avLst/>
-            </a:prstGeom>
-            <a:noFill/>
-          </p:spPr>
-          <p:txBody>
-            <a:bodyPr wrap="square" rtlCol="0">
-              <a:spAutoFit/>
-            </a:bodyPr>
-            <a:lstStyle/>
-            <a:p>
-              <a:pPr algn="ctr"/>
-              <a:r>
-                <a:rPr lang="en-US" sz="2400" dirty="0"/>
-                <a:t>24</a:t>
-              </a:r>
-            </a:p>
-          </p:txBody>
-        </p:sp>
-        <p:sp>
-          <p:nvSpPr>
-            <p:cNvPr id="153" name="TextBox 152">
-              <a:extLst>
-                <a:ext uri="{FF2B5EF4-FFF2-40B4-BE49-F238E27FC236}">
-                  <a16:creationId xmlns:a16="http://schemas.microsoft.com/office/drawing/2014/main" id="{34D013CB-DB02-4605-84C3-37CF024F87BF}"/>
-                </a:ext>
-              </a:extLst>
-            </p:cNvPr>
-            <p:cNvSpPr txBox="1"/>
-            <p:nvPr/>
-          </p:nvSpPr>
-          <p:spPr>
-            <a:xfrm>
-              <a:off x="7284561" y="4801961"/>
-              <a:ext cx="654908" cy="461665"/>
-            </a:xfrm>
-            <a:prstGeom prst="rect">
-              <a:avLst/>
-            </a:prstGeom>
-            <a:noFill/>
-          </p:spPr>
-          <p:txBody>
-            <a:bodyPr wrap="square" rtlCol="0">
-              <a:spAutoFit/>
-            </a:bodyPr>
-            <a:lstStyle/>
-            <a:p>
-              <a:pPr algn="ctr"/>
-              <a:r>
-                <a:rPr lang="en-US" sz="2400" dirty="0"/>
-                <a:t>41</a:t>
-              </a:r>
-            </a:p>
-          </p:txBody>
-        </p:sp>
-        <p:sp>
-          <p:nvSpPr>
-            <p:cNvPr id="154" name="TextBox 153">
-              <a:extLst>
-                <a:ext uri="{FF2B5EF4-FFF2-40B4-BE49-F238E27FC236}">
-                  <a16:creationId xmlns:a16="http://schemas.microsoft.com/office/drawing/2014/main" id="{D94AEBCF-43E1-DC16-2798-C6F633CF38D6}"/>
-                </a:ext>
-              </a:extLst>
-            </p:cNvPr>
-            <p:cNvSpPr txBox="1"/>
-            <p:nvPr/>
-          </p:nvSpPr>
-          <p:spPr>
-            <a:xfrm>
-              <a:off x="8949907" y="5323799"/>
-              <a:ext cx="654908" cy="461665"/>
-            </a:xfrm>
-            <a:prstGeom prst="rect">
-              <a:avLst/>
-            </a:prstGeom>
-            <a:noFill/>
-          </p:spPr>
-          <p:txBody>
-            <a:bodyPr wrap="square" rtlCol="0">
-              <a:spAutoFit/>
-            </a:bodyPr>
-            <a:lstStyle/>
-            <a:p>
-              <a:pPr algn="ctr"/>
-              <a:r>
-                <a:rPr lang="en-US" sz="2400" dirty="0"/>
-                <a:t>5</a:t>
-              </a:r>
-            </a:p>
-          </p:txBody>
-        </p:sp>
-        <p:sp>
-          <p:nvSpPr>
-            <p:cNvPr id="157" name="TextBox 156">
-              <a:extLst>
-                <a:ext uri="{FF2B5EF4-FFF2-40B4-BE49-F238E27FC236}">
-                  <a16:creationId xmlns:a16="http://schemas.microsoft.com/office/drawing/2014/main" id="{0502A777-EFA5-D949-964E-161252600201}"/>
-                </a:ext>
-              </a:extLst>
-            </p:cNvPr>
-            <p:cNvSpPr txBox="1"/>
-            <p:nvPr/>
-          </p:nvSpPr>
-          <p:spPr>
-            <a:xfrm>
-              <a:off x="7209219" y="1507280"/>
-              <a:ext cx="654908" cy="461665"/>
-            </a:xfrm>
-            <a:prstGeom prst="rect">
-              <a:avLst/>
-            </a:prstGeom>
-            <a:noFill/>
-          </p:spPr>
-          <p:txBody>
-            <a:bodyPr wrap="square" rtlCol="0">
-              <a:spAutoFit/>
-            </a:bodyPr>
-            <a:lstStyle/>
-            <a:p>
-              <a:pPr algn="ctr"/>
-              <a:r>
-                <a:rPr lang="en-US" sz="2400" dirty="0">
-                  <a:solidFill>
-                    <a:schemeClr val="accent1">
-                      <a:lumMod val="60000"/>
-                      <a:lumOff val="40000"/>
-                    </a:schemeClr>
-                  </a:solidFill>
-                </a:rPr>
-                <a:t>35</a:t>
-              </a:r>
-            </a:p>
-          </p:txBody>
-        </p:sp>
-        <p:sp>
-          <p:nvSpPr>
-            <p:cNvPr id="158" name="TextBox 157">
-              <a:extLst>
-                <a:ext uri="{FF2B5EF4-FFF2-40B4-BE49-F238E27FC236}">
-                  <a16:creationId xmlns:a16="http://schemas.microsoft.com/office/drawing/2014/main" id="{7B05C46F-4A21-E57B-EF67-C89DE45F63EC}"/>
-                </a:ext>
-              </a:extLst>
-            </p:cNvPr>
-            <p:cNvSpPr txBox="1"/>
-            <p:nvPr/>
-          </p:nvSpPr>
-          <p:spPr>
-            <a:xfrm>
-              <a:off x="10051478" y="1250142"/>
-              <a:ext cx="654908" cy="461665"/>
-            </a:xfrm>
-            <a:prstGeom prst="rect">
-              <a:avLst/>
-            </a:prstGeom>
-            <a:noFill/>
-          </p:spPr>
-          <p:txBody>
-            <a:bodyPr wrap="square" rtlCol="0">
-              <a:spAutoFit/>
-            </a:bodyPr>
-            <a:lstStyle/>
-            <a:p>
-              <a:pPr algn="ctr"/>
-              <a:r>
-                <a:rPr lang="en-US" sz="2400" dirty="0">
-                  <a:solidFill>
-                    <a:schemeClr val="accent1">
-                      <a:lumMod val="60000"/>
-                      <a:lumOff val="40000"/>
-                    </a:schemeClr>
-                  </a:solidFill>
-                </a:rPr>
-                <a:t>27</a:t>
-              </a:r>
-            </a:p>
-          </p:txBody>
-        </p:sp>
-        <p:sp>
-          <p:nvSpPr>
-            <p:cNvPr id="159" name="TextBox 158">
-              <a:extLst>
-                <a:ext uri="{FF2B5EF4-FFF2-40B4-BE49-F238E27FC236}">
-                  <a16:creationId xmlns:a16="http://schemas.microsoft.com/office/drawing/2014/main" id="{427A000A-9BA2-4FF6-1BB1-EC4FAF0F5DCA}"/>
-                </a:ext>
-              </a:extLst>
-            </p:cNvPr>
-            <p:cNvSpPr txBox="1"/>
-            <p:nvPr/>
-          </p:nvSpPr>
-          <p:spPr>
-            <a:xfrm>
-              <a:off x="8824034" y="1068931"/>
-              <a:ext cx="654908" cy="461665"/>
-            </a:xfrm>
-            <a:prstGeom prst="rect">
-              <a:avLst/>
-            </a:prstGeom>
-            <a:noFill/>
-          </p:spPr>
-          <p:txBody>
-            <a:bodyPr wrap="square" rtlCol="0">
-              <a:spAutoFit/>
-            </a:bodyPr>
-            <a:lstStyle/>
-            <a:p>
-              <a:pPr algn="ctr"/>
-              <a:r>
-                <a:rPr lang="en-US" sz="2400" dirty="0">
-                  <a:solidFill>
-                    <a:schemeClr val="accent1">
-                      <a:lumMod val="60000"/>
-                      <a:lumOff val="40000"/>
-                    </a:schemeClr>
-                  </a:solidFill>
-                </a:rPr>
-                <a:t>5</a:t>
-              </a:r>
-            </a:p>
-          </p:txBody>
-        </p:sp>
+              </a:fontRef>
+            </p:style>
+          </p:cxnSp>
+          <p:cxnSp>
+            <p:nvCxnSpPr>
+              <p:cNvPr id="116" name="Straight Connector 115">
+                <a:extLst>
+                  <a:ext uri="{FF2B5EF4-FFF2-40B4-BE49-F238E27FC236}">
+                    <a16:creationId xmlns:a16="http://schemas.microsoft.com/office/drawing/2014/main" id="{E198A755-DB47-96A1-1380-08FB2A234AA0}"/>
+                  </a:ext>
+                </a:extLst>
+              </p:cNvPr>
+              <p:cNvCxnSpPr>
+                <a:cxnSpLocks/>
+                <a:endCxn id="111" idx="4"/>
+              </p:cNvCxnSpPr>
+              <p:nvPr/>
+            </p:nvCxnSpPr>
+            <p:spPr>
+              <a:xfrm flipH="1" flipV="1">
+                <a:off x="8905414" y="1141176"/>
+                <a:ext cx="46032" cy="384099"/>
+              </a:xfrm>
+              <a:prstGeom prst="line">
+                <a:avLst/>
+              </a:prstGeom>
+              <a:ln w="31750">
+                <a:solidFill>
+                  <a:schemeClr val="accent1">
+                    <a:lumMod val="60000"/>
+                    <a:lumOff val="40000"/>
+                  </a:schemeClr>
+                </a:solidFill>
+              </a:ln>
+            </p:spPr>
+            <p:style>
+              <a:lnRef idx="2">
+                <a:schemeClr val="accent1"/>
+              </a:lnRef>
+              <a:fillRef idx="0">
+                <a:schemeClr val="accent1"/>
+              </a:fillRef>
+              <a:effectRef idx="1">
+                <a:schemeClr val="accent1"/>
+              </a:effectRef>
+              <a:fontRef idx="minor">
+                <a:schemeClr val="tx1"/>
+              </a:fontRef>
+            </p:style>
+          </p:cxnSp>
+          <p:sp>
+            <p:nvSpPr>
+              <p:cNvPr id="123" name="Oval 122">
+                <a:extLst>
+                  <a:ext uri="{FF2B5EF4-FFF2-40B4-BE49-F238E27FC236}">
+                    <a16:creationId xmlns:a16="http://schemas.microsoft.com/office/drawing/2014/main" id="{4365B91A-6F0A-7165-93D9-A7BAA77C22B9}"/>
+                  </a:ext>
+                </a:extLst>
+              </p:cNvPr>
+              <p:cNvSpPr/>
+              <p:nvPr/>
+            </p:nvSpPr>
+            <p:spPr>
+              <a:xfrm>
+                <a:off x="8559400" y="1538273"/>
+                <a:ext cx="900000" cy="900000"/>
+              </a:xfrm>
+              <a:prstGeom prst="ellipse">
+                <a:avLst/>
+              </a:prstGeom>
+              <a:noFill/>
+              <a:ln w="38100"/>
+            </p:spPr>
+            <p:style>
+              <a:lnRef idx="2">
+                <a:schemeClr val="accent1">
+                  <a:shade val="15000"/>
+                </a:schemeClr>
+              </a:lnRef>
+              <a:fillRef idx="1">
+                <a:schemeClr val="accent1"/>
+              </a:fillRef>
+              <a:effectRef idx="0">
+                <a:schemeClr val="accent1"/>
+              </a:effectRef>
+              <a:fontRef idx="minor">
+                <a:schemeClr val="lt1"/>
+              </a:fontRef>
+            </p:style>
+            <p:txBody>
+              <a:bodyPr rtlCol="0" anchor="ctr"/>
+              <a:lstStyle/>
+              <a:p>
+                <a:pPr algn="ctr"/>
+                <a:endParaRPr lang="en-US"/>
+              </a:p>
+            </p:txBody>
+          </p:sp>
+          <p:sp>
+            <p:nvSpPr>
+              <p:cNvPr id="124" name="Oval 123">
+                <a:extLst>
+                  <a:ext uri="{FF2B5EF4-FFF2-40B4-BE49-F238E27FC236}">
+                    <a16:creationId xmlns:a16="http://schemas.microsoft.com/office/drawing/2014/main" id="{A13F0B98-D814-9718-9925-D2611AAF5D33}"/>
+                  </a:ext>
+                </a:extLst>
+              </p:cNvPr>
+              <p:cNvSpPr/>
+              <p:nvPr/>
+            </p:nvSpPr>
+            <p:spPr>
+              <a:xfrm>
+                <a:off x="11044130" y="2140388"/>
+                <a:ext cx="900000" cy="900000"/>
+              </a:xfrm>
+              <a:prstGeom prst="ellipse">
+                <a:avLst/>
+              </a:prstGeom>
+              <a:noFill/>
+              <a:ln w="38100"/>
+            </p:spPr>
+            <p:style>
+              <a:lnRef idx="2">
+                <a:schemeClr val="accent1">
+                  <a:shade val="15000"/>
+                </a:schemeClr>
+              </a:lnRef>
+              <a:fillRef idx="1">
+                <a:schemeClr val="accent1"/>
+              </a:fillRef>
+              <a:effectRef idx="0">
+                <a:schemeClr val="accent1"/>
+              </a:effectRef>
+              <a:fontRef idx="minor">
+                <a:schemeClr val="lt1"/>
+              </a:fontRef>
+            </p:style>
+            <p:txBody>
+              <a:bodyPr rtlCol="0" anchor="ctr"/>
+              <a:lstStyle/>
+              <a:p>
+                <a:pPr algn="ctr"/>
+                <a:endParaRPr lang="en-US"/>
+              </a:p>
+            </p:txBody>
+          </p:sp>
+          <p:sp>
+            <p:nvSpPr>
+              <p:cNvPr id="125" name="Oval 124">
+                <a:extLst>
+                  <a:ext uri="{FF2B5EF4-FFF2-40B4-BE49-F238E27FC236}">
+                    <a16:creationId xmlns:a16="http://schemas.microsoft.com/office/drawing/2014/main" id="{1DA5C821-403F-D821-2B0A-AE1E8AC72B3E}"/>
+                  </a:ext>
+                </a:extLst>
+              </p:cNvPr>
+              <p:cNvSpPr/>
+              <p:nvPr/>
+            </p:nvSpPr>
+            <p:spPr>
+              <a:xfrm>
+                <a:off x="9239022" y="2847820"/>
+                <a:ext cx="900000" cy="900000"/>
+              </a:xfrm>
+              <a:prstGeom prst="ellipse">
+                <a:avLst/>
+              </a:prstGeom>
+              <a:noFill/>
+              <a:ln w="38100"/>
+            </p:spPr>
+            <p:style>
+              <a:lnRef idx="2">
+                <a:schemeClr val="accent1">
+                  <a:shade val="15000"/>
+                </a:schemeClr>
+              </a:lnRef>
+              <a:fillRef idx="1">
+                <a:schemeClr val="accent1"/>
+              </a:fillRef>
+              <a:effectRef idx="0">
+                <a:schemeClr val="accent1"/>
+              </a:effectRef>
+              <a:fontRef idx="minor">
+                <a:schemeClr val="lt1"/>
+              </a:fontRef>
+            </p:style>
+            <p:txBody>
+              <a:bodyPr rtlCol="0" anchor="ctr"/>
+              <a:lstStyle/>
+              <a:p>
+                <a:pPr algn="ctr"/>
+                <a:endParaRPr lang="en-US"/>
+              </a:p>
+            </p:txBody>
+          </p:sp>
+          <p:sp>
+            <p:nvSpPr>
+              <p:cNvPr id="126" name="Oval 125">
+                <a:extLst>
+                  <a:ext uri="{FF2B5EF4-FFF2-40B4-BE49-F238E27FC236}">
+                    <a16:creationId xmlns:a16="http://schemas.microsoft.com/office/drawing/2014/main" id="{D4843A57-934C-3A1F-0951-0A55E54A53F6}"/>
+                  </a:ext>
+                </a:extLst>
+              </p:cNvPr>
+              <p:cNvSpPr/>
+              <p:nvPr/>
+            </p:nvSpPr>
+            <p:spPr>
+              <a:xfrm>
+                <a:off x="8651022" y="4402199"/>
+                <a:ext cx="900000" cy="900000"/>
+              </a:xfrm>
+              <a:prstGeom prst="ellipse">
+                <a:avLst/>
+              </a:prstGeom>
+              <a:noFill/>
+              <a:ln w="38100"/>
+            </p:spPr>
+            <p:style>
+              <a:lnRef idx="2">
+                <a:schemeClr val="accent1">
+                  <a:shade val="15000"/>
+                </a:schemeClr>
+              </a:lnRef>
+              <a:fillRef idx="1">
+                <a:schemeClr val="accent1"/>
+              </a:fillRef>
+              <a:effectRef idx="0">
+                <a:schemeClr val="accent1"/>
+              </a:effectRef>
+              <a:fontRef idx="minor">
+                <a:schemeClr val="lt1"/>
+              </a:fontRef>
+            </p:style>
+            <p:txBody>
+              <a:bodyPr rtlCol="0" anchor="ctr"/>
+              <a:lstStyle/>
+              <a:p>
+                <a:pPr algn="ctr"/>
+                <a:endParaRPr lang="en-US"/>
+              </a:p>
+            </p:txBody>
+          </p:sp>
+          <p:sp>
+            <p:nvSpPr>
+              <p:cNvPr id="127" name="Oval 126">
+                <a:extLst>
+                  <a:ext uri="{FF2B5EF4-FFF2-40B4-BE49-F238E27FC236}">
+                    <a16:creationId xmlns:a16="http://schemas.microsoft.com/office/drawing/2014/main" id="{FA0EAEB6-933C-0344-DB08-6E57355F2543}"/>
+                  </a:ext>
+                </a:extLst>
+              </p:cNvPr>
+              <p:cNvSpPr/>
+              <p:nvPr/>
+            </p:nvSpPr>
+            <p:spPr>
+              <a:xfrm>
+                <a:off x="6619389" y="3104216"/>
+                <a:ext cx="900000" cy="900000"/>
+              </a:xfrm>
+              <a:prstGeom prst="ellipse">
+                <a:avLst/>
+              </a:prstGeom>
+              <a:noFill/>
+              <a:ln w="38100"/>
+            </p:spPr>
+            <p:style>
+              <a:lnRef idx="2">
+                <a:schemeClr val="accent1">
+                  <a:shade val="15000"/>
+                </a:schemeClr>
+              </a:lnRef>
+              <a:fillRef idx="1">
+                <a:schemeClr val="accent1"/>
+              </a:fillRef>
+              <a:effectRef idx="0">
+                <a:schemeClr val="accent1"/>
+              </a:effectRef>
+              <a:fontRef idx="minor">
+                <a:schemeClr val="lt1"/>
+              </a:fontRef>
+            </p:style>
+            <p:txBody>
+              <a:bodyPr rtlCol="0" anchor="ctr"/>
+              <a:lstStyle/>
+              <a:p>
+                <a:pPr algn="ctr"/>
+                <a:endParaRPr lang="en-US"/>
+              </a:p>
+            </p:txBody>
+          </p:sp>
+          <p:cxnSp>
+            <p:nvCxnSpPr>
+              <p:cNvPr id="128" name="Straight Connector 127">
+                <a:extLst>
+                  <a:ext uri="{FF2B5EF4-FFF2-40B4-BE49-F238E27FC236}">
+                    <a16:creationId xmlns:a16="http://schemas.microsoft.com/office/drawing/2014/main" id="{93FA48F9-71C2-9120-04B5-92B03A894FBB}"/>
+                  </a:ext>
+                </a:extLst>
+              </p:cNvPr>
+              <p:cNvCxnSpPr>
+                <a:cxnSpLocks/>
+                <a:stCxn id="123" idx="4"/>
+                <a:endCxn id="125" idx="1"/>
+              </p:cNvCxnSpPr>
+              <p:nvPr/>
+            </p:nvCxnSpPr>
+            <p:spPr>
+              <a:xfrm>
+                <a:off x="9009400" y="2438273"/>
+                <a:ext cx="361424" cy="541349"/>
+              </a:xfrm>
+              <a:prstGeom prst="line">
+                <a:avLst/>
+              </a:prstGeom>
+              <a:ln w="31750">
+                <a:solidFill>
+                  <a:schemeClr val="tx1"/>
+                </a:solidFill>
+              </a:ln>
+            </p:spPr>
+            <p:style>
+              <a:lnRef idx="2">
+                <a:schemeClr val="accent1"/>
+              </a:lnRef>
+              <a:fillRef idx="0">
+                <a:schemeClr val="accent1"/>
+              </a:fillRef>
+              <a:effectRef idx="1">
+                <a:schemeClr val="accent1"/>
+              </a:effectRef>
+              <a:fontRef idx="minor">
+                <a:schemeClr val="tx1"/>
+              </a:fontRef>
+            </p:style>
+          </p:cxnSp>
+          <p:cxnSp>
+            <p:nvCxnSpPr>
+              <p:cNvPr id="129" name="Straight Connector 128">
+                <a:extLst>
+                  <a:ext uri="{FF2B5EF4-FFF2-40B4-BE49-F238E27FC236}">
+                    <a16:creationId xmlns:a16="http://schemas.microsoft.com/office/drawing/2014/main" id="{3DFCCE19-5A7E-8716-3E1C-4DB01E1B5384}"/>
+                  </a:ext>
+                </a:extLst>
+              </p:cNvPr>
+              <p:cNvCxnSpPr>
+                <a:stCxn id="123" idx="3"/>
+                <a:endCxn id="127" idx="7"/>
+              </p:cNvCxnSpPr>
+              <p:nvPr/>
+            </p:nvCxnSpPr>
+            <p:spPr>
+              <a:xfrm flipH="1">
+                <a:off x="7387587" y="2306471"/>
+                <a:ext cx="1303615" cy="929547"/>
+              </a:xfrm>
+              <a:prstGeom prst="line">
+                <a:avLst/>
+              </a:prstGeom>
+              <a:ln w="31750">
+                <a:solidFill>
+                  <a:schemeClr val="tx1"/>
+                </a:solidFill>
+              </a:ln>
+            </p:spPr>
+            <p:style>
+              <a:lnRef idx="2">
+                <a:schemeClr val="accent1"/>
+              </a:lnRef>
+              <a:fillRef idx="0">
+                <a:schemeClr val="accent1"/>
+              </a:fillRef>
+              <a:effectRef idx="1">
+                <a:schemeClr val="accent1"/>
+              </a:effectRef>
+              <a:fontRef idx="minor">
+                <a:schemeClr val="tx1"/>
+              </a:fontRef>
+            </p:style>
+          </p:cxnSp>
+          <p:cxnSp>
+            <p:nvCxnSpPr>
+              <p:cNvPr id="130" name="Straight Connector 129">
+                <a:extLst>
+                  <a:ext uri="{FF2B5EF4-FFF2-40B4-BE49-F238E27FC236}">
+                    <a16:creationId xmlns:a16="http://schemas.microsoft.com/office/drawing/2014/main" id="{30817B24-7AAA-538F-1942-884C5054C71D}"/>
+                  </a:ext>
+                </a:extLst>
+              </p:cNvPr>
+              <p:cNvCxnSpPr>
+                <a:stCxn id="127" idx="5"/>
+                <a:endCxn id="126" idx="2"/>
+              </p:cNvCxnSpPr>
+              <p:nvPr/>
+            </p:nvCxnSpPr>
+            <p:spPr>
+              <a:xfrm>
+                <a:off x="7387587" y="3872414"/>
+                <a:ext cx="1263435" cy="979785"/>
+              </a:xfrm>
+              <a:prstGeom prst="line">
+                <a:avLst/>
+              </a:prstGeom>
+              <a:ln w="31750">
+                <a:solidFill>
+                  <a:schemeClr val="tx1"/>
+                </a:solidFill>
+              </a:ln>
+            </p:spPr>
+            <p:style>
+              <a:lnRef idx="2">
+                <a:schemeClr val="accent1"/>
+              </a:lnRef>
+              <a:fillRef idx="0">
+                <a:schemeClr val="accent1"/>
+              </a:fillRef>
+              <a:effectRef idx="1">
+                <a:schemeClr val="accent1"/>
+              </a:effectRef>
+              <a:fontRef idx="minor">
+                <a:schemeClr val="tx1"/>
+              </a:fontRef>
+            </p:style>
+          </p:cxnSp>
+          <p:cxnSp>
+            <p:nvCxnSpPr>
+              <p:cNvPr id="131" name="Straight Connector 130">
+                <a:extLst>
+                  <a:ext uri="{FF2B5EF4-FFF2-40B4-BE49-F238E27FC236}">
+                    <a16:creationId xmlns:a16="http://schemas.microsoft.com/office/drawing/2014/main" id="{698A2297-D560-157C-5E72-B14519BA8839}"/>
+                  </a:ext>
+                </a:extLst>
+              </p:cNvPr>
+              <p:cNvCxnSpPr>
+                <a:stCxn id="127" idx="6"/>
+                <a:endCxn id="125" idx="2"/>
+              </p:cNvCxnSpPr>
+              <p:nvPr/>
+            </p:nvCxnSpPr>
+            <p:spPr>
+              <a:xfrm flipV="1">
+                <a:off x="7519389" y="3297820"/>
+                <a:ext cx="1719633" cy="256396"/>
+              </a:xfrm>
+              <a:prstGeom prst="line">
+                <a:avLst/>
+              </a:prstGeom>
+              <a:ln w="31750">
+                <a:solidFill>
+                  <a:srgbClr val="FF0000"/>
+                </a:solidFill>
+              </a:ln>
+            </p:spPr>
+            <p:style>
+              <a:lnRef idx="2">
+                <a:schemeClr val="accent1"/>
+              </a:lnRef>
+              <a:fillRef idx="0">
+                <a:schemeClr val="accent1"/>
+              </a:fillRef>
+              <a:effectRef idx="1">
+                <a:schemeClr val="accent1"/>
+              </a:effectRef>
+              <a:fontRef idx="minor">
+                <a:schemeClr val="tx1"/>
+              </a:fontRef>
+            </p:style>
+          </p:cxnSp>
+          <p:cxnSp>
+            <p:nvCxnSpPr>
+              <p:cNvPr id="132" name="Straight Connector 131">
+                <a:extLst>
+                  <a:ext uri="{FF2B5EF4-FFF2-40B4-BE49-F238E27FC236}">
+                    <a16:creationId xmlns:a16="http://schemas.microsoft.com/office/drawing/2014/main" id="{7DC3E761-80DA-4C87-F209-D4482C580FCC}"/>
+                  </a:ext>
+                </a:extLst>
+              </p:cNvPr>
+              <p:cNvCxnSpPr>
+                <a:stCxn id="126" idx="7"/>
+                <a:endCxn id="125" idx="4"/>
+              </p:cNvCxnSpPr>
+              <p:nvPr/>
+            </p:nvCxnSpPr>
+            <p:spPr>
+              <a:xfrm flipV="1">
+                <a:off x="9419220" y="3747820"/>
+                <a:ext cx="269802" cy="786181"/>
+              </a:xfrm>
+              <a:prstGeom prst="line">
+                <a:avLst/>
+              </a:prstGeom>
+              <a:ln w="31750">
+                <a:solidFill>
+                  <a:schemeClr val="tx1"/>
+                </a:solidFill>
+              </a:ln>
+            </p:spPr>
+            <p:style>
+              <a:lnRef idx="2">
+                <a:schemeClr val="accent1"/>
+              </a:lnRef>
+              <a:fillRef idx="0">
+                <a:schemeClr val="accent1"/>
+              </a:fillRef>
+              <a:effectRef idx="1">
+                <a:schemeClr val="accent1"/>
+              </a:effectRef>
+              <a:fontRef idx="minor">
+                <a:schemeClr val="tx1"/>
+              </a:fontRef>
+            </p:style>
+          </p:cxnSp>
+          <p:cxnSp>
+            <p:nvCxnSpPr>
+              <p:cNvPr id="133" name="Straight Connector 132">
+                <a:extLst>
+                  <a:ext uri="{FF2B5EF4-FFF2-40B4-BE49-F238E27FC236}">
+                    <a16:creationId xmlns:a16="http://schemas.microsoft.com/office/drawing/2014/main" id="{72913842-4EBC-B4EC-6E90-D6F7683223BF}"/>
+                  </a:ext>
+                </a:extLst>
+              </p:cNvPr>
+              <p:cNvCxnSpPr>
+                <a:stCxn id="123" idx="6"/>
+                <a:endCxn id="124" idx="2"/>
+              </p:cNvCxnSpPr>
+              <p:nvPr/>
+            </p:nvCxnSpPr>
+            <p:spPr>
+              <a:xfrm>
+                <a:off x="9459400" y="1988273"/>
+                <a:ext cx="1584730" cy="602115"/>
+              </a:xfrm>
+              <a:prstGeom prst="line">
+                <a:avLst/>
+              </a:prstGeom>
+              <a:ln w="31750">
+                <a:solidFill>
+                  <a:schemeClr val="tx1"/>
+                </a:solidFill>
+              </a:ln>
+            </p:spPr>
+            <p:style>
+              <a:lnRef idx="2">
+                <a:schemeClr val="accent1"/>
+              </a:lnRef>
+              <a:fillRef idx="0">
+                <a:schemeClr val="accent1"/>
+              </a:fillRef>
+              <a:effectRef idx="1">
+                <a:schemeClr val="accent1"/>
+              </a:effectRef>
+              <a:fontRef idx="minor">
+                <a:schemeClr val="tx1"/>
+              </a:fontRef>
+            </p:style>
+          </p:cxnSp>
+          <p:cxnSp>
+            <p:nvCxnSpPr>
+              <p:cNvPr id="134" name="Straight Connector 133">
+                <a:extLst>
+                  <a:ext uri="{FF2B5EF4-FFF2-40B4-BE49-F238E27FC236}">
+                    <a16:creationId xmlns:a16="http://schemas.microsoft.com/office/drawing/2014/main" id="{13E0193B-2D0C-349E-DCD1-A7CF5DBF665F}"/>
+                  </a:ext>
+                </a:extLst>
+              </p:cNvPr>
+              <p:cNvCxnSpPr>
+                <a:stCxn id="125" idx="6"/>
+                <a:endCxn id="124" idx="3"/>
+              </p:cNvCxnSpPr>
+              <p:nvPr/>
+            </p:nvCxnSpPr>
+            <p:spPr>
+              <a:xfrm flipV="1">
+                <a:off x="10139022" y="2908586"/>
+                <a:ext cx="1036910" cy="389234"/>
+              </a:xfrm>
+              <a:prstGeom prst="line">
+                <a:avLst/>
+              </a:prstGeom>
+              <a:ln w="31750">
+                <a:solidFill>
+                  <a:schemeClr val="tx1"/>
+                </a:solidFill>
+              </a:ln>
+            </p:spPr>
+            <p:style>
+              <a:lnRef idx="2">
+                <a:schemeClr val="accent1"/>
+              </a:lnRef>
+              <a:fillRef idx="0">
+                <a:schemeClr val="accent1"/>
+              </a:fillRef>
+              <a:effectRef idx="1">
+                <a:schemeClr val="accent1"/>
+              </a:effectRef>
+              <a:fontRef idx="minor">
+                <a:schemeClr val="tx1"/>
+              </a:fontRef>
+            </p:style>
+          </p:cxnSp>
+          <p:cxnSp>
+            <p:nvCxnSpPr>
+              <p:cNvPr id="135" name="Straight Connector 134">
+                <a:extLst>
+                  <a:ext uri="{FF2B5EF4-FFF2-40B4-BE49-F238E27FC236}">
+                    <a16:creationId xmlns:a16="http://schemas.microsoft.com/office/drawing/2014/main" id="{AAE12599-E5EB-E67A-8166-0EE4346D419C}"/>
+                  </a:ext>
+                </a:extLst>
+              </p:cNvPr>
+              <p:cNvCxnSpPr>
+                <a:stCxn id="126" idx="6"/>
+                <a:endCxn id="124" idx="4"/>
+              </p:cNvCxnSpPr>
+              <p:nvPr/>
+            </p:nvCxnSpPr>
+            <p:spPr>
+              <a:xfrm flipV="1">
+                <a:off x="9551022" y="3040388"/>
+                <a:ext cx="1943108" cy="1811811"/>
+              </a:xfrm>
+              <a:prstGeom prst="line">
+                <a:avLst/>
+              </a:prstGeom>
+              <a:ln w="31750">
+                <a:solidFill>
+                  <a:schemeClr val="tx1"/>
+                </a:solidFill>
+              </a:ln>
+            </p:spPr>
+            <p:style>
+              <a:lnRef idx="2">
+                <a:schemeClr val="accent1"/>
+              </a:lnRef>
+              <a:fillRef idx="0">
+                <a:schemeClr val="accent1"/>
+              </a:fillRef>
+              <a:effectRef idx="1">
+                <a:schemeClr val="accent1"/>
+              </a:effectRef>
+              <a:fontRef idx="minor">
+                <a:schemeClr val="tx1"/>
+              </a:fontRef>
+            </p:style>
+          </p:cxnSp>
+          <p:sp>
+            <p:nvSpPr>
+              <p:cNvPr id="136" name="TextBox 135">
+                <a:extLst>
+                  <a:ext uri="{FF2B5EF4-FFF2-40B4-BE49-F238E27FC236}">
+                    <a16:creationId xmlns:a16="http://schemas.microsoft.com/office/drawing/2014/main" id="{40925F2C-3F02-51B7-F32A-7B2C595EA570}"/>
+                  </a:ext>
+                </a:extLst>
+              </p:cNvPr>
+              <p:cNvSpPr txBox="1"/>
+              <p:nvPr/>
+            </p:nvSpPr>
+            <p:spPr>
+              <a:xfrm>
+                <a:off x="7520393" y="2441874"/>
+                <a:ext cx="654908" cy="461665"/>
+              </a:xfrm>
+              <a:prstGeom prst="rect">
+                <a:avLst/>
+              </a:prstGeom>
+              <a:noFill/>
+            </p:spPr>
+            <p:txBody>
+              <a:bodyPr wrap="square" rtlCol="0">
+                <a:spAutoFit/>
+              </a:bodyPr>
+              <a:lstStyle/>
+              <a:p>
+                <a:pPr algn="ctr"/>
+                <a:r>
+                  <a:rPr lang="en-US" sz="2400" dirty="0"/>
+                  <a:t>12</a:t>
+                </a:r>
+              </a:p>
+            </p:txBody>
+          </p:sp>
+          <p:sp>
+            <p:nvSpPr>
+              <p:cNvPr id="137" name="TextBox 136">
+                <a:extLst>
+                  <a:ext uri="{FF2B5EF4-FFF2-40B4-BE49-F238E27FC236}">
+                    <a16:creationId xmlns:a16="http://schemas.microsoft.com/office/drawing/2014/main" id="{689C637E-4DD6-DEC8-7294-CE2B309EA958}"/>
+                  </a:ext>
+                </a:extLst>
+              </p:cNvPr>
+              <p:cNvSpPr txBox="1"/>
+              <p:nvPr/>
+            </p:nvSpPr>
+            <p:spPr>
+              <a:xfrm>
+                <a:off x="9091766" y="2406381"/>
+                <a:ext cx="654908" cy="461665"/>
+              </a:xfrm>
+              <a:prstGeom prst="rect">
+                <a:avLst/>
+              </a:prstGeom>
+              <a:noFill/>
+            </p:spPr>
+            <p:txBody>
+              <a:bodyPr wrap="square" rtlCol="0">
+                <a:spAutoFit/>
+              </a:bodyPr>
+              <a:lstStyle/>
+              <a:p>
+                <a:pPr algn="ctr"/>
+                <a:r>
+                  <a:rPr lang="en-US" sz="2400" dirty="0"/>
+                  <a:t>8</a:t>
+                </a:r>
+              </a:p>
+            </p:txBody>
+          </p:sp>
+          <p:sp>
+            <p:nvSpPr>
+              <p:cNvPr id="138" name="TextBox 137">
+                <a:extLst>
+                  <a:ext uri="{FF2B5EF4-FFF2-40B4-BE49-F238E27FC236}">
+                    <a16:creationId xmlns:a16="http://schemas.microsoft.com/office/drawing/2014/main" id="{6BDBCF13-8BD8-8619-F8B6-8F1959B8F78C}"/>
+                  </a:ext>
+                </a:extLst>
+              </p:cNvPr>
+              <p:cNvSpPr txBox="1"/>
+              <p:nvPr/>
+            </p:nvSpPr>
+            <p:spPr>
+              <a:xfrm>
+                <a:off x="8981577" y="3843927"/>
+                <a:ext cx="654908" cy="461665"/>
+              </a:xfrm>
+              <a:prstGeom prst="rect">
+                <a:avLst/>
+              </a:prstGeom>
+              <a:noFill/>
+            </p:spPr>
+            <p:txBody>
+              <a:bodyPr wrap="square" rtlCol="0">
+                <a:spAutoFit/>
+              </a:bodyPr>
+              <a:lstStyle/>
+              <a:p>
+                <a:pPr algn="ctr"/>
+                <a:r>
+                  <a:rPr lang="en-US" sz="2400" dirty="0"/>
+                  <a:t>6</a:t>
+                </a:r>
+              </a:p>
+            </p:txBody>
+          </p:sp>
+          <p:sp>
+            <p:nvSpPr>
+              <p:cNvPr id="139" name="TextBox 138">
+                <a:extLst>
+                  <a:ext uri="{FF2B5EF4-FFF2-40B4-BE49-F238E27FC236}">
+                    <a16:creationId xmlns:a16="http://schemas.microsoft.com/office/drawing/2014/main" id="{B43BD31F-F83A-5776-2940-6634DB822B8F}"/>
+                  </a:ext>
+                </a:extLst>
+              </p:cNvPr>
+              <p:cNvSpPr txBox="1"/>
+              <p:nvPr/>
+            </p:nvSpPr>
+            <p:spPr>
+              <a:xfrm>
+                <a:off x="8033740" y="2969440"/>
+                <a:ext cx="654908" cy="461665"/>
+              </a:xfrm>
+              <a:prstGeom prst="rect">
+                <a:avLst/>
+              </a:prstGeom>
+              <a:noFill/>
+            </p:spPr>
+            <p:txBody>
+              <a:bodyPr wrap="square" rtlCol="0">
+                <a:spAutoFit/>
+              </a:bodyPr>
+              <a:lstStyle/>
+              <a:p>
+                <a:pPr algn="ctr"/>
+                <a:r>
+                  <a:rPr lang="en-US" sz="2400" dirty="0">
+                    <a:solidFill>
+                      <a:srgbClr val="FF0000"/>
+                    </a:solidFill>
+                  </a:rPr>
+                  <a:t>10</a:t>
+                </a:r>
+              </a:p>
+            </p:txBody>
+          </p:sp>
+          <p:sp>
+            <p:nvSpPr>
+              <p:cNvPr id="140" name="TextBox 139">
+                <a:extLst>
+                  <a:ext uri="{FF2B5EF4-FFF2-40B4-BE49-F238E27FC236}">
+                    <a16:creationId xmlns:a16="http://schemas.microsoft.com/office/drawing/2014/main" id="{BBFF215E-564A-F5E9-A9AC-1B9BED88CEAD}"/>
+                  </a:ext>
+                </a:extLst>
+              </p:cNvPr>
+              <p:cNvSpPr txBox="1"/>
+              <p:nvPr/>
+            </p:nvSpPr>
+            <p:spPr>
+              <a:xfrm>
+                <a:off x="10023658" y="1827665"/>
+                <a:ext cx="654908" cy="461665"/>
+              </a:xfrm>
+              <a:prstGeom prst="rect">
+                <a:avLst/>
+              </a:prstGeom>
+              <a:noFill/>
+            </p:spPr>
+            <p:txBody>
+              <a:bodyPr wrap="square" rtlCol="0">
+                <a:spAutoFit/>
+              </a:bodyPr>
+              <a:lstStyle/>
+              <a:p>
+                <a:pPr algn="ctr"/>
+                <a:r>
+                  <a:rPr lang="en-US" sz="2400" dirty="0"/>
+                  <a:t>20</a:t>
+                </a:r>
+              </a:p>
+            </p:txBody>
+          </p:sp>
+          <p:sp>
+            <p:nvSpPr>
+              <p:cNvPr id="141" name="TextBox 140">
+                <a:extLst>
+                  <a:ext uri="{FF2B5EF4-FFF2-40B4-BE49-F238E27FC236}">
+                    <a16:creationId xmlns:a16="http://schemas.microsoft.com/office/drawing/2014/main" id="{F144E1CC-D36A-DEA3-5C93-D21FC0674635}"/>
+                  </a:ext>
+                </a:extLst>
+              </p:cNvPr>
+              <p:cNvSpPr txBox="1"/>
+              <p:nvPr/>
+            </p:nvSpPr>
+            <p:spPr>
+              <a:xfrm>
+                <a:off x="10206440" y="2703801"/>
+                <a:ext cx="654908" cy="461665"/>
+              </a:xfrm>
+              <a:prstGeom prst="rect">
+                <a:avLst/>
+              </a:prstGeom>
+              <a:noFill/>
+            </p:spPr>
+            <p:txBody>
+              <a:bodyPr wrap="square" rtlCol="0">
+                <a:spAutoFit/>
+              </a:bodyPr>
+              <a:lstStyle/>
+              <a:p>
+                <a:pPr algn="ctr"/>
+                <a:r>
+                  <a:rPr lang="en-US" sz="2400" dirty="0"/>
+                  <a:t>15</a:t>
+                </a:r>
+              </a:p>
+            </p:txBody>
+          </p:sp>
+          <p:sp>
+            <p:nvSpPr>
+              <p:cNvPr id="142" name="TextBox 141">
+                <a:extLst>
+                  <a:ext uri="{FF2B5EF4-FFF2-40B4-BE49-F238E27FC236}">
+                    <a16:creationId xmlns:a16="http://schemas.microsoft.com/office/drawing/2014/main" id="{CEAF4C90-AE2C-7827-DCF3-2A271ECD185B}"/>
+                  </a:ext>
+                </a:extLst>
+              </p:cNvPr>
+              <p:cNvSpPr txBox="1"/>
+              <p:nvPr/>
+            </p:nvSpPr>
+            <p:spPr>
+              <a:xfrm>
+                <a:off x="8635261" y="1797724"/>
+                <a:ext cx="778107" cy="369332"/>
+              </a:xfrm>
+              <a:prstGeom prst="rect">
+                <a:avLst/>
+              </a:prstGeom>
+              <a:noFill/>
+            </p:spPr>
+            <p:txBody>
+              <a:bodyPr wrap="square" rtlCol="0">
+                <a:spAutoFit/>
+              </a:bodyPr>
+              <a:lstStyle/>
+              <a:p>
+                <a:r>
+                  <a:rPr lang="en-US" dirty="0"/>
+                  <a:t>Alden</a:t>
+                </a:r>
+              </a:p>
+            </p:txBody>
+          </p:sp>
+          <p:sp>
+            <p:nvSpPr>
+              <p:cNvPr id="143" name="TextBox 142">
+                <a:extLst>
+                  <a:ext uri="{FF2B5EF4-FFF2-40B4-BE49-F238E27FC236}">
+                    <a16:creationId xmlns:a16="http://schemas.microsoft.com/office/drawing/2014/main" id="{A13BB8CC-11D2-8E6B-E02E-86FA62612A81}"/>
+                  </a:ext>
+                </a:extLst>
+              </p:cNvPr>
+              <p:cNvSpPr txBox="1"/>
+              <p:nvPr/>
+            </p:nvSpPr>
+            <p:spPr>
+              <a:xfrm>
+                <a:off x="11021269" y="2405722"/>
+                <a:ext cx="1115654" cy="369332"/>
+              </a:xfrm>
+              <a:prstGeom prst="rect">
+                <a:avLst/>
+              </a:prstGeom>
+              <a:noFill/>
+            </p:spPr>
+            <p:txBody>
+              <a:bodyPr wrap="square" rtlCol="0">
+                <a:spAutoFit/>
+              </a:bodyPr>
+              <a:lstStyle/>
+              <a:p>
+                <a:r>
+                  <a:rPr lang="en-US" dirty="0" err="1"/>
+                  <a:t>Brinford</a:t>
+                </a:r>
+                <a:endParaRPr lang="en-US" dirty="0"/>
+              </a:p>
+            </p:txBody>
+          </p:sp>
+          <p:sp>
+            <p:nvSpPr>
+              <p:cNvPr id="144" name="TextBox 143">
+                <a:extLst>
+                  <a:ext uri="{FF2B5EF4-FFF2-40B4-BE49-F238E27FC236}">
+                    <a16:creationId xmlns:a16="http://schemas.microsoft.com/office/drawing/2014/main" id="{EBFAB6CE-45C4-BD24-108C-F395F700BD8A}"/>
+                  </a:ext>
+                </a:extLst>
+              </p:cNvPr>
+              <p:cNvSpPr txBox="1"/>
+              <p:nvPr/>
+            </p:nvSpPr>
+            <p:spPr>
+              <a:xfrm>
+                <a:off x="8668549" y="4694454"/>
+                <a:ext cx="1115654" cy="369332"/>
+              </a:xfrm>
+              <a:prstGeom prst="rect">
+                <a:avLst/>
+              </a:prstGeom>
+              <a:noFill/>
+            </p:spPr>
+            <p:txBody>
+              <a:bodyPr wrap="square" rtlCol="0">
+                <a:spAutoFit/>
+              </a:bodyPr>
+              <a:lstStyle/>
+              <a:p>
+                <a:r>
+                  <a:rPr lang="en-US" dirty="0"/>
+                  <a:t>Caster</a:t>
+                </a:r>
+              </a:p>
+            </p:txBody>
+          </p:sp>
+          <p:sp>
+            <p:nvSpPr>
+              <p:cNvPr id="145" name="TextBox 144">
+                <a:extLst>
+                  <a:ext uri="{FF2B5EF4-FFF2-40B4-BE49-F238E27FC236}">
+                    <a16:creationId xmlns:a16="http://schemas.microsoft.com/office/drawing/2014/main" id="{682D751E-1538-A972-A34E-222CAC8E8C43}"/>
+                  </a:ext>
+                </a:extLst>
+              </p:cNvPr>
+              <p:cNvSpPr txBox="1"/>
+              <p:nvPr/>
+            </p:nvSpPr>
+            <p:spPr>
+              <a:xfrm>
+                <a:off x="9247011" y="3143802"/>
+                <a:ext cx="1115654" cy="369332"/>
+              </a:xfrm>
+              <a:prstGeom prst="rect">
+                <a:avLst/>
+              </a:prstGeom>
+              <a:noFill/>
+            </p:spPr>
+            <p:txBody>
+              <a:bodyPr wrap="square" rtlCol="0">
+                <a:spAutoFit/>
+              </a:bodyPr>
+              <a:lstStyle/>
+              <a:p>
+                <a:r>
+                  <a:rPr lang="en-US" dirty="0" err="1"/>
+                  <a:t>Dunvor</a:t>
+                </a:r>
+                <a:endParaRPr lang="en-US" dirty="0"/>
+              </a:p>
+            </p:txBody>
+          </p:sp>
+          <p:sp>
+            <p:nvSpPr>
+              <p:cNvPr id="147" name="Oval 146">
+                <a:extLst>
+                  <a:ext uri="{FF2B5EF4-FFF2-40B4-BE49-F238E27FC236}">
+                    <a16:creationId xmlns:a16="http://schemas.microsoft.com/office/drawing/2014/main" id="{7236C944-3E04-C958-3E18-0DA0EA763104}"/>
+                  </a:ext>
+                </a:extLst>
+              </p:cNvPr>
+              <p:cNvSpPr/>
+              <p:nvPr/>
+            </p:nvSpPr>
+            <p:spPr>
+              <a:xfrm>
+                <a:off x="8524923" y="5700182"/>
+                <a:ext cx="900000" cy="900000"/>
+              </a:xfrm>
+              <a:prstGeom prst="ellipse">
+                <a:avLst/>
+              </a:prstGeom>
+              <a:noFill/>
+              <a:ln w="38100"/>
+            </p:spPr>
+            <p:style>
+              <a:lnRef idx="2">
+                <a:schemeClr val="accent1">
+                  <a:shade val="15000"/>
+                </a:schemeClr>
+              </a:lnRef>
+              <a:fillRef idx="1">
+                <a:schemeClr val="accent1"/>
+              </a:fillRef>
+              <a:effectRef idx="0">
+                <a:schemeClr val="accent1"/>
+              </a:effectRef>
+              <a:fontRef idx="minor">
+                <a:schemeClr val="lt1"/>
+              </a:fontRef>
+            </p:style>
+            <p:txBody>
+              <a:bodyPr rtlCol="0" anchor="ctr"/>
+              <a:lstStyle/>
+              <a:p>
+                <a:pPr algn="ctr"/>
+                <a:endParaRPr lang="en-US"/>
+              </a:p>
+            </p:txBody>
+          </p:sp>
+          <p:sp>
+            <p:nvSpPr>
+              <p:cNvPr id="148" name="TextBox 147">
+                <a:extLst>
+                  <a:ext uri="{FF2B5EF4-FFF2-40B4-BE49-F238E27FC236}">
+                    <a16:creationId xmlns:a16="http://schemas.microsoft.com/office/drawing/2014/main" id="{FB687C8D-F8B7-55E4-00D4-FCF77A06E4F2}"/>
+                  </a:ext>
+                </a:extLst>
+              </p:cNvPr>
+              <p:cNvSpPr txBox="1"/>
+              <p:nvPr/>
+            </p:nvSpPr>
+            <p:spPr>
+              <a:xfrm>
+                <a:off x="8591816" y="5990750"/>
+                <a:ext cx="959206" cy="369332"/>
+              </a:xfrm>
+              <a:prstGeom prst="rect">
+                <a:avLst/>
+              </a:prstGeom>
+              <a:noFill/>
+            </p:spPr>
+            <p:txBody>
+              <a:bodyPr wrap="square" rtlCol="0">
+                <a:spAutoFit/>
+              </a:bodyPr>
+              <a:lstStyle/>
+              <a:p>
+                <a:r>
+                  <a:rPr lang="en-US" dirty="0" err="1"/>
+                  <a:t>Elwick</a:t>
+                </a:r>
+                <a:endParaRPr lang="en-US" dirty="0"/>
+              </a:p>
+            </p:txBody>
+          </p:sp>
+          <p:cxnSp>
+            <p:nvCxnSpPr>
+              <p:cNvPr id="149" name="Straight Connector 148">
+                <a:extLst>
+                  <a:ext uri="{FF2B5EF4-FFF2-40B4-BE49-F238E27FC236}">
+                    <a16:creationId xmlns:a16="http://schemas.microsoft.com/office/drawing/2014/main" id="{2C33D758-1C23-41A5-9456-B61787FCBB2F}"/>
+                  </a:ext>
+                </a:extLst>
+              </p:cNvPr>
+              <p:cNvCxnSpPr>
+                <a:stCxn id="127" idx="4"/>
+                <a:endCxn id="147" idx="1"/>
+              </p:cNvCxnSpPr>
+              <p:nvPr/>
+            </p:nvCxnSpPr>
+            <p:spPr>
+              <a:xfrm>
+                <a:off x="7069389" y="4004216"/>
+                <a:ext cx="1587336" cy="1827768"/>
+              </a:xfrm>
+              <a:prstGeom prst="line">
+                <a:avLst/>
+              </a:prstGeom>
+              <a:ln w="31750">
+                <a:solidFill>
+                  <a:schemeClr val="tx1"/>
+                </a:solidFill>
+              </a:ln>
+            </p:spPr>
+            <p:style>
+              <a:lnRef idx="2">
+                <a:schemeClr val="accent1"/>
+              </a:lnRef>
+              <a:fillRef idx="0">
+                <a:schemeClr val="accent1"/>
+              </a:fillRef>
+              <a:effectRef idx="1">
+                <a:schemeClr val="accent1"/>
+              </a:effectRef>
+              <a:fontRef idx="minor">
+                <a:schemeClr val="tx1"/>
+              </a:fontRef>
+            </p:style>
+          </p:cxnSp>
+          <p:cxnSp>
+            <p:nvCxnSpPr>
+              <p:cNvPr id="150" name="Straight Connector 149">
+                <a:extLst>
+                  <a:ext uri="{FF2B5EF4-FFF2-40B4-BE49-F238E27FC236}">
+                    <a16:creationId xmlns:a16="http://schemas.microsoft.com/office/drawing/2014/main" id="{89E130D5-873A-605A-DF74-A99838AC16BA}"/>
+                  </a:ext>
+                </a:extLst>
+              </p:cNvPr>
+              <p:cNvCxnSpPr>
+                <a:stCxn id="147" idx="0"/>
+                <a:endCxn id="126" idx="4"/>
+              </p:cNvCxnSpPr>
+              <p:nvPr/>
+            </p:nvCxnSpPr>
+            <p:spPr>
+              <a:xfrm flipV="1">
+                <a:off x="8974923" y="5302199"/>
+                <a:ext cx="126099" cy="397983"/>
+              </a:xfrm>
+              <a:prstGeom prst="line">
+                <a:avLst/>
+              </a:prstGeom>
+              <a:ln w="31750">
+                <a:solidFill>
+                  <a:schemeClr val="tx1"/>
+                </a:solidFill>
+              </a:ln>
+            </p:spPr>
+            <p:style>
+              <a:lnRef idx="2">
+                <a:schemeClr val="accent1"/>
+              </a:lnRef>
+              <a:fillRef idx="0">
+                <a:schemeClr val="accent1"/>
+              </a:fillRef>
+              <a:effectRef idx="1">
+                <a:schemeClr val="accent1"/>
+              </a:effectRef>
+              <a:fontRef idx="minor">
+                <a:schemeClr val="tx1"/>
+              </a:fontRef>
+            </p:style>
+          </p:cxnSp>
+          <p:sp>
+            <p:nvSpPr>
+              <p:cNvPr id="151" name="TextBox 150">
+                <a:extLst>
+                  <a:ext uri="{FF2B5EF4-FFF2-40B4-BE49-F238E27FC236}">
+                    <a16:creationId xmlns:a16="http://schemas.microsoft.com/office/drawing/2014/main" id="{9EA62054-7215-EA59-42B3-FDBBCB76E24F}"/>
+                  </a:ext>
+                </a:extLst>
+              </p:cNvPr>
+              <p:cNvSpPr txBox="1"/>
+              <p:nvPr/>
+            </p:nvSpPr>
+            <p:spPr>
+              <a:xfrm>
+                <a:off x="10232655" y="4060447"/>
+                <a:ext cx="654908" cy="461665"/>
+              </a:xfrm>
+              <a:prstGeom prst="rect">
+                <a:avLst/>
+              </a:prstGeom>
+              <a:noFill/>
+            </p:spPr>
+            <p:txBody>
+              <a:bodyPr wrap="square" rtlCol="0">
+                <a:spAutoFit/>
+              </a:bodyPr>
+              <a:lstStyle/>
+              <a:p>
+                <a:pPr algn="ctr"/>
+                <a:r>
+                  <a:rPr lang="en-US" sz="2400" dirty="0"/>
+                  <a:t>32</a:t>
+                </a:r>
+              </a:p>
+            </p:txBody>
+          </p:sp>
+          <p:sp>
+            <p:nvSpPr>
+              <p:cNvPr id="152" name="TextBox 151">
+                <a:extLst>
+                  <a:ext uri="{FF2B5EF4-FFF2-40B4-BE49-F238E27FC236}">
+                    <a16:creationId xmlns:a16="http://schemas.microsoft.com/office/drawing/2014/main" id="{E5624463-9495-5D64-59CE-1B5C9ABBD0E3}"/>
+                  </a:ext>
+                </a:extLst>
+              </p:cNvPr>
+              <p:cNvSpPr txBox="1"/>
+              <p:nvPr/>
+            </p:nvSpPr>
+            <p:spPr>
+              <a:xfrm>
+                <a:off x="7906015" y="4004216"/>
+                <a:ext cx="654908" cy="461665"/>
+              </a:xfrm>
+              <a:prstGeom prst="rect">
+                <a:avLst/>
+              </a:prstGeom>
+              <a:noFill/>
+            </p:spPr>
+            <p:txBody>
+              <a:bodyPr wrap="square" rtlCol="0">
+                <a:spAutoFit/>
+              </a:bodyPr>
+              <a:lstStyle/>
+              <a:p>
+                <a:pPr algn="ctr"/>
+                <a:r>
+                  <a:rPr lang="en-US" sz="2400" dirty="0"/>
+                  <a:t>24</a:t>
+                </a:r>
+              </a:p>
+            </p:txBody>
+          </p:sp>
+          <p:sp>
+            <p:nvSpPr>
+              <p:cNvPr id="153" name="TextBox 152">
+                <a:extLst>
+                  <a:ext uri="{FF2B5EF4-FFF2-40B4-BE49-F238E27FC236}">
+                    <a16:creationId xmlns:a16="http://schemas.microsoft.com/office/drawing/2014/main" id="{34D013CB-DB02-4605-84C3-37CF024F87BF}"/>
+                  </a:ext>
+                </a:extLst>
+              </p:cNvPr>
+              <p:cNvSpPr txBox="1"/>
+              <p:nvPr/>
+            </p:nvSpPr>
+            <p:spPr>
+              <a:xfrm>
+                <a:off x="7284561" y="4801961"/>
+                <a:ext cx="654908" cy="461665"/>
+              </a:xfrm>
+              <a:prstGeom prst="rect">
+                <a:avLst/>
+              </a:prstGeom>
+              <a:noFill/>
+            </p:spPr>
+            <p:txBody>
+              <a:bodyPr wrap="square" rtlCol="0">
+                <a:spAutoFit/>
+              </a:bodyPr>
+              <a:lstStyle/>
+              <a:p>
+                <a:pPr algn="ctr"/>
+                <a:r>
+                  <a:rPr lang="en-US" sz="2400" dirty="0"/>
+                  <a:t>41</a:t>
+                </a:r>
+              </a:p>
+            </p:txBody>
+          </p:sp>
+          <p:sp>
+            <p:nvSpPr>
+              <p:cNvPr id="154" name="TextBox 153">
+                <a:extLst>
+                  <a:ext uri="{FF2B5EF4-FFF2-40B4-BE49-F238E27FC236}">
+                    <a16:creationId xmlns:a16="http://schemas.microsoft.com/office/drawing/2014/main" id="{D94AEBCF-43E1-DC16-2798-C6F633CF38D6}"/>
+                  </a:ext>
+                </a:extLst>
+              </p:cNvPr>
+              <p:cNvSpPr txBox="1"/>
+              <p:nvPr/>
+            </p:nvSpPr>
+            <p:spPr>
+              <a:xfrm>
+                <a:off x="8949907" y="5323799"/>
+                <a:ext cx="654908" cy="461665"/>
+              </a:xfrm>
+              <a:prstGeom prst="rect">
+                <a:avLst/>
+              </a:prstGeom>
+              <a:noFill/>
+            </p:spPr>
+            <p:txBody>
+              <a:bodyPr wrap="square" rtlCol="0">
+                <a:spAutoFit/>
+              </a:bodyPr>
+              <a:lstStyle/>
+              <a:p>
+                <a:pPr algn="ctr"/>
+                <a:r>
+                  <a:rPr lang="en-US" sz="2400" dirty="0"/>
+                  <a:t>5</a:t>
+                </a:r>
+              </a:p>
+            </p:txBody>
+          </p:sp>
+          <p:sp>
+            <p:nvSpPr>
+              <p:cNvPr id="157" name="TextBox 156">
+                <a:extLst>
+                  <a:ext uri="{FF2B5EF4-FFF2-40B4-BE49-F238E27FC236}">
+                    <a16:creationId xmlns:a16="http://schemas.microsoft.com/office/drawing/2014/main" id="{0502A777-EFA5-D949-964E-161252600201}"/>
+                  </a:ext>
+                </a:extLst>
+              </p:cNvPr>
+              <p:cNvSpPr txBox="1"/>
+              <p:nvPr/>
+            </p:nvSpPr>
+            <p:spPr>
+              <a:xfrm>
+                <a:off x="7209219" y="1507280"/>
+                <a:ext cx="654908" cy="461665"/>
+              </a:xfrm>
+              <a:prstGeom prst="rect">
+                <a:avLst/>
+              </a:prstGeom>
+              <a:noFill/>
+            </p:spPr>
+            <p:txBody>
+              <a:bodyPr wrap="square" rtlCol="0">
+                <a:spAutoFit/>
+              </a:bodyPr>
+              <a:lstStyle/>
+              <a:p>
+                <a:pPr algn="ctr"/>
+                <a:r>
+                  <a:rPr lang="en-US" sz="2400" dirty="0">
+                    <a:solidFill>
+                      <a:schemeClr val="accent1">
+                        <a:lumMod val="60000"/>
+                        <a:lumOff val="40000"/>
+                      </a:schemeClr>
+                    </a:solidFill>
+                  </a:rPr>
+                  <a:t>35</a:t>
+                </a:r>
+              </a:p>
+            </p:txBody>
+          </p:sp>
+          <p:sp>
+            <p:nvSpPr>
+              <p:cNvPr id="158" name="TextBox 157">
+                <a:extLst>
+                  <a:ext uri="{FF2B5EF4-FFF2-40B4-BE49-F238E27FC236}">
+                    <a16:creationId xmlns:a16="http://schemas.microsoft.com/office/drawing/2014/main" id="{7B05C46F-4A21-E57B-EF67-C89DE45F63EC}"/>
+                  </a:ext>
+                </a:extLst>
+              </p:cNvPr>
+              <p:cNvSpPr txBox="1"/>
+              <p:nvPr/>
+            </p:nvSpPr>
+            <p:spPr>
+              <a:xfrm>
+                <a:off x="10051478" y="1250142"/>
+                <a:ext cx="654908" cy="461665"/>
+              </a:xfrm>
+              <a:prstGeom prst="rect">
+                <a:avLst/>
+              </a:prstGeom>
+              <a:noFill/>
+            </p:spPr>
+            <p:txBody>
+              <a:bodyPr wrap="square" rtlCol="0">
+                <a:spAutoFit/>
+              </a:bodyPr>
+              <a:lstStyle/>
+              <a:p>
+                <a:pPr algn="ctr"/>
+                <a:r>
+                  <a:rPr lang="en-US" sz="2400" dirty="0">
+                    <a:solidFill>
+                      <a:schemeClr val="accent1">
+                        <a:lumMod val="60000"/>
+                        <a:lumOff val="40000"/>
+                      </a:schemeClr>
+                    </a:solidFill>
+                  </a:rPr>
+                  <a:t>27</a:t>
+                </a:r>
+              </a:p>
+            </p:txBody>
+          </p:sp>
+          <p:sp>
+            <p:nvSpPr>
+              <p:cNvPr id="159" name="TextBox 158">
+                <a:extLst>
+                  <a:ext uri="{FF2B5EF4-FFF2-40B4-BE49-F238E27FC236}">
+                    <a16:creationId xmlns:a16="http://schemas.microsoft.com/office/drawing/2014/main" id="{427A000A-9BA2-4FF6-1BB1-EC4FAF0F5DCA}"/>
+                  </a:ext>
+                </a:extLst>
+              </p:cNvPr>
+              <p:cNvSpPr txBox="1"/>
+              <p:nvPr/>
+            </p:nvSpPr>
+            <p:spPr>
+              <a:xfrm>
+                <a:off x="8824034" y="1068931"/>
+                <a:ext cx="654908" cy="461665"/>
+              </a:xfrm>
+              <a:prstGeom prst="rect">
+                <a:avLst/>
+              </a:prstGeom>
+              <a:noFill/>
+            </p:spPr>
+            <p:txBody>
+              <a:bodyPr wrap="square" rtlCol="0">
+                <a:spAutoFit/>
+              </a:bodyPr>
+              <a:lstStyle/>
+              <a:p>
+                <a:pPr algn="ctr"/>
+                <a:r>
+                  <a:rPr lang="en-US" sz="2400" dirty="0">
+                    <a:solidFill>
+                      <a:schemeClr val="accent1">
+                        <a:lumMod val="60000"/>
+                        <a:lumOff val="40000"/>
+                      </a:schemeClr>
+                    </a:solidFill>
+                  </a:rPr>
+                  <a:t>5</a:t>
+                </a:r>
+              </a:p>
+            </p:txBody>
+          </p:sp>
+        </p:grpSp>
       </p:grpSp>
     </p:spTree>
     <p:extLst>

--- a/media/week_8/diagrams_dicts_tuples.pptx
+++ b/media/week_8/diagrams_dicts_tuples.pptx
@@ -8,6 +8,8 @@
     <p:sldId id="256" r:id="rId2"/>
     <p:sldId id="257" r:id="rId3"/>
     <p:sldId id="258" r:id="rId4"/>
+    <p:sldId id="259" r:id="rId5"/>
+    <p:sldId id="260" r:id="rId6"/>
   </p:sldIdLst>
   <p:sldSz cx="12192000" cy="6858000"/>
   <p:notesSz cx="6858000" cy="9144000"/>
@@ -106,7 +108,20 @@
       </a:defRPr>
     </a:lvl9pPr>
   </p:defaultTextStyle>
+  <p:extLst>
+    <p:ext uri="{EFAFB233-063F-42B5-8137-9DF3F51BA10A}">
+      <p15:sldGuideLst xmlns:p15="http://schemas.microsoft.com/office/powerpoint/2012/main"/>
+    </p:ext>
+  </p:extLst>
 </p:presentation>
+</file>
+
+<file path=ppt/revisionInfo.xml><?xml version="1.0" encoding="utf-8"?>
+<p1510:revInfo xmlns:a="http://schemas.openxmlformats.org/drawingml/2006/main" xmlns:r="http://schemas.openxmlformats.org/officeDocument/2006/relationships" xmlns:p1510="http://schemas.microsoft.com/office/powerpoint/2015/10/main">
+  <p1510:revLst>
+    <p1510:client id="{3DC55E8D-F384-8748-BD76-03BB5D3EA7AB}" v="235" dt="2026-10-28T00:48:50.562"/>
+  </p1510:revLst>
+</p1510:revInfo>
 </file>
 
 <file path=ppt/changesInfos/changesInfo1.xml><?xml version="1.0" encoding="utf-8"?>
@@ -1297,6 +1312,253 @@
             <pc:docMk/>
             <pc:sldMk cId="818822214" sldId="258"/>
             <ac:cxnSpMk id="131" creationId="{698A2297-D560-157C-5E72-B14519BA8839}"/>
+          </ac:cxnSpMkLst>
+        </pc:cxnChg>
+      </pc:sldChg>
+    </pc:docChg>
+  </pc:docChgLst>
+  <pc:docChgLst>
+    <pc:chgData name="Hemma Philamore" userId="db50e2f3-17b2-4cc0-b719-fb6254d3e9df" providerId="ADAL" clId="{B5D85944-D90A-5912-90C6-4C26E424D3D6}"/>
+    <pc:docChg chg="undo custSel addSld modSld">
+      <pc:chgData name="Hemma Philamore" userId="db50e2f3-17b2-4cc0-b719-fb6254d3e9df" providerId="ADAL" clId="{B5D85944-D90A-5912-90C6-4C26E424D3D6}" dt="2026-10-28T00:48:50.562" v="234" actId="164"/>
+      <pc:docMkLst>
+        <pc:docMk/>
+      </pc:docMkLst>
+      <pc:sldChg chg="addSp modSp new mod">
+        <pc:chgData name="Hemma Philamore" userId="db50e2f3-17b2-4cc0-b719-fb6254d3e9df" providerId="ADAL" clId="{B5D85944-D90A-5912-90C6-4C26E424D3D6}" dt="2026-10-28T00:34:51.193" v="12" actId="1076"/>
+        <pc:sldMkLst>
+          <pc:docMk/>
+          <pc:sldMk cId="110236372" sldId="259"/>
+        </pc:sldMkLst>
+        <pc:picChg chg="add mod">
+          <ac:chgData name="Hemma Philamore" userId="db50e2f3-17b2-4cc0-b719-fb6254d3e9df" providerId="ADAL" clId="{B5D85944-D90A-5912-90C6-4C26E424D3D6}" dt="2026-10-28T00:33:53.392" v="2" actId="1076"/>
+          <ac:picMkLst>
+            <pc:docMk/>
+            <pc:sldMk cId="110236372" sldId="259"/>
+            <ac:picMk id="2" creationId="{5DF3E9AD-B7C5-4363-4252-6DBB0BCE50BA}"/>
+          </ac:picMkLst>
+        </pc:picChg>
+        <pc:picChg chg="add mod modCrop">
+          <ac:chgData name="Hemma Philamore" userId="db50e2f3-17b2-4cc0-b719-fb6254d3e9df" providerId="ADAL" clId="{B5D85944-D90A-5912-90C6-4C26E424D3D6}" dt="2026-10-28T00:34:32.384" v="7" actId="1076"/>
+          <ac:picMkLst>
+            <pc:docMk/>
+            <pc:sldMk cId="110236372" sldId="259"/>
+            <ac:picMk id="3" creationId="{D1F1AEB5-8EDA-45BA-5272-84BEF8C3DAD9}"/>
+          </ac:picMkLst>
+        </pc:picChg>
+        <pc:picChg chg="add mod modCrop">
+          <ac:chgData name="Hemma Philamore" userId="db50e2f3-17b2-4cc0-b719-fb6254d3e9df" providerId="ADAL" clId="{B5D85944-D90A-5912-90C6-4C26E424D3D6}" dt="2026-10-28T00:34:51.193" v="12" actId="1076"/>
+          <ac:picMkLst>
+            <pc:docMk/>
+            <pc:sldMk cId="110236372" sldId="259"/>
+            <ac:picMk id="4" creationId="{9E083881-4318-55B1-31BA-0820174BB903}"/>
+          </ac:picMkLst>
+        </pc:picChg>
+      </pc:sldChg>
+      <pc:sldChg chg="addSp delSp modSp new mod">
+        <pc:chgData name="Hemma Philamore" userId="db50e2f3-17b2-4cc0-b719-fb6254d3e9df" providerId="ADAL" clId="{B5D85944-D90A-5912-90C6-4C26E424D3D6}" dt="2026-10-28T00:48:50.562" v="234" actId="164"/>
+        <pc:sldMkLst>
+          <pc:docMk/>
+          <pc:sldMk cId="1492292829" sldId="260"/>
+        </pc:sldMkLst>
+        <pc:spChg chg="add del mod">
+          <ac:chgData name="Hemma Philamore" userId="db50e2f3-17b2-4cc0-b719-fb6254d3e9df" providerId="ADAL" clId="{B5D85944-D90A-5912-90C6-4C26E424D3D6}" dt="2026-10-28T00:45:02.969" v="108" actId="478"/>
+          <ac:spMkLst>
+            <pc:docMk/>
+            <pc:sldMk cId="1492292829" sldId="260"/>
+            <ac:spMk id="3" creationId="{F2953987-6EB9-A5D4-2FCA-03F1E3A9C443}"/>
+          </ac:spMkLst>
+        </pc:spChg>
+        <pc:spChg chg="add mod">
+          <ac:chgData name="Hemma Philamore" userId="db50e2f3-17b2-4cc0-b719-fb6254d3e9df" providerId="ADAL" clId="{B5D85944-D90A-5912-90C6-4C26E424D3D6}" dt="2026-10-28T00:48:50.562" v="234" actId="164"/>
+          <ac:spMkLst>
+            <pc:docMk/>
+            <pc:sldMk cId="1492292829" sldId="260"/>
+            <ac:spMk id="4" creationId="{B168EDA8-3898-FB45-B24C-8D3DB86F56B6}"/>
+          </ac:spMkLst>
+        </pc:spChg>
+        <pc:spChg chg="add del mod">
+          <ac:chgData name="Hemma Philamore" userId="db50e2f3-17b2-4cc0-b719-fb6254d3e9df" providerId="ADAL" clId="{B5D85944-D90A-5912-90C6-4C26E424D3D6}" dt="2026-10-28T00:45:27.177" v="115" actId="478"/>
+          <ac:spMkLst>
+            <pc:docMk/>
+            <pc:sldMk cId="1492292829" sldId="260"/>
+            <ac:spMk id="5" creationId="{574BF8CF-129A-AC08-1B1A-AB6BB7F5FA5C}"/>
+          </ac:spMkLst>
+        </pc:spChg>
+        <pc:spChg chg="add mod">
+          <ac:chgData name="Hemma Philamore" userId="db50e2f3-17b2-4cc0-b719-fb6254d3e9df" providerId="ADAL" clId="{B5D85944-D90A-5912-90C6-4C26E424D3D6}" dt="2026-10-28T00:48:50.562" v="234" actId="164"/>
+          <ac:spMkLst>
+            <pc:docMk/>
+            <pc:sldMk cId="1492292829" sldId="260"/>
+            <ac:spMk id="6" creationId="{DA5D2A77-6CFB-F254-7FDF-26F5955669F9}"/>
+          </ac:spMkLst>
+        </pc:spChg>
+        <pc:spChg chg="add del mod">
+          <ac:chgData name="Hemma Philamore" userId="db50e2f3-17b2-4cc0-b719-fb6254d3e9df" providerId="ADAL" clId="{B5D85944-D90A-5912-90C6-4C26E424D3D6}" dt="2026-10-28T00:45:32.659" v="117" actId="478"/>
+          <ac:spMkLst>
+            <pc:docMk/>
+            <pc:sldMk cId="1492292829" sldId="260"/>
+            <ac:spMk id="7" creationId="{935B3AFE-4AC6-70E7-4A5F-1DE8086A4173}"/>
+          </ac:spMkLst>
+        </pc:spChg>
+        <pc:spChg chg="add mod">
+          <ac:chgData name="Hemma Philamore" userId="db50e2f3-17b2-4cc0-b719-fb6254d3e9df" providerId="ADAL" clId="{B5D85944-D90A-5912-90C6-4C26E424D3D6}" dt="2026-10-28T00:48:50.562" v="234" actId="164"/>
+          <ac:spMkLst>
+            <pc:docMk/>
+            <pc:sldMk cId="1492292829" sldId="260"/>
+            <ac:spMk id="8" creationId="{615A982A-7A8C-1816-E98F-9E3B30B56E4B}"/>
+          </ac:spMkLst>
+        </pc:spChg>
+        <pc:spChg chg="add del mod">
+          <ac:chgData name="Hemma Philamore" userId="db50e2f3-17b2-4cc0-b719-fb6254d3e9df" providerId="ADAL" clId="{B5D85944-D90A-5912-90C6-4C26E424D3D6}" dt="2026-10-28T00:46:05.565" v="129" actId="478"/>
+          <ac:spMkLst>
+            <pc:docMk/>
+            <pc:sldMk cId="1492292829" sldId="260"/>
+            <ac:spMk id="9" creationId="{A1A0615F-00C2-6BC5-9B8D-BF935762A5ED}"/>
+          </ac:spMkLst>
+        </pc:spChg>
+        <pc:spChg chg="add mod">
+          <ac:chgData name="Hemma Philamore" userId="db50e2f3-17b2-4cc0-b719-fb6254d3e9df" providerId="ADAL" clId="{B5D85944-D90A-5912-90C6-4C26E424D3D6}" dt="2026-10-28T00:48:50.562" v="234" actId="164"/>
+          <ac:spMkLst>
+            <pc:docMk/>
+            <pc:sldMk cId="1492292829" sldId="260"/>
+            <ac:spMk id="10" creationId="{60EFC832-8D13-7839-FC6F-2BB66549F911}"/>
+          </ac:spMkLst>
+        </pc:spChg>
+        <pc:spChg chg="add del mod">
+          <ac:chgData name="Hemma Philamore" userId="db50e2f3-17b2-4cc0-b719-fb6254d3e9df" providerId="ADAL" clId="{B5D85944-D90A-5912-90C6-4C26E424D3D6}" dt="2026-10-28T00:46:13.081" v="131" actId="478"/>
+          <ac:spMkLst>
+            <pc:docMk/>
+            <pc:sldMk cId="1492292829" sldId="260"/>
+            <ac:spMk id="11" creationId="{42772F8D-F9A3-5B7D-A1BA-F2A088869BD1}"/>
+          </ac:spMkLst>
+        </pc:spChg>
+        <pc:spChg chg="add mod">
+          <ac:chgData name="Hemma Philamore" userId="db50e2f3-17b2-4cc0-b719-fb6254d3e9df" providerId="ADAL" clId="{B5D85944-D90A-5912-90C6-4C26E424D3D6}" dt="2026-10-28T00:48:50.562" v="234" actId="164"/>
+          <ac:spMkLst>
+            <pc:docMk/>
+            <pc:sldMk cId="1492292829" sldId="260"/>
+            <ac:spMk id="12" creationId="{EEE0CA48-27ED-0938-0EF4-21B9A5F446CC}"/>
+          </ac:spMkLst>
+        </pc:spChg>
+        <pc:spChg chg="add del mod">
+          <ac:chgData name="Hemma Philamore" userId="db50e2f3-17b2-4cc0-b719-fb6254d3e9df" providerId="ADAL" clId="{B5D85944-D90A-5912-90C6-4C26E424D3D6}" dt="2026-10-28T00:46:14.127" v="132" actId="478"/>
+          <ac:spMkLst>
+            <pc:docMk/>
+            <pc:sldMk cId="1492292829" sldId="260"/>
+            <ac:spMk id="13" creationId="{1DD1FAB3-E705-53D9-32F8-B91752943710}"/>
+          </ac:spMkLst>
+        </pc:spChg>
+        <pc:spChg chg="add mod">
+          <ac:chgData name="Hemma Philamore" userId="db50e2f3-17b2-4cc0-b719-fb6254d3e9df" providerId="ADAL" clId="{B5D85944-D90A-5912-90C6-4C26E424D3D6}" dt="2026-10-28T00:48:50.562" v="234" actId="164"/>
+          <ac:spMkLst>
+            <pc:docMk/>
+            <pc:sldMk cId="1492292829" sldId="260"/>
+            <ac:spMk id="14" creationId="{763C79F9-CCD8-96B0-CFEB-FB4D858742FB}"/>
+          </ac:spMkLst>
+        </pc:spChg>
+        <pc:spChg chg="add del mod">
+          <ac:chgData name="Hemma Philamore" userId="db50e2f3-17b2-4cc0-b719-fb6254d3e9df" providerId="ADAL" clId="{B5D85944-D90A-5912-90C6-4C26E424D3D6}" dt="2026-10-28T00:47:41.443" v="205" actId="478"/>
+          <ac:spMkLst>
+            <pc:docMk/>
+            <pc:sldMk cId="1492292829" sldId="260"/>
+            <ac:spMk id="15" creationId="{C694F3A6-FF4B-FE9B-9026-DD8E5DA15C65}"/>
+          </ac:spMkLst>
+        </pc:spChg>
+        <pc:spChg chg="add mod">
+          <ac:chgData name="Hemma Philamore" userId="db50e2f3-17b2-4cc0-b719-fb6254d3e9df" providerId="ADAL" clId="{B5D85944-D90A-5912-90C6-4C26E424D3D6}" dt="2026-10-28T00:48:50.562" v="234" actId="164"/>
+          <ac:spMkLst>
+            <pc:docMk/>
+            <pc:sldMk cId="1492292829" sldId="260"/>
+            <ac:spMk id="16" creationId="{85F6C4D9-B933-346B-07D8-97BFAA1EAE37}"/>
+          </ac:spMkLst>
+        </pc:spChg>
+        <pc:spChg chg="add del mod">
+          <ac:chgData name="Hemma Philamore" userId="db50e2f3-17b2-4cc0-b719-fb6254d3e9df" providerId="ADAL" clId="{B5D85944-D90A-5912-90C6-4C26E424D3D6}" dt="2026-10-28T00:47:43.224" v="206" actId="478"/>
+          <ac:spMkLst>
+            <pc:docMk/>
+            <pc:sldMk cId="1492292829" sldId="260"/>
+            <ac:spMk id="17" creationId="{4ABE832C-3F4A-8908-E934-DD993134F0A9}"/>
+          </ac:spMkLst>
+        </pc:spChg>
+        <pc:spChg chg="add mod">
+          <ac:chgData name="Hemma Philamore" userId="db50e2f3-17b2-4cc0-b719-fb6254d3e9df" providerId="ADAL" clId="{B5D85944-D90A-5912-90C6-4C26E424D3D6}" dt="2026-10-28T00:48:50.562" v="234" actId="164"/>
+          <ac:spMkLst>
+            <pc:docMk/>
+            <pc:sldMk cId="1492292829" sldId="260"/>
+            <ac:spMk id="18" creationId="{77331A54-6494-FB96-A505-A7379F15EAE1}"/>
+          </ac:spMkLst>
+        </pc:spChg>
+        <pc:grpChg chg="add mod">
+          <ac:chgData name="Hemma Philamore" userId="db50e2f3-17b2-4cc0-b719-fb6254d3e9df" providerId="ADAL" clId="{B5D85944-D90A-5912-90C6-4C26E424D3D6}" dt="2026-10-28T00:48:50.562" v="234" actId="164"/>
+          <ac:grpSpMkLst>
+            <pc:docMk/>
+            <pc:sldMk cId="1492292829" sldId="260"/>
+            <ac:grpSpMk id="39" creationId="{F3CCA625-13C1-13D1-081D-D8C10CA4A315}"/>
+          </ac:grpSpMkLst>
+        </pc:grpChg>
+        <pc:picChg chg="add mod">
+          <ac:chgData name="Hemma Philamore" userId="db50e2f3-17b2-4cc0-b719-fb6254d3e9df" providerId="ADAL" clId="{B5D85944-D90A-5912-90C6-4C26E424D3D6}" dt="2026-10-28T00:48:45.255" v="233" actId="1076"/>
+          <ac:picMkLst>
+            <pc:docMk/>
+            <pc:sldMk cId="1492292829" sldId="260"/>
+            <ac:picMk id="2" creationId="{B55D73CB-2E9D-0856-4F55-EAB9F1CA5BC5}"/>
+          </ac:picMkLst>
+        </pc:picChg>
+        <pc:cxnChg chg="add">
+          <ac:chgData name="Hemma Philamore" userId="db50e2f3-17b2-4cc0-b719-fb6254d3e9df" providerId="ADAL" clId="{B5D85944-D90A-5912-90C6-4C26E424D3D6}" dt="2026-10-28T00:47:51.660" v="207" actId="11529"/>
+          <ac:cxnSpMkLst>
+            <pc:docMk/>
+            <pc:sldMk cId="1492292829" sldId="260"/>
+            <ac:cxnSpMk id="20" creationId="{066601BF-16D2-960B-D5DB-3D109FACF512}"/>
+          </ac:cxnSpMkLst>
+        </pc:cxnChg>
+        <pc:cxnChg chg="add mod">
+          <ac:chgData name="Hemma Philamore" userId="db50e2f3-17b2-4cc0-b719-fb6254d3e9df" providerId="ADAL" clId="{B5D85944-D90A-5912-90C6-4C26E424D3D6}" dt="2026-10-28T00:48:50.562" v="234" actId="164"/>
+          <ac:cxnSpMkLst>
+            <pc:docMk/>
+            <pc:sldMk cId="1492292829" sldId="260"/>
+            <ac:cxnSpMk id="21" creationId="{1EBCE35E-89F1-9E8C-3F73-ACD8AC4E1150}"/>
+          </ac:cxnSpMkLst>
+        </pc:cxnChg>
+        <pc:cxnChg chg="add mod">
+          <ac:chgData name="Hemma Philamore" userId="db50e2f3-17b2-4cc0-b719-fb6254d3e9df" providerId="ADAL" clId="{B5D85944-D90A-5912-90C6-4C26E424D3D6}" dt="2026-10-28T00:48:07.820" v="215" actId="14100"/>
+          <ac:cxnSpMkLst>
+            <pc:docMk/>
+            <pc:sldMk cId="1492292829" sldId="260"/>
+            <ac:cxnSpMk id="24" creationId="{0C9B2F68-4B7F-D4F0-9993-1D421F9CCE53}"/>
+          </ac:cxnSpMkLst>
+        </pc:cxnChg>
+        <pc:cxnChg chg="add mod">
+          <ac:chgData name="Hemma Philamore" userId="db50e2f3-17b2-4cc0-b719-fb6254d3e9df" providerId="ADAL" clId="{B5D85944-D90A-5912-90C6-4C26E424D3D6}" dt="2026-10-28T00:48:15.655" v="219" actId="14100"/>
+          <ac:cxnSpMkLst>
+            <pc:docMk/>
+            <pc:sldMk cId="1492292829" sldId="260"/>
+            <ac:cxnSpMk id="27" creationId="{30AB3E62-E587-47BC-B65C-6562AC60E87E}"/>
+          </ac:cxnSpMkLst>
+        </pc:cxnChg>
+        <pc:cxnChg chg="add mod">
+          <ac:chgData name="Hemma Philamore" userId="db50e2f3-17b2-4cc0-b719-fb6254d3e9df" providerId="ADAL" clId="{B5D85944-D90A-5912-90C6-4C26E424D3D6}" dt="2026-10-28T00:48:23.791" v="223" actId="14100"/>
+          <ac:cxnSpMkLst>
+            <pc:docMk/>
+            <pc:sldMk cId="1492292829" sldId="260"/>
+            <ac:cxnSpMk id="30" creationId="{E52AE403-A3A6-7F2C-53B9-CC81B6BB7E03}"/>
+          </ac:cxnSpMkLst>
+        </pc:cxnChg>
+        <pc:cxnChg chg="add mod">
+          <ac:chgData name="Hemma Philamore" userId="db50e2f3-17b2-4cc0-b719-fb6254d3e9df" providerId="ADAL" clId="{B5D85944-D90A-5912-90C6-4C26E424D3D6}" dt="2026-10-28T00:48:31.163" v="227" actId="14100"/>
+          <ac:cxnSpMkLst>
+            <pc:docMk/>
+            <pc:sldMk cId="1492292829" sldId="260"/>
+            <ac:cxnSpMk id="33" creationId="{32549293-27F8-A575-E242-4CDE74C6585D}"/>
+          </ac:cxnSpMkLst>
+        </pc:cxnChg>
+        <pc:cxnChg chg="add mod">
+          <ac:chgData name="Hemma Philamore" userId="db50e2f3-17b2-4cc0-b719-fb6254d3e9df" providerId="ADAL" clId="{B5D85944-D90A-5912-90C6-4C26E424D3D6}" dt="2026-10-28T00:48:39.081" v="231" actId="14100"/>
+          <ac:cxnSpMkLst>
+            <pc:docMk/>
+            <pc:sldMk cId="1492292829" sldId="260"/>
+            <ac:cxnSpMk id="36" creationId="{CD0B4E94-8AAD-65EE-8B9F-44708BE1A474}"/>
           </ac:cxnSpMkLst>
         </pc:cxnChg>
       </pc:sldChg>
@@ -1454,7 +1716,7 @@
           <a:p>
             <a:fld id="{2D85AF9A-95AE-7742-927B-08340FD5233B}" type="datetimeFigureOut">
               <a:rPr lang="en-US" smtClean="0"/>
-              <a:t>10/23/26</a:t>
+              <a:t>10/28/26</a:t>
             </a:fld>
             <a:endParaRPr lang="en-US"/>
           </a:p>
@@ -1654,7 +1916,7 @@
           <a:p>
             <a:fld id="{2D85AF9A-95AE-7742-927B-08340FD5233B}" type="datetimeFigureOut">
               <a:rPr lang="en-US" smtClean="0"/>
-              <a:t>10/23/26</a:t>
+              <a:t>10/28/26</a:t>
             </a:fld>
             <a:endParaRPr lang="en-US"/>
           </a:p>
@@ -1864,7 +2126,7 @@
           <a:p>
             <a:fld id="{2D85AF9A-95AE-7742-927B-08340FD5233B}" type="datetimeFigureOut">
               <a:rPr lang="en-US" smtClean="0"/>
-              <a:t>10/23/26</a:t>
+              <a:t>10/28/26</a:t>
             </a:fld>
             <a:endParaRPr lang="en-US"/>
           </a:p>
@@ -2064,7 +2326,7 @@
           <a:p>
             <a:fld id="{2D85AF9A-95AE-7742-927B-08340FD5233B}" type="datetimeFigureOut">
               <a:rPr lang="en-US" smtClean="0"/>
-              <a:t>10/23/26</a:t>
+              <a:t>10/28/26</a:t>
             </a:fld>
             <a:endParaRPr lang="en-US"/>
           </a:p>
@@ -2340,7 +2602,7 @@
           <a:p>
             <a:fld id="{2D85AF9A-95AE-7742-927B-08340FD5233B}" type="datetimeFigureOut">
               <a:rPr lang="en-US" smtClean="0"/>
-              <a:t>10/23/26</a:t>
+              <a:t>10/28/26</a:t>
             </a:fld>
             <a:endParaRPr lang="en-US"/>
           </a:p>
@@ -2608,7 +2870,7 @@
           <a:p>
             <a:fld id="{2D85AF9A-95AE-7742-927B-08340FD5233B}" type="datetimeFigureOut">
               <a:rPr lang="en-US" smtClean="0"/>
-              <a:t>10/23/26</a:t>
+              <a:t>10/28/26</a:t>
             </a:fld>
             <a:endParaRPr lang="en-US"/>
           </a:p>
@@ -3023,7 +3285,7 @@
           <a:p>
             <a:fld id="{2D85AF9A-95AE-7742-927B-08340FD5233B}" type="datetimeFigureOut">
               <a:rPr lang="en-US" smtClean="0"/>
-              <a:t>10/23/26</a:t>
+              <a:t>10/28/26</a:t>
             </a:fld>
             <a:endParaRPr lang="en-US"/>
           </a:p>
@@ -3165,7 +3427,7 @@
           <a:p>
             <a:fld id="{2D85AF9A-95AE-7742-927B-08340FD5233B}" type="datetimeFigureOut">
               <a:rPr lang="en-US" smtClean="0"/>
-              <a:t>10/23/26</a:t>
+              <a:t>10/28/26</a:t>
             </a:fld>
             <a:endParaRPr lang="en-US"/>
           </a:p>
@@ -3278,7 +3540,7 @@
           <a:p>
             <a:fld id="{2D85AF9A-95AE-7742-927B-08340FD5233B}" type="datetimeFigureOut">
               <a:rPr lang="en-US" smtClean="0"/>
-              <a:t>10/23/26</a:t>
+              <a:t>10/28/26</a:t>
             </a:fld>
             <a:endParaRPr lang="en-US"/>
           </a:p>
@@ -3591,7 +3853,7 @@
           <a:p>
             <a:fld id="{2D85AF9A-95AE-7742-927B-08340FD5233B}" type="datetimeFigureOut">
               <a:rPr lang="en-US" smtClean="0"/>
-              <a:t>10/23/26</a:t>
+              <a:t>10/28/26</a:t>
             </a:fld>
             <a:endParaRPr lang="en-US"/>
           </a:p>
@@ -3880,7 +4142,7 @@
           <a:p>
             <a:fld id="{2D85AF9A-95AE-7742-927B-08340FD5233B}" type="datetimeFigureOut">
               <a:rPr lang="en-US" smtClean="0"/>
-              <a:t>10/23/26</a:t>
+              <a:t>10/28/26</a:t>
             </a:fld>
             <a:endParaRPr lang="en-US"/>
           </a:p>
@@ -4123,7 +4385,7 @@
           <a:p>
             <a:fld id="{2D85AF9A-95AE-7742-927B-08340FD5233B}" type="datetimeFigureOut">
               <a:rPr lang="en-US" smtClean="0"/>
-              <a:t>10/23/26</a:t>
+              <a:t>10/28/26</a:t>
             </a:fld>
             <a:endParaRPr lang="en-US"/>
           </a:p>
@@ -9765,6 +10027,818 @@
 </p:sld>
 </file>
 
+<file path=ppt/slides/slide4.xml><?xml version="1.0" encoding="utf-8"?>
+<p:sld xmlns:a="http://schemas.openxmlformats.org/drawingml/2006/main" xmlns:r="http://schemas.openxmlformats.org/officeDocument/2006/relationships" xmlns:p="http://schemas.openxmlformats.org/presentationml/2006/main">
+  <p:cSld>
+    <p:spTree>
+      <p:nvGrpSpPr>
+        <p:cNvPr id="1" name=""/>
+        <p:cNvGrpSpPr/>
+        <p:nvPr/>
+      </p:nvGrpSpPr>
+      <p:grpSpPr>
+        <a:xfrm>
+          <a:off x="0" y="0"/>
+          <a:ext cx="0" cy="0"/>
+          <a:chOff x="0" y="0"/>
+          <a:chExt cx="0" cy="0"/>
+        </a:xfrm>
+      </p:grpSpPr>
+      <p:pic>
+        <p:nvPicPr>
+          <p:cNvPr id="2" name="Picture 1">
+            <a:extLst>
+              <a:ext uri="{FF2B5EF4-FFF2-40B4-BE49-F238E27FC236}">
+                <a16:creationId xmlns:a16="http://schemas.microsoft.com/office/drawing/2014/main" id="{5DF3E9AD-B7C5-4363-4252-6DBB0BCE50BA}"/>
+              </a:ext>
+            </a:extLst>
+          </p:cNvPr>
+          <p:cNvPicPr>
+            <a:picLocks noChangeAspect="1"/>
+          </p:cNvPicPr>
+          <p:nvPr/>
+        </p:nvPicPr>
+        <p:blipFill>
+          <a:blip r:embed="rId2"/>
+          <a:stretch>
+            <a:fillRect/>
+          </a:stretch>
+        </p:blipFill>
+        <p:spPr>
+          <a:xfrm>
+            <a:off x="2209800" y="253515"/>
+            <a:ext cx="7772400" cy="2665659"/>
+          </a:xfrm>
+          <a:prstGeom prst="rect">
+            <a:avLst/>
+          </a:prstGeom>
+        </p:spPr>
+      </p:pic>
+      <p:pic>
+        <p:nvPicPr>
+          <p:cNvPr id="3" name="Picture 2">
+            <a:extLst>
+              <a:ext uri="{FF2B5EF4-FFF2-40B4-BE49-F238E27FC236}">
+                <a16:creationId xmlns:a16="http://schemas.microsoft.com/office/drawing/2014/main" id="{D1F1AEB5-8EDA-45BA-5272-84BEF8C3DAD9}"/>
+              </a:ext>
+            </a:extLst>
+          </p:cNvPr>
+          <p:cNvPicPr>
+            <a:picLocks noChangeAspect="1"/>
+          </p:cNvPicPr>
+          <p:nvPr/>
+        </p:nvPicPr>
+        <p:blipFill>
+          <a:blip r:embed="rId2"/>
+          <a:srcRect l="7576" t="28326" r="58378" b="17621"/>
+          <a:stretch>
+            <a:fillRect/>
+          </a:stretch>
+        </p:blipFill>
+        <p:spPr>
+          <a:xfrm>
+            <a:off x="1080655" y="4087091"/>
+            <a:ext cx="2646218" cy="1440872"/>
+          </a:xfrm>
+          <a:prstGeom prst="rect">
+            <a:avLst/>
+          </a:prstGeom>
+        </p:spPr>
+      </p:pic>
+      <p:pic>
+        <p:nvPicPr>
+          <p:cNvPr id="4" name="Picture 3">
+            <a:extLst>
+              <a:ext uri="{FF2B5EF4-FFF2-40B4-BE49-F238E27FC236}">
+                <a16:creationId xmlns:a16="http://schemas.microsoft.com/office/drawing/2014/main" id="{9E083881-4318-55B1-31BA-0820174BB903}"/>
+              </a:ext>
+            </a:extLst>
+          </p:cNvPr>
+          <p:cNvPicPr>
+            <a:picLocks noChangeAspect="1"/>
+          </p:cNvPicPr>
+          <p:nvPr/>
+        </p:nvPicPr>
+        <p:blipFill>
+          <a:blip r:embed="rId2"/>
+          <a:srcRect l="50000" t="28846" r="3119" b="51404"/>
+          <a:stretch>
+            <a:fillRect/>
+          </a:stretch>
+        </p:blipFill>
+        <p:spPr>
+          <a:xfrm>
+            <a:off x="4274127" y="4530436"/>
+            <a:ext cx="3643745" cy="526474"/>
+          </a:xfrm>
+          <a:prstGeom prst="rect">
+            <a:avLst/>
+          </a:prstGeom>
+        </p:spPr>
+      </p:pic>
+    </p:spTree>
+    <p:extLst>
+      <p:ext uri="{BB962C8B-B14F-4D97-AF65-F5344CB8AC3E}">
+        <p14:creationId xmlns:p14="http://schemas.microsoft.com/office/powerpoint/2010/main" val="110236372"/>
+      </p:ext>
+    </p:extLst>
+  </p:cSld>
+  <p:clrMapOvr>
+    <a:masterClrMapping/>
+  </p:clrMapOvr>
+</p:sld>
+</file>
+
+<file path=ppt/slides/slide5.xml><?xml version="1.0" encoding="utf-8"?>
+<p:sld xmlns:a="http://schemas.openxmlformats.org/drawingml/2006/main" xmlns:r="http://schemas.openxmlformats.org/officeDocument/2006/relationships" xmlns:p="http://schemas.openxmlformats.org/presentationml/2006/main">
+  <p:cSld>
+    <p:spTree>
+      <p:nvGrpSpPr>
+        <p:cNvPr id="1" name=""/>
+        <p:cNvGrpSpPr/>
+        <p:nvPr/>
+      </p:nvGrpSpPr>
+      <p:grpSpPr>
+        <a:xfrm>
+          <a:off x="0" y="0"/>
+          <a:ext cx="0" cy="0"/>
+          <a:chOff x="0" y="0"/>
+          <a:chExt cx="0" cy="0"/>
+        </a:xfrm>
+      </p:grpSpPr>
+      <p:pic>
+        <p:nvPicPr>
+          <p:cNvPr id="2" name="Picture 1">
+            <a:extLst>
+              <a:ext uri="{FF2B5EF4-FFF2-40B4-BE49-F238E27FC236}">
+                <a16:creationId xmlns:a16="http://schemas.microsoft.com/office/drawing/2014/main" id="{B55D73CB-2E9D-0856-4F55-EAB9F1CA5BC5}"/>
+              </a:ext>
+            </a:extLst>
+          </p:cNvPr>
+          <p:cNvPicPr>
+            <a:picLocks noChangeAspect="1"/>
+          </p:cNvPicPr>
+          <p:nvPr/>
+        </p:nvPicPr>
+        <p:blipFill>
+          <a:blip r:embed="rId2"/>
+          <a:stretch>
+            <a:fillRect/>
+          </a:stretch>
+        </p:blipFill>
+        <p:spPr>
+          <a:xfrm>
+            <a:off x="271624" y="576678"/>
+            <a:ext cx="2540000" cy="2209800"/>
+          </a:xfrm>
+          <a:prstGeom prst="rect">
+            <a:avLst/>
+          </a:prstGeom>
+        </p:spPr>
+      </p:pic>
+      <p:grpSp>
+        <p:nvGrpSpPr>
+          <p:cNvPr id="39" name="Group 38">
+            <a:extLst>
+              <a:ext uri="{FF2B5EF4-FFF2-40B4-BE49-F238E27FC236}">
+                <a16:creationId xmlns:a16="http://schemas.microsoft.com/office/drawing/2014/main" id="{F3CCA625-13C1-13D1-081D-D8C10CA4A315}"/>
+              </a:ext>
+            </a:extLst>
+          </p:cNvPr>
+          <p:cNvGrpSpPr/>
+          <p:nvPr/>
+        </p:nvGrpSpPr>
+        <p:grpSpPr>
+          <a:xfrm>
+            <a:off x="3211747" y="953852"/>
+            <a:ext cx="6049030" cy="1731724"/>
+            <a:chOff x="3211747" y="953852"/>
+            <a:chExt cx="6049030" cy="1731724"/>
+          </a:xfrm>
+        </p:grpSpPr>
+        <p:sp>
+          <p:nvSpPr>
+            <p:cNvPr id="4" name="TextBox 3">
+              <a:extLst>
+                <a:ext uri="{FF2B5EF4-FFF2-40B4-BE49-F238E27FC236}">
+                  <a16:creationId xmlns:a16="http://schemas.microsoft.com/office/drawing/2014/main" id="{B168EDA8-3898-FB45-B24C-8D3DB86F56B6}"/>
+                </a:ext>
+              </a:extLst>
+            </p:cNvPr>
+            <p:cNvSpPr txBox="1"/>
+            <p:nvPr/>
+          </p:nvSpPr>
+          <p:spPr>
+            <a:xfrm>
+              <a:off x="5875640" y="953852"/>
+              <a:ext cx="796364" cy="369332"/>
+            </a:xfrm>
+            <a:prstGeom prst="rect">
+              <a:avLst/>
+            </a:prstGeom>
+            <a:noFill/>
+            <a:ln>
+              <a:solidFill>
+                <a:schemeClr val="accent1"/>
+              </a:solidFill>
+            </a:ln>
+          </p:spPr>
+          <p:txBody>
+            <a:bodyPr wrap="square" rtlCol="0">
+              <a:spAutoFit/>
+            </a:bodyPr>
+            <a:lstStyle/>
+            <a:p>
+              <a:pPr algn="ctr"/>
+              <a:r>
+                <a:rPr lang="en-US" dirty="0"/>
+                <a:t>home</a:t>
+              </a:r>
+            </a:p>
+          </p:txBody>
+        </p:sp>
+        <p:sp>
+          <p:nvSpPr>
+            <p:cNvPr id="6" name="TextBox 5">
+              <a:extLst>
+                <a:ext uri="{FF2B5EF4-FFF2-40B4-BE49-F238E27FC236}">
+                  <a16:creationId xmlns:a16="http://schemas.microsoft.com/office/drawing/2014/main" id="{DA5D2A77-6CFB-F254-7FDF-26F5955669F9}"/>
+                </a:ext>
+              </a:extLst>
+            </p:cNvPr>
+            <p:cNvSpPr txBox="1"/>
+            <p:nvPr/>
+          </p:nvSpPr>
+          <p:spPr>
+            <a:xfrm>
+              <a:off x="4177119" y="1666189"/>
+              <a:ext cx="1326044" cy="369332"/>
+            </a:xfrm>
+            <a:prstGeom prst="rect">
+              <a:avLst/>
+            </a:prstGeom>
+            <a:noFill/>
+            <a:ln>
+              <a:solidFill>
+                <a:schemeClr val="accent1"/>
+              </a:solidFill>
+            </a:ln>
+          </p:spPr>
+          <p:txBody>
+            <a:bodyPr wrap="square" rtlCol="0">
+              <a:spAutoFit/>
+            </a:bodyPr>
+            <a:lstStyle/>
+            <a:p>
+              <a:r>
+                <a:rPr lang="en-US" dirty="0"/>
+                <a:t>documents</a:t>
+              </a:r>
+            </a:p>
+          </p:txBody>
+        </p:sp>
+        <p:sp>
+          <p:nvSpPr>
+            <p:cNvPr id="8" name="TextBox 7">
+              <a:extLst>
+                <a:ext uri="{FF2B5EF4-FFF2-40B4-BE49-F238E27FC236}">
+                  <a16:creationId xmlns:a16="http://schemas.microsoft.com/office/drawing/2014/main" id="{615A982A-7A8C-1816-E98F-9E3B30B56E4B}"/>
+                </a:ext>
+              </a:extLst>
+            </p:cNvPr>
+            <p:cNvSpPr txBox="1"/>
+            <p:nvPr/>
+          </p:nvSpPr>
+          <p:spPr>
+            <a:xfrm>
+              <a:off x="5758345" y="1681578"/>
+              <a:ext cx="1030955" cy="369332"/>
+            </a:xfrm>
+            <a:prstGeom prst="rect">
+              <a:avLst/>
+            </a:prstGeom>
+            <a:noFill/>
+            <a:ln>
+              <a:solidFill>
+                <a:schemeClr val="accent1"/>
+              </a:solidFill>
+            </a:ln>
+          </p:spPr>
+          <p:txBody>
+            <a:bodyPr wrap="square" rtlCol="0">
+              <a:spAutoFit/>
+            </a:bodyPr>
+            <a:lstStyle/>
+            <a:p>
+              <a:pPr algn="ctr"/>
+              <a:r>
+                <a:rPr lang="en-US" dirty="0"/>
+                <a:t>photos</a:t>
+              </a:r>
+            </a:p>
+          </p:txBody>
+        </p:sp>
+        <p:sp>
+          <p:nvSpPr>
+            <p:cNvPr id="10" name="TextBox 9">
+              <a:extLst>
+                <a:ext uri="{FF2B5EF4-FFF2-40B4-BE49-F238E27FC236}">
+                  <a16:creationId xmlns:a16="http://schemas.microsoft.com/office/drawing/2014/main" id="{60EFC832-8D13-7839-FC6F-2BB66549F911}"/>
+                </a:ext>
+              </a:extLst>
+            </p:cNvPr>
+            <p:cNvSpPr txBox="1"/>
+            <p:nvPr/>
+          </p:nvSpPr>
+          <p:spPr>
+            <a:xfrm>
+              <a:off x="7074070" y="1666189"/>
+              <a:ext cx="1296456" cy="369332"/>
+            </a:xfrm>
+            <a:prstGeom prst="rect">
+              <a:avLst/>
+            </a:prstGeom>
+            <a:noFill/>
+            <a:ln>
+              <a:solidFill>
+                <a:schemeClr val="accent1"/>
+              </a:solidFill>
+            </a:ln>
+          </p:spPr>
+          <p:txBody>
+            <a:bodyPr wrap="square" rtlCol="0">
+              <a:spAutoFit/>
+            </a:bodyPr>
+            <a:lstStyle/>
+            <a:p>
+              <a:r>
+                <a:rPr lang="en-US" dirty="0"/>
+                <a:t>downloads</a:t>
+              </a:r>
+            </a:p>
+          </p:txBody>
+        </p:sp>
+        <p:sp>
+          <p:nvSpPr>
+            <p:cNvPr id="12" name="TextBox 11">
+              <a:extLst>
+                <a:ext uri="{FF2B5EF4-FFF2-40B4-BE49-F238E27FC236}">
+                  <a16:creationId xmlns:a16="http://schemas.microsoft.com/office/drawing/2014/main" id="{EEE0CA48-27ED-0938-0EF4-21B9A5F446CC}"/>
+                </a:ext>
+              </a:extLst>
+            </p:cNvPr>
+            <p:cNvSpPr txBox="1"/>
+            <p:nvPr/>
+          </p:nvSpPr>
+          <p:spPr>
+            <a:xfrm>
+              <a:off x="6255459" y="2316244"/>
+              <a:ext cx="1424233" cy="369332"/>
+            </a:xfrm>
+            <a:prstGeom prst="rect">
+              <a:avLst/>
+            </a:prstGeom>
+            <a:noFill/>
+            <a:ln>
+              <a:solidFill>
+                <a:schemeClr val="accent1"/>
+              </a:solidFill>
+            </a:ln>
+          </p:spPr>
+          <p:txBody>
+            <a:bodyPr wrap="square" rtlCol="0">
+              <a:spAutoFit/>
+            </a:bodyPr>
+            <a:lstStyle/>
+            <a:p>
+              <a:pPr algn="ctr"/>
+              <a:r>
+                <a:rPr lang="en-US" dirty="0" err="1"/>
+                <a:t>holiday.jpg</a:t>
+              </a:r>
+              <a:endParaRPr lang="en-US" dirty="0"/>
+            </a:p>
+          </p:txBody>
+        </p:sp>
+        <p:sp>
+          <p:nvSpPr>
+            <p:cNvPr id="14" name="TextBox 13">
+              <a:extLst>
+                <a:ext uri="{FF2B5EF4-FFF2-40B4-BE49-F238E27FC236}">
+                  <a16:creationId xmlns:a16="http://schemas.microsoft.com/office/drawing/2014/main" id="{763C79F9-CCD8-96B0-CFEB-FB4D858742FB}"/>
+                </a:ext>
+              </a:extLst>
+            </p:cNvPr>
+            <p:cNvSpPr txBox="1"/>
+            <p:nvPr/>
+          </p:nvSpPr>
+          <p:spPr>
+            <a:xfrm>
+              <a:off x="8071430" y="2316244"/>
+              <a:ext cx="1189347" cy="369332"/>
+            </a:xfrm>
+            <a:prstGeom prst="rect">
+              <a:avLst/>
+            </a:prstGeom>
+            <a:noFill/>
+            <a:ln>
+              <a:solidFill>
+                <a:schemeClr val="accent1"/>
+              </a:solidFill>
+            </a:ln>
+          </p:spPr>
+          <p:txBody>
+            <a:bodyPr wrap="square" rtlCol="0">
+              <a:spAutoFit/>
+            </a:bodyPr>
+            <a:lstStyle/>
+            <a:p>
+              <a:pPr algn="ctr"/>
+              <a:r>
+                <a:rPr lang="en-US" dirty="0" err="1"/>
+                <a:t>report.pdf</a:t>
+              </a:r>
+              <a:endParaRPr lang="en-US" dirty="0"/>
+            </a:p>
+          </p:txBody>
+        </p:sp>
+        <p:sp>
+          <p:nvSpPr>
+            <p:cNvPr id="16" name="TextBox 15">
+              <a:extLst>
+                <a:ext uri="{FF2B5EF4-FFF2-40B4-BE49-F238E27FC236}">
+                  <a16:creationId xmlns:a16="http://schemas.microsoft.com/office/drawing/2014/main" id="{85F6C4D9-B933-346B-07D8-97BFAA1EAE37}"/>
+                </a:ext>
+              </a:extLst>
+            </p:cNvPr>
+            <p:cNvSpPr txBox="1"/>
+            <p:nvPr/>
+          </p:nvSpPr>
+          <p:spPr>
+            <a:xfrm>
+              <a:off x="4757332" y="2316244"/>
+              <a:ext cx="1177362" cy="369332"/>
+            </a:xfrm>
+            <a:prstGeom prst="rect">
+              <a:avLst/>
+            </a:prstGeom>
+            <a:noFill/>
+            <a:ln>
+              <a:solidFill>
+                <a:schemeClr val="accent1"/>
+              </a:solidFill>
+            </a:ln>
+          </p:spPr>
+          <p:txBody>
+            <a:bodyPr wrap="square" rtlCol="0">
+              <a:spAutoFit/>
+            </a:bodyPr>
+            <a:lstStyle/>
+            <a:p>
+              <a:pPr algn="ctr"/>
+              <a:r>
+                <a:rPr lang="en-US" dirty="0" err="1"/>
+                <a:t>essay.txt</a:t>
+              </a:r>
+              <a:endParaRPr lang="en-US" dirty="0"/>
+            </a:p>
+          </p:txBody>
+        </p:sp>
+        <p:sp>
+          <p:nvSpPr>
+            <p:cNvPr id="18" name="TextBox 17">
+              <a:extLst>
+                <a:ext uri="{FF2B5EF4-FFF2-40B4-BE49-F238E27FC236}">
+                  <a16:creationId xmlns:a16="http://schemas.microsoft.com/office/drawing/2014/main" id="{77331A54-6494-FB96-A505-A7379F15EAE1}"/>
+                </a:ext>
+              </a:extLst>
+            </p:cNvPr>
+            <p:cNvSpPr txBox="1"/>
+            <p:nvPr/>
+          </p:nvSpPr>
+          <p:spPr>
+            <a:xfrm>
+              <a:off x="3211747" y="2316244"/>
+              <a:ext cx="1057099" cy="369332"/>
+            </a:xfrm>
+            <a:prstGeom prst="rect">
+              <a:avLst/>
+            </a:prstGeom>
+            <a:noFill/>
+            <a:ln>
+              <a:solidFill>
+                <a:schemeClr val="accent1"/>
+              </a:solidFill>
+            </a:ln>
+          </p:spPr>
+          <p:txBody>
+            <a:bodyPr wrap="square" rtlCol="0">
+              <a:spAutoFit/>
+            </a:bodyPr>
+            <a:lstStyle/>
+            <a:p>
+              <a:pPr algn="ctr"/>
+              <a:r>
+                <a:rPr lang="en-US" dirty="0" err="1"/>
+                <a:t>notes.txt</a:t>
+              </a:r>
+              <a:endParaRPr lang="en-US" dirty="0"/>
+            </a:p>
+          </p:txBody>
+        </p:sp>
+        <p:cxnSp>
+          <p:nvCxnSpPr>
+            <p:cNvPr id="20" name="Straight Connector 19">
+              <a:extLst>
+                <a:ext uri="{FF2B5EF4-FFF2-40B4-BE49-F238E27FC236}">
+                  <a16:creationId xmlns:a16="http://schemas.microsoft.com/office/drawing/2014/main" id="{066601BF-16D2-960B-D5DB-3D109FACF512}"/>
+                </a:ext>
+              </a:extLst>
+            </p:cNvPr>
+            <p:cNvCxnSpPr>
+              <a:stCxn id="4" idx="2"/>
+              <a:endCxn id="8" idx="0"/>
+            </p:cNvCxnSpPr>
+            <p:nvPr/>
+          </p:nvCxnSpPr>
+          <p:spPr>
+            <a:xfrm>
+              <a:off x="6273822" y="1323184"/>
+              <a:ext cx="1" cy="358394"/>
+            </a:xfrm>
+            <a:prstGeom prst="line">
+              <a:avLst/>
+            </a:prstGeom>
+          </p:spPr>
+          <p:style>
+            <a:lnRef idx="2">
+              <a:schemeClr val="accent1"/>
+            </a:lnRef>
+            <a:fillRef idx="0">
+              <a:schemeClr val="accent1"/>
+            </a:fillRef>
+            <a:effectRef idx="1">
+              <a:schemeClr val="accent1"/>
+            </a:effectRef>
+            <a:fontRef idx="minor">
+              <a:schemeClr val="tx1"/>
+            </a:fontRef>
+          </p:style>
+        </p:cxnSp>
+        <p:cxnSp>
+          <p:nvCxnSpPr>
+            <p:cNvPr id="21" name="Straight Connector 20">
+              <a:extLst>
+                <a:ext uri="{FF2B5EF4-FFF2-40B4-BE49-F238E27FC236}">
+                  <a16:creationId xmlns:a16="http://schemas.microsoft.com/office/drawing/2014/main" id="{1EBCE35E-89F1-9E8C-3F73-ACD8AC4E1150}"/>
+                </a:ext>
+              </a:extLst>
+            </p:cNvPr>
+            <p:cNvCxnSpPr>
+              <a:cxnSpLocks/>
+              <a:stCxn id="4" idx="2"/>
+              <a:endCxn id="6" idx="0"/>
+            </p:cNvCxnSpPr>
+            <p:nvPr/>
+          </p:nvCxnSpPr>
+          <p:spPr>
+            <a:xfrm flipH="1">
+              <a:off x="4840141" y="1323184"/>
+              <a:ext cx="1433681" cy="343005"/>
+            </a:xfrm>
+            <a:prstGeom prst="line">
+              <a:avLst/>
+            </a:prstGeom>
+          </p:spPr>
+          <p:style>
+            <a:lnRef idx="2">
+              <a:schemeClr val="accent1"/>
+            </a:lnRef>
+            <a:fillRef idx="0">
+              <a:schemeClr val="accent1"/>
+            </a:fillRef>
+            <a:effectRef idx="1">
+              <a:schemeClr val="accent1"/>
+            </a:effectRef>
+            <a:fontRef idx="minor">
+              <a:schemeClr val="tx1"/>
+            </a:fontRef>
+          </p:style>
+        </p:cxnSp>
+        <p:cxnSp>
+          <p:nvCxnSpPr>
+            <p:cNvPr id="24" name="Straight Connector 23">
+              <a:extLst>
+                <a:ext uri="{FF2B5EF4-FFF2-40B4-BE49-F238E27FC236}">
+                  <a16:creationId xmlns:a16="http://schemas.microsoft.com/office/drawing/2014/main" id="{0C9B2F68-4B7F-D4F0-9993-1D421F9CCE53}"/>
+                </a:ext>
+              </a:extLst>
+            </p:cNvPr>
+            <p:cNvCxnSpPr>
+              <a:cxnSpLocks/>
+              <a:stCxn id="4" idx="2"/>
+              <a:endCxn id="10" idx="0"/>
+            </p:cNvCxnSpPr>
+            <p:nvPr/>
+          </p:nvCxnSpPr>
+          <p:spPr>
+            <a:xfrm>
+              <a:off x="6273822" y="1323184"/>
+              <a:ext cx="1448476" cy="343005"/>
+            </a:xfrm>
+            <a:prstGeom prst="line">
+              <a:avLst/>
+            </a:prstGeom>
+          </p:spPr>
+          <p:style>
+            <a:lnRef idx="2">
+              <a:schemeClr val="accent1"/>
+            </a:lnRef>
+            <a:fillRef idx="0">
+              <a:schemeClr val="accent1"/>
+            </a:fillRef>
+            <a:effectRef idx="1">
+              <a:schemeClr val="accent1"/>
+            </a:effectRef>
+            <a:fontRef idx="minor">
+              <a:schemeClr val="tx1"/>
+            </a:fontRef>
+          </p:style>
+        </p:cxnSp>
+        <p:cxnSp>
+          <p:nvCxnSpPr>
+            <p:cNvPr id="27" name="Straight Connector 26">
+              <a:extLst>
+                <a:ext uri="{FF2B5EF4-FFF2-40B4-BE49-F238E27FC236}">
+                  <a16:creationId xmlns:a16="http://schemas.microsoft.com/office/drawing/2014/main" id="{30AB3E62-E587-47BC-B65C-6562AC60E87E}"/>
+                </a:ext>
+              </a:extLst>
+            </p:cNvPr>
+            <p:cNvCxnSpPr>
+              <a:cxnSpLocks/>
+              <a:stCxn id="6" idx="2"/>
+              <a:endCxn id="18" idx="0"/>
+            </p:cNvCxnSpPr>
+            <p:nvPr/>
+          </p:nvCxnSpPr>
+          <p:spPr>
+            <a:xfrm flipH="1">
+              <a:off x="3740297" y="2035521"/>
+              <a:ext cx="1099844" cy="280723"/>
+            </a:xfrm>
+            <a:prstGeom prst="line">
+              <a:avLst/>
+            </a:prstGeom>
+          </p:spPr>
+          <p:style>
+            <a:lnRef idx="2">
+              <a:schemeClr val="accent1"/>
+            </a:lnRef>
+            <a:fillRef idx="0">
+              <a:schemeClr val="accent1"/>
+            </a:fillRef>
+            <a:effectRef idx="1">
+              <a:schemeClr val="accent1"/>
+            </a:effectRef>
+            <a:fontRef idx="minor">
+              <a:schemeClr val="tx1"/>
+            </a:fontRef>
+          </p:style>
+        </p:cxnSp>
+        <p:cxnSp>
+          <p:nvCxnSpPr>
+            <p:cNvPr id="30" name="Straight Connector 29">
+              <a:extLst>
+                <a:ext uri="{FF2B5EF4-FFF2-40B4-BE49-F238E27FC236}">
+                  <a16:creationId xmlns:a16="http://schemas.microsoft.com/office/drawing/2014/main" id="{E52AE403-A3A6-7F2C-53B9-CC81B6BB7E03}"/>
+                </a:ext>
+              </a:extLst>
+            </p:cNvPr>
+            <p:cNvCxnSpPr>
+              <a:cxnSpLocks/>
+              <a:stCxn id="6" idx="2"/>
+              <a:endCxn id="16" idx="0"/>
+            </p:cNvCxnSpPr>
+            <p:nvPr/>
+          </p:nvCxnSpPr>
+          <p:spPr>
+            <a:xfrm>
+              <a:off x="4840141" y="2035521"/>
+              <a:ext cx="505872" cy="280723"/>
+            </a:xfrm>
+            <a:prstGeom prst="line">
+              <a:avLst/>
+            </a:prstGeom>
+          </p:spPr>
+          <p:style>
+            <a:lnRef idx="2">
+              <a:schemeClr val="accent1"/>
+            </a:lnRef>
+            <a:fillRef idx="0">
+              <a:schemeClr val="accent1"/>
+            </a:fillRef>
+            <a:effectRef idx="1">
+              <a:schemeClr val="accent1"/>
+            </a:effectRef>
+            <a:fontRef idx="minor">
+              <a:schemeClr val="tx1"/>
+            </a:fontRef>
+          </p:style>
+        </p:cxnSp>
+        <p:cxnSp>
+          <p:nvCxnSpPr>
+            <p:cNvPr id="33" name="Straight Connector 32">
+              <a:extLst>
+                <a:ext uri="{FF2B5EF4-FFF2-40B4-BE49-F238E27FC236}">
+                  <a16:creationId xmlns:a16="http://schemas.microsoft.com/office/drawing/2014/main" id="{32549293-27F8-A575-E242-4CDE74C6585D}"/>
+                </a:ext>
+              </a:extLst>
+            </p:cNvPr>
+            <p:cNvCxnSpPr>
+              <a:cxnSpLocks/>
+              <a:stCxn id="8" idx="2"/>
+              <a:endCxn id="12" idx="0"/>
+            </p:cNvCxnSpPr>
+            <p:nvPr/>
+          </p:nvCxnSpPr>
+          <p:spPr>
+            <a:xfrm>
+              <a:off x="6273823" y="2050910"/>
+              <a:ext cx="693753" cy="265334"/>
+            </a:xfrm>
+            <a:prstGeom prst="line">
+              <a:avLst/>
+            </a:prstGeom>
+          </p:spPr>
+          <p:style>
+            <a:lnRef idx="2">
+              <a:schemeClr val="accent1"/>
+            </a:lnRef>
+            <a:fillRef idx="0">
+              <a:schemeClr val="accent1"/>
+            </a:fillRef>
+            <a:effectRef idx="1">
+              <a:schemeClr val="accent1"/>
+            </a:effectRef>
+            <a:fontRef idx="minor">
+              <a:schemeClr val="tx1"/>
+            </a:fontRef>
+          </p:style>
+        </p:cxnSp>
+        <p:cxnSp>
+          <p:nvCxnSpPr>
+            <p:cNvPr id="36" name="Straight Connector 35">
+              <a:extLst>
+                <a:ext uri="{FF2B5EF4-FFF2-40B4-BE49-F238E27FC236}">
+                  <a16:creationId xmlns:a16="http://schemas.microsoft.com/office/drawing/2014/main" id="{CD0B4E94-8AAD-65EE-8B9F-44708BE1A474}"/>
+                </a:ext>
+              </a:extLst>
+            </p:cNvPr>
+            <p:cNvCxnSpPr>
+              <a:cxnSpLocks/>
+              <a:stCxn id="10" idx="2"/>
+              <a:endCxn id="14" idx="0"/>
+            </p:cNvCxnSpPr>
+            <p:nvPr/>
+          </p:nvCxnSpPr>
+          <p:spPr>
+            <a:xfrm>
+              <a:off x="7722298" y="2035521"/>
+              <a:ext cx="943806" cy="280723"/>
+            </a:xfrm>
+            <a:prstGeom prst="line">
+              <a:avLst/>
+            </a:prstGeom>
+          </p:spPr>
+          <p:style>
+            <a:lnRef idx="2">
+              <a:schemeClr val="accent1"/>
+            </a:lnRef>
+            <a:fillRef idx="0">
+              <a:schemeClr val="accent1"/>
+            </a:fillRef>
+            <a:effectRef idx="1">
+              <a:schemeClr val="accent1"/>
+            </a:effectRef>
+            <a:fontRef idx="minor">
+              <a:schemeClr val="tx1"/>
+            </a:fontRef>
+          </p:style>
+        </p:cxnSp>
+      </p:grpSp>
+    </p:spTree>
+    <p:extLst>
+      <p:ext uri="{BB962C8B-B14F-4D97-AF65-F5344CB8AC3E}">
+        <p14:creationId xmlns:p14="http://schemas.microsoft.com/office/powerpoint/2010/main" val="1492292829"/>
+      </p:ext>
+    </p:extLst>
+  </p:cSld>
+  <p:clrMapOvr>
+    <a:masterClrMapping/>
+  </p:clrMapOvr>
+</p:sld>
+</file>
+
 <file path=ppt/theme/theme1.xml><?xml version="1.0" encoding="utf-8"?>
 <a:theme xmlns:a="http://schemas.openxmlformats.org/drawingml/2006/main" name="Office Theme">
   <a:themeElements>

--- a/media/week_8/diagrams_dicts_tuples.pptx
+++ b/media/week_8/diagrams_dicts_tuples.pptx
@@ -10,6 +10,8 @@
     <p:sldId id="258" r:id="rId4"/>
     <p:sldId id="259" r:id="rId5"/>
     <p:sldId id="260" r:id="rId6"/>
+    <p:sldId id="261" r:id="rId7"/>
+    <p:sldId id="262" r:id="rId8"/>
   </p:sldIdLst>
   <p:sldSz cx="12192000" cy="6858000"/>
   <p:notesSz cx="6858000" cy="9144000"/>
@@ -108,11 +110,6 @@
       </a:defRPr>
     </a:lvl9pPr>
   </p:defaultTextStyle>
-  <p:extLst>
-    <p:ext uri="{EFAFB233-063F-42B5-8137-9DF3F51BA10A}">
-      <p15:sldGuideLst xmlns:p15="http://schemas.microsoft.com/office/powerpoint/2012/main"/>
-    </p:ext>
-  </p:extLst>
 </p:presentation>
 </file>
 
@@ -129,7 +126,7 @@
   <pc:docChgLst>
     <pc:chgData name="Hemma Philamore" userId="db50e2f3-17b2-4cc0-b719-fb6254d3e9df" providerId="ADAL" clId="{976AD799-FE43-55CA-A221-11B5AB66B93B}"/>
     <pc:docChg chg="undo custSel addSld modSld">
-      <pc:chgData name="Hemma Philamore" userId="db50e2f3-17b2-4cc0-b719-fb6254d3e9df" providerId="ADAL" clId="{976AD799-FE43-55CA-A221-11B5AB66B93B}" dt="2026-10-26T16:05:40.984" v="349" actId="164"/>
+      <pc:chgData name="Hemma Philamore" userId="db50e2f3-17b2-4cc0-b719-fb6254d3e9df" providerId="ADAL" clId="{976AD799-FE43-55CA-A221-11B5AB66B93B}" dt="2026-10-28T15:48:54.805" v="358"/>
       <pc:docMkLst>
         <pc:docMk/>
       </pc:docMkLst>
@@ -156,38 +153,6 @@
           </ac:spMkLst>
         </pc:spChg>
         <pc:spChg chg="mod">
-          <ac:chgData name="Hemma Philamore" userId="db50e2f3-17b2-4cc0-b719-fb6254d3e9df" providerId="ADAL" clId="{976AD799-FE43-55CA-A221-11B5AB66B93B}" dt="2026-10-26T11:34:59.667" v="28" actId="113"/>
-          <ac:spMkLst>
-            <pc:docMk/>
-            <pc:sldMk cId="918735867" sldId="257"/>
-            <ac:spMk id="6" creationId="{86EFCCEF-DBBC-D96C-6D0F-7F646E888C51}"/>
-          </ac:spMkLst>
-        </pc:spChg>
-        <pc:spChg chg="mod">
-          <ac:chgData name="Hemma Philamore" userId="db50e2f3-17b2-4cc0-b719-fb6254d3e9df" providerId="ADAL" clId="{976AD799-FE43-55CA-A221-11B5AB66B93B}" dt="2026-10-26T11:34:59.667" v="28" actId="113"/>
-          <ac:spMkLst>
-            <pc:docMk/>
-            <pc:sldMk cId="918735867" sldId="257"/>
-            <ac:spMk id="7" creationId="{CFF61D96-A3E3-1AEC-D049-ADFAB8B2F642}"/>
-          </ac:spMkLst>
-        </pc:spChg>
-        <pc:spChg chg="mod">
-          <ac:chgData name="Hemma Philamore" userId="db50e2f3-17b2-4cc0-b719-fb6254d3e9df" providerId="ADAL" clId="{976AD799-FE43-55CA-A221-11B5AB66B93B}" dt="2026-10-26T11:35:02.106" v="29"/>
-          <ac:spMkLst>
-            <pc:docMk/>
-            <pc:sldMk cId="918735867" sldId="257"/>
-            <ac:spMk id="9" creationId="{976FC995-98AD-BC43-AD9B-B4CE8765314A}"/>
-          </ac:spMkLst>
-        </pc:spChg>
-        <pc:spChg chg="mod">
-          <ac:chgData name="Hemma Philamore" userId="db50e2f3-17b2-4cc0-b719-fb6254d3e9df" providerId="ADAL" clId="{976AD799-FE43-55CA-A221-11B5AB66B93B}" dt="2026-10-26T11:35:33.243" v="43" actId="20577"/>
-          <ac:spMkLst>
-            <pc:docMk/>
-            <pc:sldMk cId="918735867" sldId="257"/>
-            <ac:spMk id="10" creationId="{78328FDD-E186-976F-D324-CD15327ECFD2}"/>
-          </ac:spMkLst>
-        </pc:spChg>
-        <pc:spChg chg="mod">
           <ac:chgData name="Hemma Philamore" userId="db50e2f3-17b2-4cc0-b719-fb6254d3e9df" providerId="ADAL" clId="{976AD799-FE43-55CA-A221-11B5AB66B93B}" dt="2026-10-26T11:35:02.394" v="30"/>
           <ac:spMkLst>
             <pc:docMk/>
@@ -315,70 +280,6 @@
             <ac:spMk id="49" creationId="{0FC379B7-B3D4-5673-5313-C081D9B9D5CB}"/>
           </ac:spMkLst>
         </pc:spChg>
-        <pc:spChg chg="del mod topLvl">
-          <ac:chgData name="Hemma Philamore" userId="db50e2f3-17b2-4cc0-b719-fb6254d3e9df" providerId="ADAL" clId="{976AD799-FE43-55CA-A221-11B5AB66B93B}" dt="2026-10-26T12:00:31.532" v="121" actId="478"/>
-          <ac:spMkLst>
-            <pc:docMk/>
-            <pc:sldMk cId="918735867" sldId="257"/>
-            <ac:spMk id="65" creationId="{2C8361F8-A209-D32D-5AC9-2DE64ED885B8}"/>
-          </ac:spMkLst>
-        </pc:spChg>
-        <pc:spChg chg="del mod topLvl">
-          <ac:chgData name="Hemma Philamore" userId="db50e2f3-17b2-4cc0-b719-fb6254d3e9df" providerId="ADAL" clId="{976AD799-FE43-55CA-A221-11B5AB66B93B}" dt="2026-10-26T12:00:36.035" v="124" actId="478"/>
-          <ac:spMkLst>
-            <pc:docMk/>
-            <pc:sldMk cId="918735867" sldId="257"/>
-            <ac:spMk id="66" creationId="{C3400A2A-AD19-27A3-96C4-2A9636C8102C}"/>
-          </ac:spMkLst>
-        </pc:spChg>
-        <pc:spChg chg="del topLvl">
-          <ac:chgData name="Hemma Philamore" userId="db50e2f3-17b2-4cc0-b719-fb6254d3e9df" providerId="ADAL" clId="{976AD799-FE43-55CA-A221-11B5AB66B93B}" dt="2026-10-26T12:00:42.724" v="128" actId="478"/>
-          <ac:spMkLst>
-            <pc:docMk/>
-            <pc:sldMk cId="918735867" sldId="257"/>
-            <ac:spMk id="67" creationId="{5C2C1936-6FAC-D61F-7B08-242387CB124A}"/>
-          </ac:spMkLst>
-        </pc:spChg>
-        <pc:spChg chg="del mod topLvl">
-          <ac:chgData name="Hemma Philamore" userId="db50e2f3-17b2-4cc0-b719-fb6254d3e9df" providerId="ADAL" clId="{976AD799-FE43-55CA-A221-11B5AB66B93B}" dt="2026-10-26T12:00:28.699" v="120" actId="478"/>
-          <ac:spMkLst>
-            <pc:docMk/>
-            <pc:sldMk cId="918735867" sldId="257"/>
-            <ac:spMk id="68" creationId="{3F76E099-EC64-7DF3-8891-2F46304CA5A6}"/>
-          </ac:spMkLst>
-        </pc:spChg>
-        <pc:spChg chg="del mod topLvl">
-          <ac:chgData name="Hemma Philamore" userId="db50e2f3-17b2-4cc0-b719-fb6254d3e9df" providerId="ADAL" clId="{976AD799-FE43-55CA-A221-11B5AB66B93B}" dt="2026-10-26T12:00:34.418" v="123" actId="478"/>
-          <ac:spMkLst>
-            <pc:docMk/>
-            <pc:sldMk cId="918735867" sldId="257"/>
-            <ac:spMk id="69" creationId="{11351722-FD5B-3044-1141-EDCC295C4C23}"/>
-          </ac:spMkLst>
-        </pc:spChg>
-        <pc:spChg chg="del topLvl">
-          <ac:chgData name="Hemma Philamore" userId="db50e2f3-17b2-4cc0-b719-fb6254d3e9df" providerId="ADAL" clId="{976AD799-FE43-55CA-A221-11B5AB66B93B}" dt="2026-10-26T12:00:37.541" v="125" actId="478"/>
-          <ac:spMkLst>
-            <pc:docMk/>
-            <pc:sldMk cId="918735867" sldId="257"/>
-            <ac:spMk id="70" creationId="{33511C53-600C-B90A-19F2-9A8F17113E0D}"/>
-          </ac:spMkLst>
-        </pc:spChg>
-        <pc:spChg chg="del topLvl">
-          <ac:chgData name="Hemma Philamore" userId="db50e2f3-17b2-4cc0-b719-fb6254d3e9df" providerId="ADAL" clId="{976AD799-FE43-55CA-A221-11B5AB66B93B}" dt="2026-10-26T12:00:40.675" v="127" actId="478"/>
-          <ac:spMkLst>
-            <pc:docMk/>
-            <pc:sldMk cId="918735867" sldId="257"/>
-            <ac:spMk id="71" creationId="{7A75BC0D-469E-9B1D-F9B0-4E7CC73C6C16}"/>
-          </ac:spMkLst>
-        </pc:spChg>
-        <pc:spChg chg="del mod topLvl">
-          <ac:chgData name="Hemma Philamore" userId="db50e2f3-17b2-4cc0-b719-fb6254d3e9df" providerId="ADAL" clId="{976AD799-FE43-55CA-A221-11B5AB66B93B}" dt="2026-10-26T12:00:39.124" v="126" actId="478"/>
-          <ac:spMkLst>
-            <pc:docMk/>
-            <pc:sldMk cId="918735867" sldId="257"/>
-            <ac:spMk id="72" creationId="{716238A2-0DB5-1E15-E69B-FE5F45A90CA6}"/>
-          </ac:spMkLst>
-        </pc:spChg>
         <pc:spChg chg="mod">
           <ac:chgData name="Hemma Philamore" userId="db50e2f3-17b2-4cc0-b719-fb6254d3e9df" providerId="ADAL" clId="{976AD799-FE43-55CA-A221-11B5AB66B93B}" dt="2026-10-26T12:00:17.602" v="117"/>
           <ac:spMkLst>
@@ -427,22 +328,6 @@
             <ac:grpSpMk id="4" creationId="{CFE2233B-7FBB-8424-6C06-C24D31DA81C1}"/>
           </ac:grpSpMkLst>
         </pc:grpChg>
-        <pc:grpChg chg="add del mod">
-          <ac:chgData name="Hemma Philamore" userId="db50e2f3-17b2-4cc0-b719-fb6254d3e9df" providerId="ADAL" clId="{976AD799-FE43-55CA-A221-11B5AB66B93B}" dt="2026-10-26T11:35:48.837" v="47" actId="478"/>
-          <ac:grpSpMkLst>
-            <pc:docMk/>
-            <pc:sldMk cId="918735867" sldId="257"/>
-            <ac:grpSpMk id="5" creationId="{DE7AA199-311C-9D20-7A42-7F2AB76FAD40}"/>
-          </ac:grpSpMkLst>
-        </pc:grpChg>
-        <pc:grpChg chg="add del mod">
-          <ac:chgData name="Hemma Philamore" userId="db50e2f3-17b2-4cc0-b719-fb6254d3e9df" providerId="ADAL" clId="{976AD799-FE43-55CA-A221-11B5AB66B93B}" dt="2026-10-26T11:35:53.064" v="49" actId="478"/>
-          <ac:grpSpMkLst>
-            <pc:docMk/>
-            <pc:sldMk cId="918735867" sldId="257"/>
-            <ac:grpSpMk id="8" creationId="{FC8AE0B3-4C13-CB7E-8EE8-ED454A9D9B76}"/>
-          </ac:grpSpMkLst>
-        </pc:grpChg>
         <pc:grpChg chg="add mod">
           <ac:chgData name="Hemma Philamore" userId="db50e2f3-17b2-4cc0-b719-fb6254d3e9df" providerId="ADAL" clId="{976AD799-FE43-55CA-A221-11B5AB66B93B}" dt="2026-10-26T11:35:52.312" v="48" actId="1076"/>
           <ac:grpSpMkLst>
@@ -483,14 +368,6 @@
             <ac:grpSpMk id="50" creationId="{8514EE9D-8518-14AD-5972-C786FCA2EA6A}"/>
           </ac:grpSpMkLst>
         </pc:grpChg>
-        <pc:grpChg chg="mod">
-          <ac:chgData name="Hemma Philamore" userId="db50e2f3-17b2-4cc0-b719-fb6254d3e9df" providerId="ADAL" clId="{976AD799-FE43-55CA-A221-11B5AB66B93B}" dt="2026-10-26T12:00:21.232" v="118" actId="1076"/>
-          <ac:grpSpMkLst>
-            <pc:docMk/>
-            <pc:sldMk cId="918735867" sldId="257"/>
-            <ac:grpSpMk id="51" creationId="{550CF0DD-D234-04A1-6837-F5A36F495072}"/>
-          </ac:grpSpMkLst>
-        </pc:grpChg>
         <pc:grpChg chg="topLvl">
           <ac:chgData name="Hemma Philamore" userId="db50e2f3-17b2-4cc0-b719-fb6254d3e9df" providerId="ADAL" clId="{976AD799-FE43-55CA-A221-11B5AB66B93B}" dt="2026-10-26T12:00:25.304" v="119" actId="165"/>
           <ac:grpSpMkLst>
@@ -515,14 +392,6 @@
             <ac:grpSpMk id="83" creationId="{2E3E862B-EC4E-D899-6C72-0F337C65CFA8}"/>
           </ac:grpSpMkLst>
         </pc:grpChg>
-        <pc:cxnChg chg="add del mod">
-          <ac:chgData name="Hemma Philamore" userId="db50e2f3-17b2-4cc0-b719-fb6254d3e9df" providerId="ADAL" clId="{976AD799-FE43-55CA-A221-11B5AB66B93B}" dt="2026-10-26T11:36:05.024" v="51" actId="11529"/>
-          <ac:cxnSpMkLst>
-            <pc:docMk/>
-            <pc:sldMk cId="918735867" sldId="257"/>
-            <ac:cxnSpMk id="24" creationId="{E7A3137D-EEA5-B6E8-EF4A-89BB107CB35E}"/>
-          </ac:cxnSpMkLst>
-        </pc:cxnChg>
         <pc:cxnChg chg="add mod">
           <ac:chgData name="Hemma Philamore" userId="db50e2f3-17b2-4cc0-b719-fb6254d3e9df" providerId="ADAL" clId="{976AD799-FE43-55CA-A221-11B5AB66B93B}" dt="2026-10-26T11:37:35.106" v="66" actId="692"/>
           <ac:cxnSpMkLst>
@@ -602,14 +471,6 @@
             <ac:spMk id="2" creationId="{1166DCA7-BE25-075C-C4EB-C3A91B2B4558}"/>
           </ac:spMkLst>
         </pc:spChg>
-        <pc:spChg chg="del">
-          <ac:chgData name="Hemma Philamore" userId="db50e2f3-17b2-4cc0-b719-fb6254d3e9df" providerId="ADAL" clId="{976AD799-FE43-55CA-A221-11B5AB66B93B}" dt="2026-10-26T14:01:37.096" v="131" actId="478"/>
-          <ac:spMkLst>
-            <pc:docMk/>
-            <pc:sldMk cId="818822214" sldId="258"/>
-            <ac:spMk id="3" creationId="{0B6CC2A2-25F1-702A-6F65-CC7DEA5A1F73}"/>
-          </ac:spMkLst>
-        </pc:spChg>
         <pc:spChg chg="add mod">
           <ac:chgData name="Hemma Philamore" userId="db50e2f3-17b2-4cc0-b719-fb6254d3e9df" providerId="ADAL" clId="{976AD799-FE43-55CA-A221-11B5AB66B93B}" dt="2026-10-26T14:01:46.070" v="139" actId="1076"/>
           <ac:spMkLst>
@@ -666,12 +527,20 @@
             <ac:spMk id="12" creationId="{4D0FB3C7-9C73-BC39-5690-7EFF4A2894AF}"/>
           </ac:spMkLst>
         </pc:spChg>
-        <pc:spChg chg="del topLvl">
-          <ac:chgData name="Hemma Philamore" userId="db50e2f3-17b2-4cc0-b719-fb6254d3e9df" providerId="ADAL" clId="{976AD799-FE43-55CA-A221-11B5AB66B93B}" dt="2026-10-26T14:02:00.479" v="143" actId="478"/>
+        <pc:spChg chg="topLvl">
+          <ac:chgData name="Hemma Philamore" userId="db50e2f3-17b2-4cc0-b719-fb6254d3e9df" providerId="ADAL" clId="{976AD799-FE43-55CA-A221-11B5AB66B93B}" dt="2026-10-26T14:01:57.370" v="142" actId="165"/>
           <ac:spMkLst>
             <pc:docMk/>
             <pc:sldMk cId="818822214" sldId="258"/>
-            <ac:spMk id="13" creationId="{37B39678-CCA2-2160-EE6B-F3FFA9DE56F5}"/>
+            <ac:spMk id="15" creationId="{075391DC-F7E3-F41D-1365-DF93FA2D0B76}"/>
+          </ac:spMkLst>
+        </pc:spChg>
+        <pc:spChg chg="topLvl">
+          <ac:chgData name="Hemma Philamore" userId="db50e2f3-17b2-4cc0-b719-fb6254d3e9df" providerId="ADAL" clId="{976AD799-FE43-55CA-A221-11B5AB66B93B}" dt="2026-10-26T14:02:02.304" v="144" actId="478"/>
+          <ac:spMkLst>
+            <pc:docMk/>
+            <pc:sldMk cId="818822214" sldId="258"/>
+            <ac:spMk id="18" creationId="{FB009A0A-1C4C-CCAF-7B85-986E3BB01521}"/>
           </ac:spMkLst>
         </pc:spChg>
         <pc:spChg chg="topLvl">
@@ -679,47 +548,7 @@
           <ac:spMkLst>
             <pc:docMk/>
             <pc:sldMk cId="818822214" sldId="258"/>
-            <ac:spMk id="15" creationId="{075391DC-F7E3-F41D-1365-DF93FA2D0B76}"/>
-          </ac:spMkLst>
-        </pc:spChg>
-        <pc:spChg chg="del">
-          <ac:chgData name="Hemma Philamore" userId="db50e2f3-17b2-4cc0-b719-fb6254d3e9df" providerId="ADAL" clId="{976AD799-FE43-55CA-A221-11B5AB66B93B}" dt="2026-10-26T14:01:52.136" v="141" actId="478"/>
-          <ac:spMkLst>
-            <pc:docMk/>
-            <pc:sldMk cId="818822214" sldId="258"/>
-            <ac:spMk id="16" creationId="{D27389F5-42BB-3C70-DE01-14C4C4FE654F}"/>
-          </ac:spMkLst>
-        </pc:spChg>
-        <pc:spChg chg="topLvl">
-          <ac:chgData name="Hemma Philamore" userId="db50e2f3-17b2-4cc0-b719-fb6254d3e9df" providerId="ADAL" clId="{976AD799-FE43-55CA-A221-11B5AB66B93B}" dt="2026-10-26T14:02:02.304" v="144" actId="478"/>
-          <ac:spMkLst>
-            <pc:docMk/>
-            <pc:sldMk cId="818822214" sldId="258"/>
-            <ac:spMk id="18" creationId="{FB009A0A-1C4C-CCAF-7B85-986E3BB01521}"/>
-          </ac:spMkLst>
-        </pc:spChg>
-        <pc:spChg chg="del topLvl">
-          <ac:chgData name="Hemma Philamore" userId="db50e2f3-17b2-4cc0-b719-fb6254d3e9df" providerId="ADAL" clId="{976AD799-FE43-55CA-A221-11B5AB66B93B}" dt="2026-10-26T14:02:02.304" v="144" actId="478"/>
-          <ac:spMkLst>
-            <pc:docMk/>
-            <pc:sldMk cId="818822214" sldId="258"/>
-            <ac:spMk id="19" creationId="{7405E25B-B77D-65B9-058C-63428652E40E}"/>
-          </ac:spMkLst>
-        </pc:spChg>
-        <pc:spChg chg="topLvl">
-          <ac:chgData name="Hemma Philamore" userId="db50e2f3-17b2-4cc0-b719-fb6254d3e9df" providerId="ADAL" clId="{976AD799-FE43-55CA-A221-11B5AB66B93B}" dt="2026-10-26T14:01:57.370" v="142" actId="165"/>
-          <ac:spMkLst>
-            <pc:docMk/>
-            <pc:sldMk cId="818822214" sldId="258"/>
             <ac:spMk id="21" creationId="{62B9B986-9CBD-1052-25FD-39E6133B2A70}"/>
-          </ac:spMkLst>
-        </pc:spChg>
-        <pc:spChg chg="del">
-          <ac:chgData name="Hemma Philamore" userId="db50e2f3-17b2-4cc0-b719-fb6254d3e9df" providerId="ADAL" clId="{976AD799-FE43-55CA-A221-11B5AB66B93B}" dt="2026-10-26T14:01:49.624" v="140" actId="478"/>
-          <ac:spMkLst>
-            <pc:docMk/>
-            <pc:sldMk cId="818822214" sldId="258"/>
-            <ac:spMk id="22" creationId="{C2F1FDE3-3920-1024-B120-E47CA3F25E3D}"/>
           </ac:spMkLst>
         </pc:spChg>
         <pc:spChg chg="add mod">
@@ -728,22 +557,6 @@
             <pc:docMk/>
             <pc:sldMk cId="818822214" sldId="258"/>
             <ac:spMk id="23" creationId="{446A178C-C437-313B-ED62-CE951E3F45F1}"/>
-          </ac:spMkLst>
-        </pc:spChg>
-        <pc:spChg chg="add del mod">
-          <ac:chgData name="Hemma Philamore" userId="db50e2f3-17b2-4cc0-b719-fb6254d3e9df" providerId="ADAL" clId="{976AD799-FE43-55CA-A221-11B5AB66B93B}" dt="2026-10-26T14:09:09.289" v="279" actId="478"/>
-          <ac:spMkLst>
-            <pc:docMk/>
-            <pc:sldMk cId="818822214" sldId="258"/>
-            <ac:spMk id="24" creationId="{6D790245-D61A-359E-E774-41FB675737AA}"/>
-          </ac:spMkLst>
-        </pc:spChg>
-        <pc:spChg chg="add del mod">
-          <ac:chgData name="Hemma Philamore" userId="db50e2f3-17b2-4cc0-b719-fb6254d3e9df" providerId="ADAL" clId="{976AD799-FE43-55CA-A221-11B5AB66B93B}" dt="2026-10-26T14:09:11.689" v="281" actId="478"/>
-          <ac:spMkLst>
-            <pc:docMk/>
-            <pc:sldMk cId="818822214" sldId="258"/>
-            <ac:spMk id="25" creationId="{B23047DA-1FB2-6F32-5E7D-EEC547097651}"/>
           </ac:spMkLst>
         </pc:spChg>
         <pc:spChg chg="mod topLvl">
@@ -770,14 +583,6 @@
             <ac:spMk id="44" creationId="{1426A36C-9368-D130-7B58-77E95C4566DD}"/>
           </ac:spMkLst>
         </pc:spChg>
-        <pc:spChg chg="del">
-          <ac:chgData name="Hemma Philamore" userId="db50e2f3-17b2-4cc0-b719-fb6254d3e9df" providerId="ADAL" clId="{976AD799-FE43-55CA-A221-11B5AB66B93B}" dt="2026-10-26T14:06:37.057" v="241" actId="478"/>
-          <ac:spMkLst>
-            <pc:docMk/>
-            <pc:sldMk cId="818822214" sldId="258"/>
-            <ac:spMk id="45" creationId="{9B01EE50-9BC2-915E-BFB6-C39B3AF6AD6C}"/>
-          </ac:spMkLst>
-        </pc:spChg>
         <pc:spChg chg="mod topLvl">
           <ac:chgData name="Hemma Philamore" userId="db50e2f3-17b2-4cc0-b719-fb6254d3e9df" providerId="ADAL" clId="{976AD799-FE43-55CA-A221-11B5AB66B93B}" dt="2026-10-26T14:10:30.327" v="302" actId="20577"/>
           <ac:spMkLst>
@@ -794,140 +599,12 @@
             <ac:spMk id="47" creationId="{985ED467-F9D2-E3D8-486F-C5B73DE24BEC}"/>
           </ac:spMkLst>
         </pc:spChg>
-        <pc:spChg chg="del mod topLvl">
-          <ac:chgData name="Hemma Philamore" userId="db50e2f3-17b2-4cc0-b719-fb6254d3e9df" providerId="ADAL" clId="{976AD799-FE43-55CA-A221-11B5AB66B93B}" dt="2026-10-26T14:08:51.817" v="276" actId="478"/>
-          <ac:spMkLst>
-            <pc:docMk/>
-            <pc:sldMk cId="818822214" sldId="258"/>
-            <ac:spMk id="48" creationId="{A50920EA-BEF7-BA04-465A-91FC90FDF5D5}"/>
-          </ac:spMkLst>
-        </pc:spChg>
         <pc:spChg chg="mod topLvl">
           <ac:chgData name="Hemma Philamore" userId="db50e2f3-17b2-4cc0-b719-fb6254d3e9df" providerId="ADAL" clId="{976AD799-FE43-55CA-A221-11B5AB66B93B}" dt="2026-10-26T14:10:27.207" v="300" actId="20577"/>
           <ac:spMkLst>
             <pc:docMk/>
             <pc:sldMk cId="818822214" sldId="258"/>
             <ac:spMk id="49" creationId="{2696082F-1587-CBC0-D621-0D22E15B2350}"/>
-          </ac:spMkLst>
-        </pc:spChg>
-        <pc:spChg chg="del">
-          <ac:chgData name="Hemma Philamore" userId="db50e2f3-17b2-4cc0-b719-fb6254d3e9df" providerId="ADAL" clId="{976AD799-FE43-55CA-A221-11B5AB66B93B}" dt="2026-10-26T14:11:47.891" v="324" actId="478"/>
-          <ac:spMkLst>
-            <pc:docMk/>
-            <pc:sldMk cId="818822214" sldId="258"/>
-            <ac:spMk id="86" creationId="{A64E81F8-9AFD-AEBD-C138-0E2EEEFEF570}"/>
-          </ac:spMkLst>
-        </pc:spChg>
-        <pc:spChg chg="add mod">
-          <ac:chgData name="Hemma Philamore" userId="db50e2f3-17b2-4cc0-b719-fb6254d3e9df" providerId="ADAL" clId="{976AD799-FE43-55CA-A221-11B5AB66B93B}" dt="2026-10-26T14:09:01.467" v="278" actId="1076"/>
-          <ac:spMkLst>
-            <pc:docMk/>
-            <pc:sldMk cId="818822214" sldId="258"/>
-            <ac:spMk id="87" creationId="{D1E39551-EB9F-48E5-8BD0-27DD519F263C}"/>
-          </ac:spMkLst>
-        </pc:spChg>
-        <pc:spChg chg="add del mod">
-          <ac:chgData name="Hemma Philamore" userId="db50e2f3-17b2-4cc0-b719-fb6254d3e9df" providerId="ADAL" clId="{976AD799-FE43-55CA-A221-11B5AB66B93B}" dt="2026-10-26T14:11:33.922" v="321" actId="478"/>
-          <ac:spMkLst>
-            <pc:docMk/>
-            <pc:sldMk cId="818822214" sldId="258"/>
-            <ac:spMk id="88" creationId="{1B379102-956F-C630-2A1D-3B8154491BFD}"/>
-          </ac:spMkLst>
-        </pc:spChg>
-        <pc:spChg chg="del">
-          <ac:chgData name="Hemma Philamore" userId="db50e2f3-17b2-4cc0-b719-fb6254d3e9df" providerId="ADAL" clId="{976AD799-FE43-55CA-A221-11B5AB66B93B}" dt="2026-10-26T14:11:33.922" v="321" actId="478"/>
-          <ac:spMkLst>
-            <pc:docMk/>
-            <pc:sldMk cId="818822214" sldId="258"/>
-            <ac:spMk id="98" creationId="{5C52D5CC-F625-4F5F-5FE0-054921630E7F}"/>
-          </ac:spMkLst>
-        </pc:spChg>
-        <pc:spChg chg="add mod">
-          <ac:chgData name="Hemma Philamore" userId="db50e2f3-17b2-4cc0-b719-fb6254d3e9df" providerId="ADAL" clId="{976AD799-FE43-55CA-A221-11B5AB66B93B}" dt="2026-10-26T14:09:01.467" v="278" actId="1076"/>
-          <ac:spMkLst>
-            <pc:docMk/>
-            <pc:sldMk cId="818822214" sldId="258"/>
-            <ac:spMk id="99" creationId="{93638AF1-46D6-09AA-F2C9-480FC5A6A7F6}"/>
-          </ac:spMkLst>
-        </pc:spChg>
-        <pc:spChg chg="add mod">
-          <ac:chgData name="Hemma Philamore" userId="db50e2f3-17b2-4cc0-b719-fb6254d3e9df" providerId="ADAL" clId="{976AD799-FE43-55CA-A221-11B5AB66B93B}" dt="2026-10-26T14:09:01.467" v="278" actId="1076"/>
-          <ac:spMkLst>
-            <pc:docMk/>
-            <pc:sldMk cId="818822214" sldId="258"/>
-            <ac:spMk id="100" creationId="{2EBD65D6-364C-48C0-08FF-186EC69538CF}"/>
-          </ac:spMkLst>
-        </pc:spChg>
-        <pc:spChg chg="add del mod">
-          <ac:chgData name="Hemma Philamore" userId="db50e2f3-17b2-4cc0-b719-fb6254d3e9df" providerId="ADAL" clId="{976AD799-FE43-55CA-A221-11B5AB66B93B}" dt="2026-10-26T14:11:33.922" v="321" actId="478"/>
-          <ac:spMkLst>
-            <pc:docMk/>
-            <pc:sldMk cId="818822214" sldId="258"/>
-            <ac:spMk id="101" creationId="{F904DC4D-9F7E-F78D-A308-4A18D42B6A3E}"/>
-          </ac:spMkLst>
-        </pc:spChg>
-        <pc:spChg chg="add del mod">
-          <ac:chgData name="Hemma Philamore" userId="db50e2f3-17b2-4cc0-b719-fb6254d3e9df" providerId="ADAL" clId="{976AD799-FE43-55CA-A221-11B5AB66B93B}" dt="2026-10-26T14:11:33.922" v="321" actId="478"/>
-          <ac:spMkLst>
-            <pc:docMk/>
-            <pc:sldMk cId="818822214" sldId="258"/>
-            <ac:spMk id="102" creationId="{B31EEC6E-D870-6915-276A-5DB3CD5AC11A}"/>
-          </ac:spMkLst>
-        </pc:spChg>
-        <pc:spChg chg="del">
-          <ac:chgData name="Hemma Philamore" userId="db50e2f3-17b2-4cc0-b719-fb6254d3e9df" providerId="ADAL" clId="{976AD799-FE43-55CA-A221-11B5AB66B93B}" dt="2026-10-26T14:11:33.922" v="321" actId="478"/>
-          <ac:spMkLst>
-            <pc:docMk/>
-            <pc:sldMk cId="818822214" sldId="258"/>
-            <ac:spMk id="103" creationId="{8B35FF13-F2F2-46A1-36ED-610A37714B79}"/>
-          </ac:spMkLst>
-        </pc:spChg>
-        <pc:spChg chg="del">
-          <ac:chgData name="Hemma Philamore" userId="db50e2f3-17b2-4cc0-b719-fb6254d3e9df" providerId="ADAL" clId="{976AD799-FE43-55CA-A221-11B5AB66B93B}" dt="2026-10-26T14:11:33.922" v="321" actId="478"/>
-          <ac:spMkLst>
-            <pc:docMk/>
-            <pc:sldMk cId="818822214" sldId="258"/>
-            <ac:spMk id="104" creationId="{475AE8FD-5901-9B93-9142-F719F6D63E9D}"/>
-          </ac:spMkLst>
-        </pc:spChg>
-        <pc:spChg chg="add del mod">
-          <ac:chgData name="Hemma Philamore" userId="db50e2f3-17b2-4cc0-b719-fb6254d3e9df" providerId="ADAL" clId="{976AD799-FE43-55CA-A221-11B5AB66B93B}" dt="2026-10-26T14:11:49.514" v="325" actId="478"/>
-          <ac:spMkLst>
-            <pc:docMk/>
-            <pc:sldMk cId="818822214" sldId="258"/>
-            <ac:spMk id="105" creationId="{10FFC99D-E1C2-D2DC-6FAB-C80FAB7789A3}"/>
-          </ac:spMkLst>
-        </pc:spChg>
-        <pc:spChg chg="add del mod">
-          <ac:chgData name="Hemma Philamore" userId="db50e2f3-17b2-4cc0-b719-fb6254d3e9df" providerId="ADAL" clId="{976AD799-FE43-55CA-A221-11B5AB66B93B}" dt="2026-10-26T14:11:33.922" v="321" actId="478"/>
-          <ac:spMkLst>
-            <pc:docMk/>
-            <pc:sldMk cId="818822214" sldId="258"/>
-            <ac:spMk id="106" creationId="{D8899B61-8B8D-95A3-4E9C-FFD41EF5A09F}"/>
-          </ac:spMkLst>
-        </pc:spChg>
-        <pc:spChg chg="del">
-          <ac:chgData name="Hemma Philamore" userId="db50e2f3-17b2-4cc0-b719-fb6254d3e9df" providerId="ADAL" clId="{976AD799-FE43-55CA-A221-11B5AB66B93B}" dt="2026-10-26T14:11:33.922" v="321" actId="478"/>
-          <ac:spMkLst>
-            <pc:docMk/>
-            <pc:sldMk cId="818822214" sldId="258"/>
-            <ac:spMk id="107" creationId="{82FA24D6-D964-25AF-2A1B-7E46FAC75E74}"/>
-          </ac:spMkLst>
-        </pc:spChg>
-        <pc:spChg chg="del">
-          <ac:chgData name="Hemma Philamore" userId="db50e2f3-17b2-4cc0-b719-fb6254d3e9df" providerId="ADAL" clId="{976AD799-FE43-55CA-A221-11B5AB66B93B}" dt="2026-10-26T14:11:33.922" v="321" actId="478"/>
-          <ac:spMkLst>
-            <pc:docMk/>
-            <pc:sldMk cId="818822214" sldId="258"/>
-            <ac:spMk id="108" creationId="{A251CB68-F817-4C3B-AECD-DE75AFC10DFB}"/>
-          </ac:spMkLst>
-        </pc:spChg>
-        <pc:spChg chg="del">
-          <ac:chgData name="Hemma Philamore" userId="db50e2f3-17b2-4cc0-b719-fb6254d3e9df" providerId="ADAL" clId="{976AD799-FE43-55CA-A221-11B5AB66B93B}" dt="2026-10-26T14:11:33.922" v="321" actId="478"/>
-          <ac:spMkLst>
-            <pc:docMk/>
-            <pc:sldMk cId="818822214" sldId="258"/>
-            <ac:spMk id="110" creationId="{1127DE7C-EF36-BB85-89C5-B7BC5B1DFC78}"/>
           </ac:spMkLst>
         </pc:spChg>
         <pc:spChg chg="add mod topLvl">
@@ -1090,62 +767,6 @@
             <ac:spMk id="159" creationId="{427A000A-9BA2-4FF6-1BB1-EC4FAF0F5DCA}"/>
           </ac:spMkLst>
         </pc:spChg>
-        <pc:grpChg chg="del">
-          <ac:chgData name="Hemma Philamore" userId="db50e2f3-17b2-4cc0-b719-fb6254d3e9df" providerId="ADAL" clId="{976AD799-FE43-55CA-A221-11B5AB66B93B}" dt="2026-10-26T14:01:37.096" v="131" actId="478"/>
-          <ac:grpSpMkLst>
-            <pc:docMk/>
-            <pc:sldMk cId="818822214" sldId="258"/>
-            <ac:grpSpMk id="4" creationId="{22B12B85-67C8-67AE-6EC9-5721AFCA6E35}"/>
-          </ac:grpSpMkLst>
-        </pc:grpChg>
-        <pc:grpChg chg="del">
-          <ac:chgData name="Hemma Philamore" userId="db50e2f3-17b2-4cc0-b719-fb6254d3e9df" providerId="ADAL" clId="{976AD799-FE43-55CA-A221-11B5AB66B93B}" dt="2026-10-26T14:02:00.479" v="143" actId="478"/>
-          <ac:grpSpMkLst>
-            <pc:docMk/>
-            <pc:sldMk cId="818822214" sldId="258"/>
-            <ac:grpSpMk id="11" creationId="{540E5583-671A-AB53-F7C1-4C8D6385EB20}"/>
-          </ac:grpSpMkLst>
-        </pc:grpChg>
-        <pc:grpChg chg="del">
-          <ac:chgData name="Hemma Philamore" userId="db50e2f3-17b2-4cc0-b719-fb6254d3e9df" providerId="ADAL" clId="{976AD799-FE43-55CA-A221-11B5AB66B93B}" dt="2026-10-26T14:01:52.136" v="141" actId="478"/>
-          <ac:grpSpMkLst>
-            <pc:docMk/>
-            <pc:sldMk cId="818822214" sldId="258"/>
-            <ac:grpSpMk id="14" creationId="{FB3D31BC-71B8-BC20-228C-02224D7FCD47}"/>
-          </ac:grpSpMkLst>
-        </pc:grpChg>
-        <pc:grpChg chg="del">
-          <ac:chgData name="Hemma Philamore" userId="db50e2f3-17b2-4cc0-b719-fb6254d3e9df" providerId="ADAL" clId="{976AD799-FE43-55CA-A221-11B5AB66B93B}" dt="2026-10-26T14:02:02.304" v="144" actId="478"/>
-          <ac:grpSpMkLst>
-            <pc:docMk/>
-            <pc:sldMk cId="818822214" sldId="258"/>
-            <ac:grpSpMk id="17" creationId="{31C4B1DA-162D-55C0-8DC3-72BF4E4F6CB7}"/>
-          </ac:grpSpMkLst>
-        </pc:grpChg>
-        <pc:grpChg chg="del">
-          <ac:chgData name="Hemma Philamore" userId="db50e2f3-17b2-4cc0-b719-fb6254d3e9df" providerId="ADAL" clId="{976AD799-FE43-55CA-A221-11B5AB66B93B}" dt="2026-10-26T14:01:49.624" v="140" actId="478"/>
-          <ac:grpSpMkLst>
-            <pc:docMk/>
-            <pc:sldMk cId="818822214" sldId="258"/>
-            <ac:grpSpMk id="20" creationId="{F317DAEE-B729-0B48-0D93-60B2EDB14E03}"/>
-          </ac:grpSpMkLst>
-        </pc:grpChg>
-        <pc:grpChg chg="del">
-          <ac:chgData name="Hemma Philamore" userId="db50e2f3-17b2-4cc0-b719-fb6254d3e9df" providerId="ADAL" clId="{976AD799-FE43-55CA-A221-11B5AB66B93B}" dt="2026-10-26T14:06:39.283" v="242" actId="478"/>
-          <ac:grpSpMkLst>
-            <pc:docMk/>
-            <pc:sldMk cId="818822214" sldId="258"/>
-            <ac:grpSpMk id="83" creationId="{814F435E-6190-F88F-A253-966894EB682F}"/>
-          </ac:grpSpMkLst>
-        </pc:grpChg>
-        <pc:grpChg chg="add del mod">
-          <ac:chgData name="Hemma Philamore" userId="db50e2f3-17b2-4cc0-b719-fb6254d3e9df" providerId="ADAL" clId="{976AD799-FE43-55CA-A221-11B5AB66B93B}" dt="2026-10-26T14:12:03.493" v="327" actId="165"/>
-          <ac:grpSpMkLst>
-            <pc:docMk/>
-            <pc:sldMk cId="818822214" sldId="258"/>
-            <ac:grpSpMk id="122" creationId="{AEC02C9C-D68C-FCA7-2B3D-1E8961BE3C53}"/>
-          </ac:grpSpMkLst>
-        </pc:grpChg>
         <pc:grpChg chg="add">
           <ac:chgData name="Hemma Philamore" userId="db50e2f3-17b2-4cc0-b719-fb6254d3e9df" providerId="ADAL" clId="{976AD799-FE43-55CA-A221-11B5AB66B93B}" dt="2026-10-26T14:29:08.554" v="347" actId="164"/>
           <ac:grpSpMkLst>
@@ -1178,102 +799,6 @@
             <ac:cxnSpMk id="28" creationId="{CA1D45DC-2FC8-6888-A955-02E09D868AC1}"/>
           </ac:cxnSpMkLst>
         </pc:cxnChg>
-        <pc:cxnChg chg="add del mod">
-          <ac:chgData name="Hemma Philamore" userId="db50e2f3-17b2-4cc0-b719-fb6254d3e9df" providerId="ADAL" clId="{976AD799-FE43-55CA-A221-11B5AB66B93B}" dt="2026-10-26T14:09:10.125" v="280" actId="478"/>
-          <ac:cxnSpMkLst>
-            <pc:docMk/>
-            <pc:sldMk cId="818822214" sldId="258"/>
-            <ac:cxnSpMk id="30" creationId="{09BF18E2-9024-11E2-149E-97E22F00B8A4}"/>
-          </ac:cxnSpMkLst>
-        </pc:cxnChg>
-        <pc:cxnChg chg="add del mod">
-          <ac:chgData name="Hemma Philamore" userId="db50e2f3-17b2-4cc0-b719-fb6254d3e9df" providerId="ADAL" clId="{976AD799-FE43-55CA-A221-11B5AB66B93B}" dt="2026-10-26T14:08:07.553" v="265" actId="478"/>
-          <ac:cxnSpMkLst>
-            <pc:docMk/>
-            <pc:sldMk cId="818822214" sldId="258"/>
-            <ac:cxnSpMk id="36" creationId="{90CE0A25-84B8-79BE-E353-4F6F7105A194}"/>
-          </ac:cxnSpMkLst>
-        </pc:cxnChg>
-        <pc:cxnChg chg="add del mod">
-          <ac:chgData name="Hemma Philamore" userId="db50e2f3-17b2-4cc0-b719-fb6254d3e9df" providerId="ADAL" clId="{976AD799-FE43-55CA-A221-11B5AB66B93B}" dt="2026-10-26T14:09:12.578" v="282" actId="478"/>
-          <ac:cxnSpMkLst>
-            <pc:docMk/>
-            <pc:sldMk cId="818822214" sldId="258"/>
-            <ac:cxnSpMk id="38" creationId="{3A2415BE-8554-E720-F22C-9B68A7D7150C}"/>
-          </ac:cxnSpMkLst>
-        </pc:cxnChg>
-        <pc:cxnChg chg="add del mod">
-          <ac:chgData name="Hemma Philamore" userId="db50e2f3-17b2-4cc0-b719-fb6254d3e9df" providerId="ADAL" clId="{976AD799-FE43-55CA-A221-11B5AB66B93B}" dt="2026-10-26T14:09:13.671" v="283" actId="478"/>
-          <ac:cxnSpMkLst>
-            <pc:docMk/>
-            <pc:sldMk cId="818822214" sldId="258"/>
-            <ac:cxnSpMk id="40" creationId="{3B4CE793-F989-BB95-0D5B-0F1096030130}"/>
-          </ac:cxnSpMkLst>
-        </pc:cxnChg>
-        <pc:cxnChg chg="mod">
-          <ac:chgData name="Hemma Philamore" userId="db50e2f3-17b2-4cc0-b719-fb6254d3e9df" providerId="ADAL" clId="{976AD799-FE43-55CA-A221-11B5AB66B93B}" dt="2026-10-26T14:06:39.283" v="242" actId="478"/>
-          <ac:cxnSpMkLst>
-            <pc:docMk/>
-            <pc:sldMk cId="818822214" sldId="258"/>
-            <ac:cxnSpMk id="57" creationId="{97D9D18C-9E7A-DFA9-FA4F-856527C788E4}"/>
-          </ac:cxnSpMkLst>
-        </pc:cxnChg>
-        <pc:cxnChg chg="mod">
-          <ac:chgData name="Hemma Philamore" userId="db50e2f3-17b2-4cc0-b719-fb6254d3e9df" providerId="ADAL" clId="{976AD799-FE43-55CA-A221-11B5AB66B93B}" dt="2026-10-26T14:06:39.283" v="242" actId="478"/>
-          <ac:cxnSpMkLst>
-            <pc:docMk/>
-            <pc:sldMk cId="818822214" sldId="258"/>
-            <ac:cxnSpMk id="58" creationId="{83B53E58-FA90-943D-D75F-C4C2A31E46DF}"/>
-          </ac:cxnSpMkLst>
-        </pc:cxnChg>
-        <pc:cxnChg chg="mod">
-          <ac:chgData name="Hemma Philamore" userId="db50e2f3-17b2-4cc0-b719-fb6254d3e9df" providerId="ADAL" clId="{976AD799-FE43-55CA-A221-11B5AB66B93B}" dt="2026-10-26T14:06:39.283" v="242" actId="478"/>
-          <ac:cxnSpMkLst>
-            <pc:docMk/>
-            <pc:sldMk cId="818822214" sldId="258"/>
-            <ac:cxnSpMk id="59" creationId="{8F8A3805-842B-0310-37D7-D619880257CE}"/>
-          </ac:cxnSpMkLst>
-        </pc:cxnChg>
-        <pc:cxnChg chg="mod">
-          <ac:chgData name="Hemma Philamore" userId="db50e2f3-17b2-4cc0-b719-fb6254d3e9df" providerId="ADAL" clId="{976AD799-FE43-55CA-A221-11B5AB66B93B}" dt="2026-10-26T14:06:39.283" v="242" actId="478"/>
-          <ac:cxnSpMkLst>
-            <pc:docMk/>
-            <pc:sldMk cId="818822214" sldId="258"/>
-            <ac:cxnSpMk id="60" creationId="{919E8544-4C7E-6947-C932-92AAFD3D8385}"/>
-          </ac:cxnSpMkLst>
-        </pc:cxnChg>
-        <pc:cxnChg chg="mod">
-          <ac:chgData name="Hemma Philamore" userId="db50e2f3-17b2-4cc0-b719-fb6254d3e9df" providerId="ADAL" clId="{976AD799-FE43-55CA-A221-11B5AB66B93B}" dt="2026-10-26T14:06:39.283" v="242" actId="478"/>
-          <ac:cxnSpMkLst>
-            <pc:docMk/>
-            <pc:sldMk cId="818822214" sldId="258"/>
-            <ac:cxnSpMk id="61" creationId="{4315371E-7668-80B7-6984-5D28C9F7BAAF}"/>
-          </ac:cxnSpMkLst>
-        </pc:cxnChg>
-        <pc:cxnChg chg="mod">
-          <ac:chgData name="Hemma Philamore" userId="db50e2f3-17b2-4cc0-b719-fb6254d3e9df" providerId="ADAL" clId="{976AD799-FE43-55CA-A221-11B5AB66B93B}" dt="2026-10-26T14:06:39.283" v="242" actId="478"/>
-          <ac:cxnSpMkLst>
-            <pc:docMk/>
-            <pc:sldMk cId="818822214" sldId="258"/>
-            <ac:cxnSpMk id="62" creationId="{8B948E47-C221-9FC6-41DF-4BD7D802D186}"/>
-          </ac:cxnSpMkLst>
-        </pc:cxnChg>
-        <pc:cxnChg chg="mod">
-          <ac:chgData name="Hemma Philamore" userId="db50e2f3-17b2-4cc0-b719-fb6254d3e9df" providerId="ADAL" clId="{976AD799-FE43-55CA-A221-11B5AB66B93B}" dt="2026-10-26T14:06:39.283" v="242" actId="478"/>
-          <ac:cxnSpMkLst>
-            <pc:docMk/>
-            <pc:sldMk cId="818822214" sldId="258"/>
-            <ac:cxnSpMk id="63" creationId="{88320384-CDE6-5221-6319-04A6E859481C}"/>
-          </ac:cxnSpMkLst>
-        </pc:cxnChg>
-        <pc:cxnChg chg="mod">
-          <ac:chgData name="Hemma Philamore" userId="db50e2f3-17b2-4cc0-b719-fb6254d3e9df" providerId="ADAL" clId="{976AD799-FE43-55CA-A221-11B5AB66B93B}" dt="2026-10-26T14:06:39.283" v="242" actId="478"/>
-          <ac:cxnSpMkLst>
-            <pc:docMk/>
-            <pc:sldMk cId="818822214" sldId="258"/>
-            <ac:cxnSpMk id="64" creationId="{CF0341AF-EC0B-683E-488D-A03B26CCA69D}"/>
-          </ac:cxnSpMkLst>
-        </pc:cxnChg>
         <pc:cxnChg chg="add mod">
           <ac:chgData name="Hemma Philamore" userId="db50e2f3-17b2-4cc0-b719-fb6254d3e9df" providerId="ADAL" clId="{976AD799-FE43-55CA-A221-11B5AB66B93B}" dt="2026-10-26T14:08:37.504" v="270" actId="692"/>
           <ac:cxnSpMkLst>
@@ -1314,6 +839,52 @@
             <ac:cxnSpMk id="131" creationId="{698A2297-D560-157C-5E72-B14519BA8839}"/>
           </ac:cxnSpMkLst>
         </pc:cxnChg>
+      </pc:sldChg>
+      <pc:sldChg chg="addSp modSp new mod">
+        <pc:chgData name="Hemma Philamore" userId="db50e2f3-17b2-4cc0-b719-fb6254d3e9df" providerId="ADAL" clId="{976AD799-FE43-55CA-A221-11B5AB66B93B}" dt="2026-10-28T15:07:34.201" v="356" actId="164"/>
+        <pc:sldMkLst>
+          <pc:docMk/>
+          <pc:sldMk cId="740843639" sldId="261"/>
+        </pc:sldMkLst>
+        <pc:spChg chg="add mod">
+          <ac:chgData name="Hemma Philamore" userId="db50e2f3-17b2-4cc0-b719-fb6254d3e9df" providerId="ADAL" clId="{976AD799-FE43-55CA-A221-11B5AB66B93B}" dt="2026-10-28T15:07:29.758" v="355" actId="207"/>
+          <ac:spMkLst>
+            <pc:docMk/>
+            <pc:sldMk cId="740843639" sldId="261"/>
+            <ac:spMk id="3" creationId="{36282F94-7182-E4E7-31C4-55E243F02479}"/>
+          </ac:spMkLst>
+        </pc:spChg>
+        <pc:grpChg chg="add">
+          <ac:chgData name="Hemma Philamore" userId="db50e2f3-17b2-4cc0-b719-fb6254d3e9df" providerId="ADAL" clId="{976AD799-FE43-55CA-A221-11B5AB66B93B}" dt="2026-10-28T15:07:34.201" v="356" actId="164"/>
+          <ac:grpSpMkLst>
+            <pc:docMk/>
+            <pc:sldMk cId="740843639" sldId="261"/>
+            <ac:grpSpMk id="4" creationId="{03988AF8-C393-4A78-3501-5DD5E7AB219D}"/>
+          </ac:grpSpMkLst>
+        </pc:grpChg>
+        <pc:picChg chg="add mod">
+          <ac:chgData name="Hemma Philamore" userId="db50e2f3-17b2-4cc0-b719-fb6254d3e9df" providerId="ADAL" clId="{976AD799-FE43-55CA-A221-11B5AB66B93B}" dt="2026-10-28T15:07:08.606" v="352" actId="14100"/>
+          <ac:picMkLst>
+            <pc:docMk/>
+            <pc:sldMk cId="740843639" sldId="261"/>
+            <ac:picMk id="2" creationId="{C67DF9C2-5EAF-D0DB-D92D-2AD6467B6DDD}"/>
+          </ac:picMkLst>
+        </pc:picChg>
+      </pc:sldChg>
+      <pc:sldChg chg="addSp new">
+        <pc:chgData name="Hemma Philamore" userId="db50e2f3-17b2-4cc0-b719-fb6254d3e9df" providerId="ADAL" clId="{976AD799-FE43-55CA-A221-11B5AB66B93B}" dt="2026-10-28T15:48:54.805" v="358"/>
+        <pc:sldMkLst>
+          <pc:docMk/>
+          <pc:sldMk cId="147272139" sldId="262"/>
+        </pc:sldMkLst>
+        <pc:picChg chg="add">
+          <ac:chgData name="Hemma Philamore" userId="db50e2f3-17b2-4cc0-b719-fb6254d3e9df" providerId="ADAL" clId="{976AD799-FE43-55CA-A221-11B5AB66B93B}" dt="2026-10-28T15:48:54.805" v="358"/>
+          <ac:picMkLst>
+            <pc:docMk/>
+            <pc:sldMk cId="147272139" sldId="262"/>
+            <ac:picMk id="2" creationId="{F132659B-9933-B9FB-EE48-A2F515A8B33E}"/>
+          </ac:picMkLst>
+        </pc:picChg>
       </pc:sldChg>
     </pc:docChg>
   </pc:docChgLst>
@@ -1716,7 +1287,7 @@
           <a:p>
             <a:fld id="{2D85AF9A-95AE-7742-927B-08340FD5233B}" type="datetimeFigureOut">
               <a:rPr lang="en-US" smtClean="0"/>
-              <a:t>10/28/26</a:t>
+              <a:t>10/23/26</a:t>
             </a:fld>
             <a:endParaRPr lang="en-US"/>
           </a:p>
@@ -1916,7 +1487,7 @@
           <a:p>
             <a:fld id="{2D85AF9A-95AE-7742-927B-08340FD5233B}" type="datetimeFigureOut">
               <a:rPr lang="en-US" smtClean="0"/>
-              <a:t>10/28/26</a:t>
+              <a:t>10/23/26</a:t>
             </a:fld>
             <a:endParaRPr lang="en-US"/>
           </a:p>
@@ -2126,7 +1697,7 @@
           <a:p>
             <a:fld id="{2D85AF9A-95AE-7742-927B-08340FD5233B}" type="datetimeFigureOut">
               <a:rPr lang="en-US" smtClean="0"/>
-              <a:t>10/28/26</a:t>
+              <a:t>10/23/26</a:t>
             </a:fld>
             <a:endParaRPr lang="en-US"/>
           </a:p>
@@ -2326,7 +1897,7 @@
           <a:p>
             <a:fld id="{2D85AF9A-95AE-7742-927B-08340FD5233B}" type="datetimeFigureOut">
               <a:rPr lang="en-US" smtClean="0"/>
-              <a:t>10/28/26</a:t>
+              <a:t>10/23/26</a:t>
             </a:fld>
             <a:endParaRPr lang="en-US"/>
           </a:p>
@@ -2602,7 +2173,7 @@
           <a:p>
             <a:fld id="{2D85AF9A-95AE-7742-927B-08340FD5233B}" type="datetimeFigureOut">
               <a:rPr lang="en-US" smtClean="0"/>
-              <a:t>10/28/26</a:t>
+              <a:t>10/23/26</a:t>
             </a:fld>
             <a:endParaRPr lang="en-US"/>
           </a:p>
@@ -2870,7 +2441,7 @@
           <a:p>
             <a:fld id="{2D85AF9A-95AE-7742-927B-08340FD5233B}" type="datetimeFigureOut">
               <a:rPr lang="en-US" smtClean="0"/>
-              <a:t>10/28/26</a:t>
+              <a:t>10/23/26</a:t>
             </a:fld>
             <a:endParaRPr lang="en-US"/>
           </a:p>
@@ -3285,7 +2856,7 @@
           <a:p>
             <a:fld id="{2D85AF9A-95AE-7742-927B-08340FD5233B}" type="datetimeFigureOut">
               <a:rPr lang="en-US" smtClean="0"/>
-              <a:t>10/28/26</a:t>
+              <a:t>10/23/26</a:t>
             </a:fld>
             <a:endParaRPr lang="en-US"/>
           </a:p>
@@ -3427,7 +2998,7 @@
           <a:p>
             <a:fld id="{2D85AF9A-95AE-7742-927B-08340FD5233B}" type="datetimeFigureOut">
               <a:rPr lang="en-US" smtClean="0"/>
-              <a:t>10/28/26</a:t>
+              <a:t>10/23/26</a:t>
             </a:fld>
             <a:endParaRPr lang="en-US"/>
           </a:p>
@@ -3540,7 +3111,7 @@
           <a:p>
             <a:fld id="{2D85AF9A-95AE-7742-927B-08340FD5233B}" type="datetimeFigureOut">
               <a:rPr lang="en-US" smtClean="0"/>
-              <a:t>10/28/26</a:t>
+              <a:t>10/23/26</a:t>
             </a:fld>
             <a:endParaRPr lang="en-US"/>
           </a:p>
@@ -3853,7 +3424,7 @@
           <a:p>
             <a:fld id="{2D85AF9A-95AE-7742-927B-08340FD5233B}" type="datetimeFigureOut">
               <a:rPr lang="en-US" smtClean="0"/>
-              <a:t>10/28/26</a:t>
+              <a:t>10/23/26</a:t>
             </a:fld>
             <a:endParaRPr lang="en-US"/>
           </a:p>
@@ -4142,7 +3713,7 @@
           <a:p>
             <a:fld id="{2D85AF9A-95AE-7742-927B-08340FD5233B}" type="datetimeFigureOut">
               <a:rPr lang="en-US" smtClean="0"/>
-              <a:t>10/28/26</a:t>
+              <a:t>10/23/26</a:t>
             </a:fld>
             <a:endParaRPr lang="en-US"/>
           </a:p>
@@ -4385,7 +3956,7 @@
           <a:p>
             <a:fld id="{2D85AF9A-95AE-7742-927B-08340FD5233B}" type="datetimeFigureOut">
               <a:rPr lang="en-US" smtClean="0"/>
-              <a:t>10/28/26</a:t>
+              <a:t>10/23/26</a:t>
             </a:fld>
             <a:endParaRPr lang="en-US"/>
           </a:p>
@@ -10251,7 +9822,7 @@
             <a:p>
               <a:pPr algn="ctr"/>
               <a:r>
-                <a:rPr lang="en-US" dirty="0"/>
+                <a:rPr lang="en-US"/>
                 <a:t>home</a:t>
               </a:r>
             </a:p>
@@ -10291,7 +9862,7 @@
             <a:lstStyle/>
             <a:p>
               <a:r>
-                <a:rPr lang="en-US" dirty="0"/>
+                <a:rPr lang="en-US"/>
                 <a:t>documents</a:t>
               </a:r>
             </a:p>
@@ -10332,7 +9903,7 @@
             <a:p>
               <a:pPr algn="ctr"/>
               <a:r>
-                <a:rPr lang="en-US" dirty="0"/>
+                <a:rPr lang="en-US"/>
                 <a:t>photos</a:t>
               </a:r>
             </a:p>
@@ -10372,7 +9943,7 @@
             <a:lstStyle/>
             <a:p>
               <a:r>
-                <a:rPr lang="en-US" dirty="0"/>
+                <a:rPr lang="en-US"/>
                 <a:t>downloads</a:t>
               </a:r>
             </a:p>
@@ -10413,10 +9984,10 @@
             <a:p>
               <a:pPr algn="ctr"/>
               <a:r>
-                <a:rPr lang="en-US" dirty="0" err="1"/>
+                <a:rPr lang="en-US" err="1"/>
                 <a:t>holiday.jpg</a:t>
               </a:r>
-              <a:endParaRPr lang="en-US" dirty="0"/>
+              <a:endParaRPr lang="en-US"/>
             </a:p>
           </p:txBody>
         </p:sp>
@@ -10455,10 +10026,10 @@
             <a:p>
               <a:pPr algn="ctr"/>
               <a:r>
-                <a:rPr lang="en-US" dirty="0" err="1"/>
+                <a:rPr lang="en-US" err="1"/>
                 <a:t>report.pdf</a:t>
               </a:r>
-              <a:endParaRPr lang="en-US" dirty="0"/>
+              <a:endParaRPr lang="en-US"/>
             </a:p>
           </p:txBody>
         </p:sp>
@@ -10497,10 +10068,10 @@
             <a:p>
               <a:pPr algn="ctr"/>
               <a:r>
-                <a:rPr lang="en-US" dirty="0" err="1"/>
+                <a:rPr lang="en-US" err="1"/>
                 <a:t>essay.txt</a:t>
               </a:r>
-              <a:endParaRPr lang="en-US" dirty="0"/>
+              <a:endParaRPr lang="en-US"/>
             </a:p>
           </p:txBody>
         </p:sp>
@@ -10539,10 +10110,10 @@
             <a:p>
               <a:pPr algn="ctr"/>
               <a:r>
-                <a:rPr lang="en-US" dirty="0" err="1"/>
+                <a:rPr lang="en-US" err="1"/>
                 <a:t>notes.txt</a:t>
               </a:r>
-              <a:endParaRPr lang="en-US" dirty="0"/>
+              <a:endParaRPr lang="en-US"/>
             </a:p>
           </p:txBody>
         </p:sp>
@@ -10830,6 +10401,201 @@
     <p:extLst>
       <p:ext uri="{BB962C8B-B14F-4D97-AF65-F5344CB8AC3E}">
         <p14:creationId xmlns:p14="http://schemas.microsoft.com/office/powerpoint/2010/main" val="1492292829"/>
+      </p:ext>
+    </p:extLst>
+  </p:cSld>
+  <p:clrMapOvr>
+    <a:masterClrMapping/>
+  </p:clrMapOvr>
+</p:sld>
+</file>
+
+<file path=ppt/slides/slide6.xml><?xml version="1.0" encoding="utf-8"?>
+<p:sld xmlns:a="http://schemas.openxmlformats.org/drawingml/2006/main" xmlns:r="http://schemas.openxmlformats.org/officeDocument/2006/relationships" xmlns:p="http://schemas.openxmlformats.org/presentationml/2006/main">
+  <p:cSld>
+    <p:spTree>
+      <p:nvGrpSpPr>
+        <p:cNvPr id="1" name=""/>
+        <p:cNvGrpSpPr/>
+        <p:nvPr/>
+      </p:nvGrpSpPr>
+      <p:grpSpPr>
+        <a:xfrm>
+          <a:off x="0" y="0"/>
+          <a:ext cx="0" cy="0"/>
+          <a:chOff x="0" y="0"/>
+          <a:chExt cx="0" cy="0"/>
+        </a:xfrm>
+      </p:grpSpPr>
+      <p:grpSp>
+        <p:nvGrpSpPr>
+          <p:cNvPr id="4" name="Group 3">
+            <a:extLst>
+              <a:ext uri="{FF2B5EF4-FFF2-40B4-BE49-F238E27FC236}">
+                <a16:creationId xmlns:a16="http://schemas.microsoft.com/office/drawing/2014/main" id="{03988AF8-C393-4A78-3501-5DD5E7AB219D}"/>
+              </a:ext>
+            </a:extLst>
+          </p:cNvPr>
+          <p:cNvGrpSpPr/>
+          <p:nvPr/>
+        </p:nvGrpSpPr>
+        <p:grpSpPr>
+          <a:xfrm>
+            <a:off x="2209799" y="838200"/>
+            <a:ext cx="8795721" cy="5863814"/>
+            <a:chOff x="2209799" y="838200"/>
+            <a:chExt cx="8795721" cy="5863814"/>
+          </a:xfrm>
+        </p:grpSpPr>
+        <p:pic>
+          <p:nvPicPr>
+            <p:cNvPr id="2" name="Picture 1">
+              <a:extLst>
+                <a:ext uri="{FF2B5EF4-FFF2-40B4-BE49-F238E27FC236}">
+                  <a16:creationId xmlns:a16="http://schemas.microsoft.com/office/drawing/2014/main" id="{C67DF9C2-5EAF-D0DB-D92D-2AD6467B6DDD}"/>
+                </a:ext>
+              </a:extLst>
+            </p:cNvPr>
+            <p:cNvPicPr>
+              <a:picLocks noChangeAspect="1"/>
+            </p:cNvPicPr>
+            <p:nvPr/>
+          </p:nvPicPr>
+          <p:blipFill>
+            <a:blip r:embed="rId2"/>
+            <a:stretch>
+              <a:fillRect/>
+            </a:stretch>
+          </p:blipFill>
+          <p:spPr>
+            <a:xfrm>
+              <a:off x="2209799" y="838200"/>
+              <a:ext cx="8795721" cy="5863814"/>
+            </a:xfrm>
+            <a:prstGeom prst="rect">
+              <a:avLst/>
+            </a:prstGeom>
+          </p:spPr>
+        </p:pic>
+        <p:sp>
+          <p:nvSpPr>
+            <p:cNvPr id="3" name="Rectangle 2">
+              <a:extLst>
+                <a:ext uri="{FF2B5EF4-FFF2-40B4-BE49-F238E27FC236}">
+                  <a16:creationId xmlns:a16="http://schemas.microsoft.com/office/drawing/2014/main" id="{36282F94-7182-E4E7-31C4-55E243F02479}"/>
+                </a:ext>
+              </a:extLst>
+            </p:cNvPr>
+            <p:cNvSpPr/>
+            <p:nvPr/>
+          </p:nvSpPr>
+          <p:spPr>
+            <a:xfrm>
+              <a:off x="2345167" y="3969572"/>
+              <a:ext cx="4690334" cy="2474259"/>
+            </a:xfrm>
+            <a:prstGeom prst="rect">
+              <a:avLst/>
+            </a:prstGeom>
+            <a:solidFill>
+              <a:schemeClr val="bg1"/>
+            </a:solidFill>
+            <a:ln>
+              <a:solidFill>
+                <a:schemeClr val="bg1"/>
+              </a:solidFill>
+            </a:ln>
+          </p:spPr>
+          <p:style>
+            <a:lnRef idx="2">
+              <a:schemeClr val="accent1">
+                <a:shade val="15000"/>
+              </a:schemeClr>
+            </a:lnRef>
+            <a:fillRef idx="1">
+              <a:schemeClr val="accent1"/>
+            </a:fillRef>
+            <a:effectRef idx="0">
+              <a:schemeClr val="accent1"/>
+            </a:effectRef>
+            <a:fontRef idx="minor">
+              <a:schemeClr val="lt1"/>
+            </a:fontRef>
+          </p:style>
+          <p:txBody>
+            <a:bodyPr rtlCol="0" anchor="ctr"/>
+            <a:lstStyle/>
+            <a:p>
+              <a:pPr algn="ctr"/>
+              <a:endParaRPr lang="en-US"/>
+            </a:p>
+          </p:txBody>
+        </p:sp>
+      </p:grpSp>
+    </p:spTree>
+    <p:extLst>
+      <p:ext uri="{BB962C8B-B14F-4D97-AF65-F5344CB8AC3E}">
+        <p14:creationId xmlns:p14="http://schemas.microsoft.com/office/powerpoint/2010/main" val="740843639"/>
+      </p:ext>
+    </p:extLst>
+  </p:cSld>
+  <p:clrMapOvr>
+    <a:masterClrMapping/>
+  </p:clrMapOvr>
+</p:sld>
+</file>
+
+<file path=ppt/slides/slide7.xml><?xml version="1.0" encoding="utf-8"?>
+<p:sld xmlns:a="http://schemas.openxmlformats.org/drawingml/2006/main" xmlns:r="http://schemas.openxmlformats.org/officeDocument/2006/relationships" xmlns:p="http://schemas.openxmlformats.org/presentationml/2006/main">
+  <p:cSld>
+    <p:spTree>
+      <p:nvGrpSpPr>
+        <p:cNvPr id="1" name=""/>
+        <p:cNvGrpSpPr/>
+        <p:nvPr/>
+      </p:nvGrpSpPr>
+      <p:grpSpPr>
+        <a:xfrm>
+          <a:off x="0" y="0"/>
+          <a:ext cx="0" cy="0"/>
+          <a:chOff x="0" y="0"/>
+          <a:chExt cx="0" cy="0"/>
+        </a:xfrm>
+      </p:grpSpPr>
+      <p:pic>
+        <p:nvPicPr>
+          <p:cNvPr id="2" name="Picture 1">
+            <a:extLst>
+              <a:ext uri="{FF2B5EF4-FFF2-40B4-BE49-F238E27FC236}">
+                <a16:creationId xmlns:a16="http://schemas.microsoft.com/office/drawing/2014/main" id="{F132659B-9933-B9FB-EE48-A2F515A8B33E}"/>
+              </a:ext>
+            </a:extLst>
+          </p:cNvPr>
+          <p:cNvPicPr>
+            <a:picLocks noChangeAspect="1"/>
+          </p:cNvPicPr>
+          <p:nvPr/>
+        </p:nvPicPr>
+        <p:blipFill>
+          <a:blip r:embed="rId2"/>
+          <a:stretch>
+            <a:fillRect/>
+          </a:stretch>
+        </p:blipFill>
+        <p:spPr>
+          <a:xfrm>
+            <a:off x="2343833" y="0"/>
+            <a:ext cx="7504334" cy="6858000"/>
+          </a:xfrm>
+          <a:prstGeom prst="rect">
+            <a:avLst/>
+          </a:prstGeom>
+        </p:spPr>
+      </p:pic>
+    </p:spTree>
+    <p:extLst>
+      <p:ext uri="{BB962C8B-B14F-4D97-AF65-F5344CB8AC3E}">
+        <p14:creationId xmlns:p14="http://schemas.microsoft.com/office/powerpoint/2010/main" val="147272139"/>
       </p:ext>
     </p:extLst>
   </p:cSld>

--- a/media/week_8/diagrams_dicts_tuples.pptx
+++ b/media/week_8/diagrams_dicts_tuples.pptx
@@ -12,6 +12,7 @@
     <p:sldId id="260" r:id="rId6"/>
     <p:sldId id="261" r:id="rId7"/>
     <p:sldId id="262" r:id="rId8"/>
+    <p:sldId id="263" r:id="rId9"/>
   </p:sldIdLst>
   <p:sldSz cx="12192000" cy="6858000"/>
   <p:notesSz cx="6858000" cy="9144000"/>
@@ -126,7 +127,7 @@
   <pc:docChgLst>
     <pc:chgData name="Hemma Philamore" userId="db50e2f3-17b2-4cc0-b719-fb6254d3e9df" providerId="ADAL" clId="{976AD799-FE43-55CA-A221-11B5AB66B93B}"/>
     <pc:docChg chg="undo custSel addSld modSld">
-      <pc:chgData name="Hemma Philamore" userId="db50e2f3-17b2-4cc0-b719-fb6254d3e9df" providerId="ADAL" clId="{976AD799-FE43-55CA-A221-11B5AB66B93B}" dt="2026-10-28T15:48:54.805" v="358"/>
+      <pc:chgData name="Hemma Philamore" userId="db50e2f3-17b2-4cc0-b719-fb6254d3e9df" providerId="ADAL" clId="{976AD799-FE43-55CA-A221-11B5AB66B93B}" dt="2026-10-28T18:32:52.739" v="550" actId="478"/>
       <pc:docMkLst>
         <pc:docMk/>
       </pc:docMkLst>
@@ -885,6 +886,389 @@
             <ac:picMk id="2" creationId="{F132659B-9933-B9FB-EE48-A2F515A8B33E}"/>
           </ac:picMkLst>
         </pc:picChg>
+      </pc:sldChg>
+      <pc:sldChg chg="addSp delSp modSp new mod">
+        <pc:chgData name="Hemma Philamore" userId="db50e2f3-17b2-4cc0-b719-fb6254d3e9df" providerId="ADAL" clId="{976AD799-FE43-55CA-A221-11B5AB66B93B}" dt="2026-10-28T18:32:52.739" v="550" actId="478"/>
+        <pc:sldMkLst>
+          <pc:docMk/>
+          <pc:sldMk cId="453573594" sldId="263"/>
+        </pc:sldMkLst>
+        <pc:spChg chg="mod">
+          <ac:chgData name="Hemma Philamore" userId="db50e2f3-17b2-4cc0-b719-fb6254d3e9df" providerId="ADAL" clId="{976AD799-FE43-55CA-A221-11B5AB66B93B}" dt="2026-10-28T18:00:45.848" v="442" actId="1076"/>
+          <ac:spMkLst>
+            <pc:docMk/>
+            <pc:sldMk cId="453573594" sldId="263"/>
+            <ac:spMk id="3" creationId="{8FDDDDE0-93FC-90DC-48B1-BEE0FCDD4B23}"/>
+          </ac:spMkLst>
+        </pc:spChg>
+        <pc:spChg chg="mod">
+          <ac:chgData name="Hemma Philamore" userId="db50e2f3-17b2-4cc0-b719-fb6254d3e9df" providerId="ADAL" clId="{976AD799-FE43-55CA-A221-11B5AB66B93B}" dt="2026-10-28T18:00:54.103" v="443" actId="1076"/>
+          <ac:spMkLst>
+            <pc:docMk/>
+            <pc:sldMk cId="453573594" sldId="263"/>
+            <ac:spMk id="5" creationId="{A451A49E-131B-A150-59CB-19891CBEB5B3}"/>
+          </ac:spMkLst>
+        </pc:spChg>
+        <pc:spChg chg="mod">
+          <ac:chgData name="Hemma Philamore" userId="db50e2f3-17b2-4cc0-b719-fb6254d3e9df" providerId="ADAL" clId="{976AD799-FE43-55CA-A221-11B5AB66B93B}" dt="2026-10-28T17:58:59.043" v="364" actId="1076"/>
+          <ac:spMkLst>
+            <pc:docMk/>
+            <pc:sldMk cId="453573594" sldId="263"/>
+            <ac:spMk id="7" creationId="{02D7C1C3-8082-5AFF-2305-B75B7FFEA848}"/>
+          </ac:spMkLst>
+        </pc:spChg>
+        <pc:spChg chg="del">
+          <ac:chgData name="Hemma Philamore" userId="db50e2f3-17b2-4cc0-b719-fb6254d3e9df" providerId="ADAL" clId="{976AD799-FE43-55CA-A221-11B5AB66B93B}" dt="2026-10-28T18:01:12.129" v="464" actId="478"/>
+          <ac:spMkLst>
+            <pc:docMk/>
+            <pc:sldMk cId="453573594" sldId="263"/>
+            <ac:spMk id="18" creationId="{3961AAA8-3911-0E35-0C78-FCCCD465CE08}"/>
+          </ac:spMkLst>
+        </pc:spChg>
+        <pc:spChg chg="del">
+          <ac:chgData name="Hemma Philamore" userId="db50e2f3-17b2-4cc0-b719-fb6254d3e9df" providerId="ADAL" clId="{976AD799-FE43-55CA-A221-11B5AB66B93B}" dt="2026-10-28T18:01:12.129" v="464" actId="478"/>
+          <ac:spMkLst>
+            <pc:docMk/>
+            <pc:sldMk cId="453573594" sldId="263"/>
+            <ac:spMk id="19" creationId="{D6BC5354-29C6-F27C-B69E-7663A9BDA5F4}"/>
+          </ac:spMkLst>
+        </pc:spChg>
+        <pc:spChg chg="del">
+          <ac:chgData name="Hemma Philamore" userId="db50e2f3-17b2-4cc0-b719-fb6254d3e9df" providerId="ADAL" clId="{976AD799-FE43-55CA-A221-11B5AB66B93B}" dt="2026-10-28T17:59:55.578" v="403" actId="478"/>
+          <ac:spMkLst>
+            <pc:docMk/>
+            <pc:sldMk cId="453573594" sldId="263"/>
+            <ac:spMk id="20" creationId="{8AB78718-18A3-4F8C-1A59-DAEC4AE24202}"/>
+          </ac:spMkLst>
+        </pc:spChg>
+        <pc:spChg chg="del">
+          <ac:chgData name="Hemma Philamore" userId="db50e2f3-17b2-4cc0-b719-fb6254d3e9df" providerId="ADAL" clId="{976AD799-FE43-55CA-A221-11B5AB66B93B}" dt="2026-10-28T17:59:53.201" v="401" actId="478"/>
+          <ac:spMkLst>
+            <pc:docMk/>
+            <pc:sldMk cId="453573594" sldId="263"/>
+            <ac:spMk id="21" creationId="{50554732-2ED0-C1E9-885C-D7A8CADCEB4C}"/>
+          </ac:spMkLst>
+        </pc:spChg>
+        <pc:spChg chg="del">
+          <ac:chgData name="Hemma Philamore" userId="db50e2f3-17b2-4cc0-b719-fb6254d3e9df" providerId="ADAL" clId="{976AD799-FE43-55CA-A221-11B5AB66B93B}" dt="2026-10-28T18:01:12.129" v="464" actId="478"/>
+          <ac:spMkLst>
+            <pc:docMk/>
+            <pc:sldMk cId="453573594" sldId="263"/>
+            <ac:spMk id="22" creationId="{072D01DD-80AD-CE14-F7FA-AE8AC21B669E}"/>
+          </ac:spMkLst>
+        </pc:spChg>
+        <pc:spChg chg="mod topLvl">
+          <ac:chgData name="Hemma Philamore" userId="db50e2f3-17b2-4cc0-b719-fb6254d3e9df" providerId="ADAL" clId="{976AD799-FE43-55CA-A221-11B5AB66B93B}" dt="2026-10-28T17:59:26.912" v="382" actId="1076"/>
+          <ac:spMkLst>
+            <pc:docMk/>
+            <pc:sldMk cId="453573594" sldId="263"/>
+            <ac:spMk id="23" creationId="{E4D6692A-45BF-F394-28DD-D8FA523E4A5E}"/>
+          </ac:spMkLst>
+        </pc:spChg>
+        <pc:spChg chg="del mod topLvl">
+          <ac:chgData name="Hemma Philamore" userId="db50e2f3-17b2-4cc0-b719-fb6254d3e9df" providerId="ADAL" clId="{976AD799-FE43-55CA-A221-11B5AB66B93B}" dt="2026-10-28T18:01:12.129" v="464" actId="478"/>
+          <ac:spMkLst>
+            <pc:docMk/>
+            <pc:sldMk cId="453573594" sldId="263"/>
+            <ac:spMk id="24" creationId="{C0BF13B2-A0BF-640E-6969-E6791E11A2EC}"/>
+          </ac:spMkLst>
+        </pc:spChg>
+        <pc:spChg chg="del mod topLvl">
+          <ac:chgData name="Hemma Philamore" userId="db50e2f3-17b2-4cc0-b719-fb6254d3e9df" providerId="ADAL" clId="{976AD799-FE43-55CA-A221-11B5AB66B93B}" dt="2026-10-28T18:01:14.827" v="465" actId="478"/>
+          <ac:spMkLst>
+            <pc:docMk/>
+            <pc:sldMk cId="453573594" sldId="263"/>
+            <ac:spMk id="25" creationId="{66B0C9B7-520D-BE6F-8696-9932746F2815}"/>
+          </ac:spMkLst>
+        </pc:spChg>
+        <pc:spChg chg="del mod topLvl">
+          <ac:chgData name="Hemma Philamore" userId="db50e2f3-17b2-4cc0-b719-fb6254d3e9df" providerId="ADAL" clId="{976AD799-FE43-55CA-A221-11B5AB66B93B}" dt="2026-10-28T18:01:12.129" v="464" actId="478"/>
+          <ac:spMkLst>
+            <pc:docMk/>
+            <pc:sldMk cId="453573594" sldId="263"/>
+            <ac:spMk id="26" creationId="{02C27BC0-5303-0E7B-F7BD-AA4C91278C95}"/>
+          </ac:spMkLst>
+        </pc:spChg>
+        <pc:spChg chg="del mod topLvl">
+          <ac:chgData name="Hemma Philamore" userId="db50e2f3-17b2-4cc0-b719-fb6254d3e9df" providerId="ADAL" clId="{976AD799-FE43-55CA-A221-11B5AB66B93B}" dt="2026-10-28T18:01:12.129" v="464" actId="478"/>
+          <ac:spMkLst>
+            <pc:docMk/>
+            <pc:sldMk cId="453573594" sldId="263"/>
+            <ac:spMk id="27" creationId="{01299C49-0C21-95A4-C703-051E22A03FFB}"/>
+          </ac:spMkLst>
+        </pc:spChg>
+        <pc:spChg chg="del mod topLvl">
+          <ac:chgData name="Hemma Philamore" userId="db50e2f3-17b2-4cc0-b719-fb6254d3e9df" providerId="ADAL" clId="{976AD799-FE43-55CA-A221-11B5AB66B93B}" dt="2026-10-28T18:01:12.129" v="464" actId="478"/>
+          <ac:spMkLst>
+            <pc:docMk/>
+            <pc:sldMk cId="453573594" sldId="263"/>
+            <ac:spMk id="28" creationId="{34813B78-3ABD-B9B6-F1CA-90404C73A043}"/>
+          </ac:spMkLst>
+        </pc:spChg>
+        <pc:spChg chg="del mod topLvl">
+          <ac:chgData name="Hemma Philamore" userId="db50e2f3-17b2-4cc0-b719-fb6254d3e9df" providerId="ADAL" clId="{976AD799-FE43-55CA-A221-11B5AB66B93B}" dt="2026-10-28T17:59:57.029" v="404" actId="478"/>
+          <ac:spMkLst>
+            <pc:docMk/>
+            <pc:sldMk cId="453573594" sldId="263"/>
+            <ac:spMk id="31" creationId="{FDFA5F16-45F9-C740-5FE8-EE879D0BD429}"/>
+          </ac:spMkLst>
+        </pc:spChg>
+        <pc:spChg chg="del mod topLvl">
+          <ac:chgData name="Hemma Philamore" userId="db50e2f3-17b2-4cc0-b719-fb6254d3e9df" providerId="ADAL" clId="{976AD799-FE43-55CA-A221-11B5AB66B93B}" dt="2026-10-28T18:01:12.129" v="464" actId="478"/>
+          <ac:spMkLst>
+            <pc:docMk/>
+            <pc:sldMk cId="453573594" sldId="263"/>
+            <ac:spMk id="32" creationId="{9D5812EF-A18F-2FAE-053F-9A6BDEBE352D}"/>
+          </ac:spMkLst>
+        </pc:spChg>
+        <pc:spChg chg="del mod topLvl">
+          <ac:chgData name="Hemma Philamore" userId="db50e2f3-17b2-4cc0-b719-fb6254d3e9df" providerId="ADAL" clId="{976AD799-FE43-55CA-A221-11B5AB66B93B}" dt="2026-10-28T18:01:12.129" v="464" actId="478"/>
+          <ac:spMkLst>
+            <pc:docMk/>
+            <pc:sldMk cId="453573594" sldId="263"/>
+            <ac:spMk id="33" creationId="{F78305C5-D554-9FD2-2746-8F8885D3C43F}"/>
+          </ac:spMkLst>
+        </pc:spChg>
+        <pc:spChg chg="del mod topLvl">
+          <ac:chgData name="Hemma Philamore" userId="db50e2f3-17b2-4cc0-b719-fb6254d3e9df" providerId="ADAL" clId="{976AD799-FE43-55CA-A221-11B5AB66B93B}" dt="2026-10-28T18:01:12.129" v="464" actId="478"/>
+          <ac:spMkLst>
+            <pc:docMk/>
+            <pc:sldMk cId="453573594" sldId="263"/>
+            <ac:spMk id="34" creationId="{FEA11F6A-D1F8-D5D4-A203-7E3EB5F7C4BE}"/>
+          </ac:spMkLst>
+        </pc:spChg>
+        <pc:spChg chg="add mod">
+          <ac:chgData name="Hemma Philamore" userId="db50e2f3-17b2-4cc0-b719-fb6254d3e9df" providerId="ADAL" clId="{976AD799-FE43-55CA-A221-11B5AB66B93B}" dt="2026-10-28T17:59:10.761" v="370" actId="1076"/>
+          <ac:spMkLst>
+            <pc:docMk/>
+            <pc:sldMk cId="453573594" sldId="263"/>
+            <ac:spMk id="43" creationId="{F6243E1B-73B3-DB94-F6F8-5FB01F850EDC}"/>
+          </ac:spMkLst>
+        </pc:spChg>
+        <pc:spChg chg="add mod">
+          <ac:chgData name="Hemma Philamore" userId="db50e2f3-17b2-4cc0-b719-fb6254d3e9df" providerId="ADAL" clId="{976AD799-FE43-55CA-A221-11B5AB66B93B}" dt="2026-10-28T17:59:38.992" v="390" actId="1076"/>
+          <ac:spMkLst>
+            <pc:docMk/>
+            <pc:sldMk cId="453573594" sldId="263"/>
+            <ac:spMk id="44" creationId="{368EB7BB-BA1B-C57E-4DC9-4412CB9F18CF}"/>
+          </ac:spMkLst>
+        </pc:spChg>
+        <pc:spChg chg="add mod">
+          <ac:chgData name="Hemma Philamore" userId="db50e2f3-17b2-4cc0-b719-fb6254d3e9df" providerId="ADAL" clId="{976AD799-FE43-55CA-A221-11B5AB66B93B}" dt="2026-10-28T17:59:47.864" v="399" actId="14100"/>
+          <ac:spMkLst>
+            <pc:docMk/>
+            <pc:sldMk cId="453573594" sldId="263"/>
+            <ac:spMk id="45" creationId="{522DF8CE-14DF-F86E-E274-B88001FE709E}"/>
+          </ac:spMkLst>
+        </pc:spChg>
+        <pc:spChg chg="add mod">
+          <ac:chgData name="Hemma Philamore" userId="db50e2f3-17b2-4cc0-b719-fb6254d3e9df" providerId="ADAL" clId="{976AD799-FE43-55CA-A221-11B5AB66B93B}" dt="2026-10-28T18:00:54.103" v="443" actId="1076"/>
+          <ac:spMkLst>
+            <pc:docMk/>
+            <pc:sldMk cId="453573594" sldId="263"/>
+            <ac:spMk id="48" creationId="{887CC708-A3F3-6DFF-F1A0-1C3E38519A55}"/>
+          </ac:spMkLst>
+        </pc:spChg>
+        <pc:spChg chg="add mod">
+          <ac:chgData name="Hemma Philamore" userId="db50e2f3-17b2-4cc0-b719-fb6254d3e9df" providerId="ADAL" clId="{976AD799-FE43-55CA-A221-11B5AB66B93B}" dt="2026-10-28T18:01:08.616" v="463" actId="1076"/>
+          <ac:spMkLst>
+            <pc:docMk/>
+            <pc:sldMk cId="453573594" sldId="263"/>
+            <ac:spMk id="49" creationId="{10C0D20D-D5EC-7D24-0169-3010315A8C5B}"/>
+          </ac:spMkLst>
+        </pc:spChg>
+        <pc:spChg chg="add del mod">
+          <ac:chgData name="Hemma Philamore" userId="db50e2f3-17b2-4cc0-b719-fb6254d3e9df" providerId="ADAL" clId="{976AD799-FE43-55CA-A221-11B5AB66B93B}" dt="2026-10-28T18:32:50.692" v="548" actId="478"/>
+          <ac:spMkLst>
+            <pc:docMk/>
+            <pc:sldMk cId="453573594" sldId="263"/>
+            <ac:spMk id="76" creationId="{4918F367-FB71-D985-33F3-D79A6D51BBEA}"/>
+          </ac:spMkLst>
+        </pc:spChg>
+        <pc:spChg chg="add del mod">
+          <ac:chgData name="Hemma Philamore" userId="db50e2f3-17b2-4cc0-b719-fb6254d3e9df" providerId="ADAL" clId="{976AD799-FE43-55CA-A221-11B5AB66B93B}" dt="2026-10-28T18:32:52.739" v="550" actId="478"/>
+          <ac:spMkLst>
+            <pc:docMk/>
+            <pc:sldMk cId="453573594" sldId="263"/>
+            <ac:spMk id="80" creationId="{B1B68B66-9272-6ECE-DA02-CA27FF5A2CA9}"/>
+          </ac:spMkLst>
+        </pc:spChg>
+        <pc:grpChg chg="mod">
+          <ac:chgData name="Hemma Philamore" userId="db50e2f3-17b2-4cc0-b719-fb6254d3e9df" providerId="ADAL" clId="{976AD799-FE43-55CA-A221-11B5AB66B93B}" dt="2026-10-28T17:58:39.178" v="361" actId="1076"/>
+          <ac:grpSpMkLst>
+            <pc:docMk/>
+            <pc:sldMk cId="453573594" sldId="263"/>
+            <ac:grpSpMk id="2" creationId="{8BC3A8FF-1E55-9F8B-6215-64552F354DA2}"/>
+          </ac:grpSpMkLst>
+        </pc:grpChg>
+        <pc:grpChg chg="add mod">
+          <ac:chgData name="Hemma Philamore" userId="db50e2f3-17b2-4cc0-b719-fb6254d3e9df" providerId="ADAL" clId="{976AD799-FE43-55CA-A221-11B5AB66B93B}" dt="2026-10-28T18:19:46.509" v="525" actId="1076"/>
+          <ac:grpSpMkLst>
+            <pc:docMk/>
+            <pc:sldMk cId="453573594" sldId="263"/>
+            <ac:grpSpMk id="63" creationId="{F00578F3-096D-6C34-9A4A-DEFF9C851F24}"/>
+          </ac:grpSpMkLst>
+        </pc:grpChg>
+        <pc:cxnChg chg="del mod">
+          <ac:chgData name="Hemma Philamore" userId="db50e2f3-17b2-4cc0-b719-fb6254d3e9df" providerId="ADAL" clId="{976AD799-FE43-55CA-A221-11B5AB66B93B}" dt="2026-10-28T18:00:04.792" v="407" actId="478"/>
+          <ac:cxnSpMkLst>
+            <pc:docMk/>
+            <pc:sldMk cId="453573594" sldId="263"/>
+            <ac:cxnSpMk id="8" creationId="{23B8BC5F-2643-D420-9188-68E93D6A3FA9}"/>
+          </ac:cxnSpMkLst>
+        </pc:cxnChg>
+        <pc:cxnChg chg="del mod">
+          <ac:chgData name="Hemma Philamore" userId="db50e2f3-17b2-4cc0-b719-fb6254d3e9df" providerId="ADAL" clId="{976AD799-FE43-55CA-A221-11B5AB66B93B}" dt="2026-10-28T17:59:04.547" v="368" actId="478"/>
+          <ac:cxnSpMkLst>
+            <pc:docMk/>
+            <pc:sldMk cId="453573594" sldId="263"/>
+            <ac:cxnSpMk id="9" creationId="{8210E558-AB91-2E83-A1E9-CCE7C5A573A1}"/>
+          </ac:cxnSpMkLst>
+        </pc:cxnChg>
+        <pc:cxnChg chg="del mod">
+          <ac:chgData name="Hemma Philamore" userId="db50e2f3-17b2-4cc0-b719-fb6254d3e9df" providerId="ADAL" clId="{976AD799-FE43-55CA-A221-11B5AB66B93B}" dt="2026-10-28T17:59:03.030" v="366" actId="478"/>
+          <ac:cxnSpMkLst>
+            <pc:docMk/>
+            <pc:sldMk cId="453573594" sldId="263"/>
+            <ac:cxnSpMk id="10" creationId="{ED5FF0D9-69A6-0876-E391-DE98F4831290}"/>
+          </ac:cxnSpMkLst>
+        </pc:cxnChg>
+        <pc:cxnChg chg="del mod">
+          <ac:chgData name="Hemma Philamore" userId="db50e2f3-17b2-4cc0-b719-fb6254d3e9df" providerId="ADAL" clId="{976AD799-FE43-55CA-A221-11B5AB66B93B}" dt="2026-10-28T17:59:03.648" v="367" actId="478"/>
+          <ac:cxnSpMkLst>
+            <pc:docMk/>
+            <pc:sldMk cId="453573594" sldId="263"/>
+            <ac:cxnSpMk id="11" creationId="{D217AEDE-7C4C-D554-10C4-E789FCDB9C79}"/>
+          </ac:cxnSpMkLst>
+        </pc:cxnChg>
+        <pc:cxnChg chg="del mod">
+          <ac:chgData name="Hemma Philamore" userId="db50e2f3-17b2-4cc0-b719-fb6254d3e9df" providerId="ADAL" clId="{976AD799-FE43-55CA-A221-11B5AB66B93B}" dt="2026-10-28T18:00:06.216" v="408" actId="478"/>
+          <ac:cxnSpMkLst>
+            <pc:docMk/>
+            <pc:sldMk cId="453573594" sldId="263"/>
+            <ac:cxnSpMk id="12" creationId="{7748B998-F6DE-D60E-5836-BE8A668DE17B}"/>
+          </ac:cxnSpMkLst>
+        </pc:cxnChg>
+        <pc:cxnChg chg="del mod">
+          <ac:chgData name="Hemma Philamore" userId="db50e2f3-17b2-4cc0-b719-fb6254d3e9df" providerId="ADAL" clId="{976AD799-FE43-55CA-A221-11B5AB66B93B}" dt="2026-10-28T17:59:54.079" v="402" actId="478"/>
+          <ac:cxnSpMkLst>
+            <pc:docMk/>
+            <pc:sldMk cId="453573594" sldId="263"/>
+            <ac:cxnSpMk id="13" creationId="{28AEE1D9-9AF3-97E3-ADAC-0BA2C4A1A81C}"/>
+          </ac:cxnSpMkLst>
+        </pc:cxnChg>
+        <pc:cxnChg chg="del mod">
+          <ac:chgData name="Hemma Philamore" userId="db50e2f3-17b2-4cc0-b719-fb6254d3e9df" providerId="ADAL" clId="{976AD799-FE43-55CA-A221-11B5AB66B93B}" dt="2026-10-28T17:59:57.650" v="405" actId="478"/>
+          <ac:cxnSpMkLst>
+            <pc:docMk/>
+            <pc:sldMk cId="453573594" sldId="263"/>
+            <ac:cxnSpMk id="14" creationId="{7F38F93D-7B6A-E45E-06BF-2826F1436FD4}"/>
+          </ac:cxnSpMkLst>
+        </pc:cxnChg>
+        <pc:cxnChg chg="del mod">
+          <ac:chgData name="Hemma Philamore" userId="db50e2f3-17b2-4cc0-b719-fb6254d3e9df" providerId="ADAL" clId="{976AD799-FE43-55CA-A221-11B5AB66B93B}" dt="2026-10-28T17:59:52.287" v="400" actId="478"/>
+          <ac:cxnSpMkLst>
+            <pc:docMk/>
+            <pc:sldMk cId="453573594" sldId="263"/>
+            <ac:cxnSpMk id="15" creationId="{3738AB66-C812-D838-7DD4-39A44B7B9C9E}"/>
+          </ac:cxnSpMkLst>
+        </pc:cxnChg>
+        <pc:cxnChg chg="del mod">
+          <ac:chgData name="Hemma Philamore" userId="db50e2f3-17b2-4cc0-b719-fb6254d3e9df" providerId="ADAL" clId="{976AD799-FE43-55CA-A221-11B5AB66B93B}" dt="2026-10-28T17:59:02.409" v="365" actId="478"/>
+          <ac:cxnSpMkLst>
+            <pc:docMk/>
+            <pc:sldMk cId="453573594" sldId="263"/>
+            <ac:cxnSpMk id="29" creationId="{4FF7517D-139C-B9C1-58D3-7E80E9F72524}"/>
+          </ac:cxnSpMkLst>
+        </pc:cxnChg>
+        <pc:cxnChg chg="add mod">
+          <ac:chgData name="Hemma Philamore" userId="db50e2f3-17b2-4cc0-b719-fb6254d3e9df" providerId="ADAL" clId="{976AD799-FE43-55CA-A221-11B5AB66B93B}" dt="2026-10-28T18:02:00.544" v="477" actId="1076"/>
+          <ac:cxnSpMkLst>
+            <pc:docMk/>
+            <pc:sldMk cId="453573594" sldId="263"/>
+            <ac:cxnSpMk id="51" creationId="{852363C4-DC28-534F-58B7-FE0C80AB9E34}"/>
+          </ac:cxnSpMkLst>
+        </pc:cxnChg>
+        <pc:cxnChg chg="add mod">
+          <ac:chgData name="Hemma Philamore" userId="db50e2f3-17b2-4cc0-b719-fb6254d3e9df" providerId="ADAL" clId="{976AD799-FE43-55CA-A221-11B5AB66B93B}" dt="2026-10-28T18:02:12.584" v="481" actId="1076"/>
+          <ac:cxnSpMkLst>
+            <pc:docMk/>
+            <pc:sldMk cId="453573594" sldId="263"/>
+            <ac:cxnSpMk id="54" creationId="{FAC81D88-2962-3156-8BE6-4F9FFD48141C}"/>
+          </ac:cxnSpMkLst>
+        </pc:cxnChg>
+        <pc:cxnChg chg="add mod">
+          <ac:chgData name="Hemma Philamore" userId="db50e2f3-17b2-4cc0-b719-fb6254d3e9df" providerId="ADAL" clId="{976AD799-FE43-55CA-A221-11B5AB66B93B}" dt="2026-10-28T18:02:20.561" v="483" actId="1076"/>
+          <ac:cxnSpMkLst>
+            <pc:docMk/>
+            <pc:sldMk cId="453573594" sldId="263"/>
+            <ac:cxnSpMk id="56" creationId="{A44A018A-6C12-1393-204C-98ADA363073A}"/>
+          </ac:cxnSpMkLst>
+        </pc:cxnChg>
+        <pc:cxnChg chg="add mod">
+          <ac:chgData name="Hemma Philamore" userId="db50e2f3-17b2-4cc0-b719-fb6254d3e9df" providerId="ADAL" clId="{976AD799-FE43-55CA-A221-11B5AB66B93B}" dt="2026-10-28T18:02:34.842" v="486" actId="1076"/>
+          <ac:cxnSpMkLst>
+            <pc:docMk/>
+            <pc:sldMk cId="453573594" sldId="263"/>
+            <ac:cxnSpMk id="57" creationId="{26281A36-8256-06B9-1FBC-F0702E8FCA23}"/>
+          </ac:cxnSpMkLst>
+        </pc:cxnChg>
+        <pc:cxnChg chg="add del mod">
+          <ac:chgData name="Hemma Philamore" userId="db50e2f3-17b2-4cc0-b719-fb6254d3e9df" providerId="ADAL" clId="{976AD799-FE43-55CA-A221-11B5AB66B93B}" dt="2026-10-28T18:15:38.501" v="517" actId="478"/>
+          <ac:cxnSpMkLst>
+            <pc:docMk/>
+            <pc:sldMk cId="453573594" sldId="263"/>
+            <ac:cxnSpMk id="58" creationId="{D9E1556D-4790-189C-0A15-3FF7507AE199}"/>
+          </ac:cxnSpMkLst>
+        </pc:cxnChg>
+        <pc:cxnChg chg="add mod">
+          <ac:chgData name="Hemma Philamore" userId="db50e2f3-17b2-4cc0-b719-fb6254d3e9df" providerId="ADAL" clId="{976AD799-FE43-55CA-A221-11B5AB66B93B}" dt="2026-10-28T18:03:08.944" v="496" actId="1076"/>
+          <ac:cxnSpMkLst>
+            <pc:docMk/>
+            <pc:sldMk cId="453573594" sldId="263"/>
+            <ac:cxnSpMk id="61" creationId="{1CC2A64D-9F8E-1F43-2C9F-5CB3E291B68E}"/>
+          </ac:cxnSpMkLst>
+        </pc:cxnChg>
+        <pc:cxnChg chg="add del mod">
+          <ac:chgData name="Hemma Philamore" userId="db50e2f3-17b2-4cc0-b719-fb6254d3e9df" providerId="ADAL" clId="{976AD799-FE43-55CA-A221-11B5AB66B93B}" dt="2026-10-28T18:15:23.877" v="512" actId="478"/>
+          <ac:cxnSpMkLst>
+            <pc:docMk/>
+            <pc:sldMk cId="453573594" sldId="263"/>
+            <ac:cxnSpMk id="65" creationId="{B1F8A7FC-0C32-B2B5-CA59-E1BA80212E4F}"/>
+          </ac:cxnSpMkLst>
+        </pc:cxnChg>
+        <pc:cxnChg chg="add mod">
+          <ac:chgData name="Hemma Philamore" userId="db50e2f3-17b2-4cc0-b719-fb6254d3e9df" providerId="ADAL" clId="{976AD799-FE43-55CA-A221-11B5AB66B93B}" dt="2026-10-28T18:19:46.509" v="525" actId="1076"/>
+          <ac:cxnSpMkLst>
+            <pc:docMk/>
+            <pc:sldMk cId="453573594" sldId="263"/>
+            <ac:cxnSpMk id="73" creationId="{5563D653-460B-E5DE-3CC6-C159911A822F}"/>
+          </ac:cxnSpMkLst>
+        </pc:cxnChg>
+        <pc:cxnChg chg="add del mod">
+          <ac:chgData name="Hemma Philamore" userId="db50e2f3-17b2-4cc0-b719-fb6254d3e9df" providerId="ADAL" clId="{976AD799-FE43-55CA-A221-11B5AB66B93B}" dt="2026-10-28T18:19:57.125" v="529" actId="478"/>
+          <ac:cxnSpMkLst>
+            <pc:docMk/>
+            <pc:sldMk cId="453573594" sldId="263"/>
+            <ac:cxnSpMk id="77" creationId="{AA7A8BA8-00BF-6091-F608-D5EF38A669EC}"/>
+          </ac:cxnSpMkLst>
+        </pc:cxnChg>
+        <pc:cxnChg chg="add del mod">
+          <ac:chgData name="Hemma Philamore" userId="db50e2f3-17b2-4cc0-b719-fb6254d3e9df" providerId="ADAL" clId="{976AD799-FE43-55CA-A221-11B5AB66B93B}" dt="2026-10-28T18:20:52.533" v="541" actId="478"/>
+          <ac:cxnSpMkLst>
+            <pc:docMk/>
+            <pc:sldMk cId="453573594" sldId="263"/>
+            <ac:cxnSpMk id="78" creationId="{A7B1E1E1-68D8-7007-8E35-144A09A9C21A}"/>
+          </ac:cxnSpMkLst>
+        </pc:cxnChg>
+        <pc:cxnChg chg="add del mod">
+          <ac:chgData name="Hemma Philamore" userId="db50e2f3-17b2-4cc0-b719-fb6254d3e9df" providerId="ADAL" clId="{976AD799-FE43-55CA-A221-11B5AB66B93B}" dt="2026-10-28T18:32:51.754" v="549" actId="478"/>
+          <ac:cxnSpMkLst>
+            <pc:docMk/>
+            <pc:sldMk cId="453573594" sldId="263"/>
+            <ac:cxnSpMk id="81" creationId="{DF8C8A8D-12A8-9833-7B2D-282A54563EA1}"/>
+          </ac:cxnSpMkLst>
+        </pc:cxnChg>
       </pc:sldChg>
     </pc:docChg>
   </pc:docChgLst>
@@ -10605,6 +10989,766 @@
 </p:sld>
 </file>
 
+<file path=ppt/slides/slide8.xml><?xml version="1.0" encoding="utf-8"?>
+<p:sld xmlns:a="http://schemas.openxmlformats.org/drawingml/2006/main" xmlns:r="http://schemas.openxmlformats.org/officeDocument/2006/relationships" xmlns:p="http://schemas.openxmlformats.org/presentationml/2006/main">
+  <p:cSld>
+    <p:spTree>
+      <p:nvGrpSpPr>
+        <p:cNvPr id="1" name=""/>
+        <p:cNvGrpSpPr/>
+        <p:nvPr/>
+      </p:nvGrpSpPr>
+      <p:grpSpPr>
+        <a:xfrm>
+          <a:off x="0" y="0"/>
+          <a:ext cx="0" cy="0"/>
+          <a:chOff x="0" y="0"/>
+          <a:chExt cx="0" cy="0"/>
+        </a:xfrm>
+      </p:grpSpPr>
+      <p:grpSp>
+        <p:nvGrpSpPr>
+          <p:cNvPr id="63" name="Group 62">
+            <a:extLst>
+              <a:ext uri="{FF2B5EF4-FFF2-40B4-BE49-F238E27FC236}">
+                <a16:creationId xmlns:a16="http://schemas.microsoft.com/office/drawing/2014/main" id="{F00578F3-096D-6C34-9A4A-DEFF9C851F24}"/>
+              </a:ext>
+            </a:extLst>
+          </p:cNvPr>
+          <p:cNvGrpSpPr/>
+          <p:nvPr/>
+        </p:nvGrpSpPr>
+        <p:grpSpPr>
+          <a:xfrm>
+            <a:off x="4727667" y="2538028"/>
+            <a:ext cx="4093772" cy="2384371"/>
+            <a:chOff x="5308580" y="1202479"/>
+            <a:chExt cx="4093772" cy="2384371"/>
+          </a:xfrm>
+        </p:grpSpPr>
+        <p:sp>
+          <p:nvSpPr>
+            <p:cNvPr id="3" name="Oval 2">
+              <a:extLst>
+                <a:ext uri="{FF2B5EF4-FFF2-40B4-BE49-F238E27FC236}">
+                  <a16:creationId xmlns:a16="http://schemas.microsoft.com/office/drawing/2014/main" id="{8FDDDDE0-93FC-90DC-48B1-BEE0FCDD4B23}"/>
+                </a:ext>
+              </a:extLst>
+            </p:cNvPr>
+            <p:cNvSpPr/>
+            <p:nvPr/>
+          </p:nvSpPr>
+          <p:spPr>
+            <a:xfrm>
+              <a:off x="8394525" y="2686850"/>
+              <a:ext cx="900000" cy="900000"/>
+            </a:xfrm>
+            <a:prstGeom prst="ellipse">
+              <a:avLst/>
+            </a:prstGeom>
+            <a:noFill/>
+            <a:ln w="38100"/>
+          </p:spPr>
+          <p:style>
+            <a:lnRef idx="2">
+              <a:schemeClr val="accent1">
+                <a:shade val="15000"/>
+              </a:schemeClr>
+            </a:lnRef>
+            <a:fillRef idx="1">
+              <a:schemeClr val="accent1"/>
+            </a:fillRef>
+            <a:effectRef idx="0">
+              <a:schemeClr val="accent1"/>
+            </a:effectRef>
+            <a:fontRef idx="minor">
+              <a:schemeClr val="lt1"/>
+            </a:fontRef>
+          </p:style>
+          <p:txBody>
+            <a:bodyPr rtlCol="0" anchor="ctr"/>
+            <a:lstStyle/>
+            <a:p>
+              <a:pPr algn="ctr"/>
+              <a:endParaRPr lang="en-US"/>
+            </a:p>
+          </p:txBody>
+        </p:sp>
+        <p:sp>
+          <p:nvSpPr>
+            <p:cNvPr id="4" name="Oval 3">
+              <a:extLst>
+                <a:ext uri="{FF2B5EF4-FFF2-40B4-BE49-F238E27FC236}">
+                  <a16:creationId xmlns:a16="http://schemas.microsoft.com/office/drawing/2014/main" id="{6E1D39F2-6BFD-2A94-3B8C-D5F69A918F2B}"/>
+                </a:ext>
+              </a:extLst>
+            </p:cNvPr>
+            <p:cNvSpPr/>
+            <p:nvPr/>
+          </p:nvSpPr>
+          <p:spPr>
+            <a:xfrm>
+              <a:off x="5416407" y="1202479"/>
+              <a:ext cx="900000" cy="900000"/>
+            </a:xfrm>
+            <a:prstGeom prst="ellipse">
+              <a:avLst/>
+            </a:prstGeom>
+            <a:noFill/>
+            <a:ln w="38100"/>
+          </p:spPr>
+          <p:style>
+            <a:lnRef idx="2">
+              <a:schemeClr val="accent1">
+                <a:shade val="15000"/>
+              </a:schemeClr>
+            </a:lnRef>
+            <a:fillRef idx="1">
+              <a:schemeClr val="accent1"/>
+            </a:fillRef>
+            <a:effectRef idx="0">
+              <a:schemeClr val="accent1"/>
+            </a:effectRef>
+            <a:fontRef idx="minor">
+              <a:schemeClr val="lt1"/>
+            </a:fontRef>
+          </p:style>
+          <p:txBody>
+            <a:bodyPr rtlCol="0" anchor="ctr"/>
+            <a:lstStyle/>
+            <a:p>
+              <a:pPr algn="ctr"/>
+              <a:endParaRPr lang="en-US"/>
+            </a:p>
+          </p:txBody>
+        </p:sp>
+        <p:sp>
+          <p:nvSpPr>
+            <p:cNvPr id="5" name="Oval 4">
+              <a:extLst>
+                <a:ext uri="{FF2B5EF4-FFF2-40B4-BE49-F238E27FC236}">
+                  <a16:creationId xmlns:a16="http://schemas.microsoft.com/office/drawing/2014/main" id="{A451A49E-131B-A150-59CB-19891CBEB5B3}"/>
+                </a:ext>
+              </a:extLst>
+            </p:cNvPr>
+            <p:cNvSpPr/>
+            <p:nvPr/>
+          </p:nvSpPr>
+          <p:spPr>
+            <a:xfrm>
+              <a:off x="5416407" y="2686850"/>
+              <a:ext cx="900000" cy="900000"/>
+            </a:xfrm>
+            <a:prstGeom prst="ellipse">
+              <a:avLst/>
+            </a:prstGeom>
+            <a:noFill/>
+            <a:ln w="38100"/>
+          </p:spPr>
+          <p:style>
+            <a:lnRef idx="2">
+              <a:schemeClr val="accent1">
+                <a:shade val="15000"/>
+              </a:schemeClr>
+            </a:lnRef>
+            <a:fillRef idx="1">
+              <a:schemeClr val="accent1"/>
+            </a:fillRef>
+            <a:effectRef idx="0">
+              <a:schemeClr val="accent1"/>
+            </a:effectRef>
+            <a:fontRef idx="minor">
+              <a:schemeClr val="lt1"/>
+            </a:fontRef>
+          </p:style>
+          <p:txBody>
+            <a:bodyPr rtlCol="0" anchor="ctr"/>
+            <a:lstStyle/>
+            <a:p>
+              <a:pPr algn="ctr"/>
+              <a:endParaRPr lang="en-US"/>
+            </a:p>
+          </p:txBody>
+        </p:sp>
+        <p:sp>
+          <p:nvSpPr>
+            <p:cNvPr id="7" name="Oval 6">
+              <a:extLst>
+                <a:ext uri="{FF2B5EF4-FFF2-40B4-BE49-F238E27FC236}">
+                  <a16:creationId xmlns:a16="http://schemas.microsoft.com/office/drawing/2014/main" id="{02D7C1C3-8082-5AFF-2305-B75B7FFEA848}"/>
+                </a:ext>
+              </a:extLst>
+            </p:cNvPr>
+            <p:cNvSpPr/>
+            <p:nvPr/>
+          </p:nvSpPr>
+          <p:spPr>
+            <a:xfrm>
+              <a:off x="6874924" y="1202479"/>
+              <a:ext cx="900000" cy="900000"/>
+            </a:xfrm>
+            <a:prstGeom prst="ellipse">
+              <a:avLst/>
+            </a:prstGeom>
+            <a:noFill/>
+            <a:ln w="38100"/>
+          </p:spPr>
+          <p:style>
+            <a:lnRef idx="2">
+              <a:schemeClr val="accent1">
+                <a:shade val="15000"/>
+              </a:schemeClr>
+            </a:lnRef>
+            <a:fillRef idx="1">
+              <a:schemeClr val="accent1"/>
+            </a:fillRef>
+            <a:effectRef idx="0">
+              <a:schemeClr val="accent1"/>
+            </a:effectRef>
+            <a:fontRef idx="minor">
+              <a:schemeClr val="lt1"/>
+            </a:fontRef>
+          </p:style>
+          <p:txBody>
+            <a:bodyPr rtlCol="0" anchor="ctr"/>
+            <a:lstStyle/>
+            <a:p>
+              <a:pPr algn="ctr"/>
+              <a:endParaRPr lang="en-US"/>
+            </a:p>
+          </p:txBody>
+        </p:sp>
+        <p:sp>
+          <p:nvSpPr>
+            <p:cNvPr id="23" name="TextBox 22">
+              <a:extLst>
+                <a:ext uri="{FF2B5EF4-FFF2-40B4-BE49-F238E27FC236}">
+                  <a16:creationId xmlns:a16="http://schemas.microsoft.com/office/drawing/2014/main" id="{E4D6692A-45BF-F394-28DD-D8FA523E4A5E}"/>
+                </a:ext>
+              </a:extLst>
+            </p:cNvPr>
+            <p:cNvSpPr txBox="1"/>
+            <p:nvPr/>
+          </p:nvSpPr>
+          <p:spPr>
+            <a:xfrm>
+              <a:off x="5369791" y="1509870"/>
+              <a:ext cx="1115654" cy="338554"/>
+            </a:xfrm>
+            <a:prstGeom prst="rect">
+              <a:avLst/>
+            </a:prstGeom>
+            <a:noFill/>
+          </p:spPr>
+          <p:txBody>
+            <a:bodyPr wrap="square" rtlCol="0">
+              <a:spAutoFit/>
+            </a:bodyPr>
+            <a:lstStyle/>
+            <a:p>
+              <a:r>
+                <a:rPr lang="en-US" sz="1600" dirty="0"/>
+                <a:t>Charging</a:t>
+              </a:r>
+            </a:p>
+          </p:txBody>
+        </p:sp>
+        <p:sp>
+          <p:nvSpPr>
+            <p:cNvPr id="43" name="Oval 42">
+              <a:extLst>
+                <a:ext uri="{FF2B5EF4-FFF2-40B4-BE49-F238E27FC236}">
+                  <a16:creationId xmlns:a16="http://schemas.microsoft.com/office/drawing/2014/main" id="{F6243E1B-73B3-DB94-F6F8-5FB01F850EDC}"/>
+                </a:ext>
+              </a:extLst>
+            </p:cNvPr>
+            <p:cNvSpPr/>
+            <p:nvPr/>
+          </p:nvSpPr>
+          <p:spPr>
+            <a:xfrm>
+              <a:off x="8360323" y="1229147"/>
+              <a:ext cx="900000" cy="900000"/>
+            </a:xfrm>
+            <a:prstGeom prst="ellipse">
+              <a:avLst/>
+            </a:prstGeom>
+            <a:noFill/>
+            <a:ln w="38100"/>
+          </p:spPr>
+          <p:style>
+            <a:lnRef idx="2">
+              <a:schemeClr val="accent1">
+                <a:shade val="15000"/>
+              </a:schemeClr>
+            </a:lnRef>
+            <a:fillRef idx="1">
+              <a:schemeClr val="accent1"/>
+            </a:fillRef>
+            <a:effectRef idx="0">
+              <a:schemeClr val="accent1"/>
+            </a:effectRef>
+            <a:fontRef idx="minor">
+              <a:schemeClr val="lt1"/>
+            </a:fontRef>
+          </p:style>
+          <p:txBody>
+            <a:bodyPr rtlCol="0" anchor="ctr"/>
+            <a:lstStyle/>
+            <a:p>
+              <a:pPr algn="ctr"/>
+              <a:endParaRPr lang="en-US"/>
+            </a:p>
+          </p:txBody>
+        </p:sp>
+        <p:sp>
+          <p:nvSpPr>
+            <p:cNvPr id="44" name="TextBox 43">
+              <a:extLst>
+                <a:ext uri="{FF2B5EF4-FFF2-40B4-BE49-F238E27FC236}">
+                  <a16:creationId xmlns:a16="http://schemas.microsoft.com/office/drawing/2014/main" id="{368EB7BB-BA1B-C57E-4DC9-4412CB9F18CF}"/>
+                </a:ext>
+              </a:extLst>
+            </p:cNvPr>
+            <p:cNvSpPr txBox="1"/>
+            <p:nvPr/>
+          </p:nvSpPr>
+          <p:spPr>
+            <a:xfrm>
+              <a:off x="7070844" y="1500364"/>
+              <a:ext cx="550633" cy="338554"/>
+            </a:xfrm>
+            <a:prstGeom prst="rect">
+              <a:avLst/>
+            </a:prstGeom>
+            <a:noFill/>
+          </p:spPr>
+          <p:txBody>
+            <a:bodyPr wrap="square" rtlCol="0">
+              <a:spAutoFit/>
+            </a:bodyPr>
+            <a:lstStyle/>
+            <a:p>
+              <a:r>
+                <a:rPr lang="en-US" sz="1600" dirty="0"/>
+                <a:t>Idle</a:t>
+              </a:r>
+            </a:p>
+          </p:txBody>
+        </p:sp>
+        <p:sp>
+          <p:nvSpPr>
+            <p:cNvPr id="45" name="TextBox 44">
+              <a:extLst>
+                <a:ext uri="{FF2B5EF4-FFF2-40B4-BE49-F238E27FC236}">
+                  <a16:creationId xmlns:a16="http://schemas.microsoft.com/office/drawing/2014/main" id="{522DF8CE-14DF-F86E-E274-B88001FE709E}"/>
+                </a:ext>
+              </a:extLst>
+            </p:cNvPr>
+            <p:cNvSpPr txBox="1"/>
+            <p:nvPr/>
+          </p:nvSpPr>
+          <p:spPr>
+            <a:xfrm>
+              <a:off x="8428728" y="1530027"/>
+              <a:ext cx="831595" cy="338554"/>
+            </a:xfrm>
+            <a:prstGeom prst="rect">
+              <a:avLst/>
+            </a:prstGeom>
+            <a:noFill/>
+          </p:spPr>
+          <p:txBody>
+            <a:bodyPr wrap="square" rtlCol="0">
+              <a:spAutoFit/>
+            </a:bodyPr>
+            <a:lstStyle/>
+            <a:p>
+              <a:r>
+                <a:rPr lang="en-US" sz="1600" dirty="0"/>
+                <a:t>Moving</a:t>
+              </a:r>
+            </a:p>
+          </p:txBody>
+        </p:sp>
+        <p:sp>
+          <p:nvSpPr>
+            <p:cNvPr id="48" name="TextBox 47">
+              <a:extLst>
+                <a:ext uri="{FF2B5EF4-FFF2-40B4-BE49-F238E27FC236}">
+                  <a16:creationId xmlns:a16="http://schemas.microsoft.com/office/drawing/2014/main" id="{887CC708-A3F3-6DFF-F1A0-1C3E38519A55}"/>
+                </a:ext>
+              </a:extLst>
+            </p:cNvPr>
+            <p:cNvSpPr txBox="1"/>
+            <p:nvPr/>
+          </p:nvSpPr>
+          <p:spPr>
+            <a:xfrm>
+              <a:off x="5308580" y="2822114"/>
+              <a:ext cx="1115654" cy="738664"/>
+            </a:xfrm>
+            <a:prstGeom prst="rect">
+              <a:avLst/>
+            </a:prstGeom>
+            <a:noFill/>
+          </p:spPr>
+          <p:txBody>
+            <a:bodyPr wrap="square" rtlCol="0">
+              <a:spAutoFit/>
+            </a:bodyPr>
+            <a:lstStyle/>
+            <a:p>
+              <a:pPr algn="ctr"/>
+              <a:r>
+                <a:rPr lang="en-US" sz="1400" dirty="0"/>
+                <a:t>Returning </a:t>
+              </a:r>
+            </a:p>
+            <a:p>
+              <a:pPr algn="ctr"/>
+              <a:r>
+                <a:rPr lang="en-US" sz="1400" dirty="0"/>
+                <a:t>to</a:t>
+              </a:r>
+            </a:p>
+            <a:p>
+              <a:pPr algn="ctr"/>
+              <a:r>
+                <a:rPr lang="en-US" sz="1400" dirty="0"/>
+                <a:t>charge</a:t>
+              </a:r>
+            </a:p>
+          </p:txBody>
+        </p:sp>
+        <p:sp>
+          <p:nvSpPr>
+            <p:cNvPr id="49" name="TextBox 48">
+              <a:extLst>
+                <a:ext uri="{FF2B5EF4-FFF2-40B4-BE49-F238E27FC236}">
+                  <a16:creationId xmlns:a16="http://schemas.microsoft.com/office/drawing/2014/main" id="{10C0D20D-D5EC-7D24-0169-3010315A8C5B}"/>
+                </a:ext>
+              </a:extLst>
+            </p:cNvPr>
+            <p:cNvSpPr txBox="1"/>
+            <p:nvPr/>
+          </p:nvSpPr>
+          <p:spPr>
+            <a:xfrm>
+              <a:off x="8286698" y="2866518"/>
+              <a:ext cx="1115654" cy="523220"/>
+            </a:xfrm>
+            <a:prstGeom prst="rect">
+              <a:avLst/>
+            </a:prstGeom>
+            <a:noFill/>
+          </p:spPr>
+          <p:txBody>
+            <a:bodyPr wrap="square" rtlCol="0">
+              <a:spAutoFit/>
+            </a:bodyPr>
+            <a:lstStyle/>
+            <a:p>
+              <a:pPr algn="ctr"/>
+              <a:r>
+                <a:rPr lang="en-US" sz="1400" dirty="0"/>
+                <a:t>Avoid</a:t>
+              </a:r>
+            </a:p>
+            <a:p>
+              <a:pPr algn="ctr"/>
+              <a:r>
+                <a:rPr lang="en-US" sz="1400" dirty="0"/>
+                <a:t>obstacles</a:t>
+              </a:r>
+            </a:p>
+          </p:txBody>
+        </p:sp>
+        <p:cxnSp>
+          <p:nvCxnSpPr>
+            <p:cNvPr id="51" name="Straight Arrow Connector 50">
+              <a:extLst>
+                <a:ext uri="{FF2B5EF4-FFF2-40B4-BE49-F238E27FC236}">
+                  <a16:creationId xmlns:a16="http://schemas.microsoft.com/office/drawing/2014/main" id="{852363C4-DC28-534F-58B7-FE0C80AB9E34}"/>
+                </a:ext>
+              </a:extLst>
+            </p:cNvPr>
+            <p:cNvCxnSpPr>
+              <a:cxnSpLocks/>
+            </p:cNvCxnSpPr>
+            <p:nvPr/>
+          </p:nvCxnSpPr>
+          <p:spPr>
+            <a:xfrm flipV="1">
+              <a:off x="6379890" y="3117059"/>
+              <a:ext cx="1924024" cy="8722"/>
+            </a:xfrm>
+            <a:prstGeom prst="straightConnector1">
+              <a:avLst/>
+            </a:prstGeom>
+            <a:ln w="28575">
+              <a:solidFill>
+                <a:schemeClr val="tx1"/>
+              </a:solidFill>
+              <a:headEnd type="triangle" w="lg" len="lg"/>
+              <a:tailEnd type="triangle" w="lg" len="lg"/>
+            </a:ln>
+          </p:spPr>
+          <p:style>
+            <a:lnRef idx="2">
+              <a:schemeClr val="accent1"/>
+            </a:lnRef>
+            <a:fillRef idx="0">
+              <a:schemeClr val="accent1"/>
+            </a:fillRef>
+            <a:effectRef idx="1">
+              <a:schemeClr val="accent1"/>
+            </a:effectRef>
+            <a:fontRef idx="minor">
+              <a:schemeClr val="tx1"/>
+            </a:fontRef>
+          </p:style>
+        </p:cxnSp>
+        <p:cxnSp>
+          <p:nvCxnSpPr>
+            <p:cNvPr id="54" name="Straight Arrow Connector 53">
+              <a:extLst>
+                <a:ext uri="{FF2B5EF4-FFF2-40B4-BE49-F238E27FC236}">
+                  <a16:creationId xmlns:a16="http://schemas.microsoft.com/office/drawing/2014/main" id="{FAC81D88-2962-3156-8BE6-4F9FFD48141C}"/>
+                </a:ext>
+              </a:extLst>
+            </p:cNvPr>
+            <p:cNvCxnSpPr>
+              <a:cxnSpLocks/>
+            </p:cNvCxnSpPr>
+            <p:nvPr/>
+          </p:nvCxnSpPr>
+          <p:spPr>
+            <a:xfrm>
+              <a:off x="6316407" y="1652479"/>
+              <a:ext cx="498571" cy="0"/>
+            </a:xfrm>
+            <a:prstGeom prst="straightConnector1">
+              <a:avLst/>
+            </a:prstGeom>
+            <a:ln w="28575">
+              <a:solidFill>
+                <a:schemeClr val="tx1"/>
+              </a:solidFill>
+              <a:headEnd type="triangle" w="lg" len="lg"/>
+              <a:tailEnd type="triangle" w="lg" len="lg"/>
+            </a:ln>
+          </p:spPr>
+          <p:style>
+            <a:lnRef idx="2">
+              <a:schemeClr val="accent1"/>
+            </a:lnRef>
+            <a:fillRef idx="0">
+              <a:schemeClr val="accent1"/>
+            </a:fillRef>
+            <a:effectRef idx="1">
+              <a:schemeClr val="accent1"/>
+            </a:effectRef>
+            <a:fontRef idx="minor">
+              <a:schemeClr val="tx1"/>
+            </a:fontRef>
+          </p:style>
+        </p:cxnSp>
+        <p:cxnSp>
+          <p:nvCxnSpPr>
+            <p:cNvPr id="56" name="Straight Arrow Connector 55">
+              <a:extLst>
+                <a:ext uri="{FF2B5EF4-FFF2-40B4-BE49-F238E27FC236}">
+                  <a16:creationId xmlns:a16="http://schemas.microsoft.com/office/drawing/2014/main" id="{A44A018A-6C12-1393-204C-98ADA363073A}"/>
+                </a:ext>
+              </a:extLst>
+            </p:cNvPr>
+            <p:cNvCxnSpPr>
+              <a:cxnSpLocks/>
+            </p:cNvCxnSpPr>
+            <p:nvPr/>
+          </p:nvCxnSpPr>
+          <p:spPr>
+            <a:xfrm>
+              <a:off x="7805343" y="1652479"/>
+              <a:ext cx="498571" cy="0"/>
+            </a:xfrm>
+            <a:prstGeom prst="straightConnector1">
+              <a:avLst/>
+            </a:prstGeom>
+            <a:ln w="28575">
+              <a:solidFill>
+                <a:schemeClr val="tx1"/>
+              </a:solidFill>
+              <a:headEnd type="triangle" w="lg" len="lg"/>
+              <a:tailEnd type="triangle" w="lg" len="lg"/>
+            </a:ln>
+          </p:spPr>
+          <p:style>
+            <a:lnRef idx="2">
+              <a:schemeClr val="accent1"/>
+            </a:lnRef>
+            <a:fillRef idx="0">
+              <a:schemeClr val="accent1"/>
+            </a:fillRef>
+            <a:effectRef idx="1">
+              <a:schemeClr val="accent1"/>
+            </a:effectRef>
+            <a:fontRef idx="minor">
+              <a:schemeClr val="tx1"/>
+            </a:fontRef>
+          </p:style>
+        </p:cxnSp>
+        <p:cxnSp>
+          <p:nvCxnSpPr>
+            <p:cNvPr id="57" name="Straight Arrow Connector 56">
+              <a:extLst>
+                <a:ext uri="{FF2B5EF4-FFF2-40B4-BE49-F238E27FC236}">
+                  <a16:creationId xmlns:a16="http://schemas.microsoft.com/office/drawing/2014/main" id="{26281A36-8256-06B9-1FBC-F0702E8FCA23}"/>
+                </a:ext>
+              </a:extLst>
+            </p:cNvPr>
+            <p:cNvCxnSpPr>
+              <a:cxnSpLocks/>
+            </p:cNvCxnSpPr>
+            <p:nvPr/>
+          </p:nvCxnSpPr>
+          <p:spPr>
+            <a:xfrm rot="16200000">
+              <a:off x="8595240" y="2432776"/>
+              <a:ext cx="498571" cy="0"/>
+            </a:xfrm>
+            <a:prstGeom prst="straightConnector1">
+              <a:avLst/>
+            </a:prstGeom>
+            <a:ln w="28575">
+              <a:solidFill>
+                <a:schemeClr val="tx1"/>
+              </a:solidFill>
+              <a:headEnd type="triangle" w="lg" len="lg"/>
+              <a:tailEnd type="triangle" w="lg" len="lg"/>
+            </a:ln>
+          </p:spPr>
+          <p:style>
+            <a:lnRef idx="2">
+              <a:schemeClr val="accent1"/>
+            </a:lnRef>
+            <a:fillRef idx="0">
+              <a:schemeClr val="accent1"/>
+            </a:fillRef>
+            <a:effectRef idx="1">
+              <a:schemeClr val="accent1"/>
+            </a:effectRef>
+            <a:fontRef idx="minor">
+              <a:schemeClr val="tx1"/>
+            </a:fontRef>
+          </p:style>
+        </p:cxnSp>
+        <p:cxnSp>
+          <p:nvCxnSpPr>
+            <p:cNvPr id="61" name="Straight Arrow Connector 60">
+              <a:extLst>
+                <a:ext uri="{FF2B5EF4-FFF2-40B4-BE49-F238E27FC236}">
+                  <a16:creationId xmlns:a16="http://schemas.microsoft.com/office/drawing/2014/main" id="{1CC2A64D-9F8E-1F43-2C9F-5CB3E291B68E}"/>
+                </a:ext>
+              </a:extLst>
+            </p:cNvPr>
+            <p:cNvCxnSpPr>
+              <a:cxnSpLocks/>
+            </p:cNvCxnSpPr>
+            <p:nvPr/>
+          </p:nvCxnSpPr>
+          <p:spPr>
+            <a:xfrm>
+              <a:off x="5866407" y="2123359"/>
+              <a:ext cx="12601" cy="516739"/>
+            </a:xfrm>
+            <a:prstGeom prst="straightConnector1">
+              <a:avLst/>
+            </a:prstGeom>
+            <a:ln w="28575">
+              <a:solidFill>
+                <a:schemeClr val="tx1"/>
+              </a:solidFill>
+              <a:headEnd type="triangle" w="lg" len="lg"/>
+              <a:tailEnd type="none" w="lg" len="lg"/>
+            </a:ln>
+          </p:spPr>
+          <p:style>
+            <a:lnRef idx="2">
+              <a:schemeClr val="accent1"/>
+            </a:lnRef>
+            <a:fillRef idx="0">
+              <a:schemeClr val="accent1"/>
+            </a:fillRef>
+            <a:effectRef idx="1">
+              <a:schemeClr val="accent1"/>
+            </a:effectRef>
+            <a:fontRef idx="minor">
+              <a:schemeClr val="tx1"/>
+            </a:fontRef>
+          </p:style>
+        </p:cxnSp>
+      </p:grpSp>
+      <p:cxnSp>
+        <p:nvCxnSpPr>
+          <p:cNvPr id="73" name="Straight Arrow Connector 72">
+            <a:extLst>
+              <a:ext uri="{FF2B5EF4-FFF2-40B4-BE49-F238E27FC236}">
+                <a16:creationId xmlns:a16="http://schemas.microsoft.com/office/drawing/2014/main" id="{5563D653-460B-E5DE-3CC6-C159911A822F}"/>
+              </a:ext>
+            </a:extLst>
+          </p:cNvPr>
+          <p:cNvCxnSpPr>
+            <a:cxnSpLocks/>
+            <a:endCxn id="43" idx="3"/>
+          </p:cNvCxnSpPr>
+          <p:nvPr/>
+        </p:nvCxnSpPr>
+        <p:spPr>
+          <a:xfrm flipV="1">
+            <a:off x="5687175" y="3332894"/>
+            <a:ext cx="2224037" cy="910532"/>
+          </a:xfrm>
+          <a:prstGeom prst="straightConnector1">
+            <a:avLst/>
+          </a:prstGeom>
+          <a:ln w="28575">
+            <a:solidFill>
+              <a:schemeClr val="tx1"/>
+            </a:solidFill>
+            <a:headEnd type="triangle" w="lg" len="lg"/>
+            <a:tailEnd type="triangle" w="lg" len="lg"/>
+          </a:ln>
+        </p:spPr>
+        <p:style>
+          <a:lnRef idx="2">
+            <a:schemeClr val="accent1"/>
+          </a:lnRef>
+          <a:fillRef idx="0">
+            <a:schemeClr val="accent1"/>
+          </a:fillRef>
+          <a:effectRef idx="1">
+            <a:schemeClr val="accent1"/>
+          </a:effectRef>
+          <a:fontRef idx="minor">
+            <a:schemeClr val="tx1"/>
+          </a:fontRef>
+        </p:style>
+      </p:cxnSp>
+    </p:spTree>
+    <p:extLst>
+      <p:ext uri="{BB962C8B-B14F-4D97-AF65-F5344CB8AC3E}">
+        <p14:creationId xmlns:p14="http://schemas.microsoft.com/office/powerpoint/2010/main" val="453573594"/>
+      </p:ext>
+    </p:extLst>
+  </p:cSld>
+  <p:clrMapOvr>
+    <a:masterClrMapping/>
+  </p:clrMapOvr>
+</p:sld>
+</file>
+
 <file path=ppt/theme/theme1.xml><?xml version="1.0" encoding="utf-8"?>
 <a:theme xmlns:a="http://schemas.openxmlformats.org/drawingml/2006/main" name="Office Theme">
   <a:themeElements>
